--- a/MEC8211-Devoir3.pptx
+++ b/MEC8211-Devoir3.pptx
@@ -7,10 +7,12 @@
   <p:sldIdLst>
     <p:sldId id="257" r:id="rId2"/>
     <p:sldId id="258" r:id="rId3"/>
-    <p:sldId id="260" r:id="rId4"/>
-    <p:sldId id="261" r:id="rId5"/>
-    <p:sldId id="262" r:id="rId6"/>
-    <p:sldId id="263" r:id="rId7"/>
+    <p:sldId id="264" r:id="rId4"/>
+    <p:sldId id="260" r:id="rId5"/>
+    <p:sldId id="261" r:id="rId6"/>
+    <p:sldId id="262" r:id="rId7"/>
+    <p:sldId id="263" r:id="rId8"/>
+    <p:sldId id="265" r:id="rId9"/>
   </p:sldIdLst>
   <p:sldSz cx="12192000" cy="6858000"/>
   <p:notesSz cx="6858000" cy="9144000"/>
@@ -109,6 +111,11 @@
       </a:defRPr>
     </a:lvl9pPr>
   </p:defaultTextStyle>
+  <p:extLst>
+    <p:ext uri="{EFAFB233-063F-42B5-8137-9DF3F51BA10A}">
+      <p15:sldGuideLst xmlns:p15="http://schemas.microsoft.com/office/powerpoint/2012/main"/>
+    </p:ext>
+  </p:extLst>
 </p:presentation>
 </file>
 
@@ -259,7 +266,7 @@
           <a:p>
             <a:fld id="{31FFBCA7-9440-4261-9163-708EE63D7830}" type="datetimeFigureOut">
               <a:rPr lang="fr-FR" smtClean="0"/>
-              <a:t>17/03/2026</a:t>
+              <a:t>25/03/2026</a:t>
             </a:fld>
             <a:endParaRPr lang="fr-FR"/>
           </a:p>
@@ -457,7 +464,7 @@
           <a:p>
             <a:fld id="{31FFBCA7-9440-4261-9163-708EE63D7830}" type="datetimeFigureOut">
               <a:rPr lang="fr-FR" smtClean="0"/>
-              <a:t>17/03/2026</a:t>
+              <a:t>25/03/2026</a:t>
             </a:fld>
             <a:endParaRPr lang="fr-FR"/>
           </a:p>
@@ -665,7 +672,7 @@
           <a:p>
             <a:fld id="{31FFBCA7-9440-4261-9163-708EE63D7830}" type="datetimeFigureOut">
               <a:rPr lang="fr-FR" smtClean="0"/>
-              <a:t>17/03/2026</a:t>
+              <a:t>25/03/2026</a:t>
             </a:fld>
             <a:endParaRPr lang="fr-FR"/>
           </a:p>
@@ -863,7 +870,7 @@
           <a:p>
             <a:fld id="{31FFBCA7-9440-4261-9163-708EE63D7830}" type="datetimeFigureOut">
               <a:rPr lang="fr-FR" smtClean="0"/>
-              <a:t>17/03/2026</a:t>
+              <a:t>25/03/2026</a:t>
             </a:fld>
             <a:endParaRPr lang="fr-FR"/>
           </a:p>
@@ -1138,7 +1145,7 @@
           <a:p>
             <a:fld id="{31FFBCA7-9440-4261-9163-708EE63D7830}" type="datetimeFigureOut">
               <a:rPr lang="fr-FR" smtClean="0"/>
-              <a:t>17/03/2026</a:t>
+              <a:t>25/03/2026</a:t>
             </a:fld>
             <a:endParaRPr lang="fr-FR"/>
           </a:p>
@@ -1403,7 +1410,7 @@
           <a:p>
             <a:fld id="{31FFBCA7-9440-4261-9163-708EE63D7830}" type="datetimeFigureOut">
               <a:rPr lang="fr-FR" smtClean="0"/>
-              <a:t>17/03/2026</a:t>
+              <a:t>25/03/2026</a:t>
             </a:fld>
             <a:endParaRPr lang="fr-FR"/>
           </a:p>
@@ -1815,7 +1822,7 @@
           <a:p>
             <a:fld id="{31FFBCA7-9440-4261-9163-708EE63D7830}" type="datetimeFigureOut">
               <a:rPr lang="fr-FR" smtClean="0"/>
-              <a:t>17/03/2026</a:t>
+              <a:t>25/03/2026</a:t>
             </a:fld>
             <a:endParaRPr lang="fr-FR"/>
           </a:p>
@@ -1956,7 +1963,7 @@
           <a:p>
             <a:fld id="{31FFBCA7-9440-4261-9163-708EE63D7830}" type="datetimeFigureOut">
               <a:rPr lang="fr-FR" smtClean="0"/>
-              <a:t>17/03/2026</a:t>
+              <a:t>25/03/2026</a:t>
             </a:fld>
             <a:endParaRPr lang="fr-FR"/>
           </a:p>
@@ -2069,7 +2076,7 @@
           <a:p>
             <a:fld id="{31FFBCA7-9440-4261-9163-708EE63D7830}" type="datetimeFigureOut">
               <a:rPr lang="fr-FR" smtClean="0"/>
-              <a:t>17/03/2026</a:t>
+              <a:t>25/03/2026</a:t>
             </a:fld>
             <a:endParaRPr lang="fr-FR"/>
           </a:p>
@@ -2380,7 +2387,7 @@
           <a:p>
             <a:fld id="{31FFBCA7-9440-4261-9163-708EE63D7830}" type="datetimeFigureOut">
               <a:rPr lang="fr-FR" smtClean="0"/>
-              <a:t>17/03/2026</a:t>
+              <a:t>25/03/2026</a:t>
             </a:fld>
             <a:endParaRPr lang="fr-FR"/>
           </a:p>
@@ -2668,7 +2675,7 @@
           <a:p>
             <a:fld id="{31FFBCA7-9440-4261-9163-708EE63D7830}" type="datetimeFigureOut">
               <a:rPr lang="fr-FR" smtClean="0"/>
-              <a:t>17/03/2026</a:t>
+              <a:t>25/03/2026</a:t>
             </a:fld>
             <a:endParaRPr lang="fr-FR"/>
           </a:p>
@@ -2909,7 +2916,7 @@
           <a:p>
             <a:fld id="{31FFBCA7-9440-4261-9163-708EE63D7830}" type="datetimeFigureOut">
               <a:rPr lang="fr-FR" smtClean="0"/>
-              <a:t>17/03/2026</a:t>
+              <a:t>25/03/2026</a:t>
             </a:fld>
             <a:endParaRPr lang="fr-FR"/>
           </a:p>
@@ -3490,8 +3497,8 @@
           <a:chExt cx="0" cy="0"/>
         </a:xfrm>
       </p:grpSpPr>
-      <mc:AlternateContent xmlns:mc="http://schemas.openxmlformats.org/markup-compatibility/2006">
-        <mc:Choice xmlns:a14="http://schemas.microsoft.com/office/drawing/2010/main" Requires="a14">
+      <mc:AlternateContent xmlns:mc="http://schemas.openxmlformats.org/markup-compatibility/2006" xmlns:a14="http://schemas.microsoft.com/office/drawing/2010/main">
+        <mc:Choice Requires="a14">
           <p:sp>
             <p:nvSpPr>
               <p:cNvPr id="2" name="Titre 1">
@@ -3561,7 +3568,7 @@
             </p:txBody>
           </p:sp>
         </mc:Choice>
-        <mc:Fallback>
+        <mc:Fallback xmlns="">
           <p:sp>
             <p:nvSpPr>
               <p:cNvPr id="2" name="Titre 1">
@@ -3665,6 +3672,557 @@
   <p:cSld>
     <p:spTree>
       <p:nvGrpSpPr>
+        <p:cNvPr id="1" name=""/>
+        <p:cNvGrpSpPr/>
+        <p:nvPr/>
+      </p:nvGrpSpPr>
+      <p:grpSpPr>
+        <a:xfrm>
+          <a:off x="0" y="0"/>
+          <a:ext cx="0" cy="0"/>
+          <a:chOff x="0" y="0"/>
+          <a:chExt cx="0" cy="0"/>
+        </a:xfrm>
+      </p:grpSpPr>
+      <mc:AlternateContent xmlns:mc="http://schemas.openxmlformats.org/markup-compatibility/2006">
+        <mc:Choice xmlns:a14="http://schemas.microsoft.com/office/drawing/2010/main" Requires="a14">
+          <p:sp>
+            <p:nvSpPr>
+              <p:cNvPr id="2" name="Titre 1">
+                <a:extLst>
+                  <a:ext uri="{FF2B5EF4-FFF2-40B4-BE49-F238E27FC236}">
+                    <a16:creationId xmlns:a16="http://schemas.microsoft.com/office/drawing/2014/main" id="{74D36CD1-A375-1A58-349E-021823C47773}"/>
+                  </a:ext>
+                </a:extLst>
+              </p:cNvPr>
+              <p:cNvSpPr>
+                <a:spLocks noGrp="1"/>
+              </p:cNvSpPr>
+              <p:nvPr>
+                <p:ph type="title"/>
+              </p:nvPr>
+            </p:nvSpPr>
+            <p:spPr/>
+            <p:txBody>
+              <a:bodyPr/>
+              <a:lstStyle/>
+              <a:p>
+                <a:r>
+                  <a:rPr lang="fr-FR" dirty="0"/>
+                  <a:t>Évolution du maillage lors du calcul de </a:t>
+                </a:r>
+                <a14:m>
+                  <m:oMath xmlns:m="http://schemas.openxmlformats.org/officeDocument/2006/math">
+                    <m:sSub>
+                      <m:sSubPr>
+                        <m:ctrlPr>
+                          <a:rPr lang="fr-FR" b="0" i="1" smtClean="0">
+                            <a:latin typeface="Cambria Math" panose="02040503050406030204" pitchFamily="18" charset="0"/>
+                          </a:rPr>
+                        </m:ctrlPr>
+                      </m:sSubPr>
+                      <m:e>
+                        <m:r>
+                          <a:rPr lang="fr-FR" b="0" i="1" smtClean="0">
+                            <a:latin typeface="Cambria Math" panose="02040503050406030204" pitchFamily="18" charset="0"/>
+                          </a:rPr>
+                          <m:t>𝑢</m:t>
+                        </m:r>
+                      </m:e>
+                      <m:sub>
+                        <m:r>
+                          <a:rPr lang="fr-FR" b="0" i="1" smtClean="0">
+                            <a:latin typeface="Cambria Math" panose="02040503050406030204" pitchFamily="18" charset="0"/>
+                          </a:rPr>
+                          <m:t>𝑛𝑢𝑚</m:t>
+                        </m:r>
+                      </m:sub>
+                    </m:sSub>
+                  </m:oMath>
+                </a14:m>
+                <a:endParaRPr lang="fr-FR" dirty="0"/>
+              </a:p>
+            </p:txBody>
+          </p:sp>
+        </mc:Choice>
+        <mc:Fallback>
+          <p:sp>
+            <p:nvSpPr>
+              <p:cNvPr id="2" name="Titre 1">
+                <a:extLst>
+                  <a:ext uri="{FF2B5EF4-FFF2-40B4-BE49-F238E27FC236}">
+                    <a16:creationId xmlns:a16="http://schemas.microsoft.com/office/drawing/2014/main" id="{74D36CD1-A375-1A58-349E-021823C47773}"/>
+                  </a:ext>
+                </a:extLst>
+              </p:cNvPr>
+              <p:cNvSpPr>
+                <a:spLocks noGrp="1" noRot="1" noChangeAspect="1" noMove="1" noResize="1" noEditPoints="1" noAdjustHandles="1" noChangeArrowheads="1" noChangeShapeType="1" noTextEdit="1"/>
+              </p:cNvSpPr>
+              <p:nvPr>
+                <p:ph type="title"/>
+              </p:nvPr>
+            </p:nvSpPr>
+            <p:spPr>
+              <a:blipFill>
+                <a:blip r:embed="rId2"/>
+                <a:stretch>
+                  <a:fillRect l="-2377"/>
+                </a:stretch>
+              </a:blipFill>
+            </p:spPr>
+            <p:txBody>
+              <a:bodyPr/>
+              <a:lstStyle/>
+              <a:p>
+                <a:r>
+                  <a:rPr lang="fr-FR">
+                    <a:noFill/>
+                  </a:rPr>
+                  <a:t> </a:t>
+                </a:r>
+              </a:p>
+            </p:txBody>
+          </p:sp>
+        </mc:Fallback>
+      </mc:AlternateContent>
+      <p:pic>
+        <p:nvPicPr>
+          <p:cNvPr id="7" name="Image 6">
+            <a:extLst>
+              <a:ext uri="{FF2B5EF4-FFF2-40B4-BE49-F238E27FC236}">
+                <a16:creationId xmlns:a16="http://schemas.microsoft.com/office/drawing/2014/main" id="{83CCC273-2B29-D3EF-6690-0C19F7BA093E}"/>
+              </a:ext>
+            </a:extLst>
+          </p:cNvPr>
+          <p:cNvPicPr>
+            <a:picLocks noChangeAspect="1"/>
+          </p:cNvPicPr>
+          <p:nvPr/>
+        </p:nvPicPr>
+        <p:blipFill>
+          <a:blip r:embed="rId3">
+            <a:extLst>
+              <a:ext uri="{28A0092B-C50C-407E-A947-70E740481C1C}">
+                <a14:useLocalDpi xmlns:a14="http://schemas.microsoft.com/office/drawing/2010/main" val="0"/>
+              </a:ext>
+            </a:extLst>
+          </a:blip>
+          <a:srcRect l="28494" r="24898"/>
+          <a:stretch>
+            <a:fillRect/>
+          </a:stretch>
+        </p:blipFill>
+        <p:spPr>
+          <a:xfrm>
+            <a:off x="115478" y="3799432"/>
+            <a:ext cx="2846981" cy="2964701"/>
+          </a:xfrm>
+          <a:prstGeom prst="rect">
+            <a:avLst/>
+          </a:prstGeom>
+        </p:spPr>
+      </p:pic>
+      <p:pic>
+        <p:nvPicPr>
+          <p:cNvPr id="9" name="Image 8">
+            <a:extLst>
+              <a:ext uri="{FF2B5EF4-FFF2-40B4-BE49-F238E27FC236}">
+                <a16:creationId xmlns:a16="http://schemas.microsoft.com/office/drawing/2014/main" id="{3DAD9868-C8F5-E667-5E2F-2B37AB742C12}"/>
+              </a:ext>
+            </a:extLst>
+          </p:cNvPr>
+          <p:cNvPicPr>
+            <a:picLocks noChangeAspect="1"/>
+          </p:cNvPicPr>
+          <p:nvPr/>
+        </p:nvPicPr>
+        <p:blipFill>
+          <a:blip r:embed="rId4">
+            <a:extLst>
+              <a:ext uri="{28A0092B-C50C-407E-A947-70E740481C1C}">
+                <a14:useLocalDpi xmlns:a14="http://schemas.microsoft.com/office/drawing/2010/main" val="0"/>
+              </a:ext>
+            </a:extLst>
+          </a:blip>
+          <a:srcRect l="28668" r="24724"/>
+          <a:stretch>
+            <a:fillRect/>
+          </a:stretch>
+        </p:blipFill>
+        <p:spPr>
+          <a:xfrm>
+            <a:off x="2962459" y="3746306"/>
+            <a:ext cx="2967545" cy="3090250"/>
+          </a:xfrm>
+          <a:prstGeom prst="rect">
+            <a:avLst/>
+          </a:prstGeom>
+        </p:spPr>
+      </p:pic>
+      <p:pic>
+        <p:nvPicPr>
+          <p:cNvPr id="11" name="Image 10">
+            <a:extLst>
+              <a:ext uri="{FF2B5EF4-FFF2-40B4-BE49-F238E27FC236}">
+                <a16:creationId xmlns:a16="http://schemas.microsoft.com/office/drawing/2014/main" id="{D8330C72-DCCD-88C9-452E-A6BABB73055F}"/>
+              </a:ext>
+            </a:extLst>
+          </p:cNvPr>
+          <p:cNvPicPr>
+            <a:picLocks noChangeAspect="1"/>
+          </p:cNvPicPr>
+          <p:nvPr/>
+        </p:nvPicPr>
+        <p:blipFill>
+          <a:blip r:embed="rId5">
+            <a:extLst>
+              <a:ext uri="{28A0092B-C50C-407E-A947-70E740481C1C}">
+                <a14:useLocalDpi xmlns:a14="http://schemas.microsoft.com/office/drawing/2010/main" val="0"/>
+              </a:ext>
+            </a:extLst>
+          </a:blip>
+          <a:srcRect l="26925" r="26466"/>
+          <a:stretch>
+            <a:fillRect/>
+          </a:stretch>
+        </p:blipFill>
+        <p:spPr>
+          <a:xfrm>
+            <a:off x="5987574" y="3746306"/>
+            <a:ext cx="2967545" cy="3090250"/>
+          </a:xfrm>
+          <a:prstGeom prst="rect">
+            <a:avLst/>
+          </a:prstGeom>
+        </p:spPr>
+      </p:pic>
+      <p:pic>
+        <p:nvPicPr>
+          <p:cNvPr id="13" name="Image 12">
+            <a:extLst>
+              <a:ext uri="{FF2B5EF4-FFF2-40B4-BE49-F238E27FC236}">
+                <a16:creationId xmlns:a16="http://schemas.microsoft.com/office/drawing/2014/main" id="{155D6098-69DC-392A-5271-0B4ADEC402C9}"/>
+              </a:ext>
+            </a:extLst>
+          </p:cNvPr>
+          <p:cNvPicPr>
+            <a:picLocks noChangeAspect="1"/>
+          </p:cNvPicPr>
+          <p:nvPr/>
+        </p:nvPicPr>
+        <p:blipFill>
+          <a:blip r:embed="rId6">
+            <a:extLst>
+              <a:ext uri="{28A0092B-C50C-407E-A947-70E740481C1C}">
+                <a14:useLocalDpi xmlns:a14="http://schemas.microsoft.com/office/drawing/2010/main" val="0"/>
+              </a:ext>
+            </a:extLst>
+          </a:blip>
+          <a:srcRect l="26054" r="24573"/>
+          <a:stretch>
+            <a:fillRect/>
+          </a:stretch>
+        </p:blipFill>
+        <p:spPr>
+          <a:xfrm>
+            <a:off x="9070258" y="3767750"/>
+            <a:ext cx="3121742" cy="3068806"/>
+          </a:xfrm>
+          <a:prstGeom prst="rect">
+            <a:avLst/>
+          </a:prstGeom>
+        </p:spPr>
+      </p:pic>
+      <p:sp>
+        <p:nvSpPr>
+          <p:cNvPr id="15" name="Espace réservé du contenu 14">
+            <a:extLst>
+              <a:ext uri="{FF2B5EF4-FFF2-40B4-BE49-F238E27FC236}">
+                <a16:creationId xmlns:a16="http://schemas.microsoft.com/office/drawing/2014/main" id="{D9AAB447-663D-CB5D-80EB-3F3EF695043B}"/>
+              </a:ext>
+            </a:extLst>
+          </p:cNvPr>
+          <p:cNvSpPr>
+            <a:spLocks noGrp="1"/>
+          </p:cNvSpPr>
+          <p:nvPr>
+            <p:ph idx="1"/>
+          </p:nvPr>
+        </p:nvSpPr>
+        <p:spPr>
+          <a:xfrm>
+            <a:off x="838200" y="1778856"/>
+            <a:ext cx="10515600" cy="1325563"/>
+          </a:xfrm>
+        </p:spPr>
+        <p:txBody>
+          <a:bodyPr/>
+          <a:lstStyle/>
+          <a:p>
+            <a:r>
+              <a:rPr lang="fr-FR" dirty="0"/>
+              <a:t>Le changement de la valeur </a:t>
+            </a:r>
+            <a:r>
+              <a:rPr lang="fr-FR" dirty="0" err="1"/>
+              <a:t>Nx</a:t>
+            </a:r>
+            <a:r>
+              <a:rPr lang="fr-FR" dirty="0"/>
+              <a:t> ne provoque pas un changement de géométrie mais seulement un raffinement du domaine pour une </a:t>
+            </a:r>
+            <a:r>
+              <a:rPr lang="fr-FR" dirty="0" err="1"/>
+              <a:t>seed</a:t>
+            </a:r>
+            <a:r>
+              <a:rPr lang="fr-FR" dirty="0"/>
+              <a:t> donnée (</a:t>
+            </a:r>
+            <a:r>
+              <a:rPr lang="fr-FR" dirty="0" err="1"/>
+              <a:t>seed</a:t>
+            </a:r>
+            <a:r>
+              <a:rPr lang="fr-FR" dirty="0"/>
+              <a:t> 1 ci-dessous)</a:t>
+            </a:r>
+          </a:p>
+        </p:txBody>
+      </p:sp>
+      <p:cxnSp>
+        <p:nvCxnSpPr>
+          <p:cNvPr id="17" name="Connecteur droit avec flèche 16">
+            <a:extLst>
+              <a:ext uri="{FF2B5EF4-FFF2-40B4-BE49-F238E27FC236}">
+                <a16:creationId xmlns:a16="http://schemas.microsoft.com/office/drawing/2014/main" id="{05810529-4DFA-2E96-842C-9D130ABEED3B}"/>
+              </a:ext>
+            </a:extLst>
+          </p:cNvPr>
+          <p:cNvCxnSpPr/>
+          <p:nvPr/>
+        </p:nvCxnSpPr>
+        <p:spPr>
+          <a:xfrm>
+            <a:off x="309716" y="3554361"/>
+            <a:ext cx="11341510" cy="0"/>
+          </a:xfrm>
+          <a:prstGeom prst="straightConnector1">
+            <a:avLst/>
+          </a:prstGeom>
+          <a:ln>
+            <a:tailEnd type="triangle"/>
+          </a:ln>
+        </p:spPr>
+        <p:style>
+          <a:lnRef idx="2">
+            <a:schemeClr val="accent1"/>
+          </a:lnRef>
+          <a:fillRef idx="0">
+            <a:schemeClr val="accent1"/>
+          </a:fillRef>
+          <a:effectRef idx="1">
+            <a:schemeClr val="accent1"/>
+          </a:effectRef>
+          <a:fontRef idx="minor">
+            <a:schemeClr val="tx1"/>
+          </a:fontRef>
+        </p:style>
+      </p:cxnSp>
+      <p:sp>
+        <p:nvSpPr>
+          <p:cNvPr id="18" name="ZoneTexte 17">
+            <a:extLst>
+              <a:ext uri="{FF2B5EF4-FFF2-40B4-BE49-F238E27FC236}">
+                <a16:creationId xmlns:a16="http://schemas.microsoft.com/office/drawing/2014/main" id="{E4B355B5-3B02-E90B-38B1-9D3FCB067BD0}"/>
+              </a:ext>
+            </a:extLst>
+          </p:cNvPr>
+          <p:cNvSpPr txBox="1"/>
+          <p:nvPr/>
+        </p:nvSpPr>
+        <p:spPr>
+          <a:xfrm>
+            <a:off x="1075485" y="3218871"/>
+            <a:ext cx="431528" cy="369332"/>
+          </a:xfrm>
+          <a:prstGeom prst="rect">
+            <a:avLst/>
+          </a:prstGeom>
+          <a:noFill/>
+        </p:spPr>
+        <p:txBody>
+          <a:bodyPr wrap="none" rtlCol="0">
+            <a:spAutoFit/>
+          </a:bodyPr>
+          <a:lstStyle/>
+          <a:p>
+            <a:r>
+              <a:rPr lang="fr-FR" dirty="0"/>
+              <a:t>75</a:t>
+            </a:r>
+          </a:p>
+        </p:txBody>
+      </p:sp>
+      <p:sp>
+        <p:nvSpPr>
+          <p:cNvPr id="19" name="ZoneTexte 18">
+            <a:extLst>
+              <a:ext uri="{FF2B5EF4-FFF2-40B4-BE49-F238E27FC236}">
+                <a16:creationId xmlns:a16="http://schemas.microsoft.com/office/drawing/2014/main" id="{6D002050-517E-568F-2E87-79DF74E1DE68}"/>
+              </a:ext>
+            </a:extLst>
+          </p:cNvPr>
+          <p:cNvSpPr txBox="1"/>
+          <p:nvPr/>
+        </p:nvSpPr>
+        <p:spPr>
+          <a:xfrm>
+            <a:off x="4133246" y="3218871"/>
+            <a:ext cx="554960" cy="369332"/>
+          </a:xfrm>
+          <a:prstGeom prst="rect">
+            <a:avLst/>
+          </a:prstGeom>
+          <a:noFill/>
+        </p:spPr>
+        <p:txBody>
+          <a:bodyPr wrap="none" rtlCol="0">
+            <a:spAutoFit/>
+          </a:bodyPr>
+          <a:lstStyle/>
+          <a:p>
+            <a:r>
+              <a:rPr lang="fr-FR" dirty="0"/>
+              <a:t>150</a:t>
+            </a:r>
+          </a:p>
+        </p:txBody>
+      </p:sp>
+      <p:sp>
+        <p:nvSpPr>
+          <p:cNvPr id="20" name="ZoneTexte 19">
+            <a:extLst>
+              <a:ext uri="{FF2B5EF4-FFF2-40B4-BE49-F238E27FC236}">
+                <a16:creationId xmlns:a16="http://schemas.microsoft.com/office/drawing/2014/main" id="{306636FE-EBE5-53E1-1F85-9FADF5941F6D}"/>
+              </a:ext>
+            </a:extLst>
+          </p:cNvPr>
+          <p:cNvSpPr txBox="1"/>
+          <p:nvPr/>
+        </p:nvSpPr>
+        <p:spPr>
+          <a:xfrm>
+            <a:off x="7314439" y="3218871"/>
+            <a:ext cx="554960" cy="369332"/>
+          </a:xfrm>
+          <a:prstGeom prst="rect">
+            <a:avLst/>
+          </a:prstGeom>
+          <a:noFill/>
+        </p:spPr>
+        <p:txBody>
+          <a:bodyPr wrap="none" rtlCol="0">
+            <a:spAutoFit/>
+          </a:bodyPr>
+          <a:lstStyle/>
+          <a:p>
+            <a:r>
+              <a:rPr lang="fr-FR" dirty="0"/>
+              <a:t>200</a:t>
+            </a:r>
+          </a:p>
+        </p:txBody>
+      </p:sp>
+      <p:sp>
+        <p:nvSpPr>
+          <p:cNvPr id="21" name="ZoneTexte 20">
+            <a:extLst>
+              <a:ext uri="{FF2B5EF4-FFF2-40B4-BE49-F238E27FC236}">
+                <a16:creationId xmlns:a16="http://schemas.microsoft.com/office/drawing/2014/main" id="{CA8A57C9-8E08-11C4-BB76-D6E101F68AAA}"/>
+              </a:ext>
+            </a:extLst>
+          </p:cNvPr>
+          <p:cNvSpPr txBox="1"/>
+          <p:nvPr/>
+        </p:nvSpPr>
+        <p:spPr>
+          <a:xfrm>
+            <a:off x="10415365" y="3218871"/>
+            <a:ext cx="554960" cy="369332"/>
+          </a:xfrm>
+          <a:prstGeom prst="rect">
+            <a:avLst/>
+          </a:prstGeom>
+          <a:noFill/>
+        </p:spPr>
+        <p:txBody>
+          <a:bodyPr wrap="none" rtlCol="0">
+            <a:spAutoFit/>
+          </a:bodyPr>
+          <a:lstStyle/>
+          <a:p>
+            <a:r>
+              <a:rPr lang="fr-FR" dirty="0"/>
+              <a:t>400</a:t>
+            </a:r>
+          </a:p>
+        </p:txBody>
+      </p:sp>
+      <p:sp>
+        <p:nvSpPr>
+          <p:cNvPr id="22" name="ZoneTexte 21">
+            <a:extLst>
+              <a:ext uri="{FF2B5EF4-FFF2-40B4-BE49-F238E27FC236}">
+                <a16:creationId xmlns:a16="http://schemas.microsoft.com/office/drawing/2014/main" id="{2ED9CE0C-4C65-AAFA-0A63-917F18944AEF}"/>
+              </a:ext>
+            </a:extLst>
+          </p:cNvPr>
+          <p:cNvSpPr txBox="1"/>
+          <p:nvPr/>
+        </p:nvSpPr>
+        <p:spPr>
+          <a:xfrm>
+            <a:off x="11651226" y="3376974"/>
+            <a:ext cx="450764" cy="369332"/>
+          </a:xfrm>
+          <a:prstGeom prst="rect">
+            <a:avLst/>
+          </a:prstGeom>
+          <a:noFill/>
+        </p:spPr>
+        <p:txBody>
+          <a:bodyPr wrap="none" rtlCol="0">
+            <a:spAutoFit/>
+          </a:bodyPr>
+          <a:lstStyle/>
+          <a:p>
+            <a:r>
+              <a:rPr lang="fr-FR" dirty="0" err="1"/>
+              <a:t>Nx</a:t>
+            </a:r>
+            <a:endParaRPr lang="fr-FR" dirty="0"/>
+          </a:p>
+        </p:txBody>
+      </p:sp>
+    </p:spTree>
+    <p:extLst>
+      <p:ext uri="{BB962C8B-B14F-4D97-AF65-F5344CB8AC3E}">
+        <p14:creationId xmlns:p14="http://schemas.microsoft.com/office/powerpoint/2010/main" val="4122727542"/>
+      </p:ext>
+    </p:extLst>
+  </p:cSld>
+  <p:clrMapOvr>
+    <a:masterClrMapping/>
+  </p:clrMapOvr>
+</p:sld>
+</file>
+
+<file path=ppt/slides/slide4.xml><?xml version="1.0" encoding="utf-8"?>
+<p:sld xmlns:a="http://schemas.openxmlformats.org/drawingml/2006/main" xmlns:r="http://schemas.openxmlformats.org/officeDocument/2006/relationships" xmlns:p="http://schemas.openxmlformats.org/presentationml/2006/main">
+  <p:cSld>
+    <p:spTree>
+      <p:nvGrpSpPr>
         <p:cNvPr id="1" name="">
           <a:extLst>
             <a:ext uri="{FF2B5EF4-FFF2-40B4-BE49-F238E27FC236}">
@@ -3683,8 +4241,8 @@
           <a:chExt cx="0" cy="0"/>
         </a:xfrm>
       </p:grpSpPr>
-      <mc:AlternateContent xmlns:mc="http://schemas.openxmlformats.org/markup-compatibility/2006">
-        <mc:Choice xmlns:a14="http://schemas.microsoft.com/office/drawing/2010/main" Requires="a14">
+      <mc:AlternateContent xmlns:mc="http://schemas.openxmlformats.org/markup-compatibility/2006" xmlns:a14="http://schemas.microsoft.com/office/drawing/2010/main">
+        <mc:Choice Requires="a14">
           <p:sp>
             <p:nvSpPr>
               <p:cNvPr id="2" name="Titre 1">
@@ -3754,7 +4312,7 @@
             </p:txBody>
           </p:sp>
         </mc:Choice>
-        <mc:Fallback>
+        <mc:Fallback xmlns="">
           <p:sp>
             <p:nvSpPr>
               <p:cNvPr id="2" name="Titre 1">
@@ -3839,7 +4397,7 @@
 </p:sld>
 </file>
 
-<file path=ppt/slides/slide4.xml><?xml version="1.0" encoding="utf-8"?>
+<file path=ppt/slides/slide5.xml><?xml version="1.0" encoding="utf-8"?>
 <p:sld xmlns:a="http://schemas.openxmlformats.org/drawingml/2006/main" xmlns:r="http://schemas.openxmlformats.org/officeDocument/2006/relationships" xmlns:p="http://schemas.openxmlformats.org/presentationml/2006/main">
   <p:cSld>
     <p:spTree>
@@ -3862,8 +4420,8 @@
           <a:chExt cx="0" cy="0"/>
         </a:xfrm>
       </p:grpSpPr>
-      <mc:AlternateContent xmlns:mc="http://schemas.openxmlformats.org/markup-compatibility/2006">
-        <mc:Choice xmlns:a14="http://schemas.microsoft.com/office/drawing/2010/main" Requires="a14">
+      <mc:AlternateContent xmlns:mc="http://schemas.openxmlformats.org/markup-compatibility/2006" xmlns:a14="http://schemas.microsoft.com/office/drawing/2010/main">
+        <mc:Choice Requires="a14">
           <p:sp>
             <p:nvSpPr>
               <p:cNvPr id="2" name="Titre 1">
@@ -3933,7 +4491,7 @@
             </p:txBody>
           </p:sp>
         </mc:Choice>
-        <mc:Fallback>
+        <mc:Fallback xmlns="">
           <p:sp>
             <p:nvSpPr>
               <p:cNvPr id="2" name="Titre 1">
@@ -3977,40 +4535,412 @@
           </p:sp>
         </mc:Fallback>
       </mc:AlternateContent>
-      <p:sp>
-        <p:nvSpPr>
-          <p:cNvPr id="3" name="Espace réservé du contenu 2">
-            <a:extLst>
-              <a:ext uri="{FF2B5EF4-FFF2-40B4-BE49-F238E27FC236}">
-                <a16:creationId xmlns:a16="http://schemas.microsoft.com/office/drawing/2014/main" id="{622EB648-3F2D-8A95-AAB6-E223881CFED9}"/>
-              </a:ext>
-            </a:extLst>
-          </p:cNvPr>
-          <p:cNvSpPr>
-            <a:spLocks noGrp="1"/>
-          </p:cNvSpPr>
-          <p:nvPr>
-            <p:ph idx="1"/>
-          </p:nvPr>
-        </p:nvSpPr>
-        <p:spPr/>
-        <p:txBody>
-          <a:bodyPr/>
-          <a:lstStyle/>
-          <a:p>
-            <a:r>
-              <a:rPr lang="fr-FR" dirty="0"/>
-              <a:t>Racine des carrés des incertitudes des valeurs </a:t>
-            </a:r>
-          </a:p>
-          <a:p>
-            <a:r>
-              <a:rPr lang="fr-FR" dirty="0"/>
-              <a:t>Systématique et aléatoire </a:t>
-            </a:r>
-          </a:p>
-        </p:txBody>
-      </p:sp>
+      <mc:AlternateContent xmlns:mc="http://schemas.openxmlformats.org/markup-compatibility/2006">
+        <mc:Choice xmlns:a14="http://schemas.microsoft.com/office/drawing/2010/main" Requires="a14">
+          <p:sp>
+            <p:nvSpPr>
+              <p:cNvPr id="3" name="Espace réservé du contenu 2">
+                <a:extLst>
+                  <a:ext uri="{FF2B5EF4-FFF2-40B4-BE49-F238E27FC236}">
+                    <a16:creationId xmlns:a16="http://schemas.microsoft.com/office/drawing/2014/main" id="{622EB648-3F2D-8A95-AAB6-E223881CFED9}"/>
+                  </a:ext>
+                </a:extLst>
+              </p:cNvPr>
+              <p:cNvSpPr>
+                <a:spLocks noGrp="1"/>
+              </p:cNvSpPr>
+              <p:nvPr>
+                <p:ph idx="1"/>
+              </p:nvPr>
+            </p:nvSpPr>
+            <p:spPr/>
+            <p:txBody>
+              <a:bodyPr/>
+              <a:lstStyle/>
+              <a:p>
+                <a:r>
+                  <a:rPr lang="fr-FR" dirty="0"/>
+                  <a:t>Systématique et aléatoire </a:t>
+                </a:r>
+              </a:p>
+              <a:p>
+                <a:r>
+                  <a:rPr lang="fr-FR" dirty="0"/>
+                  <a:t>Erreur expérimentale provient de la mesure de la perméabilité :  	</a:t>
+                </a:r>
+              </a:p>
+              <a:p>
+                <a:pPr lvl="1"/>
+                <a:r>
+                  <a:rPr lang="fr-FR" dirty="0"/>
+                  <a:t>Erreur de l’outil de mesure (épistémique) </a:t>
+                </a:r>
+                <a:r>
+                  <a:rPr lang="fr-FR" dirty="0">
+                    <a:sym typeface="Wingdings" panose="05000000000000000000" pitchFamily="2" charset="2"/>
+                  </a:rPr>
+                  <a:t> </a:t>
+                </a:r>
+                <a14:m>
+                  <m:oMath xmlns:m="http://schemas.openxmlformats.org/officeDocument/2006/math">
+                    <m:sSub>
+                      <m:sSubPr>
+                        <m:ctrlPr>
+                          <a:rPr lang="fr-FR" i="1">
+                            <a:latin typeface="Cambria Math" panose="02040503050406030204" pitchFamily="18" charset="0"/>
+                            <a:sym typeface="Wingdings" panose="05000000000000000000" pitchFamily="2" charset="2"/>
+                          </a:rPr>
+                        </m:ctrlPr>
+                      </m:sSubPr>
+                      <m:e>
+                        <m:r>
+                          <a:rPr lang="fr-FR" i="1">
+                            <a:latin typeface="Cambria Math" panose="02040503050406030204" pitchFamily="18" charset="0"/>
+                            <a:sym typeface="Wingdings" panose="05000000000000000000" pitchFamily="2" charset="2"/>
+                          </a:rPr>
+                          <m:t>𝐵</m:t>
+                        </m:r>
+                      </m:e>
+                      <m:sub>
+                        <m:r>
+                          <a:rPr lang="fr-FR" i="1">
+                            <a:latin typeface="Cambria Math" panose="02040503050406030204" pitchFamily="18" charset="0"/>
+                            <a:sym typeface="Wingdings" panose="05000000000000000000" pitchFamily="2" charset="2"/>
+                          </a:rPr>
+                          <m:t>𝑟</m:t>
+                        </m:r>
+                      </m:sub>
+                    </m:sSub>
+                  </m:oMath>
+                </a14:m>
+                <a:endParaRPr lang="fr-FR" dirty="0">
+                  <a:sym typeface="Wingdings" panose="05000000000000000000" pitchFamily="2" charset="2"/>
+                </a:endParaRPr>
+              </a:p>
+              <a:p>
+                <a:pPr lvl="1"/>
+                <a:r>
+                  <a:rPr lang="fr-FR" dirty="0"/>
+                  <a:t>Incertitude de la perméabilité (aléatoire) </a:t>
+                </a:r>
+                <a:r>
+                  <a:rPr lang="fr-FR" dirty="0">
+                    <a:sym typeface="Wingdings" panose="05000000000000000000" pitchFamily="2" charset="2"/>
+                  </a:rPr>
+                  <a:t> </a:t>
+                </a:r>
+                <a14:m>
+                  <m:oMath xmlns:m="http://schemas.openxmlformats.org/officeDocument/2006/math">
+                    <m:sSub>
+                      <m:sSubPr>
+                        <m:ctrlPr>
+                          <a:rPr lang="fr-FR" b="0" i="1" smtClean="0">
+                            <a:latin typeface="Cambria Math" panose="02040503050406030204" pitchFamily="18" charset="0"/>
+                            <a:sym typeface="Wingdings" panose="05000000000000000000" pitchFamily="2" charset="2"/>
+                          </a:rPr>
+                        </m:ctrlPr>
+                      </m:sSubPr>
+                      <m:e>
+                        <m:r>
+                          <a:rPr lang="fr-FR" b="0" i="1" smtClean="0">
+                            <a:latin typeface="Cambria Math" panose="02040503050406030204" pitchFamily="18" charset="0"/>
+                            <a:sym typeface="Wingdings" panose="05000000000000000000" pitchFamily="2" charset="2"/>
+                          </a:rPr>
+                          <m:t>𝑆</m:t>
+                        </m:r>
+                      </m:e>
+                      <m:sub>
+                        <m:r>
+                          <a:rPr lang="fr-FR" b="0" i="1" smtClean="0">
+                            <a:latin typeface="Cambria Math" panose="02040503050406030204" pitchFamily="18" charset="0"/>
+                            <a:sym typeface="Wingdings" panose="05000000000000000000" pitchFamily="2" charset="2"/>
+                          </a:rPr>
+                          <m:t>𝑟</m:t>
+                        </m:r>
+                      </m:sub>
+                    </m:sSub>
+                  </m:oMath>
+                </a14:m>
+                <a:endParaRPr lang="fr-FR" dirty="0"/>
+              </a:p>
+              <a:p>
+                <a14:m>
+                  <m:oMath xmlns:m="http://schemas.openxmlformats.org/officeDocument/2006/math">
+                    <m:sSub>
+                      <m:sSubPr>
+                        <m:ctrlPr>
+                          <a:rPr lang="fr-FR" b="0" i="1" smtClean="0">
+                            <a:latin typeface="Cambria Math" panose="02040503050406030204" pitchFamily="18" charset="0"/>
+                          </a:rPr>
+                        </m:ctrlPr>
+                      </m:sSubPr>
+                      <m:e>
+                        <m:r>
+                          <a:rPr lang="fr-FR" b="0" i="1" smtClean="0">
+                            <a:latin typeface="Cambria Math" panose="02040503050406030204" pitchFamily="18" charset="0"/>
+                          </a:rPr>
+                          <m:t>𝑢</m:t>
+                        </m:r>
+                      </m:e>
+                      <m:sub>
+                        <m:r>
+                          <a:rPr lang="fr-FR" b="0" i="1" smtClean="0">
+                            <a:latin typeface="Cambria Math" panose="02040503050406030204" pitchFamily="18" charset="0"/>
+                          </a:rPr>
+                          <m:t>𝐷</m:t>
+                        </m:r>
+                      </m:sub>
+                    </m:sSub>
+                    <m:r>
+                      <a:rPr lang="fr-FR" b="0" i="1" smtClean="0">
+                        <a:latin typeface="Cambria Math" panose="02040503050406030204" pitchFamily="18" charset="0"/>
+                      </a:rPr>
+                      <m:t>=</m:t>
+                    </m:r>
+                    <m:rad>
+                      <m:radPr>
+                        <m:degHide m:val="on"/>
+                        <m:ctrlPr>
+                          <a:rPr lang="fr-FR" b="0" i="1" smtClean="0">
+                            <a:latin typeface="Cambria Math" panose="02040503050406030204" pitchFamily="18" charset="0"/>
+                          </a:rPr>
+                        </m:ctrlPr>
+                      </m:radPr>
+                      <m:deg/>
+                      <m:e>
+                        <m:sSubSup>
+                          <m:sSubSupPr>
+                            <m:ctrlPr>
+                              <a:rPr lang="fr-FR" b="0" i="1" smtClean="0">
+                                <a:latin typeface="Cambria Math" panose="02040503050406030204" pitchFamily="18" charset="0"/>
+                              </a:rPr>
+                            </m:ctrlPr>
+                          </m:sSubSupPr>
+                          <m:e>
+                            <m:r>
+                              <a:rPr lang="fr-FR" b="0" i="1" smtClean="0">
+                                <a:latin typeface="Cambria Math" panose="02040503050406030204" pitchFamily="18" charset="0"/>
+                              </a:rPr>
+                              <m:t>𝑆</m:t>
+                            </m:r>
+                          </m:e>
+                          <m:sub>
+                            <m:r>
+                              <a:rPr lang="fr-FR" b="0" i="1" smtClean="0">
+                                <a:latin typeface="Cambria Math" panose="02040503050406030204" pitchFamily="18" charset="0"/>
+                              </a:rPr>
+                              <m:t>𝑟</m:t>
+                            </m:r>
+                          </m:sub>
+                          <m:sup>
+                            <m:r>
+                              <a:rPr lang="fr-FR" b="0" i="1" smtClean="0">
+                                <a:latin typeface="Cambria Math" panose="02040503050406030204" pitchFamily="18" charset="0"/>
+                              </a:rPr>
+                              <m:t>2</m:t>
+                            </m:r>
+                          </m:sup>
+                        </m:sSubSup>
+                      </m:e>
+                    </m:rad>
+                    <m:r>
+                      <a:rPr lang="fr-FR" b="0" i="1" smtClean="0">
+                        <a:latin typeface="Cambria Math" panose="02040503050406030204" pitchFamily="18" charset="0"/>
+                      </a:rPr>
+                      <m:t>+</m:t>
+                    </m:r>
+                    <m:sSubSup>
+                      <m:sSubSupPr>
+                        <m:ctrlPr>
+                          <a:rPr lang="fr-FR" b="0" i="1" smtClean="0">
+                            <a:latin typeface="Cambria Math" panose="02040503050406030204" pitchFamily="18" charset="0"/>
+                          </a:rPr>
+                        </m:ctrlPr>
+                      </m:sSubSupPr>
+                      <m:e>
+                        <m:r>
+                          <a:rPr lang="fr-FR" b="0" i="1" smtClean="0">
+                            <a:latin typeface="Cambria Math" panose="02040503050406030204" pitchFamily="18" charset="0"/>
+                          </a:rPr>
+                          <m:t>𝐵</m:t>
+                        </m:r>
+                      </m:e>
+                      <m:sub>
+                        <m:r>
+                          <a:rPr lang="fr-FR" b="0" i="1" smtClean="0">
+                            <a:latin typeface="Cambria Math" panose="02040503050406030204" pitchFamily="18" charset="0"/>
+                          </a:rPr>
+                          <m:t>𝑟</m:t>
+                        </m:r>
+                      </m:sub>
+                      <m:sup>
+                        <m:r>
+                          <a:rPr lang="fr-FR" b="0" i="1" smtClean="0">
+                            <a:latin typeface="Cambria Math" panose="02040503050406030204" pitchFamily="18" charset="0"/>
+                          </a:rPr>
+                          <m:t>2</m:t>
+                        </m:r>
+                      </m:sup>
+                    </m:sSubSup>
+                    <m:r>
+                      <a:rPr lang="fr-FR" b="0" i="1" smtClean="0">
+                        <a:latin typeface="Cambria Math" panose="02040503050406030204" pitchFamily="18" charset="0"/>
+                      </a:rPr>
+                      <m:t>=</m:t>
+                    </m:r>
+                    <m:rad>
+                      <m:radPr>
+                        <m:degHide m:val="on"/>
+                        <m:ctrlPr>
+                          <a:rPr lang="fr-FR" b="0" i="1" smtClean="0">
+                            <a:latin typeface="Cambria Math" panose="02040503050406030204" pitchFamily="18" charset="0"/>
+                          </a:rPr>
+                        </m:ctrlPr>
+                      </m:radPr>
+                      <m:deg/>
+                      <m:e>
+                        <m:sSup>
+                          <m:sSupPr>
+                            <m:ctrlPr>
+                              <a:rPr lang="fr-FR" b="0" i="1" smtClean="0">
+                                <a:latin typeface="Cambria Math" panose="02040503050406030204" pitchFamily="18" charset="0"/>
+                              </a:rPr>
+                            </m:ctrlPr>
+                          </m:sSupPr>
+                          <m:e>
+                            <m:r>
+                              <a:rPr lang="fr-FR" b="0" i="1" smtClean="0">
+                                <a:latin typeface="Cambria Math" panose="02040503050406030204" pitchFamily="18" charset="0"/>
+                              </a:rPr>
+                              <m:t>10.0</m:t>
+                            </m:r>
+                          </m:e>
+                          <m:sup>
+                            <m:r>
+                              <a:rPr lang="fr-FR" b="0" i="1" smtClean="0">
+                                <a:latin typeface="Cambria Math" panose="02040503050406030204" pitchFamily="18" charset="0"/>
+                              </a:rPr>
+                              <m:t>2</m:t>
+                            </m:r>
+                          </m:sup>
+                        </m:sSup>
+                        <m:r>
+                          <a:rPr lang="fr-FR" b="0" i="1" smtClean="0">
+                            <a:latin typeface="Cambria Math" panose="02040503050406030204" pitchFamily="18" charset="0"/>
+                          </a:rPr>
+                          <m:t>+</m:t>
+                        </m:r>
+                        <m:sSup>
+                          <m:sSupPr>
+                            <m:ctrlPr>
+                              <a:rPr lang="fr-FR" b="0" i="1" smtClean="0">
+                                <a:latin typeface="Cambria Math" panose="02040503050406030204" pitchFamily="18" charset="0"/>
+                              </a:rPr>
+                            </m:ctrlPr>
+                          </m:sSupPr>
+                          <m:e>
+                            <m:r>
+                              <a:rPr lang="fr-FR" b="0" i="1" smtClean="0">
+                                <a:latin typeface="Cambria Math" panose="02040503050406030204" pitchFamily="18" charset="0"/>
+                              </a:rPr>
+                              <m:t>14.7</m:t>
+                            </m:r>
+                          </m:e>
+                          <m:sup>
+                            <m:r>
+                              <a:rPr lang="fr-FR" b="0" i="1" smtClean="0">
+                                <a:latin typeface="Cambria Math" panose="02040503050406030204" pitchFamily="18" charset="0"/>
+                              </a:rPr>
+                              <m:t>2</m:t>
+                            </m:r>
+                          </m:sup>
+                        </m:sSup>
+                      </m:e>
+                    </m:rad>
+                    <m:r>
+                      <a:rPr lang="fr-FR" b="0" i="1" smtClean="0">
+                        <a:latin typeface="Cambria Math" panose="02040503050406030204" pitchFamily="18" charset="0"/>
+                      </a:rPr>
+                      <m:t>=17.8 </m:t>
+                    </m:r>
+                    <m:r>
+                      <a:rPr lang="fr-FR" b="0" i="1" smtClean="0">
+                        <a:latin typeface="Cambria Math" panose="02040503050406030204" pitchFamily="18" charset="0"/>
+                      </a:rPr>
+                      <m:t>𝜇</m:t>
+                    </m:r>
+                    <m:sSup>
+                      <m:sSupPr>
+                        <m:ctrlPr>
+                          <a:rPr lang="fr-FR" b="0" i="1" smtClean="0">
+                            <a:latin typeface="Cambria Math" panose="02040503050406030204" pitchFamily="18" charset="0"/>
+                          </a:rPr>
+                        </m:ctrlPr>
+                      </m:sSupPr>
+                      <m:e>
+                        <m:r>
+                          <a:rPr lang="fr-FR" b="0" i="1" smtClean="0">
+                            <a:latin typeface="Cambria Math" panose="02040503050406030204" pitchFamily="18" charset="0"/>
+                          </a:rPr>
+                          <m:t>𝑚</m:t>
+                        </m:r>
+                      </m:e>
+                      <m:sup>
+                        <m:r>
+                          <a:rPr lang="fr-FR" b="0" i="1" smtClean="0">
+                            <a:latin typeface="Cambria Math" panose="02040503050406030204" pitchFamily="18" charset="0"/>
+                          </a:rPr>
+                          <m:t>2</m:t>
+                        </m:r>
+                      </m:sup>
+                    </m:sSup>
+                  </m:oMath>
+                </a14:m>
+                <a:endParaRPr lang="fr-FR" dirty="0"/>
+              </a:p>
+            </p:txBody>
+          </p:sp>
+        </mc:Choice>
+        <mc:Fallback>
+          <p:sp>
+            <p:nvSpPr>
+              <p:cNvPr id="3" name="Espace réservé du contenu 2">
+                <a:extLst>
+                  <a:ext uri="{FF2B5EF4-FFF2-40B4-BE49-F238E27FC236}">
+                    <a16:creationId xmlns:a16="http://schemas.microsoft.com/office/drawing/2014/main" id="{622EB648-3F2D-8A95-AAB6-E223881CFED9}"/>
+                  </a:ext>
+                </a:extLst>
+              </p:cNvPr>
+              <p:cNvSpPr>
+                <a:spLocks noGrp="1" noRot="1" noChangeAspect="1" noMove="1" noResize="1" noEditPoints="1" noAdjustHandles="1" noChangeArrowheads="1" noChangeShapeType="1" noTextEdit="1"/>
+              </p:cNvSpPr>
+              <p:nvPr>
+                <p:ph idx="1"/>
+              </p:nvPr>
+            </p:nvSpPr>
+            <p:spPr>
+              <a:blipFill>
+                <a:blip r:embed="rId3"/>
+                <a:stretch>
+                  <a:fillRect l="-1043" t="-2381"/>
+                </a:stretch>
+              </a:blipFill>
+            </p:spPr>
+            <p:txBody>
+              <a:bodyPr/>
+              <a:lstStyle/>
+              <a:p>
+                <a:r>
+                  <a:rPr lang="fr-FR">
+                    <a:noFill/>
+                  </a:rPr>
+                  <a:t> </a:t>
+                </a:r>
+              </a:p>
+            </p:txBody>
+          </p:sp>
+        </mc:Fallback>
+      </mc:AlternateContent>
     </p:spTree>
     <p:extLst>
       <p:ext uri="{BB962C8B-B14F-4D97-AF65-F5344CB8AC3E}">
@@ -4024,7 +4954,7 @@
 </p:sld>
 </file>
 
-<file path=ppt/slides/slide5.xml><?xml version="1.0" encoding="utf-8"?>
+<file path=ppt/slides/slide6.xml><?xml version="1.0" encoding="utf-8"?>
 <p:sld xmlns:a="http://schemas.openxmlformats.org/drawingml/2006/main" xmlns:r="http://schemas.openxmlformats.org/officeDocument/2006/relationships" xmlns:p="http://schemas.openxmlformats.org/presentationml/2006/main">
   <p:cSld>
     <p:spTree>
@@ -4086,46 +5016,212 @@
           </a:p>
         </p:txBody>
       </p:sp>
-      <p:sp>
-        <p:nvSpPr>
-          <p:cNvPr id="3" name="Espace réservé du contenu 2">
-            <a:extLst>
-              <a:ext uri="{FF2B5EF4-FFF2-40B4-BE49-F238E27FC236}">
-                <a16:creationId xmlns:a16="http://schemas.microsoft.com/office/drawing/2014/main" id="{253E90C5-151C-4E9F-B84E-15760D48BB9B}"/>
-              </a:ext>
-            </a:extLst>
-          </p:cNvPr>
-          <p:cNvSpPr>
-            <a:spLocks noGrp="1"/>
-          </p:cNvSpPr>
-          <p:nvPr>
-            <p:ph idx="1"/>
-          </p:nvPr>
-        </p:nvSpPr>
-        <p:spPr/>
-        <p:txBody>
-          <a:bodyPr/>
-          <a:lstStyle/>
-          <a:p>
-            <a:r>
-              <a:rPr lang="fr-FR" dirty="0"/>
-              <a:t>E=S-D </a:t>
-            </a:r>
-          </a:p>
-          <a:p>
-            <a:r>
-              <a:rPr lang="fr-FR" dirty="0"/>
-              <a:t>D calculé à partir des moyennes du tableau 1 (moyenne = médiane) </a:t>
-            </a:r>
-          </a:p>
-          <a:p>
-            <a:r>
-              <a:rPr lang="fr-FR" dirty="0"/>
-              <a:t>S à simuler avec le code fourni </a:t>
-            </a:r>
-          </a:p>
-        </p:txBody>
-      </p:sp>
+      <mc:AlternateContent xmlns:mc="http://schemas.openxmlformats.org/markup-compatibility/2006">
+        <mc:Choice xmlns:a14="http://schemas.microsoft.com/office/drawing/2010/main" Requires="a14">
+          <p:sp>
+            <p:nvSpPr>
+              <p:cNvPr id="3" name="Espace réservé du contenu 2">
+                <a:extLst>
+                  <a:ext uri="{FF2B5EF4-FFF2-40B4-BE49-F238E27FC236}">
+                    <a16:creationId xmlns:a16="http://schemas.microsoft.com/office/drawing/2014/main" id="{253E90C5-151C-4E9F-B84E-15760D48BB9B}"/>
+                  </a:ext>
+                </a:extLst>
+              </p:cNvPr>
+              <p:cNvSpPr>
+                <a:spLocks noGrp="1"/>
+              </p:cNvSpPr>
+              <p:nvPr>
+                <p:ph idx="1"/>
+              </p:nvPr>
+            </p:nvSpPr>
+            <p:spPr/>
+            <p:txBody>
+              <a:bodyPr/>
+              <a:lstStyle/>
+              <a:p>
+                <a14:m>
+                  <m:oMath xmlns:m="http://schemas.openxmlformats.org/officeDocument/2006/math">
+                    <m:r>
+                      <a:rPr lang="fr-FR" b="0" i="1" smtClean="0">
+                        <a:latin typeface="Cambria Math" panose="02040503050406030204" pitchFamily="18" charset="0"/>
+                      </a:rPr>
+                      <m:t>𝐸</m:t>
+                    </m:r>
+                    <m:r>
+                      <a:rPr lang="fr-FR" b="0" i="1" smtClean="0">
+                        <a:latin typeface="Cambria Math" panose="02040503050406030204" pitchFamily="18" charset="0"/>
+                      </a:rPr>
+                      <m:t>=</m:t>
+                    </m:r>
+                    <m:r>
+                      <a:rPr lang="fr-FR" b="0" i="1" smtClean="0">
+                        <a:latin typeface="Cambria Math" panose="02040503050406030204" pitchFamily="18" charset="0"/>
+                      </a:rPr>
+                      <m:t>𝑆</m:t>
+                    </m:r>
+                    <m:r>
+                      <a:rPr lang="fr-FR" b="0" i="1" smtClean="0">
+                        <a:latin typeface="Cambria Math" panose="02040503050406030204" pitchFamily="18" charset="0"/>
+                      </a:rPr>
+                      <m:t>−</m:t>
+                    </m:r>
+                    <m:r>
+                      <a:rPr lang="fr-FR" b="0" i="1" smtClean="0">
+                        <a:latin typeface="Cambria Math" panose="02040503050406030204" pitchFamily="18" charset="0"/>
+                      </a:rPr>
+                      <m:t>𝐷</m:t>
+                    </m:r>
+                    <m:r>
+                      <a:rPr lang="fr-FR" b="0" i="1" smtClean="0">
+                        <a:latin typeface="Cambria Math" panose="02040503050406030204" pitchFamily="18" charset="0"/>
+                      </a:rPr>
+                      <m:t>=</m:t>
+                    </m:r>
+                    <m:sSub>
+                      <m:sSubPr>
+                        <m:ctrlPr>
+                          <a:rPr lang="fr-FR" b="0" i="1" smtClean="0">
+                            <a:latin typeface="Cambria Math" panose="02040503050406030204" pitchFamily="18" charset="0"/>
+                          </a:rPr>
+                        </m:ctrlPr>
+                      </m:sSubPr>
+                      <m:e>
+                        <m:r>
+                          <a:rPr lang="fr-FR" b="0" i="1" smtClean="0">
+                            <a:latin typeface="Cambria Math" panose="02040503050406030204" pitchFamily="18" charset="0"/>
+                          </a:rPr>
+                          <m:t>𝑘</m:t>
+                        </m:r>
+                      </m:e>
+                      <m:sub>
+                        <m:r>
+                          <a:rPr lang="fr-FR" b="0" i="1" smtClean="0">
+                            <a:latin typeface="Cambria Math" panose="02040503050406030204" pitchFamily="18" charset="0"/>
+                          </a:rPr>
+                          <m:t>𝑠𝑖𝑚</m:t>
+                        </m:r>
+                      </m:sub>
+                    </m:sSub>
+                    <m:r>
+                      <a:rPr lang="fr-FR" b="0" i="1" smtClean="0">
+                        <a:latin typeface="Cambria Math" panose="02040503050406030204" pitchFamily="18" charset="0"/>
+                      </a:rPr>
+                      <m:t>−</m:t>
+                    </m:r>
+                    <m:bar>
+                      <m:barPr>
+                        <m:pos m:val="top"/>
+                        <m:ctrlPr>
+                          <a:rPr lang="fr-FR" b="0" i="1" smtClean="0">
+                            <a:latin typeface="Cambria Math" panose="02040503050406030204" pitchFamily="18" charset="0"/>
+                          </a:rPr>
+                        </m:ctrlPr>
+                      </m:barPr>
+                      <m:e>
+                        <m:r>
+                          <a:rPr lang="fr-FR" b="0" i="1" smtClean="0">
+                            <a:latin typeface="Cambria Math" panose="02040503050406030204" pitchFamily="18" charset="0"/>
+                          </a:rPr>
+                          <m:t>𝑘</m:t>
+                        </m:r>
+                      </m:e>
+                    </m:bar>
+                    <m:r>
+                      <a:rPr lang="fr-FR" b="0" i="1" smtClean="0">
+                        <a:latin typeface="Cambria Math" panose="02040503050406030204" pitchFamily="18" charset="0"/>
+                      </a:rPr>
+                      <m:t>=28.5−80.6=−52.1 </m:t>
+                    </m:r>
+                    <m:r>
+                      <a:rPr lang="fr-FR" b="0" i="1" smtClean="0">
+                        <a:latin typeface="Cambria Math" panose="02040503050406030204" pitchFamily="18" charset="0"/>
+                      </a:rPr>
+                      <m:t>𝜇</m:t>
+                    </m:r>
+                    <m:sSup>
+                      <m:sSupPr>
+                        <m:ctrlPr>
+                          <a:rPr lang="fr-FR" b="0" i="1" smtClean="0">
+                            <a:latin typeface="Cambria Math" panose="02040503050406030204" pitchFamily="18" charset="0"/>
+                          </a:rPr>
+                        </m:ctrlPr>
+                      </m:sSupPr>
+                      <m:e>
+                        <m:r>
+                          <a:rPr lang="fr-FR" b="0" i="1" smtClean="0">
+                            <a:latin typeface="Cambria Math" panose="02040503050406030204" pitchFamily="18" charset="0"/>
+                          </a:rPr>
+                          <m:t>𝑚</m:t>
+                        </m:r>
+                      </m:e>
+                      <m:sup>
+                        <m:r>
+                          <a:rPr lang="fr-FR" b="0" i="1" smtClean="0">
+                            <a:latin typeface="Cambria Math" panose="02040503050406030204" pitchFamily="18" charset="0"/>
+                          </a:rPr>
+                          <m:t>2</m:t>
+                        </m:r>
+                      </m:sup>
+                    </m:sSup>
+                  </m:oMath>
+                </a14:m>
+                <a:endParaRPr lang="fr-FR" dirty="0"/>
+              </a:p>
+              <a:p>
+                <a:r>
+                  <a:rPr lang="fr-FR" dirty="0"/>
+                  <a:t>D calculé à partir des moyennes du tableau 1 (moyenne = médiane) </a:t>
+                </a:r>
+              </a:p>
+              <a:p>
+                <a:r>
+                  <a:rPr lang="fr-FR" dirty="0"/>
+                  <a:t>S à simuler avec le code fourni </a:t>
+                </a:r>
+              </a:p>
+            </p:txBody>
+          </p:sp>
+        </mc:Choice>
+        <mc:Fallback>
+          <p:sp>
+            <p:nvSpPr>
+              <p:cNvPr id="3" name="Espace réservé du contenu 2">
+                <a:extLst>
+                  <a:ext uri="{FF2B5EF4-FFF2-40B4-BE49-F238E27FC236}">
+                    <a16:creationId xmlns:a16="http://schemas.microsoft.com/office/drawing/2014/main" id="{253E90C5-151C-4E9F-B84E-15760D48BB9B}"/>
+                  </a:ext>
+                </a:extLst>
+              </p:cNvPr>
+              <p:cNvSpPr>
+                <a:spLocks noGrp="1" noRot="1" noChangeAspect="1" noMove="1" noResize="1" noEditPoints="1" noAdjustHandles="1" noChangeArrowheads="1" noChangeShapeType="1" noTextEdit="1"/>
+              </p:cNvSpPr>
+              <p:nvPr>
+                <p:ph idx="1"/>
+              </p:nvPr>
+            </p:nvSpPr>
+            <p:spPr>
+              <a:blipFill>
+                <a:blip r:embed="rId2"/>
+                <a:stretch>
+                  <a:fillRect l="-1043"/>
+                </a:stretch>
+              </a:blipFill>
+            </p:spPr>
+            <p:txBody>
+              <a:bodyPr/>
+              <a:lstStyle/>
+              <a:p>
+                <a:r>
+                  <a:rPr lang="fr-FR">
+                    <a:noFill/>
+                  </a:rPr>
+                  <a:t> </a:t>
+                </a:r>
+              </a:p>
+            </p:txBody>
+          </p:sp>
+        </mc:Fallback>
+      </mc:AlternateContent>
     </p:spTree>
     <p:extLst>
       <p:ext uri="{BB962C8B-B14F-4D97-AF65-F5344CB8AC3E}">
@@ -4139,7 +5235,7 @@
 </p:sld>
 </file>
 
-<file path=ppt/slides/slide6.xml><?xml version="1.0" encoding="utf-8"?>
+<file path=ppt/slides/slide7.xml><?xml version="1.0" encoding="utf-8"?>
 <p:sld xmlns:a="http://schemas.openxmlformats.org/drawingml/2006/main" xmlns:r="http://schemas.openxmlformats.org/officeDocument/2006/relationships" xmlns:p="http://schemas.openxmlformats.org/presentationml/2006/main">
   <p:cSld>
     <p:spTree>
@@ -4162,8 +5258,8 @@
           <a:chExt cx="0" cy="0"/>
         </a:xfrm>
       </p:grpSpPr>
-      <mc:AlternateContent xmlns:mc="http://schemas.openxmlformats.org/markup-compatibility/2006">
-        <mc:Choice xmlns:a14="http://schemas.microsoft.com/office/drawing/2010/main" Requires="a14">
+      <mc:AlternateContent xmlns:mc="http://schemas.openxmlformats.org/markup-compatibility/2006" xmlns:a14="http://schemas.microsoft.com/office/drawing/2010/main">
+        <mc:Choice Requires="a14">
           <p:sp>
             <p:nvSpPr>
               <p:cNvPr id="2" name="Titre 1">
@@ -4233,7 +5329,7 @@
             </p:txBody>
           </p:sp>
         </mc:Choice>
-        <mc:Fallback>
+        <mc:Fallback xmlns="">
           <p:sp>
             <p:nvSpPr>
               <p:cNvPr id="2" name="Titre 1">
@@ -4428,12 +5524,6 @@
                   </m:oMath>
                 </a14:m>
                 <a:endParaRPr lang="fr-FR" b="0" dirty="0"/>
-              </a:p>
-              <a:p>
-                <a:r>
-                  <a:rPr lang="fr-FR" dirty="0"/>
-                  <a:t>E calculé dans la partie D </a:t>
-                </a:r>
               </a:p>
               <a:p>
                 <a:r>
@@ -4660,6 +5750,196 @@
     <p:extLst>
       <p:ext uri="{BB962C8B-B14F-4D97-AF65-F5344CB8AC3E}">
         <p14:creationId xmlns:p14="http://schemas.microsoft.com/office/powerpoint/2010/main" val="848531350"/>
+      </p:ext>
+    </p:extLst>
+  </p:cSld>
+  <p:clrMapOvr>
+    <a:masterClrMapping/>
+  </p:clrMapOvr>
+</p:sld>
+</file>
+
+<file path=ppt/slides/slide8.xml><?xml version="1.0" encoding="utf-8"?>
+<p:sld xmlns:a="http://schemas.openxmlformats.org/drawingml/2006/main" xmlns:r="http://schemas.openxmlformats.org/officeDocument/2006/relationships" xmlns:p="http://schemas.openxmlformats.org/presentationml/2006/main">
+  <p:cSld>
+    <p:spTree>
+      <p:nvGrpSpPr>
+        <p:cNvPr id="1" name=""/>
+        <p:cNvGrpSpPr/>
+        <p:nvPr/>
+      </p:nvGrpSpPr>
+      <p:grpSpPr>
+        <a:xfrm>
+          <a:off x="0" y="0"/>
+          <a:ext cx="0" cy="0"/>
+          <a:chOff x="0" y="0"/>
+          <a:chExt cx="0" cy="0"/>
+        </a:xfrm>
+      </p:grpSpPr>
+      <p:sp>
+        <p:nvSpPr>
+          <p:cNvPr id="2" name="Titre 1">
+            <a:extLst>
+              <a:ext uri="{FF2B5EF4-FFF2-40B4-BE49-F238E27FC236}">
+                <a16:creationId xmlns:a16="http://schemas.microsoft.com/office/drawing/2014/main" id="{952FD1E7-D507-F3B9-06EA-C4D755151F65}"/>
+              </a:ext>
+            </a:extLst>
+          </p:cNvPr>
+          <p:cNvSpPr>
+            <a:spLocks noGrp="1"/>
+          </p:cNvSpPr>
+          <p:nvPr>
+            <p:ph type="title"/>
+          </p:nvPr>
+        </p:nvSpPr>
+        <p:spPr/>
+        <p:txBody>
+          <a:bodyPr/>
+          <a:lstStyle/>
+          <a:p>
+            <a:r>
+              <a:rPr lang="fr-FR" dirty="0"/>
+              <a:t>Interprétation de l’intervalle de confiance </a:t>
+            </a:r>
+          </a:p>
+        </p:txBody>
+      </p:sp>
+      <mc:AlternateContent xmlns:mc="http://schemas.openxmlformats.org/markup-compatibility/2006">
+        <mc:Choice xmlns:a14="http://schemas.microsoft.com/office/drawing/2010/main" Requires="a14">
+          <p:sp>
+            <p:nvSpPr>
+              <p:cNvPr id="3" name="Espace réservé du contenu 2">
+                <a:extLst>
+                  <a:ext uri="{FF2B5EF4-FFF2-40B4-BE49-F238E27FC236}">
+                    <a16:creationId xmlns:a16="http://schemas.microsoft.com/office/drawing/2014/main" id="{5F231FAE-DF1D-EF42-B4E7-03EBF13AC650}"/>
+                  </a:ext>
+                </a:extLst>
+              </p:cNvPr>
+              <p:cNvSpPr>
+                <a:spLocks noGrp="1"/>
+              </p:cNvSpPr>
+              <p:nvPr>
+                <p:ph idx="1"/>
+              </p:nvPr>
+            </p:nvSpPr>
+            <p:spPr/>
+            <p:txBody>
+              <a:bodyPr/>
+              <a:lstStyle/>
+              <a:p>
+                <a:r>
+                  <a:rPr lang="fr-FR" b="0" dirty="0">
+                    <a:latin typeface="Cambria Math" panose="02040503050406030204" pitchFamily="18" charset="0"/>
+                  </a:rPr>
+                  <a:t>E par rapport à </a:t>
+                </a:r>
+                <a:r>
+                  <a:rPr lang="fr-FR" b="0" dirty="0" err="1">
+                    <a:latin typeface="Cambria Math" panose="02040503050406030204" pitchFamily="18" charset="0"/>
+                  </a:rPr>
+                  <a:t>u_val</a:t>
+                </a:r>
+                <a:r>
+                  <a:rPr lang="fr-FR" b="0" dirty="0">
+                    <a:latin typeface="Cambria Math" panose="02040503050406030204" pitchFamily="18" charset="0"/>
+                  </a:rPr>
+                  <a:t> ?</a:t>
+                </a:r>
+              </a:p>
+              <a:p>
+                <a:endParaRPr lang="fr-FR" b="0" i="1" dirty="0">
+                  <a:latin typeface="Cambria Math" panose="02040503050406030204" pitchFamily="18" charset="0"/>
+                </a:endParaRPr>
+              </a:p>
+              <a:p>
+                <a14:m>
+                  <m:oMath xmlns:m="http://schemas.openxmlformats.org/officeDocument/2006/math">
+                    <m:sSub>
+                      <m:sSubPr>
+                        <m:ctrlPr>
+                          <a:rPr lang="fr-FR" b="0" i="1" smtClean="0">
+                            <a:latin typeface="Cambria Math" panose="02040503050406030204" pitchFamily="18" charset="0"/>
+                          </a:rPr>
+                        </m:ctrlPr>
+                      </m:sSubPr>
+                      <m:e>
+                        <m:r>
+                          <a:rPr lang="fr-FR" b="0" i="1" smtClean="0">
+                            <a:latin typeface="Cambria Math" panose="02040503050406030204" pitchFamily="18" charset="0"/>
+                          </a:rPr>
+                          <m:t>𝑢</m:t>
+                        </m:r>
+                      </m:e>
+                      <m:sub>
+                        <m:r>
+                          <a:rPr lang="fr-FR" b="0" i="1" smtClean="0">
+                            <a:latin typeface="Cambria Math" panose="02040503050406030204" pitchFamily="18" charset="0"/>
+                          </a:rPr>
+                          <m:t>𝐷</m:t>
+                        </m:r>
+                      </m:sub>
+                    </m:sSub>
+                  </m:oMath>
+                </a14:m>
+                <a:r>
+                  <a:rPr lang="fr-FR" dirty="0"/>
+                  <a:t> semble être l’erreur prédominante dans la validation </a:t>
+                </a:r>
+                <a:r>
+                  <a:rPr lang="fr-FR" dirty="0">
+                    <a:sym typeface="Wingdings" panose="05000000000000000000" pitchFamily="2" charset="2"/>
+                  </a:rPr>
+                  <a:t> être plus précis sur les expériences  </a:t>
+                </a:r>
+                <a:endParaRPr lang="fr-FR" dirty="0"/>
+              </a:p>
+            </p:txBody>
+          </p:sp>
+        </mc:Choice>
+        <mc:Fallback>
+          <p:sp>
+            <p:nvSpPr>
+              <p:cNvPr id="3" name="Espace réservé du contenu 2">
+                <a:extLst>
+                  <a:ext uri="{FF2B5EF4-FFF2-40B4-BE49-F238E27FC236}">
+                    <a16:creationId xmlns:a16="http://schemas.microsoft.com/office/drawing/2014/main" id="{5F231FAE-DF1D-EF42-B4E7-03EBF13AC650}"/>
+                  </a:ext>
+                </a:extLst>
+              </p:cNvPr>
+              <p:cNvSpPr>
+                <a:spLocks noGrp="1" noRot="1" noChangeAspect="1" noMove="1" noResize="1" noEditPoints="1" noAdjustHandles="1" noChangeArrowheads="1" noChangeShapeType="1" noTextEdit="1"/>
+              </p:cNvSpPr>
+              <p:nvPr>
+                <p:ph idx="1"/>
+              </p:nvPr>
+            </p:nvSpPr>
+            <p:spPr>
+              <a:blipFill>
+                <a:blip r:embed="rId2"/>
+                <a:stretch>
+                  <a:fillRect l="-1043" t="-2381"/>
+                </a:stretch>
+              </a:blipFill>
+            </p:spPr>
+            <p:txBody>
+              <a:bodyPr/>
+              <a:lstStyle/>
+              <a:p>
+                <a:r>
+                  <a:rPr lang="fr-FR">
+                    <a:noFill/>
+                  </a:rPr>
+                  <a:t> </a:t>
+                </a:r>
+              </a:p>
+            </p:txBody>
+          </p:sp>
+        </mc:Fallback>
+      </mc:AlternateContent>
+    </p:spTree>
+    <p:extLst>
+      <p:ext uri="{BB962C8B-B14F-4D97-AF65-F5344CB8AC3E}">
+        <p14:creationId xmlns:p14="http://schemas.microsoft.com/office/powerpoint/2010/main" val="1935114118"/>
       </p:ext>
     </p:extLst>
   </p:cSld>

--- a/MEC8211-Devoir3.pptx
+++ b/MEC8211-Devoir3.pptx
@@ -7,12 +7,13 @@
   <p:sldIdLst>
     <p:sldId id="257" r:id="rId2"/>
     <p:sldId id="258" r:id="rId3"/>
-    <p:sldId id="264" r:id="rId4"/>
-    <p:sldId id="260" r:id="rId5"/>
-    <p:sldId id="261" r:id="rId6"/>
-    <p:sldId id="262" r:id="rId7"/>
-    <p:sldId id="263" r:id="rId8"/>
-    <p:sldId id="265" r:id="rId9"/>
+    <p:sldId id="266" r:id="rId4"/>
+    <p:sldId id="264" r:id="rId5"/>
+    <p:sldId id="260" r:id="rId6"/>
+    <p:sldId id="261" r:id="rId7"/>
+    <p:sldId id="262" r:id="rId8"/>
+    <p:sldId id="263" r:id="rId9"/>
+    <p:sldId id="265" r:id="rId10"/>
   </p:sldIdLst>
   <p:sldSz cx="12192000" cy="6858000"/>
   <p:notesSz cx="6858000" cy="9144000"/>
@@ -3612,48 +3613,748 @@
           </p:sp>
         </mc:Fallback>
       </mc:AlternateContent>
-      <p:sp>
-        <p:nvSpPr>
-          <p:cNvPr id="3" name="Espace réservé du contenu 2">
-            <a:extLst>
-              <a:ext uri="{FF2B5EF4-FFF2-40B4-BE49-F238E27FC236}">
-                <a16:creationId xmlns:a16="http://schemas.microsoft.com/office/drawing/2014/main" id="{22E80974-09C0-B5E5-C74A-D5162AC8CD95}"/>
-              </a:ext>
-            </a:extLst>
-          </p:cNvPr>
-          <p:cNvSpPr>
-            <a:spLocks noGrp="1"/>
-          </p:cNvSpPr>
-          <p:nvPr>
-            <p:ph idx="1"/>
-          </p:nvPr>
-        </p:nvSpPr>
-        <p:spPr/>
-        <p:txBody>
-          <a:bodyPr/>
-          <a:lstStyle/>
-          <a:p>
-            <a:r>
-              <a:rPr lang="fr-FR" dirty="0"/>
-              <a:t>Mesure de l’ordre de convergence observé </a:t>
-            </a:r>
-          </a:p>
-          <a:p>
-            <a:r>
-              <a:rPr lang="fr-FR" dirty="0"/>
-              <a:t>Calcul du </a:t>
-            </a:r>
-            <a:r>
-              <a:rPr lang="fr-FR" dirty="0" err="1"/>
-              <a:t>Grid</a:t>
-            </a:r>
-            <a:r>
-              <a:rPr lang="fr-FR" dirty="0"/>
-              <a:t> Convergence Index (p=2)</a:t>
-            </a:r>
-          </a:p>
-        </p:txBody>
-      </p:sp>
+      <mc:AlternateContent xmlns:mc="http://schemas.openxmlformats.org/markup-compatibility/2006">
+        <mc:Choice xmlns:a14="http://schemas.microsoft.com/office/drawing/2010/main" Requires="a14">
+          <p:sp>
+            <p:nvSpPr>
+              <p:cNvPr id="3" name="Espace réservé du contenu 2">
+                <a:extLst>
+                  <a:ext uri="{FF2B5EF4-FFF2-40B4-BE49-F238E27FC236}">
+                    <a16:creationId xmlns:a16="http://schemas.microsoft.com/office/drawing/2014/main" id="{22E80974-09C0-B5E5-C74A-D5162AC8CD95}"/>
+                  </a:ext>
+                </a:extLst>
+              </p:cNvPr>
+              <p:cNvSpPr>
+                <a:spLocks noGrp="1"/>
+              </p:cNvSpPr>
+              <p:nvPr>
+                <p:ph idx="1"/>
+              </p:nvPr>
+            </p:nvSpPr>
+            <p:spPr>
+              <a:xfrm>
+                <a:off x="838200" y="1013988"/>
+                <a:ext cx="10515600" cy="5939074"/>
+              </a:xfrm>
+            </p:spPr>
+            <p:txBody>
+              <a:bodyPr>
+                <a:normAutofit/>
+              </a:bodyPr>
+              <a:lstStyle/>
+              <a:p>
+                <a14:m>
+                  <m:oMath xmlns:m="http://schemas.openxmlformats.org/officeDocument/2006/math">
+                    <m:sSub>
+                      <m:sSubPr>
+                        <m:ctrlPr>
+                          <a:rPr lang="fr-FR" sz="2000" i="1" smtClean="0">
+                            <a:latin typeface="Cambria Math" panose="02040503050406030204" pitchFamily="18" charset="0"/>
+                          </a:rPr>
+                        </m:ctrlPr>
+                      </m:sSubPr>
+                      <m:e>
+                        <m:r>
+                          <a:rPr lang="fr-FR" sz="2000" i="1">
+                            <a:latin typeface="Cambria Math" panose="02040503050406030204" pitchFamily="18" charset="0"/>
+                          </a:rPr>
+                          <m:t>𝑢</m:t>
+                        </m:r>
+                      </m:e>
+                      <m:sub>
+                        <m:r>
+                          <a:rPr lang="fr-FR" sz="2000" i="1">
+                            <a:latin typeface="Cambria Math" panose="02040503050406030204" pitchFamily="18" charset="0"/>
+                          </a:rPr>
+                          <m:t>𝑛𝑢𝑚</m:t>
+                        </m:r>
+                      </m:sub>
+                    </m:sSub>
+                  </m:oMath>
+                </a14:m>
+                <a:r>
+                  <a:rPr lang="fr-FR" sz="2000" dirty="0"/>
+                  <a:t> peut être calculé à l’aide du GCI (</a:t>
+                </a:r>
+                <a:r>
+                  <a:rPr lang="fr-FR" sz="2000" i="1" dirty="0" err="1"/>
+                  <a:t>Grid</a:t>
+                </a:r>
+                <a:r>
+                  <a:rPr lang="fr-FR" sz="2000" i="1" dirty="0"/>
+                  <a:t> Convergence Index</a:t>
+                </a:r>
+                <a:r>
+                  <a:rPr lang="fr-FR" sz="2000" dirty="0"/>
+                  <a:t>)</a:t>
+                </a:r>
+              </a:p>
+              <a:p>
+                <a:r>
+                  <a:rPr lang="fr-FR" sz="2000" dirty="0"/>
+                  <a:t>GCI donne une évaluation conservative de l’incertitude à 95% de fiabilité. On conclu donc que </a:t>
+                </a:r>
+                <a14:m>
+                  <m:oMath xmlns:m="http://schemas.openxmlformats.org/officeDocument/2006/math">
+                    <m:sSub>
+                      <m:sSubPr>
+                        <m:ctrlPr>
+                          <a:rPr lang="fr-CA" sz="2000" b="0" i="1" smtClean="0">
+                            <a:latin typeface="Cambria Math" panose="02040503050406030204" pitchFamily="18" charset="0"/>
+                          </a:rPr>
+                        </m:ctrlPr>
+                      </m:sSubPr>
+                      <m:e>
+                        <m:r>
+                          <a:rPr lang="fr-CA" sz="2000" b="0" i="1" smtClean="0">
+                            <a:latin typeface="Cambria Math" panose="02040503050406030204" pitchFamily="18" charset="0"/>
+                          </a:rPr>
+                          <m:t>𝑢</m:t>
+                        </m:r>
+                      </m:e>
+                      <m:sub>
+                        <m:r>
+                          <a:rPr lang="fr-CA" sz="2000" b="0" i="1" smtClean="0">
+                            <a:latin typeface="Cambria Math" panose="02040503050406030204" pitchFamily="18" charset="0"/>
+                          </a:rPr>
+                          <m:t>𝑛𝑢𝑚</m:t>
+                        </m:r>
+                      </m:sub>
+                    </m:sSub>
+                    <m:r>
+                      <a:rPr lang="fr-CA" sz="2000" b="0" i="1" smtClean="0">
+                        <a:latin typeface="Cambria Math" panose="02040503050406030204" pitchFamily="18" charset="0"/>
+                      </a:rPr>
+                      <m:t>=</m:t>
+                    </m:r>
+                    <m:f>
+                      <m:fPr>
+                        <m:ctrlPr>
+                          <a:rPr lang="fr-CA" sz="2000" b="0" i="1" smtClean="0">
+                            <a:latin typeface="Cambria Math" panose="02040503050406030204" pitchFamily="18" charset="0"/>
+                          </a:rPr>
+                        </m:ctrlPr>
+                      </m:fPr>
+                      <m:num>
+                        <m:r>
+                          <a:rPr lang="fr-CA" sz="2000" b="0" i="1" smtClean="0">
+                            <a:latin typeface="Cambria Math" panose="02040503050406030204" pitchFamily="18" charset="0"/>
+                          </a:rPr>
+                          <m:t>𝐺𝐶𝐼</m:t>
+                        </m:r>
+                      </m:num>
+                      <m:den>
+                        <m:r>
+                          <a:rPr lang="fr-CA" sz="2000" b="0" i="1" smtClean="0">
+                            <a:latin typeface="Cambria Math" panose="02040503050406030204" pitchFamily="18" charset="0"/>
+                          </a:rPr>
+                          <m:t>2</m:t>
+                        </m:r>
+                      </m:den>
+                    </m:f>
+                  </m:oMath>
+                </a14:m>
+                <a:r>
+                  <a:rPr lang="fr-FR" sz="2000" dirty="0"/>
+                  <a:t>, pour rester cohérent avec le facteur de couverture, </a:t>
+                </a:r>
+                <a14:m>
+                  <m:oMath xmlns:m="http://schemas.openxmlformats.org/officeDocument/2006/math">
+                    <m:r>
+                      <a:rPr lang="fr-CA" sz="2000" b="0" i="1" smtClean="0">
+                        <a:latin typeface="Cambria Math" panose="02040503050406030204" pitchFamily="18" charset="0"/>
+                      </a:rPr>
+                      <m:t>𝑘</m:t>
+                    </m:r>
+                    <m:r>
+                      <a:rPr lang="fr-CA" sz="2000" b="0" i="1" smtClean="0">
+                        <a:latin typeface="Cambria Math" panose="02040503050406030204" pitchFamily="18" charset="0"/>
+                      </a:rPr>
+                      <m:t>=2</m:t>
+                    </m:r>
+                  </m:oMath>
+                </a14:m>
+                <a:r>
+                  <a:rPr lang="fr-FR" sz="2000" dirty="0"/>
+                  <a:t>.</a:t>
+                </a:r>
+              </a:p>
+              <a:p>
+                <a:r>
+                  <a:rPr lang="fr-FR" sz="2000" dirty="0"/>
+                  <a:t>GCI est calculé de la manière suivante (</a:t>
+                </a:r>
+                <a:r>
+                  <a:rPr lang="fr-FR" sz="2000" i="1" dirty="0"/>
+                  <a:t>Figure 1</a:t>
+                </a:r>
+                <a:r>
+                  <a:rPr lang="fr-FR" sz="2000" dirty="0"/>
+                  <a:t>) : </a:t>
+                </a:r>
+                <a:br>
+                  <a:rPr lang="fr-FR" sz="2000" dirty="0"/>
+                </a:br>
+                <a:r>
+                  <a:rPr lang="fr-FR" sz="2000" dirty="0"/>
+                  <a:t>	où </a:t>
+                </a:r>
+                <a14:m>
+                  <m:oMath xmlns:m="http://schemas.openxmlformats.org/officeDocument/2006/math">
+                    <m:sSub>
+                      <m:sSubPr>
+                        <m:ctrlPr>
+                          <a:rPr lang="fr-CA" sz="2000" b="0" i="1" smtClean="0">
+                            <a:latin typeface="Cambria Math" panose="02040503050406030204" pitchFamily="18" charset="0"/>
+                          </a:rPr>
+                        </m:ctrlPr>
+                      </m:sSubPr>
+                      <m:e>
+                        <m:r>
+                          <a:rPr lang="fr-CA" sz="2000" b="0" i="1" smtClean="0">
+                            <a:latin typeface="Cambria Math" panose="02040503050406030204" pitchFamily="18" charset="0"/>
+                          </a:rPr>
+                          <m:t>𝑝</m:t>
+                        </m:r>
+                      </m:e>
+                      <m:sub>
+                        <m:r>
+                          <a:rPr lang="fr-CA" sz="2000" b="0" i="1" smtClean="0">
+                            <a:latin typeface="Cambria Math" panose="02040503050406030204" pitchFamily="18" charset="0"/>
+                          </a:rPr>
+                          <m:t>𝑓</m:t>
+                        </m:r>
+                      </m:sub>
+                    </m:sSub>
+                  </m:oMath>
+                </a14:m>
+                <a:r>
+                  <a:rPr lang="fr-FR" sz="2000" dirty="0"/>
+                  <a:t> est l’ordre théorique en espace, soit 2,</a:t>
+                </a:r>
+                <a:br>
+                  <a:rPr lang="fr-FR" sz="2000" dirty="0"/>
+                </a:br>
+                <a:r>
+                  <a:rPr lang="fr-FR" sz="2000" dirty="0"/>
+                  <a:t>	et </a:t>
+                </a:r>
+                <a14:m>
+                  <m:oMath xmlns:m="http://schemas.openxmlformats.org/officeDocument/2006/math">
+                    <m:acc>
+                      <m:accPr>
+                        <m:chr m:val="̂"/>
+                        <m:ctrlPr>
+                          <a:rPr lang="fr-CA" sz="2000" b="0" i="1" smtClean="0">
+                            <a:latin typeface="Cambria Math" panose="02040503050406030204" pitchFamily="18" charset="0"/>
+                          </a:rPr>
+                        </m:ctrlPr>
+                      </m:accPr>
+                      <m:e>
+                        <m:r>
+                          <a:rPr lang="fr-CA" sz="2000" b="0" i="1" smtClean="0">
+                            <a:latin typeface="Cambria Math" panose="02040503050406030204" pitchFamily="18" charset="0"/>
+                          </a:rPr>
+                          <m:t>𝑝</m:t>
+                        </m:r>
+                      </m:e>
+                    </m:acc>
+                  </m:oMath>
+                </a14:m>
+                <a:r>
+                  <a:rPr lang="fr-FR" sz="2000" dirty="0"/>
+                  <a:t> est l’ordre observé.</a:t>
+                </a:r>
+              </a:p>
+              <a:p>
+                <a:r>
+                  <a:rPr lang="fr-FR" sz="2000" dirty="0"/>
+                  <a:t>Pour mesurer l’ordre </a:t>
+                </a:r>
+                <a14:m>
+                  <m:oMath xmlns:m="http://schemas.openxmlformats.org/officeDocument/2006/math">
+                    <m:acc>
+                      <m:accPr>
+                        <m:chr m:val="̂"/>
+                        <m:ctrlPr>
+                          <a:rPr lang="fr-FR" sz="2000" i="1" smtClean="0">
+                            <a:latin typeface="Cambria Math" panose="02040503050406030204" pitchFamily="18" charset="0"/>
+                          </a:rPr>
+                        </m:ctrlPr>
+                      </m:accPr>
+                      <m:e>
+                        <m:r>
+                          <a:rPr lang="fr-CA" sz="2000" b="0" i="1" smtClean="0">
+                            <a:latin typeface="Cambria Math" panose="02040503050406030204" pitchFamily="18" charset="0"/>
+                          </a:rPr>
+                          <m:t>𝑝</m:t>
+                        </m:r>
+                      </m:e>
+                    </m:acc>
+                  </m:oMath>
+                </a14:m>
+                <a:r>
+                  <a:rPr lang="fr-FR" sz="2000" dirty="0"/>
+                  <a:t>, comme on travaille avec des</a:t>
+                </a:r>
+                <a:br>
+                  <a:rPr lang="fr-FR" sz="2000" dirty="0"/>
+                </a:br>
+                <a:r>
+                  <a:rPr lang="fr-FR" sz="2000" dirty="0"/>
+                  <a:t>données stochastiques, on propose la méthodologie</a:t>
+                </a:r>
+                <a:br>
+                  <a:rPr lang="fr-FR" sz="2000" dirty="0"/>
+                </a:br>
+                <a:r>
+                  <a:rPr lang="fr-FR" sz="2000" dirty="0"/>
+                  <a:t>suivante :</a:t>
+                </a:r>
+              </a:p>
+              <a:p>
+                <a:pPr marL="800100" lvl="1" indent="-342900">
+                  <a:buFont typeface="+mj-lt"/>
+                  <a:buAutoNum type="arabicPeriod"/>
+                </a:pPr>
+                <a:r>
+                  <a:rPr lang="fr-FR" sz="1600" dirty="0"/>
+                  <a:t>Générer un nombre aléatoire avec un </a:t>
+                </a:r>
+                <a:r>
+                  <a:rPr lang="fr-FR" sz="1600" i="1" dirty="0" err="1"/>
+                  <a:t>seed</a:t>
+                </a:r>
+                <a:r>
+                  <a:rPr lang="fr-FR" sz="1600" dirty="0"/>
+                  <a:t> précis pour générer</a:t>
+                </a:r>
+                <a:br>
+                  <a:rPr lang="fr-FR" sz="1600" dirty="0"/>
+                </a:br>
+                <a:r>
+                  <a:rPr lang="fr-FR" sz="1600" dirty="0"/>
+                  <a:t>une simulation du matériau du filtre.</a:t>
+                </a:r>
+              </a:p>
+              <a:p>
+                <a:pPr marL="800100" lvl="1" indent="-342900">
+                  <a:buFont typeface="+mj-lt"/>
+                  <a:buAutoNum type="arabicPeriod"/>
+                </a:pPr>
+                <a:r>
+                  <a:rPr lang="fr-FR" sz="1600" dirty="0"/>
+                  <a:t>Simuler l’écoulement pour le </a:t>
+                </a:r>
+                <a:r>
+                  <a:rPr lang="fr-FR" sz="1600" i="1" dirty="0" err="1"/>
+                  <a:t>seed</a:t>
+                </a:r>
+                <a:r>
+                  <a:rPr lang="fr-FR" sz="1600" dirty="0"/>
+                  <a:t> choisi pour un ensemble de maillages raffinés, en gardant une épaisseur constante (</a:t>
+                </a:r>
+                <a14:m>
+                  <m:oMath xmlns:m="http://schemas.openxmlformats.org/officeDocument/2006/math">
+                    <m:r>
+                      <a:rPr lang="fr-FR" sz="1600" i="1" smtClean="0">
+                        <a:latin typeface="Cambria Math" panose="02040503050406030204" pitchFamily="18" charset="0"/>
+                        <a:ea typeface="Cambria Math" panose="02040503050406030204" pitchFamily="18" charset="0"/>
+                      </a:rPr>
+                      <m:t>∆</m:t>
+                    </m:r>
+                    <m:r>
+                      <a:rPr lang="fr-CA" sz="1600" b="0" i="1" smtClean="0">
+                        <a:latin typeface="Cambria Math" panose="02040503050406030204" pitchFamily="18" charset="0"/>
+                        <a:ea typeface="Cambria Math" panose="02040503050406030204" pitchFamily="18" charset="0"/>
+                      </a:rPr>
+                      <m:t>𝑥</m:t>
+                    </m:r>
+                    <m:r>
+                      <a:rPr lang="fr-CA" sz="1600" b="0" i="1" smtClean="0">
+                        <a:latin typeface="Cambria Math" panose="02040503050406030204" pitchFamily="18" charset="0"/>
+                        <a:ea typeface="Cambria Math" panose="02040503050406030204" pitchFamily="18" charset="0"/>
+                      </a:rPr>
+                      <m:t> </m:t>
+                    </m:r>
+                    <m:sSub>
+                      <m:sSubPr>
+                        <m:ctrlPr>
+                          <a:rPr lang="fr-CA" sz="1600" b="0" i="1" smtClean="0">
+                            <a:latin typeface="Cambria Math" panose="02040503050406030204" pitchFamily="18" charset="0"/>
+                            <a:ea typeface="Cambria Math" panose="02040503050406030204" pitchFamily="18" charset="0"/>
+                          </a:rPr>
+                        </m:ctrlPr>
+                      </m:sSubPr>
+                      <m:e>
+                        <m:r>
+                          <a:rPr lang="fr-CA" sz="1600" b="0" i="1" smtClean="0">
+                            <a:latin typeface="Cambria Math" panose="02040503050406030204" pitchFamily="18" charset="0"/>
+                            <a:ea typeface="Cambria Math" panose="02040503050406030204" pitchFamily="18" charset="0"/>
+                          </a:rPr>
+                          <m:t>𝑁</m:t>
+                        </m:r>
+                      </m:e>
+                      <m:sub>
+                        <m:r>
+                          <a:rPr lang="fr-CA" sz="1600" b="0" i="1" smtClean="0">
+                            <a:latin typeface="Cambria Math" panose="02040503050406030204" pitchFamily="18" charset="0"/>
+                            <a:ea typeface="Cambria Math" panose="02040503050406030204" pitchFamily="18" charset="0"/>
+                          </a:rPr>
+                          <m:t>𝑥</m:t>
+                        </m:r>
+                      </m:sub>
+                    </m:sSub>
+                    <m:r>
+                      <a:rPr lang="fr-CA" sz="1600" b="0" i="1" smtClean="0">
+                        <a:latin typeface="Cambria Math" panose="02040503050406030204" pitchFamily="18" charset="0"/>
+                        <a:ea typeface="Cambria Math" panose="02040503050406030204" pitchFamily="18" charset="0"/>
+                      </a:rPr>
+                      <m:t>=</m:t>
+                    </m:r>
+                    <m:sSub>
+                      <m:sSubPr>
+                        <m:ctrlPr>
+                          <a:rPr lang="fr-CA" sz="1600" b="0" i="1" smtClean="0">
+                            <a:latin typeface="Cambria Math" panose="02040503050406030204" pitchFamily="18" charset="0"/>
+                            <a:ea typeface="Cambria Math" panose="02040503050406030204" pitchFamily="18" charset="0"/>
+                          </a:rPr>
+                        </m:ctrlPr>
+                      </m:sSubPr>
+                      <m:e>
+                        <m:r>
+                          <a:rPr lang="fr-CA" sz="1600" b="0" i="1" smtClean="0">
+                            <a:latin typeface="Cambria Math" panose="02040503050406030204" pitchFamily="18" charset="0"/>
+                            <a:ea typeface="Cambria Math" panose="02040503050406030204" pitchFamily="18" charset="0"/>
+                          </a:rPr>
+                          <m:t>h</m:t>
+                        </m:r>
+                      </m:e>
+                      <m:sub>
+                        <m:r>
+                          <a:rPr lang="fr-CA" sz="1600" b="0" i="1" smtClean="0">
+                            <a:latin typeface="Cambria Math" panose="02040503050406030204" pitchFamily="18" charset="0"/>
+                            <a:ea typeface="Cambria Math" panose="02040503050406030204" pitchFamily="18" charset="0"/>
+                          </a:rPr>
+                          <m:t>𝑐𝑠𝑡</m:t>
+                        </m:r>
+                      </m:sub>
+                    </m:sSub>
+                    <m:r>
+                      <a:rPr lang="fr-CA" sz="1600" b="0" i="1" smtClean="0">
+                        <a:latin typeface="Cambria Math" panose="02040503050406030204" pitchFamily="18" charset="0"/>
+                        <a:ea typeface="Cambria Math" panose="02040503050406030204" pitchFamily="18" charset="0"/>
+                      </a:rPr>
+                      <m:t>)</m:t>
+                    </m:r>
+                  </m:oMath>
+                </a14:m>
+                <a:r>
+                  <a:rPr lang="fr-FR" sz="1600" dirty="0"/>
+                  <a:t>.</a:t>
+                </a:r>
+              </a:p>
+              <a:p>
+                <a:pPr marL="800100" lvl="1" indent="-342900">
+                  <a:buFont typeface="+mj-lt"/>
+                  <a:buAutoNum type="arabicPeriod"/>
+                </a:pPr>
+                <a:r>
+                  <a:rPr lang="fr-FR" sz="1600" dirty="0"/>
+                  <a:t>Répéter les étapes 1 et 2 pour plusieurs </a:t>
+                </a:r>
+                <a:r>
+                  <a:rPr lang="fr-FR" sz="1600" i="1" dirty="0" err="1"/>
+                  <a:t>seeds</a:t>
+                </a:r>
+                <a:r>
+                  <a:rPr lang="fr-FR" sz="1600" i="1" dirty="0"/>
+                  <a:t> </a:t>
+                </a:r>
+                <a:r>
+                  <a:rPr lang="fr-FR" sz="1600" dirty="0"/>
+                  <a:t>différents (dans ce cas, 3)</a:t>
+                </a:r>
+              </a:p>
+              <a:p>
+                <a:pPr marL="800100" lvl="1" indent="-342900">
+                  <a:buFont typeface="+mj-lt"/>
+                  <a:buAutoNum type="arabicPeriod"/>
+                </a:pPr>
+                <a:r>
+                  <a:rPr lang="fr-FR" sz="1600" dirty="0"/>
+                  <a:t>Évaluer la convergence de l’erreur relative par rapport à la solution fine (</a:t>
+                </a:r>
+                <a14:m>
+                  <m:oMath xmlns:m="http://schemas.openxmlformats.org/officeDocument/2006/math">
+                    <m:r>
+                      <a:rPr lang="fr-CA" sz="1600" b="0" i="1" smtClean="0">
+                        <a:latin typeface="Cambria Math" panose="02040503050406030204" pitchFamily="18" charset="0"/>
+                      </a:rPr>
+                      <m:t>𝑁𝑥</m:t>
+                    </m:r>
+                    <m:r>
+                      <a:rPr lang="fr-CA" sz="1600" b="0" i="1" smtClean="0">
+                        <a:latin typeface="Cambria Math" panose="02040503050406030204" pitchFamily="18" charset="0"/>
+                      </a:rPr>
+                      <m:t>=400</m:t>
+                    </m:r>
+                  </m:oMath>
+                </a14:m>
+                <a:r>
+                  <a:rPr lang="fr-FR" sz="1600" dirty="0"/>
+                  <a:t>) de la </a:t>
+                </a:r>
+                <a:r>
+                  <a:rPr lang="fr-FR" sz="1600" b="1" dirty="0"/>
+                  <a:t>moyenne</a:t>
+                </a:r>
+                <a:r>
+                  <a:rPr lang="fr-FR" sz="1600" dirty="0"/>
+                  <a:t> des valeurs de k obtenues à chaque maillage.</a:t>
+                </a:r>
+              </a:p>
+              <a:p>
+                <a:r>
+                  <a:rPr lang="fr-FR" sz="2000" dirty="0"/>
+                  <a:t>Les différentes simulations proposées ci-dessus ont été générés à l’aide du script </a:t>
+                </a:r>
+                <a:r>
+                  <a:rPr lang="fr-FR" sz="2000" i="1" dirty="0"/>
+                  <a:t>convergence_ devoir_3.bs</a:t>
+                </a:r>
+                <a:r>
+                  <a:rPr lang="fr-FR" sz="2000" dirty="0"/>
+                  <a:t>, qui lance aussi le fichier </a:t>
+                </a:r>
+                <a:r>
+                  <a:rPr lang="fr-FR" sz="2000" i="1" dirty="0"/>
+                  <a:t>GCI.py</a:t>
+                </a:r>
+                <a:r>
+                  <a:rPr lang="fr-FR" sz="2000" dirty="0"/>
+                  <a:t> afin de traiter les données et de calculer l’incertitude </a:t>
+                </a:r>
+                <a14:m>
+                  <m:oMath xmlns:m="http://schemas.openxmlformats.org/officeDocument/2006/math">
+                    <m:sSub>
+                      <m:sSubPr>
+                        <m:ctrlPr>
+                          <a:rPr lang="fr-CA" sz="2000" b="0" i="1" smtClean="0">
+                            <a:latin typeface="Cambria Math" panose="02040503050406030204" pitchFamily="18" charset="0"/>
+                          </a:rPr>
+                        </m:ctrlPr>
+                      </m:sSubPr>
+                      <m:e>
+                        <m:r>
+                          <a:rPr lang="fr-CA" sz="2000" b="0" i="1" smtClean="0">
+                            <a:latin typeface="Cambria Math" panose="02040503050406030204" pitchFamily="18" charset="0"/>
+                          </a:rPr>
+                          <m:t>𝑢</m:t>
+                        </m:r>
+                      </m:e>
+                      <m:sub>
+                        <m:r>
+                          <a:rPr lang="fr-CA" sz="2000" b="0" i="1" smtClean="0">
+                            <a:latin typeface="Cambria Math" panose="02040503050406030204" pitchFamily="18" charset="0"/>
+                          </a:rPr>
+                          <m:t>𝑛𝑢𝑚</m:t>
+                        </m:r>
+                      </m:sub>
+                    </m:sSub>
+                  </m:oMath>
+                </a14:m>
+                <a:r>
+                  <a:rPr lang="fr-FR" sz="2000" i="1" dirty="0"/>
+                  <a:t>.</a:t>
+                </a:r>
+              </a:p>
+            </p:txBody>
+          </p:sp>
+        </mc:Choice>
+        <mc:Fallback>
+          <p:sp>
+            <p:nvSpPr>
+              <p:cNvPr id="3" name="Espace réservé du contenu 2">
+                <a:extLst>
+                  <a:ext uri="{FF2B5EF4-FFF2-40B4-BE49-F238E27FC236}">
+                    <a16:creationId xmlns:a16="http://schemas.microsoft.com/office/drawing/2014/main" id="{22E80974-09C0-B5E5-C74A-D5162AC8CD95}"/>
+                  </a:ext>
+                </a:extLst>
+              </p:cNvPr>
+              <p:cNvSpPr>
+                <a:spLocks noGrp="1" noRot="1" noChangeAspect="1" noMove="1" noResize="1" noEditPoints="1" noAdjustHandles="1" noChangeArrowheads="1" noChangeShapeType="1" noTextEdit="1"/>
+              </p:cNvSpPr>
+              <p:nvPr>
+                <p:ph idx="1"/>
+              </p:nvPr>
+            </p:nvSpPr>
+            <p:spPr>
+              <a:xfrm>
+                <a:off x="838200" y="1013988"/>
+                <a:ext cx="10515600" cy="5939074"/>
+              </a:xfrm>
+              <a:blipFill>
+                <a:blip r:embed="rId3"/>
+                <a:stretch>
+                  <a:fillRect l="-522" t="-923"/>
+                </a:stretch>
+              </a:blipFill>
+            </p:spPr>
+            <p:txBody>
+              <a:bodyPr/>
+              <a:lstStyle/>
+              <a:p>
+                <a:r>
+                  <a:rPr lang="fr-CA">
+                    <a:noFill/>
+                  </a:rPr>
+                  <a:t> </a:t>
+                </a:r>
+              </a:p>
+            </p:txBody>
+          </p:sp>
+        </mc:Fallback>
+      </mc:AlternateContent>
+      <p:grpSp>
+        <p:nvGrpSpPr>
+          <p:cNvPr id="10" name="Groupe 9">
+            <a:extLst>
+              <a:ext uri="{FF2B5EF4-FFF2-40B4-BE49-F238E27FC236}">
+                <a16:creationId xmlns:a16="http://schemas.microsoft.com/office/drawing/2014/main" id="{C818C4AC-8626-2E5D-6FED-B13F5EE24EE3}"/>
+              </a:ext>
+            </a:extLst>
+          </p:cNvPr>
+          <p:cNvGrpSpPr/>
+          <p:nvPr/>
+        </p:nvGrpSpPr>
+        <p:grpSpPr>
+          <a:xfrm>
+            <a:off x="7756401" y="2230909"/>
+            <a:ext cx="2467451" cy="2159060"/>
+            <a:chOff x="7756401" y="2339551"/>
+            <a:chExt cx="2467451" cy="2159060"/>
+          </a:xfrm>
+        </p:grpSpPr>
+        <p:grpSp>
+          <p:nvGrpSpPr>
+            <p:cNvPr id="8" name="Groupe 7">
+              <a:extLst>
+                <a:ext uri="{FF2B5EF4-FFF2-40B4-BE49-F238E27FC236}">
+                  <a16:creationId xmlns:a16="http://schemas.microsoft.com/office/drawing/2014/main" id="{EE74B48D-2513-0199-37D8-0FC3A518E2C0}"/>
+                </a:ext>
+              </a:extLst>
+            </p:cNvPr>
+            <p:cNvGrpSpPr/>
+            <p:nvPr/>
+          </p:nvGrpSpPr>
+          <p:grpSpPr>
+            <a:xfrm>
+              <a:off x="7756401" y="2339551"/>
+              <a:ext cx="2467451" cy="1631805"/>
+              <a:chOff x="5541169" y="2940195"/>
+              <a:chExt cx="3005875" cy="2225722"/>
+            </a:xfrm>
+          </p:grpSpPr>
+          <p:pic>
+            <p:nvPicPr>
+              <p:cNvPr id="5" name="Image 4">
+                <a:extLst>
+                  <a:ext uri="{FF2B5EF4-FFF2-40B4-BE49-F238E27FC236}">
+                    <a16:creationId xmlns:a16="http://schemas.microsoft.com/office/drawing/2014/main" id="{2331C906-EF82-6CDB-6CA7-2BC81AC0AF48}"/>
+                  </a:ext>
+                </a:extLst>
+              </p:cNvPr>
+              <p:cNvPicPr>
+                <a:picLocks noChangeAspect="1"/>
+              </p:cNvPicPr>
+              <p:nvPr/>
+            </p:nvPicPr>
+            <p:blipFill>
+              <a:blip r:embed="rId4"/>
+              <a:srcRect l="910"/>
+              <a:stretch>
+                <a:fillRect/>
+              </a:stretch>
+            </p:blipFill>
+            <p:spPr>
+              <a:xfrm>
+                <a:off x="5541169" y="2940195"/>
+                <a:ext cx="3005875" cy="552179"/>
+              </a:xfrm>
+              <a:prstGeom prst="rect">
+                <a:avLst/>
+              </a:prstGeom>
+            </p:spPr>
+          </p:pic>
+          <p:pic>
+            <p:nvPicPr>
+              <p:cNvPr id="7" name="Image 6">
+                <a:extLst>
+                  <a:ext uri="{FF2B5EF4-FFF2-40B4-BE49-F238E27FC236}">
+                    <a16:creationId xmlns:a16="http://schemas.microsoft.com/office/drawing/2014/main" id="{90B22E26-E316-4E03-D3FF-4DA9AE7C745C}"/>
+                  </a:ext>
+                </a:extLst>
+              </p:cNvPr>
+              <p:cNvPicPr>
+                <a:picLocks noChangeAspect="1"/>
+              </p:cNvPicPr>
+              <p:nvPr/>
+            </p:nvPicPr>
+            <p:blipFill>
+              <a:blip r:embed="rId5"/>
+              <a:stretch>
+                <a:fillRect/>
+              </a:stretch>
+            </p:blipFill>
+            <p:spPr>
+              <a:xfrm>
+                <a:off x="5541169" y="3492375"/>
+                <a:ext cx="3005875" cy="1673542"/>
+              </a:xfrm>
+              <a:prstGeom prst="rect">
+                <a:avLst/>
+              </a:prstGeom>
+            </p:spPr>
+          </p:pic>
+        </p:grpSp>
+        <p:sp>
+          <p:nvSpPr>
+            <p:cNvPr id="9" name="ZoneTexte 8">
+              <a:extLst>
+                <a:ext uri="{FF2B5EF4-FFF2-40B4-BE49-F238E27FC236}">
+                  <a16:creationId xmlns:a16="http://schemas.microsoft.com/office/drawing/2014/main" id="{F622CA0B-9153-A67C-34BC-994D0DC1A366}"/>
+                </a:ext>
+              </a:extLst>
+            </p:cNvPr>
+            <p:cNvSpPr txBox="1"/>
+            <p:nvPr/>
+          </p:nvSpPr>
+          <p:spPr>
+            <a:xfrm>
+              <a:off x="7756401" y="4083113"/>
+              <a:ext cx="2467451" cy="415498"/>
+            </a:xfrm>
+            <a:prstGeom prst="rect">
+              <a:avLst/>
+            </a:prstGeom>
+            <a:noFill/>
+          </p:spPr>
+          <p:txBody>
+            <a:bodyPr wrap="square" rtlCol="0">
+              <a:spAutoFit/>
+            </a:bodyPr>
+            <a:lstStyle/>
+            <a:p>
+              <a:pPr algn="ctr"/>
+              <a:r>
+                <a:rPr lang="fr-CA" sz="1050" i="1" dirty="0"/>
+                <a:t>Figure 1: Méthodologie de calcul du GCI.</a:t>
+              </a:r>
+            </a:p>
+          </p:txBody>
+        </p:sp>
+      </p:grpSp>
     </p:spTree>
     <p:extLst>
       <p:ext uri="{BB962C8B-B14F-4D97-AF65-F5344CB8AC3E}">
@@ -3672,6 +4373,766 @@
   <p:cSld>
     <p:spTree>
       <p:nvGrpSpPr>
+        <p:cNvPr id="1" name="">
+          <a:extLst>
+            <a:ext uri="{FF2B5EF4-FFF2-40B4-BE49-F238E27FC236}">
+              <a16:creationId xmlns:a16="http://schemas.microsoft.com/office/drawing/2014/main" id="{42540B2C-51A7-2196-FA74-78EBBE4CA85C}"/>
+            </a:ext>
+          </a:extLst>
+        </p:cNvPr>
+        <p:cNvGrpSpPr/>
+        <p:nvPr/>
+      </p:nvGrpSpPr>
+      <p:grpSpPr>
+        <a:xfrm>
+          <a:off x="0" y="0"/>
+          <a:ext cx="0" cy="0"/>
+          <a:chOff x="0" y="0"/>
+          <a:chExt cx="0" cy="0"/>
+        </a:xfrm>
+      </p:grpSpPr>
+      <mc:AlternateContent xmlns:mc="http://schemas.openxmlformats.org/markup-compatibility/2006" xmlns:a14="http://schemas.microsoft.com/office/drawing/2010/main">
+        <mc:Choice Requires="a14">
+          <p:sp>
+            <p:nvSpPr>
+              <p:cNvPr id="2" name="Titre 1">
+                <a:extLst>
+                  <a:ext uri="{FF2B5EF4-FFF2-40B4-BE49-F238E27FC236}">
+                    <a16:creationId xmlns:a16="http://schemas.microsoft.com/office/drawing/2014/main" id="{ACD25E7A-0970-4CEE-B873-7AE5FFC4807E}"/>
+                  </a:ext>
+                </a:extLst>
+              </p:cNvPr>
+              <p:cNvSpPr>
+                <a:spLocks noGrp="1"/>
+              </p:cNvSpPr>
+              <p:nvPr>
+                <p:ph type="title"/>
+              </p:nvPr>
+            </p:nvSpPr>
+            <p:spPr>
+              <a:xfrm>
+                <a:off x="838200" y="255321"/>
+                <a:ext cx="10515600" cy="1325563"/>
+              </a:xfrm>
+            </p:spPr>
+            <p:txBody>
+              <a:bodyPr>
+                <a:normAutofit/>
+              </a:bodyPr>
+              <a:lstStyle/>
+              <a:p>
+                <a:r>
+                  <a:rPr lang="fr-FR" dirty="0"/>
+                  <a:t>A) Incertitude numérique </a:t>
+                </a:r>
+                <a14:m>
+                  <m:oMath xmlns:m="http://schemas.openxmlformats.org/officeDocument/2006/math">
+                    <m:sSub>
+                      <m:sSubPr>
+                        <m:ctrlPr>
+                          <a:rPr lang="fr-FR" b="0" i="1" smtClean="0">
+                            <a:latin typeface="Cambria Math" panose="02040503050406030204" pitchFamily="18" charset="0"/>
+                          </a:rPr>
+                        </m:ctrlPr>
+                      </m:sSubPr>
+                      <m:e>
+                        <m:r>
+                          <a:rPr lang="fr-FR" b="0" i="1" smtClean="0">
+                            <a:latin typeface="Cambria Math" panose="02040503050406030204" pitchFamily="18" charset="0"/>
+                          </a:rPr>
+                          <m:t>𝑢</m:t>
+                        </m:r>
+                      </m:e>
+                      <m:sub>
+                        <m:r>
+                          <a:rPr lang="fr-FR" b="0" i="1" smtClean="0">
+                            <a:latin typeface="Cambria Math" panose="02040503050406030204" pitchFamily="18" charset="0"/>
+                          </a:rPr>
+                          <m:t>𝑛𝑢𝑚</m:t>
+                        </m:r>
+                      </m:sub>
+                    </m:sSub>
+                  </m:oMath>
+                </a14:m>
+                <a:br>
+                  <a:rPr lang="fr-FR" b="0" dirty="0"/>
+                </a:br>
+                <a:endParaRPr lang="fr-FR" dirty="0"/>
+              </a:p>
+            </p:txBody>
+          </p:sp>
+        </mc:Choice>
+        <mc:Fallback xmlns="">
+          <p:sp>
+            <p:nvSpPr>
+              <p:cNvPr id="2" name="Titre 1">
+                <a:extLst>
+                  <a:ext uri="{FF2B5EF4-FFF2-40B4-BE49-F238E27FC236}">
+                    <a16:creationId xmlns:a16="http://schemas.microsoft.com/office/drawing/2014/main" id="{E7D87B06-2293-46A9-1B49-5FA555DC4644}"/>
+                  </a:ext>
+                </a:extLst>
+              </p:cNvPr>
+              <p:cNvSpPr>
+                <a:spLocks noGrp="1" noRot="1" noChangeAspect="1" noMove="1" noResize="1" noEditPoints="1" noAdjustHandles="1" noChangeArrowheads="1" noChangeShapeType="1" noTextEdit="1"/>
+              </p:cNvSpPr>
+              <p:nvPr>
+                <p:ph type="title"/>
+              </p:nvPr>
+            </p:nvSpPr>
+            <p:spPr>
+              <a:xfrm>
+                <a:off x="838200" y="255321"/>
+                <a:ext cx="10515600" cy="1325563"/>
+              </a:xfrm>
+              <a:blipFill>
+                <a:blip r:embed="rId2"/>
+                <a:stretch>
+                  <a:fillRect l="-2377" t="-13364"/>
+                </a:stretch>
+              </a:blipFill>
+            </p:spPr>
+            <p:txBody>
+              <a:bodyPr/>
+              <a:lstStyle/>
+              <a:p>
+                <a:r>
+                  <a:rPr lang="fr-FR">
+                    <a:noFill/>
+                  </a:rPr>
+                  <a:t> </a:t>
+                </a:r>
+              </a:p>
+            </p:txBody>
+          </p:sp>
+        </mc:Fallback>
+      </mc:AlternateContent>
+      <p:pic>
+        <p:nvPicPr>
+          <p:cNvPr id="6" name="Espace réservé du contenu 5">
+            <a:extLst>
+              <a:ext uri="{FF2B5EF4-FFF2-40B4-BE49-F238E27FC236}">
+                <a16:creationId xmlns:a16="http://schemas.microsoft.com/office/drawing/2014/main" id="{C483BD03-40A8-C47C-6338-F4F32665B22D}"/>
+              </a:ext>
+            </a:extLst>
+          </p:cNvPr>
+          <p:cNvPicPr>
+            <a:picLocks noGrp="1" noChangeAspect="1"/>
+          </p:cNvPicPr>
+          <p:nvPr>
+            <p:ph idx="1"/>
+          </p:nvPr>
+        </p:nvPicPr>
+        <p:blipFill>
+          <a:blip r:embed="rId3">
+            <a:extLst>
+              <a:ext uri="{28A0092B-C50C-407E-A947-70E740481C1C}">
+                <a14:useLocalDpi xmlns:a14="http://schemas.microsoft.com/office/drawing/2010/main" val="0"/>
+              </a:ext>
+            </a:extLst>
+          </a:blip>
+          <a:stretch>
+            <a:fillRect/>
+          </a:stretch>
+        </p:blipFill>
+        <p:spPr>
+          <a:xfrm>
+            <a:off x="5576663" y="1180652"/>
+            <a:ext cx="5777137" cy="4070810"/>
+          </a:xfrm>
+          <a:prstGeom prst="rect">
+            <a:avLst/>
+          </a:prstGeom>
+        </p:spPr>
+      </p:pic>
+      <p:sp>
+        <p:nvSpPr>
+          <p:cNvPr id="11" name="ZoneTexte 10">
+            <a:extLst>
+              <a:ext uri="{FF2B5EF4-FFF2-40B4-BE49-F238E27FC236}">
+                <a16:creationId xmlns:a16="http://schemas.microsoft.com/office/drawing/2014/main" id="{47B6169A-A823-A626-B784-DFB66C1E8F5A}"/>
+              </a:ext>
+            </a:extLst>
+          </p:cNvPr>
+          <p:cNvSpPr txBox="1"/>
+          <p:nvPr/>
+        </p:nvSpPr>
+        <p:spPr>
+          <a:xfrm>
+            <a:off x="5576663" y="5251462"/>
+            <a:ext cx="5763849" cy="461665"/>
+          </a:xfrm>
+          <a:prstGeom prst="rect">
+            <a:avLst/>
+          </a:prstGeom>
+          <a:noFill/>
+        </p:spPr>
+        <p:txBody>
+          <a:bodyPr wrap="square" rtlCol="0">
+            <a:spAutoFit/>
+          </a:bodyPr>
+          <a:lstStyle/>
+          <a:p>
+            <a:pPr algn="ctr"/>
+            <a:r>
+              <a:rPr lang="fr-CA" sz="1200" i="1" dirty="0"/>
+              <a:t>Figure 2: Graphique de l’erreur relative de la perméabilité en fonction de la taille des cellules.</a:t>
+            </a:r>
+          </a:p>
+        </p:txBody>
+      </p:sp>
+      <mc:AlternateContent xmlns:mc="http://schemas.openxmlformats.org/markup-compatibility/2006">
+        <mc:Choice xmlns:a14="http://schemas.microsoft.com/office/drawing/2010/main" Requires="a14">
+          <p:sp>
+            <p:nvSpPr>
+              <p:cNvPr id="12" name="ZoneTexte 11">
+                <a:extLst>
+                  <a:ext uri="{FF2B5EF4-FFF2-40B4-BE49-F238E27FC236}">
+                    <a16:creationId xmlns:a16="http://schemas.microsoft.com/office/drawing/2014/main" id="{8AC6D6EA-7E9F-E1BB-3FC8-5AC2858539BB}"/>
+                  </a:ext>
+                </a:extLst>
+              </p:cNvPr>
+              <p:cNvSpPr txBox="1"/>
+              <p:nvPr/>
+            </p:nvSpPr>
+            <p:spPr>
+              <a:xfrm>
+                <a:off x="742384" y="1580884"/>
+                <a:ext cx="4001632" cy="4278094"/>
+              </a:xfrm>
+              <a:prstGeom prst="rect">
+                <a:avLst/>
+              </a:prstGeom>
+              <a:noFill/>
+            </p:spPr>
+            <p:txBody>
+              <a:bodyPr wrap="square" rtlCol="0">
+                <a:spAutoFit/>
+              </a:bodyPr>
+              <a:lstStyle/>
+              <a:p>
+                <a:pPr marL="285750" indent="-285750">
+                  <a:buFont typeface="Arial" panose="020B0604020202020204" pitchFamily="34" charset="0"/>
+                  <a:buChar char="•"/>
+                </a:pPr>
+                <a:r>
+                  <a:rPr lang="fr-CA" sz="1600" dirty="0"/>
+                  <a:t>Ce graphique est le résultat de l’analyse de convergence pour 3 </a:t>
+                </a:r>
+                <a:r>
+                  <a:rPr lang="fr-CA" sz="1600" i="1" dirty="0" err="1"/>
+                  <a:t>seeds</a:t>
+                </a:r>
+                <a:r>
+                  <a:rPr lang="fr-CA" sz="1600" i="1" dirty="0"/>
+                  <a:t> </a:t>
+                </a:r>
+                <a:r>
+                  <a:rPr lang="fr-CA" sz="1600" dirty="0"/>
+                  <a:t>(101, 202, 303).</a:t>
+                </a:r>
+              </a:p>
+              <a:p>
+                <a:pPr marL="285750" indent="-285750">
+                  <a:buFont typeface="Arial" panose="020B0604020202020204" pitchFamily="34" charset="0"/>
+                  <a:buChar char="•"/>
+                </a:pPr>
+                <a:r>
+                  <a:rPr lang="fr-CA" sz="1600" dirty="0"/>
+                  <a:t>La valeur la plus fine n’est pas dans la région asymptotique et donc n’est pas considérée dans le calcul de l’ordre observé.</a:t>
+                </a:r>
+              </a:p>
+              <a:p>
+                <a:pPr marL="285750" indent="-285750">
+                  <a:buFont typeface="Arial" panose="020B0604020202020204" pitchFamily="34" charset="0"/>
+                  <a:buChar char="•"/>
+                </a:pPr>
+                <a:r>
+                  <a:rPr lang="fr-CA" sz="1600" dirty="0"/>
+                  <a:t>L’ordre observé est de </a:t>
+                </a:r>
+                <a14:m>
+                  <m:oMath xmlns:m="http://schemas.openxmlformats.org/officeDocument/2006/math">
+                    <m:acc>
+                      <m:accPr>
+                        <m:chr m:val="̂"/>
+                        <m:ctrlPr>
+                          <a:rPr lang="fr-CA" sz="1600" i="1" smtClean="0">
+                            <a:latin typeface="Cambria Math" panose="02040503050406030204" pitchFamily="18" charset="0"/>
+                          </a:rPr>
+                        </m:ctrlPr>
+                      </m:accPr>
+                      <m:e>
+                        <m:r>
+                          <a:rPr lang="fr-CA" sz="1600" b="0" i="1" smtClean="0">
+                            <a:latin typeface="Cambria Math" panose="02040503050406030204" pitchFamily="18" charset="0"/>
+                          </a:rPr>
+                          <m:t>𝑝</m:t>
+                        </m:r>
+                      </m:e>
+                    </m:acc>
+                    <m:r>
+                      <a:rPr lang="fr-CA" sz="1600" b="0" i="1" smtClean="0">
+                        <a:latin typeface="Cambria Math" panose="02040503050406030204" pitchFamily="18" charset="0"/>
+                      </a:rPr>
+                      <m:t>=2.34</m:t>
+                    </m:r>
+                  </m:oMath>
+                </a14:m>
+                <a:endParaRPr lang="fr-CA" sz="1600" dirty="0"/>
+              </a:p>
+              <a:p>
+                <a:pPr marL="285750" indent="-285750">
+                  <a:buFont typeface="Arial" panose="020B0604020202020204" pitchFamily="34" charset="0"/>
+                  <a:buChar char="•"/>
+                </a:pPr>
+                <a:r>
+                  <a:rPr lang="fr-CA" sz="1600" dirty="0"/>
+                  <a:t>On peut ainsi calculer le GCI :</a:t>
+                </a:r>
+                <a:br>
+                  <a:rPr lang="fr-CA" sz="1600" dirty="0"/>
+                </a:br>
+                <a14:m>
+                  <m:oMath xmlns:m="http://schemas.openxmlformats.org/officeDocument/2006/math">
+                    <m:r>
+                      <a:rPr lang="fr-CA" sz="1600" i="1">
+                        <a:latin typeface="Cambria Math" panose="02040503050406030204" pitchFamily="18" charset="0"/>
+                      </a:rPr>
+                      <m:t>𝐺𝐶𝐼</m:t>
+                    </m:r>
+                    <m:r>
+                      <a:rPr lang="fr-CA" sz="1600" i="1">
+                        <a:latin typeface="Cambria Math" panose="02040503050406030204" pitchFamily="18" charset="0"/>
+                      </a:rPr>
+                      <m:t>=1.086767</m:t>
+                    </m:r>
+                    <m:r>
+                      <a:rPr lang="fr-CA" sz="1600" i="1">
+                        <a:latin typeface="Cambria Math" panose="02040503050406030204" pitchFamily="18" charset="0"/>
+                      </a:rPr>
+                      <m:t>𝑒</m:t>
+                    </m:r>
+                    <m:r>
+                      <a:rPr lang="fr-CA" sz="1600" i="1">
+                        <a:latin typeface="Cambria Math" panose="02040503050406030204" pitchFamily="18" charset="0"/>
+                      </a:rPr>
+                      <m:t>-02 µ</m:t>
+                    </m:r>
+                    <m:r>
+                      <a:rPr lang="fr-CA" sz="1600" i="1">
+                        <a:latin typeface="Cambria Math" panose="02040503050406030204" pitchFamily="18" charset="0"/>
+                      </a:rPr>
+                      <m:t>𝑚</m:t>
+                    </m:r>
+                    <m:r>
+                      <a:rPr lang="fr-CA" sz="1600" i="1">
+                        <a:latin typeface="Cambria Math" panose="02040503050406030204" pitchFamily="18" charset="0"/>
+                      </a:rPr>
+                      <m:t>²</m:t>
+                    </m:r>
+                  </m:oMath>
+                </a14:m>
+                <a:endParaRPr lang="fr-CA" sz="1600" dirty="0"/>
+              </a:p>
+              <a:p>
+                <a:pPr marL="285750" indent="-285750">
+                  <a:buFont typeface="Arial" panose="020B0604020202020204" pitchFamily="34" charset="0"/>
+                  <a:buChar char="•"/>
+                </a:pPr>
+                <a:r>
+                  <a:rPr lang="fr-CA" sz="1600" dirty="0"/>
+                  <a:t>Et donc l’incertitude numérique¹ :</a:t>
+                </a:r>
+                <a:br>
+                  <a:rPr lang="fr-CA" sz="1600" dirty="0"/>
+                </a:br>
+                <a14:m>
+                  <m:oMath xmlns:m="http://schemas.openxmlformats.org/officeDocument/2006/math">
+                    <m:sSub>
+                      <m:sSubPr>
+                        <m:ctrlPr>
+                          <a:rPr lang="fr-CA" sz="1600" b="1" i="1" smtClean="0">
+                            <a:latin typeface="Cambria Math" panose="02040503050406030204" pitchFamily="18" charset="0"/>
+                          </a:rPr>
+                        </m:ctrlPr>
+                      </m:sSubPr>
+                      <m:e>
+                        <m:r>
+                          <a:rPr lang="fr-CA" sz="1600" b="1" i="1" smtClean="0">
+                            <a:latin typeface="Cambria Math" panose="02040503050406030204" pitchFamily="18" charset="0"/>
+                          </a:rPr>
+                          <m:t>𝒖</m:t>
+                        </m:r>
+                      </m:e>
+                      <m:sub>
+                        <m:r>
+                          <a:rPr lang="fr-CA" sz="1600" b="1" i="1" smtClean="0">
+                            <a:latin typeface="Cambria Math" panose="02040503050406030204" pitchFamily="18" charset="0"/>
+                          </a:rPr>
+                          <m:t>𝒏𝒖𝒎</m:t>
+                        </m:r>
+                      </m:sub>
+                    </m:sSub>
+                    <m:r>
+                      <a:rPr lang="fr-CA" sz="1600" b="1" i="1">
+                        <a:latin typeface="Cambria Math" panose="02040503050406030204" pitchFamily="18" charset="0"/>
+                      </a:rPr>
+                      <m:t>=</m:t>
+                    </m:r>
+                    <m:r>
+                      <a:rPr lang="fr-CA" sz="1600" b="1" i="1">
+                        <a:latin typeface="Cambria Math" panose="02040503050406030204" pitchFamily="18" charset="0"/>
+                      </a:rPr>
+                      <m:t>𝟓</m:t>
+                    </m:r>
+                    <m:r>
+                      <a:rPr lang="fr-CA" sz="1600" b="1" i="1">
+                        <a:latin typeface="Cambria Math" panose="02040503050406030204" pitchFamily="18" charset="0"/>
+                      </a:rPr>
+                      <m:t>.</m:t>
+                    </m:r>
+                    <m:r>
+                      <a:rPr lang="fr-CA" sz="1600" b="1" i="1">
+                        <a:latin typeface="Cambria Math" panose="02040503050406030204" pitchFamily="18" charset="0"/>
+                      </a:rPr>
+                      <m:t>𝟒𝟑𝟑𝟖𝟑𝟑</m:t>
+                    </m:r>
+                    <m:r>
+                      <a:rPr lang="fr-CA" sz="1600" b="1" i="1">
+                        <a:latin typeface="Cambria Math" panose="02040503050406030204" pitchFamily="18" charset="0"/>
+                      </a:rPr>
+                      <m:t>𝒆</m:t>
+                    </m:r>
+                    <m:r>
+                      <a:rPr lang="fr-CA" sz="1600" b="1" i="1">
+                        <a:latin typeface="Cambria Math" panose="02040503050406030204" pitchFamily="18" charset="0"/>
+                      </a:rPr>
+                      <m:t>-</m:t>
+                    </m:r>
+                    <m:r>
+                      <a:rPr lang="fr-CA" sz="1600" b="1" i="1">
+                        <a:latin typeface="Cambria Math" panose="02040503050406030204" pitchFamily="18" charset="0"/>
+                      </a:rPr>
+                      <m:t>𝟎𝟑</m:t>
+                    </m:r>
+                    <m:r>
+                      <a:rPr lang="fr-CA" sz="1600" b="1" i="1">
+                        <a:latin typeface="Cambria Math" panose="02040503050406030204" pitchFamily="18" charset="0"/>
+                      </a:rPr>
+                      <m:t> µ</m:t>
+                    </m:r>
+                    <m:r>
+                      <a:rPr lang="fr-CA" sz="1600" b="1" i="1">
+                        <a:latin typeface="Cambria Math" panose="02040503050406030204" pitchFamily="18" charset="0"/>
+                      </a:rPr>
+                      <m:t>𝒎</m:t>
+                    </m:r>
+                    <m:r>
+                      <a:rPr lang="fr-CA" sz="1600" b="1" i="1">
+                        <a:latin typeface="Cambria Math" panose="02040503050406030204" pitchFamily="18" charset="0"/>
+                      </a:rPr>
+                      <m:t>²</m:t>
+                    </m:r>
+                  </m:oMath>
+                </a14:m>
+                <a:endParaRPr lang="fr-CA" sz="1600" b="1" dirty="0"/>
+              </a:p>
+              <a:p>
+                <a:pPr marL="285750" indent="-285750">
+                  <a:buFont typeface="Arial" panose="020B0604020202020204" pitchFamily="34" charset="0"/>
+                  <a:buChar char="•"/>
+                </a:pPr>
+                <a:r>
+                  <a:rPr lang="fr-CA" sz="1600" dirty="0"/>
+                  <a:t>Les barres d’erreur présentés dans ce graphique peuvent être interprétées comme étant les incertitudes des données d’entrée, qui seront calculées prochainement.</a:t>
+                </a:r>
+              </a:p>
+            </p:txBody>
+          </p:sp>
+        </mc:Choice>
+        <mc:Fallback>
+          <p:sp>
+            <p:nvSpPr>
+              <p:cNvPr id="12" name="ZoneTexte 11">
+                <a:extLst>
+                  <a:ext uri="{FF2B5EF4-FFF2-40B4-BE49-F238E27FC236}">
+                    <a16:creationId xmlns:a16="http://schemas.microsoft.com/office/drawing/2014/main" id="{8AC6D6EA-7E9F-E1BB-3FC8-5AC2858539BB}"/>
+                  </a:ext>
+                </a:extLst>
+              </p:cNvPr>
+              <p:cNvSpPr txBox="1">
+                <a:spLocks noRot="1" noChangeAspect="1" noMove="1" noResize="1" noEditPoints="1" noAdjustHandles="1" noChangeArrowheads="1" noChangeShapeType="1" noTextEdit="1"/>
+              </p:cNvSpPr>
+              <p:nvPr/>
+            </p:nvSpPr>
+            <p:spPr>
+              <a:xfrm>
+                <a:off x="742384" y="1580884"/>
+                <a:ext cx="4001632" cy="4278094"/>
+              </a:xfrm>
+              <a:prstGeom prst="rect">
+                <a:avLst/>
+              </a:prstGeom>
+              <a:blipFill>
+                <a:blip r:embed="rId4"/>
+                <a:stretch>
+                  <a:fillRect l="-610" t="-427" r="-305" b="-855"/>
+                </a:stretch>
+              </a:blipFill>
+            </p:spPr>
+            <p:txBody>
+              <a:bodyPr/>
+              <a:lstStyle/>
+              <a:p>
+                <a:r>
+                  <a:rPr lang="fr-CA">
+                    <a:noFill/>
+                  </a:rPr>
+                  <a:t> </a:t>
+                </a:r>
+              </a:p>
+            </p:txBody>
+          </p:sp>
+        </mc:Fallback>
+      </mc:AlternateContent>
+      <mc:AlternateContent xmlns:mc="http://schemas.openxmlformats.org/markup-compatibility/2006">
+        <mc:Choice xmlns:a14="http://schemas.microsoft.com/office/drawing/2010/main" Requires="a14">
+          <p:sp>
+            <p:nvSpPr>
+              <p:cNvPr id="13" name="ZoneTexte 12">
+                <a:extLst>
+                  <a:ext uri="{FF2B5EF4-FFF2-40B4-BE49-F238E27FC236}">
+                    <a16:creationId xmlns:a16="http://schemas.microsoft.com/office/drawing/2014/main" id="{E731592B-FFEE-2191-A4DF-923F1D405983}"/>
+                  </a:ext>
+                </a:extLst>
+              </p:cNvPr>
+              <p:cNvSpPr txBox="1"/>
+              <p:nvPr/>
+            </p:nvSpPr>
+            <p:spPr>
+              <a:xfrm>
+                <a:off x="4176879" y="6356457"/>
+                <a:ext cx="8015121" cy="476477"/>
+              </a:xfrm>
+              <a:prstGeom prst="rect">
+                <a:avLst/>
+              </a:prstGeom>
+              <a:noFill/>
+            </p:spPr>
+            <p:txBody>
+              <a:bodyPr wrap="square" rtlCol="0">
+                <a:spAutoFit/>
+              </a:bodyPr>
+              <a:lstStyle/>
+              <a:p>
+                <a:r>
+                  <a:rPr lang="fr-CA" sz="1200" dirty="0"/>
+                  <a:t>¹À noter que les autres incertitudes numériques sont mises à l’écart puisque soit négligeable par rapport à l’ordre de </a:t>
+                </a:r>
+                <a14:m>
+                  <m:oMath xmlns:m="http://schemas.openxmlformats.org/officeDocument/2006/math">
+                    <m:sSub>
+                      <m:sSubPr>
+                        <m:ctrlPr>
+                          <a:rPr lang="fr-CA" sz="1200" b="0" i="1" smtClean="0">
+                            <a:latin typeface="Cambria Math" panose="02040503050406030204" pitchFamily="18" charset="0"/>
+                          </a:rPr>
+                        </m:ctrlPr>
+                      </m:sSubPr>
+                      <m:e>
+                        <m:r>
+                          <a:rPr lang="fr-CA" sz="1200" b="0" i="1" smtClean="0">
+                            <a:latin typeface="Cambria Math" panose="02040503050406030204" pitchFamily="18" charset="0"/>
+                          </a:rPr>
+                          <m:t>𝑢</m:t>
+                        </m:r>
+                      </m:e>
+                      <m:sub>
+                        <m:r>
+                          <a:rPr lang="fr-CA" sz="1200" b="0" i="1" smtClean="0">
+                            <a:latin typeface="Cambria Math" panose="02040503050406030204" pitchFamily="18" charset="0"/>
+                          </a:rPr>
+                          <m:t>𝑑𝑖𝑠𝑐𝑟𝑒𝑡𝑖𝑧𝑎𝑡𝑖𝑜𝑛</m:t>
+                        </m:r>
+                      </m:sub>
+                    </m:sSub>
+                  </m:oMath>
+                </a14:m>
+                <a:r>
+                  <a:rPr lang="fr-CA" sz="1200" dirty="0"/>
+                  <a:t> (</a:t>
+                </a:r>
+                <a14:m>
+                  <m:oMath xmlns:m="http://schemas.openxmlformats.org/officeDocument/2006/math">
+                    <m:sSub>
+                      <m:sSubPr>
+                        <m:ctrlPr>
+                          <a:rPr lang="fr-CA" sz="1200" b="0" i="1" dirty="0" smtClean="0">
+                            <a:latin typeface="Cambria Math" panose="02040503050406030204" pitchFamily="18" charset="0"/>
+                          </a:rPr>
+                        </m:ctrlPr>
+                      </m:sSubPr>
+                      <m:e>
+                        <m:r>
+                          <a:rPr lang="fr-CA" sz="1200" b="0" i="1" dirty="0" smtClean="0">
+                            <a:latin typeface="Cambria Math" panose="02040503050406030204" pitchFamily="18" charset="0"/>
+                          </a:rPr>
+                          <m:t>𝑢</m:t>
+                        </m:r>
+                      </m:e>
+                      <m:sub>
+                        <m:r>
+                          <a:rPr lang="fr-CA" sz="1200" b="0" i="1" dirty="0" smtClean="0">
+                            <a:latin typeface="Cambria Math" panose="02040503050406030204" pitchFamily="18" charset="0"/>
+                          </a:rPr>
+                          <m:t>𝑟𝑜𝑢𝑛𝑑𝑜𝑓𝑓</m:t>
+                        </m:r>
+                      </m:sub>
+                    </m:sSub>
+                    <m:r>
+                      <a:rPr lang="fr-CA" sz="1200" b="0" i="1" dirty="0" smtClean="0">
+                        <a:latin typeface="Cambria Math" panose="02040503050406030204" pitchFamily="18" charset="0"/>
+                      </a:rPr>
+                      <m:t>, </m:t>
+                    </m:r>
+                    <m:sSub>
+                      <m:sSubPr>
+                        <m:ctrlPr>
+                          <a:rPr lang="fr-CA" sz="1200" b="0" i="1" dirty="0" smtClean="0">
+                            <a:latin typeface="Cambria Math" panose="02040503050406030204" pitchFamily="18" charset="0"/>
+                          </a:rPr>
+                        </m:ctrlPr>
+                      </m:sSubPr>
+                      <m:e>
+                        <m:r>
+                          <a:rPr lang="fr-CA" sz="1200" b="0" i="1" dirty="0" smtClean="0">
+                            <a:latin typeface="Cambria Math" panose="02040503050406030204" pitchFamily="18" charset="0"/>
+                          </a:rPr>
+                          <m:t>𝑢</m:t>
+                        </m:r>
+                      </m:e>
+                      <m:sub>
+                        <m:r>
+                          <a:rPr lang="fr-CA" sz="1200" b="0" i="1" dirty="0" smtClean="0">
+                            <a:latin typeface="Cambria Math" panose="02040503050406030204" pitchFamily="18" charset="0"/>
+                          </a:rPr>
+                          <m:t>𝑠𝑎𝑚𝑝𝑙𝑖𝑛𝑔</m:t>
+                        </m:r>
+                      </m:sub>
+                    </m:sSub>
+                    <m:r>
+                      <a:rPr lang="fr-CA" sz="1200" b="0" i="1" dirty="0" smtClean="0">
+                        <a:latin typeface="Cambria Math" panose="02040503050406030204" pitchFamily="18" charset="0"/>
+                      </a:rPr>
+                      <m:t>, </m:t>
+                    </m:r>
+                    <m:sSub>
+                      <m:sSubPr>
+                        <m:ctrlPr>
+                          <a:rPr lang="fr-CA" sz="1200" b="0" i="1" dirty="0" smtClean="0">
+                            <a:latin typeface="Cambria Math" panose="02040503050406030204" pitchFamily="18" charset="0"/>
+                          </a:rPr>
+                        </m:ctrlPr>
+                      </m:sSubPr>
+                      <m:e>
+                        <m:r>
+                          <a:rPr lang="fr-CA" sz="1200" b="0" i="1" dirty="0" smtClean="0">
+                            <a:latin typeface="Cambria Math" panose="02040503050406030204" pitchFamily="18" charset="0"/>
+                          </a:rPr>
+                          <m:t>𝑢</m:t>
+                        </m:r>
+                      </m:e>
+                      <m:sub>
+                        <m:r>
+                          <a:rPr lang="fr-CA" sz="1200" b="0" i="1" dirty="0" smtClean="0">
+                            <a:latin typeface="Cambria Math" panose="02040503050406030204" pitchFamily="18" charset="0"/>
+                          </a:rPr>
+                          <m:t>𝑖𝑡𝑒𝑟𝑎𝑡𝑖𝑣𝑒</m:t>
+                        </m:r>
+                      </m:sub>
+                    </m:sSub>
+                    <m:r>
+                      <a:rPr lang="fr-CA" sz="1200" b="0" i="1" dirty="0" smtClean="0">
+                        <a:latin typeface="Cambria Math" panose="02040503050406030204" pitchFamily="18" charset="0"/>
+                      </a:rPr>
+                      <m:t>)</m:t>
+                    </m:r>
+                    <m:r>
+                      <a:rPr lang="fr-CA" sz="1200" b="0" i="0" dirty="0" smtClean="0">
+                        <a:latin typeface="Cambria Math" panose="02040503050406030204" pitchFamily="18" charset="0"/>
+                      </a:rPr>
+                      <m:t>.</m:t>
+                    </m:r>
+                  </m:oMath>
+                </a14:m>
+                <a:endParaRPr lang="fr-CA" sz="1200" dirty="0"/>
+              </a:p>
+            </p:txBody>
+          </p:sp>
+        </mc:Choice>
+        <mc:Fallback>
+          <p:sp>
+            <p:nvSpPr>
+              <p:cNvPr id="13" name="ZoneTexte 12">
+                <a:extLst>
+                  <a:ext uri="{FF2B5EF4-FFF2-40B4-BE49-F238E27FC236}">
+                    <a16:creationId xmlns:a16="http://schemas.microsoft.com/office/drawing/2014/main" id="{E731592B-FFEE-2191-A4DF-923F1D405983}"/>
+                  </a:ext>
+                </a:extLst>
+              </p:cNvPr>
+              <p:cNvSpPr txBox="1">
+                <a:spLocks noRot="1" noChangeAspect="1" noMove="1" noResize="1" noEditPoints="1" noAdjustHandles="1" noChangeArrowheads="1" noChangeShapeType="1" noTextEdit="1"/>
+              </p:cNvSpPr>
+              <p:nvPr/>
+            </p:nvSpPr>
+            <p:spPr>
+              <a:xfrm>
+                <a:off x="4176879" y="6356457"/>
+                <a:ext cx="8015121" cy="476477"/>
+              </a:xfrm>
+              <a:prstGeom prst="rect">
+                <a:avLst/>
+              </a:prstGeom>
+              <a:blipFill>
+                <a:blip r:embed="rId5"/>
+                <a:stretch>
+                  <a:fillRect t="-1282" b="-7692"/>
+                </a:stretch>
+              </a:blipFill>
+            </p:spPr>
+            <p:txBody>
+              <a:bodyPr/>
+              <a:lstStyle/>
+              <a:p>
+                <a:r>
+                  <a:rPr lang="fr-CA">
+                    <a:noFill/>
+                  </a:rPr>
+                  <a:t> </a:t>
+                </a:r>
+              </a:p>
+            </p:txBody>
+          </p:sp>
+        </mc:Fallback>
+      </mc:AlternateContent>
+    </p:spTree>
+    <p:extLst>
+      <p:ext uri="{BB962C8B-B14F-4D97-AF65-F5344CB8AC3E}">
+        <p14:creationId xmlns:p14="http://schemas.microsoft.com/office/powerpoint/2010/main" val="2709558708"/>
+      </p:ext>
+    </p:extLst>
+  </p:cSld>
+  <p:clrMapOvr>
+    <a:masterClrMapping/>
+  </p:clrMapOvr>
+</p:sld>
+</file>
+
+<file path=ppt/slides/slide4.xml><?xml version="1.0" encoding="utf-8"?>
+<p:sld xmlns:a="http://schemas.openxmlformats.org/drawingml/2006/main" xmlns:r="http://schemas.openxmlformats.org/officeDocument/2006/relationships" xmlns:p="http://schemas.openxmlformats.org/presentationml/2006/main">
+  <p:cSld>
+    <p:spTree>
+      <p:nvGrpSpPr>
         <p:cNvPr id="1" name=""/>
         <p:cNvGrpSpPr/>
         <p:nvPr/>
@@ -3684,8 +5145,8 @@
           <a:chExt cx="0" cy="0"/>
         </a:xfrm>
       </p:grpSpPr>
-      <mc:AlternateContent xmlns:mc="http://schemas.openxmlformats.org/markup-compatibility/2006">
-        <mc:Choice xmlns:a14="http://schemas.microsoft.com/office/drawing/2010/main" Requires="a14">
+      <mc:AlternateContent xmlns:mc="http://schemas.openxmlformats.org/markup-compatibility/2006" xmlns:a14="http://schemas.microsoft.com/office/drawing/2010/main">
+        <mc:Choice Requires="a14">
           <p:sp>
             <p:nvSpPr>
               <p:cNvPr id="2" name="Titre 1">
@@ -3745,7 +5206,7 @@
             </p:txBody>
           </p:sp>
         </mc:Choice>
-        <mc:Fallback>
+        <mc:Fallback xmlns="">
           <p:sp>
             <p:nvSpPr>
               <p:cNvPr id="2" name="Titre 1">
@@ -3951,7 +5412,7 @@
         </p:nvSpPr>
         <p:spPr>
           <a:xfrm>
-            <a:off x="838200" y="1778856"/>
+            <a:off x="838200" y="1582938"/>
             <a:ext cx="10515600" cy="1325563"/>
           </a:xfrm>
         </p:spPr>
@@ -4205,6 +5666,49 @@
           </a:p>
         </p:txBody>
       </p:sp>
+      <p:sp>
+        <p:nvSpPr>
+          <p:cNvPr id="3" name="ZoneTexte 2">
+            <a:extLst>
+              <a:ext uri="{FF2B5EF4-FFF2-40B4-BE49-F238E27FC236}">
+                <a16:creationId xmlns:a16="http://schemas.microsoft.com/office/drawing/2014/main" id="{8D8320ED-12F4-95A7-217E-CBC390EE103F}"/>
+              </a:ext>
+            </a:extLst>
+          </p:cNvPr>
+          <p:cNvSpPr txBox="1"/>
+          <p:nvPr/>
+        </p:nvSpPr>
+        <p:spPr>
+          <a:xfrm>
+            <a:off x="3427708" y="2931168"/>
+            <a:ext cx="5004591" cy="338554"/>
+          </a:xfrm>
+          <a:prstGeom prst="rect">
+            <a:avLst/>
+          </a:prstGeom>
+          <a:noFill/>
+        </p:spPr>
+        <p:txBody>
+          <a:bodyPr wrap="square" rtlCol="0">
+            <a:spAutoFit/>
+          </a:bodyPr>
+          <a:lstStyle/>
+          <a:p>
+            <a:r>
+              <a:rPr lang="fr-CA" sz="1600" i="1" dirty="0"/>
+              <a:t>Figure 3: Domaines générés en fonction du </a:t>
+            </a:r>
+            <a:r>
+              <a:rPr lang="fr-CA" sz="1600" i="1" dirty="0" err="1"/>
+              <a:t>seed</a:t>
+            </a:r>
+            <a:r>
+              <a:rPr lang="fr-CA" sz="1600" i="1" dirty="0"/>
+              <a:t> utilisé.</a:t>
+            </a:r>
+          </a:p>
+        </p:txBody>
+      </p:sp>
     </p:spTree>
     <p:extLst>
       <p:ext uri="{BB962C8B-B14F-4D97-AF65-F5344CB8AC3E}">
@@ -4218,7 +5722,7 @@
 </p:sld>
 </file>
 
-<file path=ppt/slides/slide4.xml><?xml version="1.0" encoding="utf-8"?>
+<file path=ppt/slides/slide5.xml><?xml version="1.0" encoding="utf-8"?>
 <p:sld xmlns:a="http://schemas.openxmlformats.org/drawingml/2006/main" xmlns:r="http://schemas.openxmlformats.org/officeDocument/2006/relationships" xmlns:p="http://schemas.openxmlformats.org/presentationml/2006/main">
   <p:cSld>
     <p:spTree>
@@ -4397,7 +5901,7 @@
 </p:sld>
 </file>
 
-<file path=ppt/slides/slide5.xml><?xml version="1.0" encoding="utf-8"?>
+<file path=ppt/slides/slide6.xml><?xml version="1.0" encoding="utf-8"?>
 <p:sld xmlns:a="http://schemas.openxmlformats.org/drawingml/2006/main" xmlns:r="http://schemas.openxmlformats.org/officeDocument/2006/relationships" xmlns:p="http://schemas.openxmlformats.org/presentationml/2006/main">
   <p:cSld>
     <p:spTree>
@@ -4535,8 +6039,8 @@
           </p:sp>
         </mc:Fallback>
       </mc:AlternateContent>
-      <mc:AlternateContent xmlns:mc="http://schemas.openxmlformats.org/markup-compatibility/2006">
-        <mc:Choice xmlns:a14="http://schemas.microsoft.com/office/drawing/2010/main" Requires="a14">
+      <mc:AlternateContent xmlns:mc="http://schemas.openxmlformats.org/markup-compatibility/2006" xmlns:a14="http://schemas.microsoft.com/office/drawing/2010/main">
+        <mc:Choice Requires="a14">
           <p:sp>
             <p:nvSpPr>
               <p:cNvPr id="3" name="Espace réservé du contenu 2">
@@ -4901,7 +6405,7 @@
             </p:txBody>
           </p:sp>
         </mc:Choice>
-        <mc:Fallback>
+        <mc:Fallback xmlns="">
           <p:sp>
             <p:nvSpPr>
               <p:cNvPr id="3" name="Espace réservé du contenu 2">
@@ -4954,7 +6458,7 @@
 </p:sld>
 </file>
 
-<file path=ppt/slides/slide6.xml><?xml version="1.0" encoding="utf-8"?>
+<file path=ppt/slides/slide7.xml><?xml version="1.0" encoding="utf-8"?>
 <p:sld xmlns:a="http://schemas.openxmlformats.org/drawingml/2006/main" xmlns:r="http://schemas.openxmlformats.org/officeDocument/2006/relationships" xmlns:p="http://schemas.openxmlformats.org/presentationml/2006/main">
   <p:cSld>
     <p:spTree>
@@ -5016,8 +6520,8 @@
           </a:p>
         </p:txBody>
       </p:sp>
-      <mc:AlternateContent xmlns:mc="http://schemas.openxmlformats.org/markup-compatibility/2006">
-        <mc:Choice xmlns:a14="http://schemas.microsoft.com/office/drawing/2010/main" Requires="a14">
+      <mc:AlternateContent xmlns:mc="http://schemas.openxmlformats.org/markup-compatibility/2006" xmlns:a14="http://schemas.microsoft.com/office/drawing/2010/main">
+        <mc:Choice Requires="a14">
           <p:sp>
             <p:nvSpPr>
               <p:cNvPr id="3" name="Espace réservé du contenu 2">
@@ -5182,7 +6686,7 @@
             </p:txBody>
           </p:sp>
         </mc:Choice>
-        <mc:Fallback>
+        <mc:Fallback xmlns="">
           <p:sp>
             <p:nvSpPr>
               <p:cNvPr id="3" name="Espace réservé du contenu 2">
@@ -5235,7 +6739,7 @@
 </p:sld>
 </file>
 
-<file path=ppt/slides/slide7.xml><?xml version="1.0" encoding="utf-8"?>
+<file path=ppt/slides/slide8.xml><?xml version="1.0" encoding="utf-8"?>
 <p:sld xmlns:a="http://schemas.openxmlformats.org/drawingml/2006/main" xmlns:r="http://schemas.openxmlformats.org/officeDocument/2006/relationships" xmlns:p="http://schemas.openxmlformats.org/presentationml/2006/main">
   <p:cSld>
     <p:spTree>
@@ -5373,8 +6877,8 @@
           </p:sp>
         </mc:Fallback>
       </mc:AlternateContent>
-      <mc:AlternateContent xmlns:mc="http://schemas.openxmlformats.org/markup-compatibility/2006">
-        <mc:Choice xmlns:a14="http://schemas.microsoft.com/office/drawing/2010/main" Requires="a14">
+      <mc:AlternateContent xmlns:mc="http://schemas.openxmlformats.org/markup-compatibility/2006" xmlns:a14="http://schemas.microsoft.com/office/drawing/2010/main">
+        <mc:Choice Requires="a14">
           <p:sp>
             <p:nvSpPr>
               <p:cNvPr id="3" name="Espace réservé du contenu 2">
@@ -5706,7 +7210,7 @@
             </p:txBody>
           </p:sp>
         </mc:Choice>
-        <mc:Fallback>
+        <mc:Fallback xmlns="">
           <p:sp>
             <p:nvSpPr>
               <p:cNvPr id="3" name="Espace réservé du contenu 2">
@@ -5759,7 +7263,7 @@
 </p:sld>
 </file>
 
-<file path=ppt/slides/slide8.xml><?xml version="1.0" encoding="utf-8"?>
+<file path=ppt/slides/slide9.xml><?xml version="1.0" encoding="utf-8"?>
 <p:sld xmlns:a="http://schemas.openxmlformats.org/drawingml/2006/main" xmlns:r="http://schemas.openxmlformats.org/officeDocument/2006/relationships" xmlns:p="http://schemas.openxmlformats.org/presentationml/2006/main">
   <p:cSld>
     <p:spTree>
@@ -5804,8 +7308,8 @@
           </a:p>
         </p:txBody>
       </p:sp>
-      <mc:AlternateContent xmlns:mc="http://schemas.openxmlformats.org/markup-compatibility/2006">
-        <mc:Choice xmlns:a14="http://schemas.microsoft.com/office/drawing/2010/main" Requires="a14">
+      <mc:AlternateContent xmlns:mc="http://schemas.openxmlformats.org/markup-compatibility/2006" xmlns:a14="http://schemas.microsoft.com/office/drawing/2010/main">
+        <mc:Choice Requires="a14">
           <p:sp>
             <p:nvSpPr>
               <p:cNvPr id="3" name="Espace réservé du contenu 2">
@@ -5896,7 +7400,7 @@
             </p:txBody>
           </p:sp>
         </mc:Choice>
-        <mc:Fallback>
+        <mc:Fallback xmlns="">
           <p:sp>
             <p:nvSpPr>
               <p:cNvPr id="3" name="Espace réservé du contenu 2">

--- a/MEC8211-Devoir3.pptx
+++ b/MEC8211-Devoir3.pptx
@@ -4,16 +4,20 @@
   <p:sldMasterIdLst>
     <p:sldMasterId id="2147483648" r:id="rId1"/>
   </p:sldMasterIdLst>
+  <p:notesMasterIdLst>
+    <p:notesMasterId r:id="rId12"/>
+  </p:notesMasterIdLst>
   <p:sldIdLst>
     <p:sldId id="257" r:id="rId2"/>
     <p:sldId id="258" r:id="rId3"/>
     <p:sldId id="266" r:id="rId4"/>
     <p:sldId id="264" r:id="rId5"/>
     <p:sldId id="260" r:id="rId6"/>
-    <p:sldId id="261" r:id="rId7"/>
-    <p:sldId id="262" r:id="rId8"/>
-    <p:sldId id="263" r:id="rId9"/>
-    <p:sldId id="265" r:id="rId10"/>
+    <p:sldId id="267" r:id="rId7"/>
+    <p:sldId id="261" r:id="rId8"/>
+    <p:sldId id="262" r:id="rId9"/>
+    <p:sldId id="263" r:id="rId10"/>
+    <p:sldId id="265" r:id="rId11"/>
   </p:sldIdLst>
   <p:sldSz cx="12192000" cy="6858000"/>
   <p:notesSz cx="6858000" cy="9144000"/>
@@ -118,6 +122,548 @@
     </p:ext>
   </p:extLst>
 </p:presentation>
+</file>
+
+<file path=ppt/notesMasters/notesMaster1.xml><?xml version="1.0" encoding="utf-8"?>
+<p:notesMaster xmlns:a="http://schemas.openxmlformats.org/drawingml/2006/main" xmlns:r="http://schemas.openxmlformats.org/officeDocument/2006/relationships" xmlns:p="http://schemas.openxmlformats.org/presentationml/2006/main">
+  <p:cSld>
+    <p:bg>
+      <p:bgRef idx="1001">
+        <a:schemeClr val="bg1"/>
+      </p:bgRef>
+    </p:bg>
+    <p:spTree>
+      <p:nvGrpSpPr>
+        <p:cNvPr id="1" name=""/>
+        <p:cNvGrpSpPr/>
+        <p:nvPr/>
+      </p:nvGrpSpPr>
+      <p:grpSpPr>
+        <a:xfrm>
+          <a:off x="0" y="0"/>
+          <a:ext cx="0" cy="0"/>
+          <a:chOff x="0" y="0"/>
+          <a:chExt cx="0" cy="0"/>
+        </a:xfrm>
+      </p:grpSpPr>
+      <p:sp>
+        <p:nvSpPr>
+          <p:cNvPr id="2" name="Espace réservé de l'en-tête 1"/>
+          <p:cNvSpPr>
+            <a:spLocks noGrp="1"/>
+          </p:cNvSpPr>
+          <p:nvPr>
+            <p:ph type="hdr" sz="quarter"/>
+          </p:nvPr>
+        </p:nvSpPr>
+        <p:spPr>
+          <a:xfrm>
+            <a:off x="0" y="0"/>
+            <a:ext cx="2971800" cy="458788"/>
+          </a:xfrm>
+          <a:prstGeom prst="rect">
+            <a:avLst/>
+          </a:prstGeom>
+        </p:spPr>
+        <p:txBody>
+          <a:bodyPr vert="horz" lIns="91440" tIns="45720" rIns="91440" bIns="45720" rtlCol="0"/>
+          <a:lstStyle>
+            <a:lvl1pPr algn="l">
+              <a:defRPr sz="1200"/>
+            </a:lvl1pPr>
+          </a:lstStyle>
+          <a:p>
+            <a:endParaRPr lang="fr-CA"/>
+          </a:p>
+        </p:txBody>
+      </p:sp>
+      <p:sp>
+        <p:nvSpPr>
+          <p:cNvPr id="3" name="Espace réservé de la date 2"/>
+          <p:cNvSpPr>
+            <a:spLocks noGrp="1"/>
+          </p:cNvSpPr>
+          <p:nvPr>
+            <p:ph type="dt" idx="1"/>
+          </p:nvPr>
+        </p:nvSpPr>
+        <p:spPr>
+          <a:xfrm>
+            <a:off x="3884613" y="0"/>
+            <a:ext cx="2971800" cy="458788"/>
+          </a:xfrm>
+          <a:prstGeom prst="rect">
+            <a:avLst/>
+          </a:prstGeom>
+        </p:spPr>
+        <p:txBody>
+          <a:bodyPr vert="horz" lIns="91440" tIns="45720" rIns="91440" bIns="45720" rtlCol="0"/>
+          <a:lstStyle>
+            <a:lvl1pPr algn="r">
+              <a:defRPr sz="1200"/>
+            </a:lvl1pPr>
+          </a:lstStyle>
+          <a:p>
+            <a:fld id="{6BD447F1-453D-4945-8981-7B47F590C70C}" type="datetimeFigureOut">
+              <a:rPr lang="fr-CA" smtClean="0"/>
+              <a:t>2026-03-25</a:t>
+            </a:fld>
+            <a:endParaRPr lang="fr-CA"/>
+          </a:p>
+        </p:txBody>
+      </p:sp>
+      <p:sp>
+        <p:nvSpPr>
+          <p:cNvPr id="4" name="Espace réservé de l'image des diapositives 3"/>
+          <p:cNvSpPr>
+            <a:spLocks noGrp="1" noRot="1" noChangeAspect="1"/>
+          </p:cNvSpPr>
+          <p:nvPr>
+            <p:ph type="sldImg" idx="2"/>
+          </p:nvPr>
+        </p:nvSpPr>
+        <p:spPr>
+          <a:xfrm>
+            <a:off x="685800" y="1143000"/>
+            <a:ext cx="5486400" cy="3086100"/>
+          </a:xfrm>
+          <a:prstGeom prst="rect">
+            <a:avLst/>
+          </a:prstGeom>
+          <a:noFill/>
+          <a:ln w="12700">
+            <a:solidFill>
+              <a:prstClr val="black"/>
+            </a:solidFill>
+          </a:ln>
+        </p:spPr>
+        <p:txBody>
+          <a:bodyPr vert="horz" lIns="91440" tIns="45720" rIns="91440" bIns="45720" rtlCol="0" anchor="ctr"/>
+          <a:lstStyle/>
+          <a:p>
+            <a:endParaRPr lang="fr-CA"/>
+          </a:p>
+        </p:txBody>
+      </p:sp>
+      <p:sp>
+        <p:nvSpPr>
+          <p:cNvPr id="5" name="Espace réservé des notes 4"/>
+          <p:cNvSpPr>
+            <a:spLocks noGrp="1"/>
+          </p:cNvSpPr>
+          <p:nvPr>
+            <p:ph type="body" sz="quarter" idx="3"/>
+          </p:nvPr>
+        </p:nvSpPr>
+        <p:spPr>
+          <a:xfrm>
+            <a:off x="685800" y="4400550"/>
+            <a:ext cx="5486400" cy="3600450"/>
+          </a:xfrm>
+          <a:prstGeom prst="rect">
+            <a:avLst/>
+          </a:prstGeom>
+        </p:spPr>
+        <p:txBody>
+          <a:bodyPr vert="horz" lIns="91440" tIns="45720" rIns="91440" bIns="45720" rtlCol="0"/>
+          <a:lstStyle/>
+          <a:p>
+            <a:pPr lvl="0"/>
+            <a:r>
+              <a:rPr lang="fr-FR"/>
+              <a:t>Cliquez pour modifier les styles du texte du masque</a:t>
+            </a:r>
+          </a:p>
+          <a:p>
+            <a:pPr lvl="1"/>
+            <a:r>
+              <a:rPr lang="fr-FR"/>
+              <a:t>Deuxième niveau</a:t>
+            </a:r>
+          </a:p>
+          <a:p>
+            <a:pPr lvl="2"/>
+            <a:r>
+              <a:rPr lang="fr-FR"/>
+              <a:t>Troisième niveau</a:t>
+            </a:r>
+          </a:p>
+          <a:p>
+            <a:pPr lvl="3"/>
+            <a:r>
+              <a:rPr lang="fr-FR"/>
+              <a:t>Quatrième niveau</a:t>
+            </a:r>
+          </a:p>
+          <a:p>
+            <a:pPr lvl="4"/>
+            <a:r>
+              <a:rPr lang="fr-FR"/>
+              <a:t>Cinquième niveau</a:t>
+            </a:r>
+            <a:endParaRPr lang="fr-CA"/>
+          </a:p>
+        </p:txBody>
+      </p:sp>
+      <p:sp>
+        <p:nvSpPr>
+          <p:cNvPr id="6" name="Espace réservé du pied de page 5"/>
+          <p:cNvSpPr>
+            <a:spLocks noGrp="1"/>
+          </p:cNvSpPr>
+          <p:nvPr>
+            <p:ph type="ftr" sz="quarter" idx="4"/>
+          </p:nvPr>
+        </p:nvSpPr>
+        <p:spPr>
+          <a:xfrm>
+            <a:off x="0" y="8685213"/>
+            <a:ext cx="2971800" cy="458787"/>
+          </a:xfrm>
+          <a:prstGeom prst="rect">
+            <a:avLst/>
+          </a:prstGeom>
+        </p:spPr>
+        <p:txBody>
+          <a:bodyPr vert="horz" lIns="91440" tIns="45720" rIns="91440" bIns="45720" rtlCol="0" anchor="b"/>
+          <a:lstStyle>
+            <a:lvl1pPr algn="l">
+              <a:defRPr sz="1200"/>
+            </a:lvl1pPr>
+          </a:lstStyle>
+          <a:p>
+            <a:endParaRPr lang="fr-CA"/>
+          </a:p>
+        </p:txBody>
+      </p:sp>
+      <p:sp>
+        <p:nvSpPr>
+          <p:cNvPr id="7" name="Espace réservé du numéro de diapositive 6"/>
+          <p:cNvSpPr>
+            <a:spLocks noGrp="1"/>
+          </p:cNvSpPr>
+          <p:nvPr>
+            <p:ph type="sldNum" sz="quarter" idx="5"/>
+          </p:nvPr>
+        </p:nvSpPr>
+        <p:spPr>
+          <a:xfrm>
+            <a:off x="3884613" y="8685213"/>
+            <a:ext cx="2971800" cy="458787"/>
+          </a:xfrm>
+          <a:prstGeom prst="rect">
+            <a:avLst/>
+          </a:prstGeom>
+        </p:spPr>
+        <p:txBody>
+          <a:bodyPr vert="horz" lIns="91440" tIns="45720" rIns="91440" bIns="45720" rtlCol="0" anchor="b"/>
+          <a:lstStyle>
+            <a:lvl1pPr algn="r">
+              <a:defRPr sz="1200"/>
+            </a:lvl1pPr>
+          </a:lstStyle>
+          <a:p>
+            <a:fld id="{75A0F3B1-98BF-4430-AB0B-53D22E8A78C9}" type="slidenum">
+              <a:rPr lang="fr-CA" smtClean="0"/>
+              <a:t>‹N°›</a:t>
+            </a:fld>
+            <a:endParaRPr lang="fr-CA"/>
+          </a:p>
+        </p:txBody>
+      </p:sp>
+    </p:spTree>
+    <p:extLst>
+      <p:ext uri="{BB962C8B-B14F-4D97-AF65-F5344CB8AC3E}">
+        <p14:creationId xmlns:p14="http://schemas.microsoft.com/office/powerpoint/2010/main" val="3853204097"/>
+      </p:ext>
+    </p:extLst>
+  </p:cSld>
+  <p:clrMap bg1="lt1" tx1="dk1" bg2="lt2" tx2="dk2" accent1="accent1" accent2="accent2" accent3="accent3" accent4="accent4" accent5="accent5" accent6="accent6" hlink="hlink" folHlink="folHlink"/>
+  <p:notesStyle>
+    <a:lvl1pPr marL="0" algn="l" defTabSz="914400" rtl="0" eaLnBrk="1" latinLnBrk="0" hangingPunct="1">
+      <a:defRPr sz="1200" kern="1200">
+        <a:solidFill>
+          <a:schemeClr val="tx1"/>
+        </a:solidFill>
+        <a:latin typeface="+mn-lt"/>
+        <a:ea typeface="+mn-ea"/>
+        <a:cs typeface="+mn-cs"/>
+      </a:defRPr>
+    </a:lvl1pPr>
+    <a:lvl2pPr marL="457200" algn="l" defTabSz="914400" rtl="0" eaLnBrk="1" latinLnBrk="0" hangingPunct="1">
+      <a:defRPr sz="1200" kern="1200">
+        <a:solidFill>
+          <a:schemeClr val="tx1"/>
+        </a:solidFill>
+        <a:latin typeface="+mn-lt"/>
+        <a:ea typeface="+mn-ea"/>
+        <a:cs typeface="+mn-cs"/>
+      </a:defRPr>
+    </a:lvl2pPr>
+    <a:lvl3pPr marL="914400" algn="l" defTabSz="914400" rtl="0" eaLnBrk="1" latinLnBrk="0" hangingPunct="1">
+      <a:defRPr sz="1200" kern="1200">
+        <a:solidFill>
+          <a:schemeClr val="tx1"/>
+        </a:solidFill>
+        <a:latin typeface="+mn-lt"/>
+        <a:ea typeface="+mn-ea"/>
+        <a:cs typeface="+mn-cs"/>
+      </a:defRPr>
+    </a:lvl3pPr>
+    <a:lvl4pPr marL="1371600" algn="l" defTabSz="914400" rtl="0" eaLnBrk="1" latinLnBrk="0" hangingPunct="1">
+      <a:defRPr sz="1200" kern="1200">
+        <a:solidFill>
+          <a:schemeClr val="tx1"/>
+        </a:solidFill>
+        <a:latin typeface="+mn-lt"/>
+        <a:ea typeface="+mn-ea"/>
+        <a:cs typeface="+mn-cs"/>
+      </a:defRPr>
+    </a:lvl4pPr>
+    <a:lvl5pPr marL="1828800" algn="l" defTabSz="914400" rtl="0" eaLnBrk="1" latinLnBrk="0" hangingPunct="1">
+      <a:defRPr sz="1200" kern="1200">
+        <a:solidFill>
+          <a:schemeClr val="tx1"/>
+        </a:solidFill>
+        <a:latin typeface="+mn-lt"/>
+        <a:ea typeface="+mn-ea"/>
+        <a:cs typeface="+mn-cs"/>
+      </a:defRPr>
+    </a:lvl5pPr>
+    <a:lvl6pPr marL="2286000" algn="l" defTabSz="914400" rtl="0" eaLnBrk="1" latinLnBrk="0" hangingPunct="1">
+      <a:defRPr sz="1200" kern="1200">
+        <a:solidFill>
+          <a:schemeClr val="tx1"/>
+        </a:solidFill>
+        <a:latin typeface="+mn-lt"/>
+        <a:ea typeface="+mn-ea"/>
+        <a:cs typeface="+mn-cs"/>
+      </a:defRPr>
+    </a:lvl6pPr>
+    <a:lvl7pPr marL="2743200" algn="l" defTabSz="914400" rtl="0" eaLnBrk="1" latinLnBrk="0" hangingPunct="1">
+      <a:defRPr sz="1200" kern="1200">
+        <a:solidFill>
+          <a:schemeClr val="tx1"/>
+        </a:solidFill>
+        <a:latin typeface="+mn-lt"/>
+        <a:ea typeface="+mn-ea"/>
+        <a:cs typeface="+mn-cs"/>
+      </a:defRPr>
+    </a:lvl7pPr>
+    <a:lvl8pPr marL="3200400" algn="l" defTabSz="914400" rtl="0" eaLnBrk="1" latinLnBrk="0" hangingPunct="1">
+      <a:defRPr sz="1200" kern="1200">
+        <a:solidFill>
+          <a:schemeClr val="tx1"/>
+        </a:solidFill>
+        <a:latin typeface="+mn-lt"/>
+        <a:ea typeface="+mn-ea"/>
+        <a:cs typeface="+mn-cs"/>
+      </a:defRPr>
+    </a:lvl8pPr>
+    <a:lvl9pPr marL="3657600" algn="l" defTabSz="914400" rtl="0" eaLnBrk="1" latinLnBrk="0" hangingPunct="1">
+      <a:defRPr sz="1200" kern="1200">
+        <a:solidFill>
+          <a:schemeClr val="tx1"/>
+        </a:solidFill>
+        <a:latin typeface="+mn-lt"/>
+        <a:ea typeface="+mn-ea"/>
+        <a:cs typeface="+mn-cs"/>
+      </a:defRPr>
+    </a:lvl9pPr>
+  </p:notesStyle>
+</p:notesMaster>
+</file>
+
+<file path=ppt/notesSlides/notesSlide1.xml><?xml version="1.0" encoding="utf-8"?>
+<p:notes xmlns:a="http://schemas.openxmlformats.org/drawingml/2006/main" xmlns:r="http://schemas.openxmlformats.org/officeDocument/2006/relationships" xmlns:p="http://schemas.openxmlformats.org/presentationml/2006/main">
+  <p:cSld>
+    <p:spTree>
+      <p:nvGrpSpPr>
+        <p:cNvPr id="1" name=""/>
+        <p:cNvGrpSpPr/>
+        <p:nvPr/>
+      </p:nvGrpSpPr>
+      <p:grpSpPr>
+        <a:xfrm>
+          <a:off x="0" y="0"/>
+          <a:ext cx="0" cy="0"/>
+          <a:chOff x="0" y="0"/>
+          <a:chExt cx="0" cy="0"/>
+        </a:xfrm>
+      </p:grpSpPr>
+      <p:sp>
+        <p:nvSpPr>
+          <p:cNvPr id="2" name="Espace réservé de l'image des diapositives 1"/>
+          <p:cNvSpPr>
+            <a:spLocks noGrp="1" noRot="1" noChangeAspect="1"/>
+          </p:cNvSpPr>
+          <p:nvPr>
+            <p:ph type="sldImg"/>
+          </p:nvPr>
+        </p:nvSpPr>
+        <p:spPr/>
+      </p:sp>
+      <p:sp>
+        <p:nvSpPr>
+          <p:cNvPr id="3" name="Espace réservé des notes 2"/>
+          <p:cNvSpPr>
+            <a:spLocks noGrp="1"/>
+          </p:cNvSpPr>
+          <p:nvPr>
+            <p:ph type="body" idx="1"/>
+          </p:nvPr>
+        </p:nvSpPr>
+        <p:spPr/>
+        <p:txBody>
+          <a:bodyPr/>
+          <a:lstStyle/>
+          <a:p>
+            <a:endParaRPr lang="fr-CA" dirty="0"/>
+          </a:p>
+        </p:txBody>
+      </p:sp>
+      <p:sp>
+        <p:nvSpPr>
+          <p:cNvPr id="4" name="Espace réservé du numéro de diapositive 3"/>
+          <p:cNvSpPr>
+            <a:spLocks noGrp="1"/>
+          </p:cNvSpPr>
+          <p:nvPr>
+            <p:ph type="sldNum" sz="quarter" idx="5"/>
+          </p:nvPr>
+        </p:nvSpPr>
+        <p:spPr/>
+        <p:txBody>
+          <a:bodyPr/>
+          <a:lstStyle/>
+          <a:p>
+            <a:fld id="{75A0F3B1-98BF-4430-AB0B-53D22E8A78C9}" type="slidenum">
+              <a:rPr lang="fr-CA" smtClean="0"/>
+              <a:t>5</a:t>
+            </a:fld>
+            <a:endParaRPr lang="fr-CA"/>
+          </a:p>
+        </p:txBody>
+      </p:sp>
+    </p:spTree>
+    <p:extLst>
+      <p:ext uri="{BB962C8B-B14F-4D97-AF65-F5344CB8AC3E}">
+        <p14:creationId xmlns:p14="http://schemas.microsoft.com/office/powerpoint/2010/main" val="2299516035"/>
+      </p:ext>
+    </p:extLst>
+  </p:cSld>
+  <p:clrMapOvr>
+    <a:masterClrMapping/>
+  </p:clrMapOvr>
+</p:notes>
+</file>
+
+<file path=ppt/notesSlides/notesSlide2.xml><?xml version="1.0" encoding="utf-8"?>
+<p:notes xmlns:a="http://schemas.openxmlformats.org/drawingml/2006/main" xmlns:r="http://schemas.openxmlformats.org/officeDocument/2006/relationships" xmlns:p="http://schemas.openxmlformats.org/presentationml/2006/main">
+  <p:cSld>
+    <p:spTree>
+      <p:nvGrpSpPr>
+        <p:cNvPr id="1" name="">
+          <a:extLst>
+            <a:ext uri="{FF2B5EF4-FFF2-40B4-BE49-F238E27FC236}">
+              <a16:creationId xmlns:a16="http://schemas.microsoft.com/office/drawing/2014/main" id="{61D662C8-9F56-6A3F-7606-F5012E871565}"/>
+            </a:ext>
+          </a:extLst>
+        </p:cNvPr>
+        <p:cNvGrpSpPr/>
+        <p:nvPr/>
+      </p:nvGrpSpPr>
+      <p:grpSpPr>
+        <a:xfrm>
+          <a:off x="0" y="0"/>
+          <a:ext cx="0" cy="0"/>
+          <a:chOff x="0" y="0"/>
+          <a:chExt cx="0" cy="0"/>
+        </a:xfrm>
+      </p:grpSpPr>
+      <p:sp>
+        <p:nvSpPr>
+          <p:cNvPr id="2" name="Espace réservé de l'image des diapositives 1">
+            <a:extLst>
+              <a:ext uri="{FF2B5EF4-FFF2-40B4-BE49-F238E27FC236}">
+                <a16:creationId xmlns:a16="http://schemas.microsoft.com/office/drawing/2014/main" id="{79606C73-C25B-B502-BFD4-729AB1AC9BCD}"/>
+              </a:ext>
+            </a:extLst>
+          </p:cNvPr>
+          <p:cNvSpPr>
+            <a:spLocks noGrp="1" noRot="1" noChangeAspect="1"/>
+          </p:cNvSpPr>
+          <p:nvPr>
+            <p:ph type="sldImg"/>
+          </p:nvPr>
+        </p:nvSpPr>
+        <p:spPr/>
+      </p:sp>
+      <p:sp>
+        <p:nvSpPr>
+          <p:cNvPr id="3" name="Espace réservé des notes 2">
+            <a:extLst>
+              <a:ext uri="{FF2B5EF4-FFF2-40B4-BE49-F238E27FC236}">
+                <a16:creationId xmlns:a16="http://schemas.microsoft.com/office/drawing/2014/main" id="{23060132-D4D8-91EA-AAC4-E3943EB2CC5E}"/>
+              </a:ext>
+            </a:extLst>
+          </p:cNvPr>
+          <p:cNvSpPr>
+            <a:spLocks noGrp="1"/>
+          </p:cNvSpPr>
+          <p:nvPr>
+            <p:ph type="body" idx="1"/>
+          </p:nvPr>
+        </p:nvSpPr>
+        <p:spPr/>
+        <p:txBody>
+          <a:bodyPr/>
+          <a:lstStyle/>
+          <a:p>
+            <a:endParaRPr lang="fr-CA" dirty="0"/>
+          </a:p>
+        </p:txBody>
+      </p:sp>
+      <p:sp>
+        <p:nvSpPr>
+          <p:cNvPr id="4" name="Espace réservé du numéro de diapositive 3">
+            <a:extLst>
+              <a:ext uri="{FF2B5EF4-FFF2-40B4-BE49-F238E27FC236}">
+                <a16:creationId xmlns:a16="http://schemas.microsoft.com/office/drawing/2014/main" id="{400F20EB-06EC-198A-EC9A-6DDE888492AA}"/>
+              </a:ext>
+            </a:extLst>
+          </p:cNvPr>
+          <p:cNvSpPr>
+            <a:spLocks noGrp="1"/>
+          </p:cNvSpPr>
+          <p:nvPr>
+            <p:ph type="sldNum" sz="quarter" idx="5"/>
+          </p:nvPr>
+        </p:nvSpPr>
+        <p:spPr/>
+        <p:txBody>
+          <a:bodyPr/>
+          <a:lstStyle/>
+          <a:p>
+            <a:fld id="{75A0F3B1-98BF-4430-AB0B-53D22E8A78C9}" type="slidenum">
+              <a:rPr lang="fr-CA" smtClean="0"/>
+              <a:t>6</a:t>
+            </a:fld>
+            <a:endParaRPr lang="fr-CA"/>
+          </a:p>
+        </p:txBody>
+      </p:sp>
+    </p:spTree>
+    <p:extLst>
+      <p:ext uri="{BB962C8B-B14F-4D97-AF65-F5344CB8AC3E}">
+        <p14:creationId xmlns:p14="http://schemas.microsoft.com/office/powerpoint/2010/main" val="1039464604"/>
+      </p:ext>
+    </p:extLst>
+  </p:cSld>
+  <p:clrMapOvr>
+    <a:masterClrMapping/>
+  </p:clrMapOvr>
+</p:notes>
 </file>
 
 <file path=ppt/slideLayouts/slideLayout1.xml><?xml version="1.0" encoding="utf-8"?>
@@ -3481,6 +4027,196 @@
 </p:sld>
 </file>
 
+<file path=ppt/slides/slide10.xml><?xml version="1.0" encoding="utf-8"?>
+<p:sld xmlns:a="http://schemas.openxmlformats.org/drawingml/2006/main" xmlns:r="http://schemas.openxmlformats.org/officeDocument/2006/relationships" xmlns:p="http://schemas.openxmlformats.org/presentationml/2006/main">
+  <p:cSld>
+    <p:spTree>
+      <p:nvGrpSpPr>
+        <p:cNvPr id="1" name=""/>
+        <p:cNvGrpSpPr/>
+        <p:nvPr/>
+      </p:nvGrpSpPr>
+      <p:grpSpPr>
+        <a:xfrm>
+          <a:off x="0" y="0"/>
+          <a:ext cx="0" cy="0"/>
+          <a:chOff x="0" y="0"/>
+          <a:chExt cx="0" cy="0"/>
+        </a:xfrm>
+      </p:grpSpPr>
+      <p:sp>
+        <p:nvSpPr>
+          <p:cNvPr id="2" name="Titre 1">
+            <a:extLst>
+              <a:ext uri="{FF2B5EF4-FFF2-40B4-BE49-F238E27FC236}">
+                <a16:creationId xmlns:a16="http://schemas.microsoft.com/office/drawing/2014/main" id="{952FD1E7-D507-F3B9-06EA-C4D755151F65}"/>
+              </a:ext>
+            </a:extLst>
+          </p:cNvPr>
+          <p:cNvSpPr>
+            <a:spLocks noGrp="1"/>
+          </p:cNvSpPr>
+          <p:nvPr>
+            <p:ph type="title"/>
+          </p:nvPr>
+        </p:nvSpPr>
+        <p:spPr/>
+        <p:txBody>
+          <a:bodyPr/>
+          <a:lstStyle/>
+          <a:p>
+            <a:r>
+              <a:rPr lang="fr-FR" dirty="0"/>
+              <a:t>Interprétation de l’intervalle de confiance </a:t>
+            </a:r>
+          </a:p>
+        </p:txBody>
+      </p:sp>
+      <mc:AlternateContent xmlns:mc="http://schemas.openxmlformats.org/markup-compatibility/2006" xmlns:a14="http://schemas.microsoft.com/office/drawing/2010/main">
+        <mc:Choice Requires="a14">
+          <p:sp>
+            <p:nvSpPr>
+              <p:cNvPr id="3" name="Espace réservé du contenu 2">
+                <a:extLst>
+                  <a:ext uri="{FF2B5EF4-FFF2-40B4-BE49-F238E27FC236}">
+                    <a16:creationId xmlns:a16="http://schemas.microsoft.com/office/drawing/2014/main" id="{5F231FAE-DF1D-EF42-B4E7-03EBF13AC650}"/>
+                  </a:ext>
+                </a:extLst>
+              </p:cNvPr>
+              <p:cNvSpPr>
+                <a:spLocks noGrp="1"/>
+              </p:cNvSpPr>
+              <p:nvPr>
+                <p:ph idx="1"/>
+              </p:nvPr>
+            </p:nvSpPr>
+            <p:spPr/>
+            <p:txBody>
+              <a:bodyPr/>
+              <a:lstStyle/>
+              <a:p>
+                <a:r>
+                  <a:rPr lang="fr-FR" b="0" dirty="0">
+                    <a:latin typeface="Cambria Math" panose="02040503050406030204" pitchFamily="18" charset="0"/>
+                  </a:rPr>
+                  <a:t>E par rapport à </a:t>
+                </a:r>
+                <a:r>
+                  <a:rPr lang="fr-FR" b="0" dirty="0" err="1">
+                    <a:latin typeface="Cambria Math" panose="02040503050406030204" pitchFamily="18" charset="0"/>
+                  </a:rPr>
+                  <a:t>u_val</a:t>
+                </a:r>
+                <a:r>
+                  <a:rPr lang="fr-FR" b="0" dirty="0">
+                    <a:latin typeface="Cambria Math" panose="02040503050406030204" pitchFamily="18" charset="0"/>
+                  </a:rPr>
+                  <a:t> ?</a:t>
+                </a:r>
+              </a:p>
+              <a:p>
+                <a:endParaRPr lang="fr-FR" b="0" i="1" dirty="0">
+                  <a:latin typeface="Cambria Math" panose="02040503050406030204" pitchFamily="18" charset="0"/>
+                </a:endParaRPr>
+              </a:p>
+              <a:p>
+                <a14:m>
+                  <m:oMath xmlns:m="http://schemas.openxmlformats.org/officeDocument/2006/math">
+                    <m:sSub>
+                      <m:sSubPr>
+                        <m:ctrlPr>
+                          <a:rPr lang="fr-FR" b="0" i="1" smtClean="0">
+                            <a:latin typeface="Cambria Math" panose="02040503050406030204" pitchFamily="18" charset="0"/>
+                          </a:rPr>
+                        </m:ctrlPr>
+                      </m:sSubPr>
+                      <m:e>
+                        <m:r>
+                          <a:rPr lang="fr-FR" b="0" i="1" smtClean="0">
+                            <a:latin typeface="Cambria Math" panose="02040503050406030204" pitchFamily="18" charset="0"/>
+                          </a:rPr>
+                          <m:t>𝑢</m:t>
+                        </m:r>
+                      </m:e>
+                      <m:sub>
+                        <m:r>
+                          <a:rPr lang="fr-FR" b="0" i="1" smtClean="0">
+                            <a:latin typeface="Cambria Math" panose="02040503050406030204" pitchFamily="18" charset="0"/>
+                          </a:rPr>
+                          <m:t>𝐷</m:t>
+                        </m:r>
+                      </m:sub>
+                    </m:sSub>
+                  </m:oMath>
+                </a14:m>
+                <a:r>
+                  <a:rPr lang="fr-FR" dirty="0"/>
+                  <a:t> semble être l’erreur prédominante dans la validation </a:t>
+                </a:r>
+                <a:r>
+                  <a:rPr lang="fr-FR" dirty="0">
+                    <a:sym typeface="Wingdings" panose="05000000000000000000" pitchFamily="2" charset="2"/>
+                  </a:rPr>
+                  <a:t> être plus précis sur les expériences  </a:t>
+                </a:r>
+                <a:endParaRPr lang="fr-FR" dirty="0"/>
+              </a:p>
+            </p:txBody>
+          </p:sp>
+        </mc:Choice>
+        <mc:Fallback xmlns="">
+          <p:sp>
+            <p:nvSpPr>
+              <p:cNvPr id="3" name="Espace réservé du contenu 2">
+                <a:extLst>
+                  <a:ext uri="{FF2B5EF4-FFF2-40B4-BE49-F238E27FC236}">
+                    <a16:creationId xmlns:a16="http://schemas.microsoft.com/office/drawing/2014/main" id="{5F231FAE-DF1D-EF42-B4E7-03EBF13AC650}"/>
+                  </a:ext>
+                </a:extLst>
+              </p:cNvPr>
+              <p:cNvSpPr>
+                <a:spLocks noGrp="1" noRot="1" noChangeAspect="1" noMove="1" noResize="1" noEditPoints="1" noAdjustHandles="1" noChangeArrowheads="1" noChangeShapeType="1" noTextEdit="1"/>
+              </p:cNvSpPr>
+              <p:nvPr>
+                <p:ph idx="1"/>
+              </p:nvPr>
+            </p:nvSpPr>
+            <p:spPr>
+              <a:blipFill>
+                <a:blip r:embed="rId2"/>
+                <a:stretch>
+                  <a:fillRect l="-1043" t="-2381"/>
+                </a:stretch>
+              </a:blipFill>
+            </p:spPr>
+            <p:txBody>
+              <a:bodyPr/>
+              <a:lstStyle/>
+              <a:p>
+                <a:r>
+                  <a:rPr lang="fr-FR">
+                    <a:noFill/>
+                  </a:rPr>
+                  <a:t> </a:t>
+                </a:r>
+              </a:p>
+            </p:txBody>
+          </p:sp>
+        </mc:Fallback>
+      </mc:AlternateContent>
+    </p:spTree>
+    <p:extLst>
+      <p:ext uri="{BB962C8B-B14F-4D97-AF65-F5344CB8AC3E}">
+        <p14:creationId xmlns:p14="http://schemas.microsoft.com/office/powerpoint/2010/main" val="1935114118"/>
+      </p:ext>
+    </p:extLst>
+  </p:cSld>
+  <p:clrMapOvr>
+    <a:masterClrMapping/>
+  </p:clrMapOvr>
+</p:sld>
+</file>
+
 <file path=ppt/slides/slide2.xml><?xml version="1.0" encoding="utf-8"?>
 <p:sld xmlns:a="http://schemas.openxmlformats.org/drawingml/2006/main" xmlns:r="http://schemas.openxmlformats.org/officeDocument/2006/relationships" xmlns:p="http://schemas.openxmlformats.org/presentationml/2006/main">
   <p:cSld>
@@ -3613,8 +4349,8 @@
           </p:sp>
         </mc:Fallback>
       </mc:AlternateContent>
-      <mc:AlternateContent xmlns:mc="http://schemas.openxmlformats.org/markup-compatibility/2006">
-        <mc:Choice xmlns:a14="http://schemas.microsoft.com/office/drawing/2010/main" Requires="a14">
+      <mc:AlternateContent xmlns:mc="http://schemas.openxmlformats.org/markup-compatibility/2006" xmlns:a14="http://schemas.microsoft.com/office/drawing/2010/main">
+        <mc:Choice Requires="a14">
           <p:sp>
             <p:nvSpPr>
               <p:cNvPr id="3" name="Espace réservé du contenu 2">
@@ -4172,7 +4908,7 @@
             </p:txBody>
           </p:sp>
         </mc:Choice>
-        <mc:Fallback>
+        <mc:Fallback xmlns="">
           <p:sp>
             <p:nvSpPr>
               <p:cNvPr id="3" name="Espace réservé du contenu 2">
@@ -4580,8 +5316,8 @@
           </a:p>
         </p:txBody>
       </p:sp>
-      <mc:AlternateContent xmlns:mc="http://schemas.openxmlformats.org/markup-compatibility/2006">
-        <mc:Choice xmlns:a14="http://schemas.microsoft.com/office/drawing/2010/main" Requires="a14">
+      <mc:AlternateContent xmlns:mc="http://schemas.openxmlformats.org/markup-compatibility/2006" xmlns:a14="http://schemas.microsoft.com/office/drawing/2010/main">
+        <mc:Choice Requires="a14">
           <p:sp>
             <p:nvSpPr>
               <p:cNvPr id="12" name="ZoneTexte 11">
@@ -4716,7 +5452,7 @@
                       <a:rPr lang="fr-CA" sz="1600" i="1">
                         <a:latin typeface="Cambria Math" panose="02040503050406030204" pitchFamily="18" charset="0"/>
                       </a:rPr>
-                      <m:t>-02 µ</m:t>
+                      <m:t>−02 µ</m:t>
                     </m:r>
                     <m:r>
                       <a:rPr lang="fr-CA" sz="1600" i="1">
@@ -4807,7 +5543,7 @@
                       <a:rPr lang="fr-CA" sz="1600" b="1" i="1">
                         <a:latin typeface="Cambria Math" panose="02040503050406030204" pitchFamily="18" charset="0"/>
                       </a:rPr>
-                      <m:t>-</m:t>
+                      <m:t>−</m:t>
                     </m:r>
                     <m:r>
                       <a:rPr lang="fr-CA" sz="1600" b="1" i="1">
@@ -4850,7 +5586,7 @@
             </p:txBody>
           </p:sp>
         </mc:Choice>
-        <mc:Fallback>
+        <mc:Fallback xmlns="">
           <p:sp>
             <p:nvSpPr>
               <p:cNvPr id="12" name="ZoneTexte 11">
@@ -4895,8 +5631,8 @@
           </p:sp>
         </mc:Fallback>
       </mc:AlternateContent>
-      <mc:AlternateContent xmlns:mc="http://schemas.openxmlformats.org/markup-compatibility/2006">
-        <mc:Choice xmlns:a14="http://schemas.microsoft.com/office/drawing/2010/main" Requires="a14">
+      <mc:AlternateContent xmlns:mc="http://schemas.openxmlformats.org/markup-compatibility/2006" xmlns:a14="http://schemas.microsoft.com/office/drawing/2010/main">
+        <mc:Choice Requires="a14">
           <p:sp>
             <p:nvSpPr>
               <p:cNvPr id="13" name="ZoneTexte 12">
@@ -5070,7 +5806,7 @@
             </p:txBody>
           </p:sp>
         </mc:Choice>
-        <mc:Fallback>
+        <mc:Fallback xmlns="">
           <p:sp>
             <p:nvSpPr>
               <p:cNvPr id="13" name="ZoneTexte 12">
@@ -5839,7 +6575,7 @@
                 <a:ext cx="10515600" cy="1325563"/>
               </a:xfrm>
               <a:blipFill>
-                <a:blip r:embed="rId2"/>
+                <a:blip r:embed="rId3"/>
                 <a:stretch>
                   <a:fillRect l="-2087" t="-7834"/>
                 </a:stretch>
@@ -5860,34 +6596,494 @@
           </p:sp>
         </mc:Fallback>
       </mc:AlternateContent>
-      <p:sp>
-        <p:nvSpPr>
-          <p:cNvPr id="3" name="Espace réservé du contenu 2">
-            <a:extLst>
-              <a:ext uri="{FF2B5EF4-FFF2-40B4-BE49-F238E27FC236}">
-                <a16:creationId xmlns:a16="http://schemas.microsoft.com/office/drawing/2014/main" id="{A6CA13C1-0552-592F-8A56-718E46BDA011}"/>
-              </a:ext>
-            </a:extLst>
-          </p:cNvPr>
-          <p:cNvSpPr>
-            <a:spLocks noGrp="1"/>
-          </p:cNvSpPr>
-          <p:nvPr>
-            <p:ph idx="1"/>
-          </p:nvPr>
-        </p:nvSpPr>
-        <p:spPr/>
-        <p:txBody>
-          <a:bodyPr/>
-          <a:lstStyle/>
-          <a:p>
-            <a:r>
-              <a:rPr lang="fr-FR" dirty="0"/>
-              <a:t>Méthode de Monte Carlo pour la propagation des incertitudes </a:t>
-            </a:r>
-          </a:p>
-        </p:txBody>
-      </p:sp>
+      <mc:AlternateContent xmlns:mc="http://schemas.openxmlformats.org/markup-compatibility/2006">
+        <mc:Choice xmlns:a14="http://schemas.microsoft.com/office/drawing/2010/main" Requires="a14">
+          <p:sp>
+            <p:nvSpPr>
+              <p:cNvPr id="3" name="Espace réservé du contenu 2">
+                <a:extLst>
+                  <a:ext uri="{FF2B5EF4-FFF2-40B4-BE49-F238E27FC236}">
+                    <a16:creationId xmlns:a16="http://schemas.microsoft.com/office/drawing/2014/main" id="{A6CA13C1-0552-592F-8A56-718E46BDA011}"/>
+                  </a:ext>
+                </a:extLst>
+              </p:cNvPr>
+              <p:cNvSpPr>
+                <a:spLocks noGrp="1"/>
+              </p:cNvSpPr>
+              <p:nvPr>
+                <p:ph idx="1"/>
+              </p:nvPr>
+            </p:nvSpPr>
+            <p:spPr>
+              <a:xfrm>
+                <a:off x="838200" y="1580884"/>
+                <a:ext cx="10515600" cy="4351338"/>
+              </a:xfrm>
+            </p:spPr>
+            <p:txBody>
+              <a:bodyPr>
+                <a:normAutofit fontScale="62500" lnSpcReduction="20000"/>
+              </a:bodyPr>
+              <a:lstStyle/>
+              <a:p>
+                <a:r>
+                  <a:rPr lang="fr-FR" dirty="0"/>
+                  <a:t>On mesure </a:t>
+                </a:r>
+                <a14:m>
+                  <m:oMath xmlns:m="http://schemas.openxmlformats.org/officeDocument/2006/math">
+                    <m:sSub>
+                      <m:sSubPr>
+                        <m:ctrlPr>
+                          <a:rPr lang="fr-CA" b="0" i="1" smtClean="0">
+                            <a:latin typeface="Cambria Math" panose="02040503050406030204" pitchFamily="18" charset="0"/>
+                          </a:rPr>
+                        </m:ctrlPr>
+                      </m:sSubPr>
+                      <m:e>
+                        <m:r>
+                          <a:rPr lang="fr-CA" b="0" i="1" smtClean="0">
+                            <a:latin typeface="Cambria Math" panose="02040503050406030204" pitchFamily="18" charset="0"/>
+                          </a:rPr>
+                          <m:t>𝑢</m:t>
+                        </m:r>
+                      </m:e>
+                      <m:sub>
+                        <m:r>
+                          <a:rPr lang="fr-CA" b="0" i="1" smtClean="0">
+                            <a:latin typeface="Cambria Math" panose="02040503050406030204" pitchFamily="18" charset="0"/>
+                          </a:rPr>
+                          <m:t>𝑖𝑛𝑝𝑢𝑡</m:t>
+                        </m:r>
+                      </m:sub>
+                    </m:sSub>
+                  </m:oMath>
+                </a14:m>
+                <a:r>
+                  <a:rPr lang="fr-FR" dirty="0"/>
+                  <a:t> à l’aide de la propagation des incertitudes par la méthode de Monte-Carlo.</a:t>
+                </a:r>
+              </a:p>
+              <a:p>
+                <a:r>
+                  <a:rPr lang="fr-FR" dirty="0"/>
+                  <a:t>Ici, les paramètres d’entrés affectant la SRQ (</a:t>
+                </a:r>
+                <a14:m>
+                  <m:oMath xmlns:m="http://schemas.openxmlformats.org/officeDocument/2006/math">
+                    <m:r>
+                      <a:rPr lang="fr-CA" i="1">
+                        <a:latin typeface="Cambria Math" panose="02040503050406030204" pitchFamily="18" charset="0"/>
+                      </a:rPr>
+                      <m:t>𝑘</m:t>
+                    </m:r>
+                  </m:oMath>
+                </a14:m>
+                <a:r>
+                  <a:rPr lang="fr-FR" dirty="0"/>
+                  <a:t>, perméabilité) sont la porosité et le diamètre des fibres.</a:t>
+                </a:r>
+              </a:p>
+              <a:p>
+                <a:r>
+                  <a:rPr lang="fr-FR" dirty="0"/>
+                  <a:t>L’impact de la propagation de l’incertitude de la taille des fibres est déjà pris en compte du fait qu’on génère un grand nombre de fibres de manière aléatoire suivant une distribution normale pour générer le matériau (en posant </a:t>
+                </a:r>
+                <a14:m>
+                  <m:oMath xmlns:m="http://schemas.openxmlformats.org/officeDocument/2006/math">
+                    <m:r>
+                      <a:rPr lang="fr-CA" b="0" i="1" smtClean="0">
+                        <a:latin typeface="Cambria Math" panose="02040503050406030204" pitchFamily="18" charset="0"/>
+                      </a:rPr>
+                      <m:t>𝑠𝑒𝑒𝑑</m:t>
+                    </m:r>
+                    <m:r>
+                      <a:rPr lang="fr-CA" b="0" i="1" smtClean="0">
+                        <a:latin typeface="Cambria Math" panose="02040503050406030204" pitchFamily="18" charset="0"/>
+                      </a:rPr>
+                      <m:t>=0</m:t>
+                    </m:r>
+                  </m:oMath>
+                </a14:m>
+                <a:r>
+                  <a:rPr lang="fr-FR" dirty="0"/>
+                  <a:t>, distribution aléatoire).</a:t>
+                </a:r>
+              </a:p>
+              <a:p>
+                <a:r>
+                  <a:rPr lang="fr-FR" dirty="0"/>
+                  <a:t>Donc, pour mesurer la propagation, on évalue la propagation pour un échantillon représentatif de la fonction de distribution des probabilités (PDF) de la porosité.</a:t>
+                </a:r>
+              </a:p>
+              <a:p>
+                <a:r>
+                  <a:rPr lang="fr-FR" dirty="0"/>
+                  <a:t>Méthodologie : </a:t>
+                </a:r>
+              </a:p>
+              <a:p>
+                <a:pPr marL="914400" lvl="1" indent="-457200">
+                  <a:buFont typeface="+mj-lt"/>
+                  <a:buAutoNum type="arabicPeriod"/>
+                </a:pPr>
+                <a:r>
+                  <a:rPr lang="fr-FR" dirty="0"/>
+                  <a:t>Générer un échantillon représentatif suivant la PDF de la porosité.</a:t>
+                </a:r>
+              </a:p>
+              <a:p>
+                <a:pPr marL="914400" lvl="1" indent="-457200">
+                  <a:buFont typeface="+mj-lt"/>
+                  <a:buAutoNum type="arabicPeriod"/>
+                </a:pPr>
+                <a:r>
+                  <a:rPr lang="fr-FR" dirty="0"/>
+                  <a:t>Calculer la perméabilité pour l’ensemble des points de l’échantillon.</a:t>
+                </a:r>
+              </a:p>
+              <a:p>
+                <a:pPr marL="914400" lvl="1" indent="-457200">
+                  <a:buFont typeface="+mj-lt"/>
+                  <a:buAutoNum type="arabicPeriod"/>
+                </a:pPr>
+                <a:r>
+                  <a:rPr lang="fr-FR" dirty="0"/>
+                  <a:t>Calculer la distribution de la SRQ (</a:t>
+                </a:r>
+                <a14:m>
+                  <m:oMath xmlns:m="http://schemas.openxmlformats.org/officeDocument/2006/math">
+                    <m:r>
+                      <a:rPr lang="fr-CA" i="1">
+                        <a:latin typeface="Cambria Math" panose="02040503050406030204" pitchFamily="18" charset="0"/>
+                      </a:rPr>
+                      <m:t>𝑘</m:t>
+                    </m:r>
+                  </m:oMath>
+                </a14:m>
+                <a:r>
+                  <a:rPr lang="fr-FR" dirty="0"/>
+                  <a:t>, perméabilité).</a:t>
+                </a:r>
+              </a:p>
+              <a:p>
+                <a:pPr lvl="2"/>
+                <a:r>
+                  <a:rPr lang="fr-FR" dirty="0"/>
+                  <a:t>On se retrouve avec une distribution log-normale.</a:t>
+                </a:r>
+              </a:p>
+              <a:p>
+                <a:pPr lvl="2"/>
+                <a:r>
+                  <a:rPr lang="fr-FR" dirty="0"/>
+                  <a:t>On utilise le facteur de variation géométrique (FVG) qui permet d’interpréter les résultats dans le domaine normal. Le FVG correspond à l’exponentielle de l’écart type mesuré dans l’espace log.</a:t>
+                </a:r>
+              </a:p>
+              <a:p>
+                <a:pPr lvl="2"/>
+                <a:r>
+                  <a:rPr lang="fr-FR" dirty="0"/>
+                  <a:t>À l’aide tu FVG et de la médiane, on peut calculer l’intervalle dans lequel se trouvent  68.3% des données, basé sur </a:t>
+                </a:r>
+                <a14:m>
+                  <m:oMath xmlns:m="http://schemas.openxmlformats.org/officeDocument/2006/math">
+                    <m:r>
+                      <a:rPr lang="fr-FR" i="1" smtClean="0">
+                        <a:latin typeface="Cambria Math" panose="02040503050406030204" pitchFamily="18" charset="0"/>
+                        <a:ea typeface="Cambria Math" panose="02040503050406030204" pitchFamily="18" charset="0"/>
+                      </a:rPr>
+                      <m:t>𝜇</m:t>
+                    </m:r>
+                    <m:r>
+                      <a:rPr lang="fr-FR" i="1" smtClean="0">
+                        <a:latin typeface="Cambria Math" panose="02040503050406030204" pitchFamily="18" charset="0"/>
+                        <a:ea typeface="Cambria Math" panose="02040503050406030204" pitchFamily="18" charset="0"/>
+                      </a:rPr>
+                      <m:t>±</m:t>
+                    </m:r>
+                    <m:r>
+                      <a:rPr lang="fr-FR" i="1" smtClean="0">
+                        <a:latin typeface="Cambria Math" panose="02040503050406030204" pitchFamily="18" charset="0"/>
+                        <a:ea typeface="Cambria Math" panose="02040503050406030204" pitchFamily="18" charset="0"/>
+                      </a:rPr>
+                      <m:t>𝜎</m:t>
+                    </m:r>
+                  </m:oMath>
+                </a14:m>
+                <a:r>
+                  <a:rPr lang="fr-FR" dirty="0"/>
+                  <a:t> dans l’espace logarithmique.</a:t>
+                </a:r>
+              </a:p>
+              <a:p>
+                <a:pPr marL="914400" lvl="1" indent="-457200">
+                  <a:buFont typeface="+mj-lt"/>
+                  <a:buAutoNum type="arabicPeriod"/>
+                </a:pPr>
+                <a:r>
+                  <a:rPr lang="fr-FR" dirty="0"/>
+                  <a:t>On pose </a:t>
+                </a:r>
+                <a14:m>
+                  <m:oMath xmlns:m="http://schemas.openxmlformats.org/officeDocument/2006/math">
+                    <m:sSub>
+                      <m:sSubPr>
+                        <m:ctrlPr>
+                          <a:rPr lang="fr-CA" b="0" i="1" smtClean="0">
+                            <a:latin typeface="Cambria Math" panose="02040503050406030204" pitchFamily="18" charset="0"/>
+                          </a:rPr>
+                        </m:ctrlPr>
+                      </m:sSubPr>
+                      <m:e>
+                        <m:r>
+                          <a:rPr lang="fr-CA" b="0" i="1" smtClean="0">
+                            <a:latin typeface="Cambria Math" panose="02040503050406030204" pitchFamily="18" charset="0"/>
+                          </a:rPr>
+                          <m:t>𝑢</m:t>
+                        </m:r>
+                      </m:e>
+                      <m:sub>
+                        <m:r>
+                          <a:rPr lang="fr-CA" b="0" i="1" smtClean="0">
+                            <a:latin typeface="Cambria Math" panose="02040503050406030204" pitchFamily="18" charset="0"/>
+                          </a:rPr>
+                          <m:t>𝑖𝑛𝑝𝑢𝑡</m:t>
+                        </m:r>
+                      </m:sub>
+                    </m:sSub>
+                  </m:oMath>
+                </a14:m>
+                <a:r>
+                  <a:rPr lang="fr-FR" dirty="0"/>
+                  <a:t> égal au plus grand écart ; en log-normal, les écarts sont asymétriques :</a:t>
+                </a:r>
+                <a:br>
+                  <a:rPr lang="fr-FR" dirty="0"/>
+                </a:br>
+                <a14:m>
+                  <m:oMath xmlns:m="http://schemas.openxmlformats.org/officeDocument/2006/math">
+                    <m:sSub>
+                      <m:sSubPr>
+                        <m:ctrlPr>
+                          <a:rPr lang="fr-CA" b="0" i="1" smtClean="0">
+                            <a:latin typeface="Cambria Math" panose="02040503050406030204" pitchFamily="18" charset="0"/>
+                          </a:rPr>
+                        </m:ctrlPr>
+                      </m:sSubPr>
+                      <m:e>
+                        <m:r>
+                          <a:rPr lang="fr-CA" b="0" i="1" smtClean="0">
+                            <a:latin typeface="Cambria Math" panose="02040503050406030204" pitchFamily="18" charset="0"/>
+                          </a:rPr>
+                          <m:t>𝑢</m:t>
+                        </m:r>
+                      </m:e>
+                      <m:sub>
+                        <m:r>
+                          <a:rPr lang="fr-CA" b="0" i="1" smtClean="0">
+                            <a:latin typeface="Cambria Math" panose="02040503050406030204" pitchFamily="18" charset="0"/>
+                          </a:rPr>
+                          <m:t>𝑖𝑛𝑝𝑢𝑡</m:t>
+                        </m:r>
+                      </m:sub>
+                    </m:sSub>
+                    <m:r>
+                      <a:rPr lang="fr-CA" b="0" i="1" smtClean="0">
+                        <a:latin typeface="Cambria Math" panose="02040503050406030204" pitchFamily="18" charset="0"/>
+                      </a:rPr>
+                      <m:t>=</m:t>
+                    </m:r>
+                    <m:r>
+                      <m:rPr>
+                        <m:sty m:val="p"/>
+                      </m:rPr>
+                      <a:rPr lang="fr-CA" b="0" i="0" smtClean="0">
+                        <a:latin typeface="Cambria Math" panose="02040503050406030204" pitchFamily="18" charset="0"/>
+                      </a:rPr>
+                      <m:t>max</m:t>
+                    </m:r>
+                    <m:r>
+                      <a:rPr lang="fr-CA" b="0" i="1" smtClean="0">
+                        <a:latin typeface="Cambria Math" panose="02040503050406030204" pitchFamily="18" charset="0"/>
+                      </a:rPr>
+                      <m:t>⁡(</m:t>
+                    </m:r>
+                    <m:sSub>
+                      <m:sSubPr>
+                        <m:ctrlPr>
+                          <a:rPr lang="fr-CA" b="0" i="1" smtClean="0">
+                            <a:latin typeface="Cambria Math" panose="02040503050406030204" pitchFamily="18" charset="0"/>
+                          </a:rPr>
+                        </m:ctrlPr>
+                      </m:sSubPr>
+                      <m:e>
+                        <m:r>
+                          <a:rPr lang="fr-CA" b="0" i="1" smtClean="0">
+                            <a:latin typeface="Cambria Math" panose="02040503050406030204" pitchFamily="18" charset="0"/>
+                          </a:rPr>
+                          <m:t>𝑘</m:t>
+                        </m:r>
+                      </m:e>
+                      <m:sub>
+                        <m:r>
+                          <a:rPr lang="fr-CA" b="0" i="1" smtClean="0">
+                            <a:latin typeface="Cambria Math" panose="02040503050406030204" pitchFamily="18" charset="0"/>
+                          </a:rPr>
+                          <m:t>𝑚𝑒𝑑𝑖𝑎𝑛𝑒</m:t>
+                        </m:r>
+                      </m:sub>
+                    </m:sSub>
+                    <m:r>
+                      <a:rPr lang="fr-CA" b="0" i="1" smtClean="0">
+                        <a:latin typeface="Cambria Math" panose="02040503050406030204" pitchFamily="18" charset="0"/>
+                      </a:rPr>
+                      <m:t>−</m:t>
+                    </m:r>
+                    <m:sSub>
+                      <m:sSubPr>
+                        <m:ctrlPr>
+                          <a:rPr lang="fr-CA" b="0" i="1" smtClean="0">
+                            <a:latin typeface="Cambria Math" panose="02040503050406030204" pitchFamily="18" charset="0"/>
+                          </a:rPr>
+                        </m:ctrlPr>
+                      </m:sSubPr>
+                      <m:e>
+                        <m:r>
+                          <a:rPr lang="fr-CA" b="0" i="1" smtClean="0">
+                            <a:latin typeface="Cambria Math" panose="02040503050406030204" pitchFamily="18" charset="0"/>
+                          </a:rPr>
+                          <m:t>𝑘</m:t>
+                        </m:r>
+                      </m:e>
+                      <m:sub>
+                        <m:r>
+                          <a:rPr lang="fr-CA" b="0" i="1" smtClean="0">
+                            <a:latin typeface="Cambria Math" panose="02040503050406030204" pitchFamily="18" charset="0"/>
+                          </a:rPr>
+                          <m:t>𝑚𝑖𝑛</m:t>
+                        </m:r>
+                      </m:sub>
+                    </m:sSub>
+                    <m:r>
+                      <a:rPr lang="fr-CA" b="0" i="1" smtClean="0">
+                        <a:latin typeface="Cambria Math" panose="02040503050406030204" pitchFamily="18" charset="0"/>
+                      </a:rPr>
+                      <m:t>, </m:t>
+                    </m:r>
+                    <m:sSub>
+                      <m:sSubPr>
+                        <m:ctrlPr>
+                          <a:rPr lang="fr-CA" b="0" i="1" smtClean="0">
+                            <a:latin typeface="Cambria Math" panose="02040503050406030204" pitchFamily="18" charset="0"/>
+                          </a:rPr>
+                        </m:ctrlPr>
+                      </m:sSubPr>
+                      <m:e>
+                        <m:r>
+                          <a:rPr lang="fr-CA" b="0" i="1" smtClean="0">
+                            <a:latin typeface="Cambria Math" panose="02040503050406030204" pitchFamily="18" charset="0"/>
+                          </a:rPr>
+                          <m:t>𝑘</m:t>
+                        </m:r>
+                      </m:e>
+                      <m:sub>
+                        <m:r>
+                          <a:rPr lang="fr-CA" b="0" i="1" smtClean="0">
+                            <a:latin typeface="Cambria Math" panose="02040503050406030204" pitchFamily="18" charset="0"/>
+                          </a:rPr>
+                          <m:t>𝑚𝑎𝑥</m:t>
+                        </m:r>
+                      </m:sub>
+                    </m:sSub>
+                    <m:r>
+                      <a:rPr lang="fr-CA" b="0" i="1" smtClean="0">
+                        <a:latin typeface="Cambria Math" panose="02040503050406030204" pitchFamily="18" charset="0"/>
+                      </a:rPr>
+                      <m:t>−</m:t>
+                    </m:r>
+                    <m:sSub>
+                      <m:sSubPr>
+                        <m:ctrlPr>
+                          <a:rPr lang="fr-CA" b="0" i="1" smtClean="0">
+                            <a:latin typeface="Cambria Math" panose="02040503050406030204" pitchFamily="18" charset="0"/>
+                          </a:rPr>
+                        </m:ctrlPr>
+                      </m:sSubPr>
+                      <m:e>
+                        <m:r>
+                          <a:rPr lang="fr-CA" b="0" i="1" smtClean="0">
+                            <a:latin typeface="Cambria Math" panose="02040503050406030204" pitchFamily="18" charset="0"/>
+                          </a:rPr>
+                          <m:t>𝑘</m:t>
+                        </m:r>
+                      </m:e>
+                      <m:sub>
+                        <m:r>
+                          <a:rPr lang="fr-CA" b="0" i="1" smtClean="0">
+                            <a:latin typeface="Cambria Math" panose="02040503050406030204" pitchFamily="18" charset="0"/>
+                          </a:rPr>
+                          <m:t>𝑚𝑒𝑑𝑖𝑎𝑛𝑒</m:t>
+                        </m:r>
+                      </m:sub>
+                    </m:sSub>
+                    <m:r>
+                      <a:rPr lang="fr-CA" b="0" i="0" smtClean="0">
+                        <a:latin typeface="Cambria Math" panose="02040503050406030204" pitchFamily="18" charset="0"/>
+                      </a:rPr>
+                      <m:t>)</m:t>
+                    </m:r>
+                  </m:oMath>
+                </a14:m>
+                <a:endParaRPr lang="fr-FR" dirty="0"/>
+              </a:p>
+            </p:txBody>
+          </p:sp>
+        </mc:Choice>
+        <mc:Fallback>
+          <p:sp>
+            <p:nvSpPr>
+              <p:cNvPr id="3" name="Espace réservé du contenu 2">
+                <a:extLst>
+                  <a:ext uri="{FF2B5EF4-FFF2-40B4-BE49-F238E27FC236}">
+                    <a16:creationId xmlns:a16="http://schemas.microsoft.com/office/drawing/2014/main" id="{A6CA13C1-0552-592F-8A56-718E46BDA011}"/>
+                  </a:ext>
+                </a:extLst>
+              </p:cNvPr>
+              <p:cNvSpPr>
+                <a:spLocks noGrp="1" noRot="1" noChangeAspect="1" noMove="1" noResize="1" noEditPoints="1" noAdjustHandles="1" noChangeArrowheads="1" noChangeShapeType="1" noTextEdit="1"/>
+              </p:cNvSpPr>
+              <p:nvPr>
+                <p:ph idx="1"/>
+              </p:nvPr>
+            </p:nvSpPr>
+            <p:spPr>
+              <a:xfrm>
+                <a:off x="838200" y="1580884"/>
+                <a:ext cx="10515600" cy="4351338"/>
+              </a:xfrm>
+              <a:blipFill>
+                <a:blip r:embed="rId4"/>
+                <a:stretch>
+                  <a:fillRect l="-406" t="-1961" r="-870"/>
+                </a:stretch>
+              </a:blipFill>
+            </p:spPr>
+            <p:txBody>
+              <a:bodyPr/>
+              <a:lstStyle/>
+              <a:p>
+                <a:r>
+                  <a:rPr lang="fr-CA">
+                    <a:noFill/>
+                  </a:rPr>
+                  <a:t> </a:t>
+                </a:r>
+              </a:p>
+            </p:txBody>
+          </p:sp>
+        </mc:Fallback>
+      </mc:AlternateContent>
     </p:spTree>
     <p:extLst>
       <p:ext uri="{BB962C8B-B14F-4D97-AF65-F5344CB8AC3E}">
@@ -5902,6 +7098,293 @@
 </file>
 
 <file path=ppt/slides/slide6.xml><?xml version="1.0" encoding="utf-8"?>
+<p:sld xmlns:a="http://schemas.openxmlformats.org/drawingml/2006/main" xmlns:r="http://schemas.openxmlformats.org/officeDocument/2006/relationships" xmlns:p="http://schemas.openxmlformats.org/presentationml/2006/main">
+  <p:cSld>
+    <p:spTree>
+      <p:nvGrpSpPr>
+        <p:cNvPr id="1" name="">
+          <a:extLst>
+            <a:ext uri="{FF2B5EF4-FFF2-40B4-BE49-F238E27FC236}">
+              <a16:creationId xmlns:a16="http://schemas.microsoft.com/office/drawing/2014/main" id="{4C7F3900-E8F2-B59F-8037-8B8AD280B857}"/>
+            </a:ext>
+          </a:extLst>
+        </p:cNvPr>
+        <p:cNvGrpSpPr/>
+        <p:nvPr/>
+      </p:nvGrpSpPr>
+      <p:grpSpPr>
+        <a:xfrm>
+          <a:off x="0" y="0"/>
+          <a:ext cx="0" cy="0"/>
+          <a:chOff x="0" y="0"/>
+          <a:chExt cx="0" cy="0"/>
+        </a:xfrm>
+      </p:grpSpPr>
+      <mc:AlternateContent xmlns:mc="http://schemas.openxmlformats.org/markup-compatibility/2006" xmlns:a14="http://schemas.microsoft.com/office/drawing/2010/main">
+        <mc:Choice Requires="a14">
+          <p:sp>
+            <p:nvSpPr>
+              <p:cNvPr id="2" name="Titre 1">
+                <a:extLst>
+                  <a:ext uri="{FF2B5EF4-FFF2-40B4-BE49-F238E27FC236}">
+                    <a16:creationId xmlns:a16="http://schemas.microsoft.com/office/drawing/2014/main" id="{DF82B067-B537-3E0F-96D6-2FFA9E4B2202}"/>
+                  </a:ext>
+                </a:extLst>
+              </p:cNvPr>
+              <p:cNvSpPr>
+                <a:spLocks noGrp="1"/>
+              </p:cNvSpPr>
+              <p:nvPr>
+                <p:ph type="title"/>
+              </p:nvPr>
+            </p:nvSpPr>
+            <p:spPr>
+              <a:xfrm>
+                <a:off x="838200" y="255321"/>
+                <a:ext cx="10515600" cy="1325563"/>
+              </a:xfrm>
+            </p:spPr>
+            <p:txBody>
+              <a:bodyPr>
+                <a:normAutofit fontScale="90000"/>
+              </a:bodyPr>
+              <a:lstStyle/>
+              <a:p>
+                <a:r>
+                  <a:rPr lang="fr-FR" dirty="0"/>
+                  <a:t>B) Incertitude sur les données d’entrée </a:t>
+                </a:r>
+                <a14:m>
+                  <m:oMath xmlns:m="http://schemas.openxmlformats.org/officeDocument/2006/math">
+                    <m:sSub>
+                      <m:sSubPr>
+                        <m:ctrlPr>
+                          <a:rPr lang="fr-FR" b="0" i="1" smtClean="0">
+                            <a:latin typeface="Cambria Math" panose="02040503050406030204" pitchFamily="18" charset="0"/>
+                          </a:rPr>
+                        </m:ctrlPr>
+                      </m:sSubPr>
+                      <m:e>
+                        <m:r>
+                          <a:rPr lang="fr-FR" b="0" i="1" smtClean="0">
+                            <a:latin typeface="Cambria Math" panose="02040503050406030204" pitchFamily="18" charset="0"/>
+                          </a:rPr>
+                          <m:t>𝑢</m:t>
+                        </m:r>
+                      </m:e>
+                      <m:sub>
+                        <m:r>
+                          <a:rPr lang="fr-FR" b="0" i="1" smtClean="0">
+                            <a:latin typeface="Cambria Math" panose="02040503050406030204" pitchFamily="18" charset="0"/>
+                          </a:rPr>
+                          <m:t>𝑖𝑛𝑝𝑢𝑡</m:t>
+                        </m:r>
+                      </m:sub>
+                    </m:sSub>
+                  </m:oMath>
+                </a14:m>
+                <a:br>
+                  <a:rPr lang="fr-FR" b="0" dirty="0"/>
+                </a:br>
+                <a:endParaRPr lang="fr-FR" dirty="0"/>
+              </a:p>
+            </p:txBody>
+          </p:sp>
+        </mc:Choice>
+        <mc:Fallback xmlns="">
+          <p:sp>
+            <p:nvSpPr>
+              <p:cNvPr id="2" name="Titre 1">
+                <a:extLst>
+                  <a:ext uri="{FF2B5EF4-FFF2-40B4-BE49-F238E27FC236}">
+                    <a16:creationId xmlns:a16="http://schemas.microsoft.com/office/drawing/2014/main" id="{E42DB292-C1C7-B7A1-2983-182756BDF140}"/>
+                  </a:ext>
+                </a:extLst>
+              </p:cNvPr>
+              <p:cNvSpPr>
+                <a:spLocks noGrp="1" noRot="1" noChangeAspect="1" noMove="1" noResize="1" noEditPoints="1" noAdjustHandles="1" noChangeArrowheads="1" noChangeShapeType="1" noTextEdit="1"/>
+              </p:cNvSpPr>
+              <p:nvPr>
+                <p:ph type="title"/>
+              </p:nvPr>
+            </p:nvSpPr>
+            <p:spPr>
+              <a:xfrm>
+                <a:off x="838200" y="255321"/>
+                <a:ext cx="10515600" cy="1325563"/>
+              </a:xfrm>
+              <a:blipFill>
+                <a:blip r:embed="rId3"/>
+                <a:stretch>
+                  <a:fillRect l="-2087" t="-7834"/>
+                </a:stretch>
+              </a:blipFill>
+            </p:spPr>
+            <p:txBody>
+              <a:bodyPr/>
+              <a:lstStyle/>
+              <a:p>
+                <a:r>
+                  <a:rPr lang="fr-FR">
+                    <a:noFill/>
+                  </a:rPr>
+                  <a:t> </a:t>
+                </a:r>
+              </a:p>
+            </p:txBody>
+          </p:sp>
+        </mc:Fallback>
+      </mc:AlternateContent>
+      <mc:AlternateContent xmlns:mc="http://schemas.openxmlformats.org/markup-compatibility/2006">
+        <mc:Choice xmlns:a14="http://schemas.microsoft.com/office/drawing/2010/main" Requires="a14">
+          <p:sp>
+            <p:nvSpPr>
+              <p:cNvPr id="3" name="Espace réservé du contenu 2">
+                <a:extLst>
+                  <a:ext uri="{FF2B5EF4-FFF2-40B4-BE49-F238E27FC236}">
+                    <a16:creationId xmlns:a16="http://schemas.microsoft.com/office/drawing/2014/main" id="{6B684BD0-48B3-023C-548F-8DC561A6A601}"/>
+                  </a:ext>
+                </a:extLst>
+              </p:cNvPr>
+              <p:cNvSpPr>
+                <a:spLocks noGrp="1"/>
+              </p:cNvSpPr>
+              <p:nvPr>
+                <p:ph idx="1"/>
+              </p:nvPr>
+            </p:nvSpPr>
+            <p:spPr>
+              <a:xfrm>
+                <a:off x="838199" y="1580884"/>
+                <a:ext cx="4080309" cy="3597508"/>
+              </a:xfrm>
+            </p:spPr>
+            <p:txBody>
+              <a:bodyPr>
+                <a:normAutofit/>
+              </a:bodyPr>
+              <a:lstStyle/>
+              <a:p>
+                <a:r>
+                  <a:rPr lang="fr-FR" sz="2000" dirty="0"/>
+                  <a:t>Les graphiques suivants présentent la fonction de probabilité ainsi que la fonction de probabilité cumulative de la SRQ.</a:t>
+                </a:r>
+              </a:p>
+              <a:p>
+                <a:r>
+                  <a:rPr lang="fr-FR" sz="2000" dirty="0"/>
+                  <a:t>On observe un résultat assez satisfaisant.</a:t>
+                </a:r>
+              </a:p>
+              <a:p>
+                <a:r>
+                  <a:rPr lang="fr-FR" sz="2000" dirty="0"/>
+                  <a:t>L’intervalle maximal est calculé :</a:t>
+                </a:r>
+                <a:br>
+                  <a:rPr lang="fr-FR" sz="2000" dirty="0"/>
+                </a:br>
+                <a14:m>
+                  <m:oMath xmlns:m="http://schemas.openxmlformats.org/officeDocument/2006/math">
+                    <m:sSub>
+                      <m:sSubPr>
+                        <m:ctrlPr>
+                          <a:rPr lang="fr-CA" sz="2000" b="1" i="1" smtClean="0">
+                            <a:latin typeface="Cambria Math" panose="02040503050406030204" pitchFamily="18" charset="0"/>
+                          </a:rPr>
+                        </m:ctrlPr>
+                      </m:sSubPr>
+                      <m:e>
+                        <m:r>
+                          <a:rPr lang="fr-CA" sz="2000" b="1" i="1" smtClean="0">
+                            <a:latin typeface="Cambria Math" panose="02040503050406030204" pitchFamily="18" charset="0"/>
+                          </a:rPr>
+                          <m:t>𝒖</m:t>
+                        </m:r>
+                      </m:e>
+                      <m:sub>
+                        <m:r>
+                          <a:rPr lang="fr-CA" sz="2000" b="1" i="1" smtClean="0">
+                            <a:latin typeface="Cambria Math" panose="02040503050406030204" pitchFamily="18" charset="0"/>
+                          </a:rPr>
+                          <m:t>𝒊𝒏𝒑𝒖𝒕</m:t>
+                        </m:r>
+                      </m:sub>
+                    </m:sSub>
+                    <m:r>
+                      <a:rPr lang="fr-CA" sz="2000" b="1" i="1" smtClean="0">
+                        <a:latin typeface="Cambria Math" panose="02040503050406030204" pitchFamily="18" charset="0"/>
+                      </a:rPr>
+                      <m:t>= </m:t>
+                    </m:r>
+                  </m:oMath>
+                </a14:m>
+                <a:endParaRPr lang="fr-FR" sz="2000" b="1" dirty="0"/>
+              </a:p>
+              <a:p>
+                <a:endParaRPr lang="fr-FR" b="1" dirty="0"/>
+              </a:p>
+            </p:txBody>
+          </p:sp>
+        </mc:Choice>
+        <mc:Fallback>
+          <p:sp>
+            <p:nvSpPr>
+              <p:cNvPr id="3" name="Espace réservé du contenu 2">
+                <a:extLst>
+                  <a:ext uri="{FF2B5EF4-FFF2-40B4-BE49-F238E27FC236}">
+                    <a16:creationId xmlns:a16="http://schemas.microsoft.com/office/drawing/2014/main" id="{6B684BD0-48B3-023C-548F-8DC561A6A601}"/>
+                  </a:ext>
+                </a:extLst>
+              </p:cNvPr>
+              <p:cNvSpPr>
+                <a:spLocks noGrp="1" noRot="1" noChangeAspect="1" noMove="1" noResize="1" noEditPoints="1" noAdjustHandles="1" noChangeArrowheads="1" noChangeShapeType="1" noTextEdit="1"/>
+              </p:cNvSpPr>
+              <p:nvPr>
+                <p:ph idx="1"/>
+              </p:nvPr>
+            </p:nvSpPr>
+            <p:spPr>
+              <a:xfrm>
+                <a:off x="838199" y="1580884"/>
+                <a:ext cx="4080309" cy="3597508"/>
+              </a:xfrm>
+              <a:blipFill>
+                <a:blip r:embed="rId4"/>
+                <a:stretch>
+                  <a:fillRect l="-1194" t="-1525"/>
+                </a:stretch>
+              </a:blipFill>
+            </p:spPr>
+            <p:txBody>
+              <a:bodyPr/>
+              <a:lstStyle/>
+              <a:p>
+                <a:r>
+                  <a:rPr lang="fr-CA">
+                    <a:noFill/>
+                  </a:rPr>
+                  <a:t> </a:t>
+                </a:r>
+              </a:p>
+            </p:txBody>
+          </p:sp>
+        </mc:Fallback>
+      </mc:AlternateContent>
+    </p:spTree>
+    <p:extLst>
+      <p:ext uri="{BB962C8B-B14F-4D97-AF65-F5344CB8AC3E}">
+        <p14:creationId xmlns:p14="http://schemas.microsoft.com/office/powerpoint/2010/main" val="135364426"/>
+      </p:ext>
+    </p:extLst>
+  </p:cSld>
+  <p:clrMapOvr>
+    <a:masterClrMapping/>
+  </p:clrMapOvr>
+</p:sld>
+</file>
+
+<file path=ppt/slides/slide7.xml><?xml version="1.0" encoding="utf-8"?>
 <p:sld xmlns:a="http://schemas.openxmlformats.org/drawingml/2006/main" xmlns:r="http://schemas.openxmlformats.org/officeDocument/2006/relationships" xmlns:p="http://schemas.openxmlformats.org/presentationml/2006/main">
   <p:cSld>
     <p:spTree>
@@ -6039,8 +7522,8 @@
           </p:sp>
         </mc:Fallback>
       </mc:AlternateContent>
-      <mc:AlternateContent xmlns:mc="http://schemas.openxmlformats.org/markup-compatibility/2006" xmlns:a14="http://schemas.microsoft.com/office/drawing/2010/main">
-        <mc:Choice Requires="a14">
+      <mc:AlternateContent xmlns:mc="http://schemas.openxmlformats.org/markup-compatibility/2006">
+        <mc:Choice xmlns:a14="http://schemas.microsoft.com/office/drawing/2010/main" Requires="a14">
           <p:sp>
             <p:nvSpPr>
               <p:cNvPr id="3" name="Espace réservé du contenu 2">
@@ -6173,30 +7656,30 @@
                     <m:sSub>
                       <m:sSubPr>
                         <m:ctrlPr>
-                          <a:rPr lang="fr-FR" b="0" i="1" smtClean="0">
+                          <a:rPr lang="fr-FR" b="1" i="1" smtClean="0">
                             <a:latin typeface="Cambria Math" panose="02040503050406030204" pitchFamily="18" charset="0"/>
                           </a:rPr>
                         </m:ctrlPr>
                       </m:sSubPr>
                       <m:e>
                         <m:r>
-                          <a:rPr lang="fr-FR" b="0" i="1" smtClean="0">
-                            <a:latin typeface="Cambria Math" panose="02040503050406030204" pitchFamily="18" charset="0"/>
-                          </a:rPr>
-                          <m:t>𝑢</m:t>
+                          <a:rPr lang="fr-FR" b="1" i="1" smtClean="0">
+                            <a:latin typeface="Cambria Math" panose="02040503050406030204" pitchFamily="18" charset="0"/>
+                          </a:rPr>
+                          <m:t>𝒖</m:t>
                         </m:r>
                       </m:e>
                       <m:sub>
                         <m:r>
-                          <a:rPr lang="fr-FR" b="0" i="1" smtClean="0">
-                            <a:latin typeface="Cambria Math" panose="02040503050406030204" pitchFamily="18" charset="0"/>
-                          </a:rPr>
-                          <m:t>𝐷</m:t>
+                          <a:rPr lang="fr-FR" b="1" i="1" smtClean="0">
+                            <a:latin typeface="Cambria Math" panose="02040503050406030204" pitchFamily="18" charset="0"/>
+                          </a:rPr>
+                          <m:t>𝑫</m:t>
                         </m:r>
                       </m:sub>
                     </m:sSub>
                     <m:r>
-                      <a:rPr lang="fr-FR" b="0" i="1" smtClean="0">
+                      <a:rPr lang="fr-FR" b="1" i="1" smtClean="0">
                         <a:latin typeface="Cambria Math" panose="02040503050406030204" pitchFamily="18" charset="0"/>
                       </a:rPr>
                       <m:t>=</m:t>
@@ -6205,7 +7688,7 @@
                       <m:radPr>
                         <m:degHide m:val="on"/>
                         <m:ctrlPr>
-                          <a:rPr lang="fr-FR" b="0" i="1" smtClean="0">
+                          <a:rPr lang="fr-FR" b="1" i="1" smtClean="0">
                             <a:latin typeface="Cambria Math" panose="02040503050406030204" pitchFamily="18" charset="0"/>
                           </a:rPr>
                         </m:ctrlPr>
@@ -6215,79 +7698,79 @@
                         <m:sSubSup>
                           <m:sSubSupPr>
                             <m:ctrlPr>
-                              <a:rPr lang="fr-FR" b="0" i="1" smtClean="0">
+                              <a:rPr lang="fr-FR" b="1" i="1" smtClean="0">
                                 <a:latin typeface="Cambria Math" panose="02040503050406030204" pitchFamily="18" charset="0"/>
                               </a:rPr>
                             </m:ctrlPr>
                           </m:sSubSupPr>
                           <m:e>
                             <m:r>
-                              <a:rPr lang="fr-FR" b="0" i="1" smtClean="0">
+                              <a:rPr lang="fr-FR" b="1" i="1" smtClean="0">
                                 <a:latin typeface="Cambria Math" panose="02040503050406030204" pitchFamily="18" charset="0"/>
                               </a:rPr>
-                              <m:t>𝑆</m:t>
+                              <m:t>𝑺</m:t>
                             </m:r>
                           </m:e>
                           <m:sub>
                             <m:r>
-                              <a:rPr lang="fr-FR" b="0" i="1" smtClean="0">
+                              <a:rPr lang="fr-FR" b="1" i="1" smtClean="0">
                                 <a:latin typeface="Cambria Math" panose="02040503050406030204" pitchFamily="18" charset="0"/>
                               </a:rPr>
-                              <m:t>𝑟</m:t>
+                              <m:t>𝒓</m:t>
                             </m:r>
                           </m:sub>
                           <m:sup>
                             <m:r>
-                              <a:rPr lang="fr-FR" b="0" i="1" smtClean="0">
+                              <a:rPr lang="fr-FR" b="1" i="1" smtClean="0">
                                 <a:latin typeface="Cambria Math" panose="02040503050406030204" pitchFamily="18" charset="0"/>
                               </a:rPr>
-                              <m:t>2</m:t>
+                              <m:t>𝟐</m:t>
+                            </m:r>
+                          </m:sup>
+                        </m:sSubSup>
+                        <m:r>
+                          <a:rPr lang="fr-FR" b="1" i="1">
+                            <a:latin typeface="Cambria Math" panose="02040503050406030204" pitchFamily="18" charset="0"/>
+                          </a:rPr>
+                          <m:t>+</m:t>
+                        </m:r>
+                        <m:sSubSup>
+                          <m:sSubSupPr>
+                            <m:ctrlPr>
+                              <a:rPr lang="fr-FR" b="1" i="1">
+                                <a:latin typeface="Cambria Math" panose="02040503050406030204" pitchFamily="18" charset="0"/>
+                              </a:rPr>
+                            </m:ctrlPr>
+                          </m:sSubSupPr>
+                          <m:e>
+                            <m:r>
+                              <a:rPr lang="fr-FR" b="1" i="1">
+                                <a:latin typeface="Cambria Math" panose="02040503050406030204" pitchFamily="18" charset="0"/>
+                              </a:rPr>
+                              <m:t>𝑩</m:t>
+                            </m:r>
+                          </m:e>
+                          <m:sub>
+                            <m:r>
+                              <a:rPr lang="fr-FR" b="1" i="1">
+                                <a:latin typeface="Cambria Math" panose="02040503050406030204" pitchFamily="18" charset="0"/>
+                              </a:rPr>
+                              <m:t>𝒓</m:t>
+                            </m:r>
+                          </m:sub>
+                          <m:sup>
+                            <m:r>
+                              <a:rPr lang="fr-FR" b="1" i="1">
+                                <a:latin typeface="Cambria Math" panose="02040503050406030204" pitchFamily="18" charset="0"/>
+                              </a:rPr>
+                              <m:t>𝟐</m:t>
                             </m:r>
                           </m:sup>
                         </m:sSubSup>
                       </m:e>
                     </m:rad>
                     <m:r>
-                      <a:rPr lang="fr-FR" b="0" i="1" smtClean="0">
-                        <a:latin typeface="Cambria Math" panose="02040503050406030204" pitchFamily="18" charset="0"/>
-                      </a:rPr>
-                      <m:t>+</m:t>
-                    </m:r>
-                    <m:sSubSup>
-                      <m:sSubSupPr>
-                        <m:ctrlPr>
-                          <a:rPr lang="fr-FR" b="0" i="1" smtClean="0">
-                            <a:latin typeface="Cambria Math" panose="02040503050406030204" pitchFamily="18" charset="0"/>
-                          </a:rPr>
-                        </m:ctrlPr>
-                      </m:sSubSupPr>
-                      <m:e>
-                        <m:r>
-                          <a:rPr lang="fr-FR" b="0" i="1" smtClean="0">
-                            <a:latin typeface="Cambria Math" panose="02040503050406030204" pitchFamily="18" charset="0"/>
-                          </a:rPr>
-                          <m:t>𝐵</m:t>
-                        </m:r>
-                      </m:e>
-                      <m:sub>
-                        <m:r>
-                          <a:rPr lang="fr-FR" b="0" i="1" smtClean="0">
-                            <a:latin typeface="Cambria Math" panose="02040503050406030204" pitchFamily="18" charset="0"/>
-                          </a:rPr>
-                          <m:t>𝑟</m:t>
-                        </m:r>
-                      </m:sub>
-                      <m:sup>
-                        <m:r>
-                          <a:rPr lang="fr-FR" b="0" i="1" smtClean="0">
-                            <a:latin typeface="Cambria Math" panose="02040503050406030204" pitchFamily="18" charset="0"/>
-                          </a:rPr>
-                          <m:t>2</m:t>
-                        </m:r>
-                      </m:sup>
-                    </m:sSubSup>
-                    <m:r>
-                      <a:rPr lang="fr-FR" b="0" i="1" smtClean="0">
+                      <a:rPr lang="fr-FR" b="1" i="1" smtClean="0">
                         <a:latin typeface="Cambria Math" panose="02040503050406030204" pitchFamily="18" charset="0"/>
                       </a:rPr>
                       <m:t>=</m:t>
@@ -6296,7 +7779,7 @@
                       <m:radPr>
                         <m:degHide m:val="on"/>
                         <m:ctrlPr>
-                          <a:rPr lang="fr-FR" b="0" i="1" smtClean="0">
+                          <a:rPr lang="fr-FR" b="1" i="1" smtClean="0">
                             <a:latin typeface="Cambria Math" panose="02040503050406030204" pitchFamily="18" charset="0"/>
                           </a:rPr>
                         </m:ctrlPr>
@@ -6306,30 +7789,42 @@
                         <m:sSup>
                           <m:sSupPr>
                             <m:ctrlPr>
-                              <a:rPr lang="fr-FR" b="0" i="1" smtClean="0">
+                              <a:rPr lang="fr-FR" b="1" i="1" smtClean="0">
                                 <a:latin typeface="Cambria Math" panose="02040503050406030204" pitchFamily="18" charset="0"/>
                               </a:rPr>
                             </m:ctrlPr>
                           </m:sSupPr>
                           <m:e>
                             <m:r>
-                              <a:rPr lang="fr-FR" b="0" i="1" smtClean="0">
+                              <a:rPr lang="fr-FR" b="1" i="1" smtClean="0">
                                 <a:latin typeface="Cambria Math" panose="02040503050406030204" pitchFamily="18" charset="0"/>
                               </a:rPr>
-                              <m:t>10.0</m:t>
+                              <m:t>𝟏𝟎</m:t>
+                            </m:r>
+                            <m:r>
+                              <a:rPr lang="fr-FR" b="1" i="1" smtClean="0">
+                                <a:latin typeface="Cambria Math" panose="02040503050406030204" pitchFamily="18" charset="0"/>
+                              </a:rPr>
+                              <m:t>.</m:t>
+                            </m:r>
+                            <m:r>
+                              <a:rPr lang="fr-FR" b="1" i="1" smtClean="0">
+                                <a:latin typeface="Cambria Math" panose="02040503050406030204" pitchFamily="18" charset="0"/>
+                              </a:rPr>
+                              <m:t>𝟎</m:t>
                             </m:r>
                           </m:e>
                           <m:sup>
                             <m:r>
-                              <a:rPr lang="fr-FR" b="0" i="1" smtClean="0">
+                              <a:rPr lang="fr-FR" b="1" i="1" smtClean="0">
                                 <a:latin typeface="Cambria Math" panose="02040503050406030204" pitchFamily="18" charset="0"/>
                               </a:rPr>
-                              <m:t>2</m:t>
+                              <m:t>𝟐</m:t>
                             </m:r>
                           </m:sup>
                         </m:sSup>
                         <m:r>
-                          <a:rPr lang="fr-FR" b="0" i="1" smtClean="0">
+                          <a:rPr lang="fr-FR" b="1" i="1" smtClean="0">
                             <a:latin typeface="Cambria Math" panose="02040503050406030204" pitchFamily="18" charset="0"/>
                           </a:rPr>
                           <m:t>+</m:t>
@@ -6337,75 +7832,111 @@
                         <m:sSup>
                           <m:sSupPr>
                             <m:ctrlPr>
-                              <a:rPr lang="fr-FR" b="0" i="1" smtClean="0">
+                              <a:rPr lang="fr-FR" b="1" i="1" smtClean="0">
                                 <a:latin typeface="Cambria Math" panose="02040503050406030204" pitchFamily="18" charset="0"/>
                               </a:rPr>
                             </m:ctrlPr>
                           </m:sSupPr>
                           <m:e>
                             <m:r>
-                              <a:rPr lang="fr-FR" b="0" i="1" smtClean="0">
+                              <a:rPr lang="fr-FR" b="1" i="1" smtClean="0">
                                 <a:latin typeface="Cambria Math" panose="02040503050406030204" pitchFamily="18" charset="0"/>
                               </a:rPr>
-                              <m:t>14.7</m:t>
+                              <m:t>𝟏𝟒</m:t>
+                            </m:r>
+                            <m:r>
+                              <a:rPr lang="fr-FR" b="1" i="1" smtClean="0">
+                                <a:latin typeface="Cambria Math" panose="02040503050406030204" pitchFamily="18" charset="0"/>
+                              </a:rPr>
+                              <m:t>.</m:t>
+                            </m:r>
+                            <m:r>
+                              <a:rPr lang="fr-FR" b="1" i="1" smtClean="0">
+                                <a:latin typeface="Cambria Math" panose="02040503050406030204" pitchFamily="18" charset="0"/>
+                              </a:rPr>
+                              <m:t>𝟕</m:t>
                             </m:r>
                           </m:e>
                           <m:sup>
                             <m:r>
-                              <a:rPr lang="fr-FR" b="0" i="1" smtClean="0">
+                              <a:rPr lang="fr-FR" b="1" i="1" smtClean="0">
                                 <a:latin typeface="Cambria Math" panose="02040503050406030204" pitchFamily="18" charset="0"/>
                               </a:rPr>
-                              <m:t>2</m:t>
+                              <m:t>𝟐</m:t>
                             </m:r>
                           </m:sup>
                         </m:sSup>
                       </m:e>
                     </m:rad>
                     <m:r>
-                      <a:rPr lang="fr-FR" b="0" i="1" smtClean="0">
+                      <a:rPr lang="fr-FR" b="1" i="1" smtClean="0">
                         <a:latin typeface="Cambria Math" panose="02040503050406030204" pitchFamily="18" charset="0"/>
                       </a:rPr>
-                      <m:t>=17.8 </m:t>
+                      <m:t>=</m:t>
                     </m:r>
                     <m:r>
-                      <a:rPr lang="fr-FR" b="0" i="1" smtClean="0">
+                      <a:rPr lang="fr-FR" b="1" i="1" smtClean="0">
                         <a:latin typeface="Cambria Math" panose="02040503050406030204" pitchFamily="18" charset="0"/>
                       </a:rPr>
-                      <m:t>𝜇</m:t>
+                      <m:t>𝟏𝟕</m:t>
+                    </m:r>
+                    <m:r>
+                      <a:rPr lang="fr-FR" b="1" i="1" smtClean="0">
+                        <a:latin typeface="Cambria Math" panose="02040503050406030204" pitchFamily="18" charset="0"/>
+                      </a:rPr>
+                      <m:t>.</m:t>
+                    </m:r>
+                    <m:r>
+                      <a:rPr lang="fr-FR" b="1" i="1" smtClean="0">
+                        <a:latin typeface="Cambria Math" panose="02040503050406030204" pitchFamily="18" charset="0"/>
+                      </a:rPr>
+                      <m:t>𝟖</m:t>
+                    </m:r>
+                    <m:r>
+                      <a:rPr lang="fr-FR" b="1" i="1" smtClean="0">
+                        <a:latin typeface="Cambria Math" panose="02040503050406030204" pitchFamily="18" charset="0"/>
+                      </a:rPr>
+                      <m:t> </m:t>
+                    </m:r>
+                    <m:r>
+                      <a:rPr lang="fr-FR" b="1" i="1" smtClean="0">
+                        <a:latin typeface="Cambria Math" panose="02040503050406030204" pitchFamily="18" charset="0"/>
+                      </a:rPr>
+                      <m:t>𝝁</m:t>
                     </m:r>
                     <m:sSup>
                       <m:sSupPr>
                         <m:ctrlPr>
-                          <a:rPr lang="fr-FR" b="0" i="1" smtClean="0">
+                          <a:rPr lang="fr-FR" b="1" i="1" smtClean="0">
                             <a:latin typeface="Cambria Math" panose="02040503050406030204" pitchFamily="18" charset="0"/>
                           </a:rPr>
                         </m:ctrlPr>
                       </m:sSupPr>
                       <m:e>
                         <m:r>
-                          <a:rPr lang="fr-FR" b="0" i="1" smtClean="0">
-                            <a:latin typeface="Cambria Math" panose="02040503050406030204" pitchFamily="18" charset="0"/>
-                          </a:rPr>
-                          <m:t>𝑚</m:t>
+                          <a:rPr lang="fr-FR" b="1" i="1" smtClean="0">
+                            <a:latin typeface="Cambria Math" panose="02040503050406030204" pitchFamily="18" charset="0"/>
+                          </a:rPr>
+                          <m:t>𝒎</m:t>
                         </m:r>
                       </m:e>
                       <m:sup>
                         <m:r>
-                          <a:rPr lang="fr-FR" b="0" i="1" smtClean="0">
-                            <a:latin typeface="Cambria Math" panose="02040503050406030204" pitchFamily="18" charset="0"/>
-                          </a:rPr>
-                          <m:t>2</m:t>
+                          <a:rPr lang="fr-FR" b="1" i="1" smtClean="0">
+                            <a:latin typeface="Cambria Math" panose="02040503050406030204" pitchFamily="18" charset="0"/>
+                          </a:rPr>
+                          <m:t>𝟐</m:t>
                         </m:r>
                       </m:sup>
                     </m:sSup>
                   </m:oMath>
                 </a14:m>
-                <a:endParaRPr lang="fr-FR" dirty="0"/>
+                <a:endParaRPr lang="fr-FR" b="1" dirty="0"/>
               </a:p>
             </p:txBody>
           </p:sp>
         </mc:Choice>
-        <mc:Fallback xmlns="">
+        <mc:Fallback>
           <p:sp>
             <p:nvSpPr>
               <p:cNvPr id="3" name="Espace réservé du contenu 2">
@@ -6435,7 +7966,7 @@
               <a:lstStyle/>
               <a:p>
                 <a:r>
-                  <a:rPr lang="fr-FR">
+                  <a:rPr lang="fr-CA">
                     <a:noFill/>
                   </a:rPr>
                   <a:t> </a:t>
@@ -6458,7 +7989,7 @@
 </p:sld>
 </file>
 
-<file path=ppt/slides/slide7.xml><?xml version="1.0" encoding="utf-8"?>
+<file path=ppt/slides/slide8.xml><?xml version="1.0" encoding="utf-8"?>
 <p:sld xmlns:a="http://schemas.openxmlformats.org/drawingml/2006/main" xmlns:r="http://schemas.openxmlformats.org/officeDocument/2006/relationships" xmlns:p="http://schemas.openxmlformats.org/presentationml/2006/main">
   <p:cSld>
     <p:spTree>
@@ -6739,7 +8270,7 @@
 </p:sld>
 </file>
 
-<file path=ppt/slides/slide8.xml><?xml version="1.0" encoding="utf-8"?>
+<file path=ppt/slides/slide9.xml><?xml version="1.0" encoding="utf-8"?>
 <p:sld xmlns:a="http://schemas.openxmlformats.org/drawingml/2006/main" xmlns:r="http://schemas.openxmlformats.org/officeDocument/2006/relationships" xmlns:p="http://schemas.openxmlformats.org/presentationml/2006/main">
   <p:cSld>
     <p:spTree>
@@ -7254,196 +8785,6 @@
     <p:extLst>
       <p:ext uri="{BB962C8B-B14F-4D97-AF65-F5344CB8AC3E}">
         <p14:creationId xmlns:p14="http://schemas.microsoft.com/office/powerpoint/2010/main" val="848531350"/>
-      </p:ext>
-    </p:extLst>
-  </p:cSld>
-  <p:clrMapOvr>
-    <a:masterClrMapping/>
-  </p:clrMapOvr>
-</p:sld>
-</file>
-
-<file path=ppt/slides/slide9.xml><?xml version="1.0" encoding="utf-8"?>
-<p:sld xmlns:a="http://schemas.openxmlformats.org/drawingml/2006/main" xmlns:r="http://schemas.openxmlformats.org/officeDocument/2006/relationships" xmlns:p="http://schemas.openxmlformats.org/presentationml/2006/main">
-  <p:cSld>
-    <p:spTree>
-      <p:nvGrpSpPr>
-        <p:cNvPr id="1" name=""/>
-        <p:cNvGrpSpPr/>
-        <p:nvPr/>
-      </p:nvGrpSpPr>
-      <p:grpSpPr>
-        <a:xfrm>
-          <a:off x="0" y="0"/>
-          <a:ext cx="0" cy="0"/>
-          <a:chOff x="0" y="0"/>
-          <a:chExt cx="0" cy="0"/>
-        </a:xfrm>
-      </p:grpSpPr>
-      <p:sp>
-        <p:nvSpPr>
-          <p:cNvPr id="2" name="Titre 1">
-            <a:extLst>
-              <a:ext uri="{FF2B5EF4-FFF2-40B4-BE49-F238E27FC236}">
-                <a16:creationId xmlns:a16="http://schemas.microsoft.com/office/drawing/2014/main" id="{952FD1E7-D507-F3B9-06EA-C4D755151F65}"/>
-              </a:ext>
-            </a:extLst>
-          </p:cNvPr>
-          <p:cNvSpPr>
-            <a:spLocks noGrp="1"/>
-          </p:cNvSpPr>
-          <p:nvPr>
-            <p:ph type="title"/>
-          </p:nvPr>
-        </p:nvSpPr>
-        <p:spPr/>
-        <p:txBody>
-          <a:bodyPr/>
-          <a:lstStyle/>
-          <a:p>
-            <a:r>
-              <a:rPr lang="fr-FR" dirty="0"/>
-              <a:t>Interprétation de l’intervalle de confiance </a:t>
-            </a:r>
-          </a:p>
-        </p:txBody>
-      </p:sp>
-      <mc:AlternateContent xmlns:mc="http://schemas.openxmlformats.org/markup-compatibility/2006" xmlns:a14="http://schemas.microsoft.com/office/drawing/2010/main">
-        <mc:Choice Requires="a14">
-          <p:sp>
-            <p:nvSpPr>
-              <p:cNvPr id="3" name="Espace réservé du contenu 2">
-                <a:extLst>
-                  <a:ext uri="{FF2B5EF4-FFF2-40B4-BE49-F238E27FC236}">
-                    <a16:creationId xmlns:a16="http://schemas.microsoft.com/office/drawing/2014/main" id="{5F231FAE-DF1D-EF42-B4E7-03EBF13AC650}"/>
-                  </a:ext>
-                </a:extLst>
-              </p:cNvPr>
-              <p:cNvSpPr>
-                <a:spLocks noGrp="1"/>
-              </p:cNvSpPr>
-              <p:nvPr>
-                <p:ph idx="1"/>
-              </p:nvPr>
-            </p:nvSpPr>
-            <p:spPr/>
-            <p:txBody>
-              <a:bodyPr/>
-              <a:lstStyle/>
-              <a:p>
-                <a:r>
-                  <a:rPr lang="fr-FR" b="0" dirty="0">
-                    <a:latin typeface="Cambria Math" panose="02040503050406030204" pitchFamily="18" charset="0"/>
-                  </a:rPr>
-                  <a:t>E par rapport à </a:t>
-                </a:r>
-                <a:r>
-                  <a:rPr lang="fr-FR" b="0" dirty="0" err="1">
-                    <a:latin typeface="Cambria Math" panose="02040503050406030204" pitchFamily="18" charset="0"/>
-                  </a:rPr>
-                  <a:t>u_val</a:t>
-                </a:r>
-                <a:r>
-                  <a:rPr lang="fr-FR" b="0" dirty="0">
-                    <a:latin typeface="Cambria Math" panose="02040503050406030204" pitchFamily="18" charset="0"/>
-                  </a:rPr>
-                  <a:t> ?</a:t>
-                </a:r>
-              </a:p>
-              <a:p>
-                <a:endParaRPr lang="fr-FR" b="0" i="1" dirty="0">
-                  <a:latin typeface="Cambria Math" panose="02040503050406030204" pitchFamily="18" charset="0"/>
-                </a:endParaRPr>
-              </a:p>
-              <a:p>
-                <a14:m>
-                  <m:oMath xmlns:m="http://schemas.openxmlformats.org/officeDocument/2006/math">
-                    <m:sSub>
-                      <m:sSubPr>
-                        <m:ctrlPr>
-                          <a:rPr lang="fr-FR" b="0" i="1" smtClean="0">
-                            <a:latin typeface="Cambria Math" panose="02040503050406030204" pitchFamily="18" charset="0"/>
-                          </a:rPr>
-                        </m:ctrlPr>
-                      </m:sSubPr>
-                      <m:e>
-                        <m:r>
-                          <a:rPr lang="fr-FR" b="0" i="1" smtClean="0">
-                            <a:latin typeface="Cambria Math" panose="02040503050406030204" pitchFamily="18" charset="0"/>
-                          </a:rPr>
-                          <m:t>𝑢</m:t>
-                        </m:r>
-                      </m:e>
-                      <m:sub>
-                        <m:r>
-                          <a:rPr lang="fr-FR" b="0" i="1" smtClean="0">
-                            <a:latin typeface="Cambria Math" panose="02040503050406030204" pitchFamily="18" charset="0"/>
-                          </a:rPr>
-                          <m:t>𝐷</m:t>
-                        </m:r>
-                      </m:sub>
-                    </m:sSub>
-                  </m:oMath>
-                </a14:m>
-                <a:r>
-                  <a:rPr lang="fr-FR" dirty="0"/>
-                  <a:t> semble être l’erreur prédominante dans la validation </a:t>
-                </a:r>
-                <a:r>
-                  <a:rPr lang="fr-FR" dirty="0">
-                    <a:sym typeface="Wingdings" panose="05000000000000000000" pitchFamily="2" charset="2"/>
-                  </a:rPr>
-                  <a:t> être plus précis sur les expériences  </a:t>
-                </a:r>
-                <a:endParaRPr lang="fr-FR" dirty="0"/>
-              </a:p>
-            </p:txBody>
-          </p:sp>
-        </mc:Choice>
-        <mc:Fallback xmlns="">
-          <p:sp>
-            <p:nvSpPr>
-              <p:cNvPr id="3" name="Espace réservé du contenu 2">
-                <a:extLst>
-                  <a:ext uri="{FF2B5EF4-FFF2-40B4-BE49-F238E27FC236}">
-                    <a16:creationId xmlns:a16="http://schemas.microsoft.com/office/drawing/2014/main" id="{5F231FAE-DF1D-EF42-B4E7-03EBF13AC650}"/>
-                  </a:ext>
-                </a:extLst>
-              </p:cNvPr>
-              <p:cNvSpPr>
-                <a:spLocks noGrp="1" noRot="1" noChangeAspect="1" noMove="1" noResize="1" noEditPoints="1" noAdjustHandles="1" noChangeArrowheads="1" noChangeShapeType="1" noTextEdit="1"/>
-              </p:cNvSpPr>
-              <p:nvPr>
-                <p:ph idx="1"/>
-              </p:nvPr>
-            </p:nvSpPr>
-            <p:spPr>
-              <a:blipFill>
-                <a:blip r:embed="rId2"/>
-                <a:stretch>
-                  <a:fillRect l="-1043" t="-2381"/>
-                </a:stretch>
-              </a:blipFill>
-            </p:spPr>
-            <p:txBody>
-              <a:bodyPr/>
-              <a:lstStyle/>
-              <a:p>
-                <a:r>
-                  <a:rPr lang="fr-FR">
-                    <a:noFill/>
-                  </a:rPr>
-                  <a:t> </a:t>
-                </a:r>
-              </a:p>
-            </p:txBody>
-          </p:sp>
-        </mc:Fallback>
-      </mc:AlternateContent>
-    </p:spTree>
-    <p:extLst>
-      <p:ext uri="{BB962C8B-B14F-4D97-AF65-F5344CB8AC3E}">
-        <p14:creationId xmlns:p14="http://schemas.microsoft.com/office/powerpoint/2010/main" val="1935114118"/>
       </p:ext>
     </p:extLst>
   </p:cSld>
@@ -7766,4 +9107,319 @@
     </a:ext>
   </a:extLst>
 </a:theme>
+</file>
+
+<file path=ppt/theme/theme2.xml><?xml version="1.0" encoding="utf-8"?>
+<a:theme xmlns:a="http://schemas.openxmlformats.org/drawingml/2006/main" name="Thème Office">
+  <a:themeElements>
+    <a:clrScheme name="Office">
+      <a:dk1>
+        <a:sysClr val="windowText" lastClr="000000"/>
+      </a:dk1>
+      <a:lt1>
+        <a:sysClr val="window" lastClr="FFFFFF"/>
+      </a:lt1>
+      <a:dk2>
+        <a:srgbClr val="0E2841"/>
+      </a:dk2>
+      <a:lt2>
+        <a:srgbClr val="E8E8E8"/>
+      </a:lt2>
+      <a:accent1>
+        <a:srgbClr val="156082"/>
+      </a:accent1>
+      <a:accent2>
+        <a:srgbClr val="E97132"/>
+      </a:accent2>
+      <a:accent3>
+        <a:srgbClr val="196B24"/>
+      </a:accent3>
+      <a:accent4>
+        <a:srgbClr val="0F9ED5"/>
+      </a:accent4>
+      <a:accent5>
+        <a:srgbClr val="A02B93"/>
+      </a:accent5>
+      <a:accent6>
+        <a:srgbClr val="4EA72E"/>
+      </a:accent6>
+      <a:hlink>
+        <a:srgbClr val="467886"/>
+      </a:hlink>
+      <a:folHlink>
+        <a:srgbClr val="96607D"/>
+      </a:folHlink>
+    </a:clrScheme>
+    <a:fontScheme name="Office">
+      <a:majorFont>
+        <a:latin typeface="Aptos Display" panose="02110004020202020204"/>
+        <a:ea typeface=""/>
+        <a:cs typeface=""/>
+        <a:font script="Jpan" typeface="游ゴシック Light"/>
+        <a:font script="Hang" typeface="맑은 고딕"/>
+        <a:font script="Hans" typeface="等线 Light"/>
+        <a:font script="Hant" typeface="新細明體"/>
+        <a:font script="Arab" typeface="Times New Roman"/>
+        <a:font script="Hebr" typeface="Times New Roman"/>
+        <a:font script="Thai" typeface="Angsana New"/>
+        <a:font script="Ethi" typeface="Nyala"/>
+        <a:font script="Beng" typeface="Vrinda"/>
+        <a:font script="Gujr" typeface="Shruti"/>
+        <a:font script="Khmr" typeface="MoolBoran"/>
+        <a:font script="Knda" typeface="Tunga"/>
+        <a:font script="Guru" typeface="Raavi"/>
+        <a:font script="Cans" typeface="Euphemia"/>
+        <a:font script="Cher" typeface="Plantagenet Cherokee"/>
+        <a:font script="Yiii" typeface="Microsoft Yi Baiti"/>
+        <a:font script="Tibt" typeface="Microsoft Himalaya"/>
+        <a:font script="Thaa" typeface="MV Boli"/>
+        <a:font script="Deva" typeface="Mangal"/>
+        <a:font script="Telu" typeface="Gautami"/>
+        <a:font script="Taml" typeface="Latha"/>
+        <a:font script="Syrc" typeface="Estrangelo Edessa"/>
+        <a:font script="Orya" typeface="Kalinga"/>
+        <a:font script="Mlym" typeface="Kartika"/>
+        <a:font script="Laoo" typeface="DokChampa"/>
+        <a:font script="Sinh" typeface="Iskoola Pota"/>
+        <a:font script="Mong" typeface="Mongolian Baiti"/>
+        <a:font script="Viet" typeface="Times New Roman"/>
+        <a:font script="Uigh" typeface="Microsoft Uighur"/>
+        <a:font script="Geor" typeface="Sylfaen"/>
+        <a:font script="Armn" typeface="Arial"/>
+        <a:font script="Bugi" typeface="Leelawadee UI"/>
+        <a:font script="Bopo" typeface="Microsoft JhengHei"/>
+        <a:font script="Java" typeface="Javanese Text"/>
+        <a:font script="Lisu" typeface="Segoe UI"/>
+        <a:font script="Mymr" typeface="Myanmar Text"/>
+        <a:font script="Nkoo" typeface="Ebrima"/>
+        <a:font script="Olck" typeface="Nirmala UI"/>
+        <a:font script="Osma" typeface="Ebrima"/>
+        <a:font script="Phag" typeface="Phagspa"/>
+        <a:font script="Syrn" typeface="Estrangelo Edessa"/>
+        <a:font script="Syrj" typeface="Estrangelo Edessa"/>
+        <a:font script="Syre" typeface="Estrangelo Edessa"/>
+        <a:font script="Sora" typeface="Nirmala UI"/>
+        <a:font script="Tale" typeface="Microsoft Tai Le"/>
+        <a:font script="Talu" typeface="Microsoft New Tai Lue"/>
+        <a:font script="Tfng" typeface="Ebrima"/>
+      </a:majorFont>
+      <a:minorFont>
+        <a:latin typeface="Aptos" panose="02110004020202020204"/>
+        <a:ea typeface=""/>
+        <a:cs typeface=""/>
+        <a:font script="Jpan" typeface="游ゴシック"/>
+        <a:font script="Hang" typeface="맑은 고딕"/>
+        <a:font script="Hans" typeface="等线"/>
+        <a:font script="Hant" typeface="新細明體"/>
+        <a:font script="Arab" typeface="Arial"/>
+        <a:font script="Hebr" typeface="Arial"/>
+        <a:font script="Thai" typeface="Cordia New"/>
+        <a:font script="Ethi" typeface="Nyala"/>
+        <a:font script="Beng" typeface="Vrinda"/>
+        <a:font script="Gujr" typeface="Shruti"/>
+        <a:font script="Khmr" typeface="DaunPenh"/>
+        <a:font script="Knda" typeface="Tunga"/>
+        <a:font script="Guru" typeface="Raavi"/>
+        <a:font script="Cans" typeface="Euphemia"/>
+        <a:font script="Cher" typeface="Plantagenet Cherokee"/>
+        <a:font script="Yiii" typeface="Microsoft Yi Baiti"/>
+        <a:font script="Tibt" typeface="Microsoft Himalaya"/>
+        <a:font script="Thaa" typeface="MV Boli"/>
+        <a:font script="Deva" typeface="Mangal"/>
+        <a:font script="Telu" typeface="Gautami"/>
+        <a:font script="Taml" typeface="Latha"/>
+        <a:font script="Syrc" typeface="Estrangelo Edessa"/>
+        <a:font script="Orya" typeface="Kalinga"/>
+        <a:font script="Mlym" typeface="Kartika"/>
+        <a:font script="Laoo" typeface="DokChampa"/>
+        <a:font script="Sinh" typeface="Iskoola Pota"/>
+        <a:font script="Mong" typeface="Mongolian Baiti"/>
+        <a:font script="Viet" typeface="Arial"/>
+        <a:font script="Uigh" typeface="Microsoft Uighur"/>
+        <a:font script="Geor" typeface="Sylfaen"/>
+        <a:font script="Armn" typeface="Arial"/>
+        <a:font script="Bugi" typeface="Leelawadee UI"/>
+        <a:font script="Bopo" typeface="Microsoft JhengHei"/>
+        <a:font script="Java" typeface="Javanese Text"/>
+        <a:font script="Lisu" typeface="Segoe UI"/>
+        <a:font script="Mymr" typeface="Myanmar Text"/>
+        <a:font script="Nkoo" typeface="Ebrima"/>
+        <a:font script="Olck" typeface="Nirmala UI"/>
+        <a:font script="Osma" typeface="Ebrima"/>
+        <a:font script="Phag" typeface="Phagspa"/>
+        <a:font script="Syrn" typeface="Estrangelo Edessa"/>
+        <a:font script="Syrj" typeface="Estrangelo Edessa"/>
+        <a:font script="Syre" typeface="Estrangelo Edessa"/>
+        <a:font script="Sora" typeface="Nirmala UI"/>
+        <a:font script="Tale" typeface="Microsoft Tai Le"/>
+        <a:font script="Talu" typeface="Microsoft New Tai Lue"/>
+        <a:font script="Tfng" typeface="Ebrima"/>
+      </a:minorFont>
+    </a:fontScheme>
+    <a:fmtScheme name="Office">
+      <a:fillStyleLst>
+        <a:solidFill>
+          <a:schemeClr val="phClr"/>
+        </a:solidFill>
+        <a:gradFill rotWithShape="1">
+          <a:gsLst>
+            <a:gs pos="0">
+              <a:schemeClr val="phClr">
+                <a:lumMod val="110000"/>
+                <a:satMod val="105000"/>
+                <a:tint val="67000"/>
+              </a:schemeClr>
+            </a:gs>
+            <a:gs pos="50000">
+              <a:schemeClr val="phClr">
+                <a:lumMod val="105000"/>
+                <a:satMod val="103000"/>
+                <a:tint val="73000"/>
+              </a:schemeClr>
+            </a:gs>
+            <a:gs pos="100000">
+              <a:schemeClr val="phClr">
+                <a:lumMod val="105000"/>
+                <a:satMod val="109000"/>
+                <a:tint val="81000"/>
+              </a:schemeClr>
+            </a:gs>
+          </a:gsLst>
+          <a:lin ang="5400000" scaled="0"/>
+        </a:gradFill>
+        <a:gradFill rotWithShape="1">
+          <a:gsLst>
+            <a:gs pos="0">
+              <a:schemeClr val="phClr">
+                <a:satMod val="103000"/>
+                <a:lumMod val="102000"/>
+                <a:tint val="94000"/>
+              </a:schemeClr>
+            </a:gs>
+            <a:gs pos="50000">
+              <a:schemeClr val="phClr">
+                <a:satMod val="110000"/>
+                <a:lumMod val="100000"/>
+                <a:shade val="100000"/>
+              </a:schemeClr>
+            </a:gs>
+            <a:gs pos="100000">
+              <a:schemeClr val="phClr">
+                <a:lumMod val="99000"/>
+                <a:satMod val="120000"/>
+                <a:shade val="78000"/>
+              </a:schemeClr>
+            </a:gs>
+          </a:gsLst>
+          <a:lin ang="5400000" scaled="0"/>
+        </a:gradFill>
+      </a:fillStyleLst>
+      <a:lnStyleLst>
+        <a:ln w="12700" cap="flat" cmpd="sng" algn="ctr">
+          <a:solidFill>
+            <a:schemeClr val="phClr"/>
+          </a:solidFill>
+          <a:prstDash val="solid"/>
+          <a:miter lim="800000"/>
+        </a:ln>
+        <a:ln w="19050" cap="flat" cmpd="sng" algn="ctr">
+          <a:solidFill>
+            <a:schemeClr val="phClr"/>
+          </a:solidFill>
+          <a:prstDash val="solid"/>
+          <a:miter lim="800000"/>
+        </a:ln>
+        <a:ln w="25400" cap="flat" cmpd="sng" algn="ctr">
+          <a:solidFill>
+            <a:schemeClr val="phClr"/>
+          </a:solidFill>
+          <a:prstDash val="solid"/>
+          <a:miter lim="800000"/>
+        </a:ln>
+      </a:lnStyleLst>
+      <a:effectStyleLst>
+        <a:effectStyle>
+          <a:effectLst/>
+        </a:effectStyle>
+        <a:effectStyle>
+          <a:effectLst/>
+        </a:effectStyle>
+        <a:effectStyle>
+          <a:effectLst>
+            <a:outerShdw blurRad="57150" dist="19050" dir="5400000" algn="ctr" rotWithShape="0">
+              <a:srgbClr val="000000">
+                <a:alpha val="63000"/>
+              </a:srgbClr>
+            </a:outerShdw>
+          </a:effectLst>
+        </a:effectStyle>
+      </a:effectStyleLst>
+      <a:bgFillStyleLst>
+        <a:solidFill>
+          <a:schemeClr val="phClr"/>
+        </a:solidFill>
+        <a:solidFill>
+          <a:schemeClr val="phClr">
+            <a:tint val="95000"/>
+            <a:satMod val="170000"/>
+          </a:schemeClr>
+        </a:solidFill>
+        <a:gradFill rotWithShape="1">
+          <a:gsLst>
+            <a:gs pos="0">
+              <a:schemeClr val="phClr">
+                <a:tint val="93000"/>
+                <a:satMod val="150000"/>
+                <a:shade val="98000"/>
+                <a:lumMod val="102000"/>
+              </a:schemeClr>
+            </a:gs>
+            <a:gs pos="50000">
+              <a:schemeClr val="phClr">
+                <a:tint val="98000"/>
+                <a:satMod val="130000"/>
+                <a:shade val="90000"/>
+                <a:lumMod val="103000"/>
+              </a:schemeClr>
+            </a:gs>
+            <a:gs pos="100000">
+              <a:schemeClr val="phClr">
+                <a:shade val="63000"/>
+                <a:satMod val="120000"/>
+              </a:schemeClr>
+            </a:gs>
+          </a:gsLst>
+          <a:lin ang="5400000" scaled="0"/>
+        </a:gradFill>
+      </a:bgFillStyleLst>
+    </a:fmtScheme>
+  </a:themeElements>
+  <a:objectDefaults>
+    <a:lnDef>
+      <a:spPr/>
+      <a:bodyPr/>
+      <a:lstStyle/>
+      <a:style>
+        <a:lnRef idx="2">
+          <a:schemeClr val="accent1"/>
+        </a:lnRef>
+        <a:fillRef idx="0">
+          <a:schemeClr val="accent1"/>
+        </a:fillRef>
+        <a:effectRef idx="1">
+          <a:schemeClr val="accent1"/>
+        </a:effectRef>
+        <a:fontRef idx="minor">
+          <a:schemeClr val="tx1"/>
+        </a:fontRef>
+      </a:style>
+    </a:lnDef>
+  </a:objectDefaults>
+  <a:extraClrSchemeLst/>
+  <a:extLst>
+    <a:ext uri="{05A4C25C-085E-4340-85A3-A5531E510DB2}">
+      <thm15:themeFamily xmlns:thm15="http://schemas.microsoft.com/office/thememl/2012/main" name="Office Theme" id="{2E142A2C-CD16-42D6-873A-C26D2A0506FA}" vid="{1BDDFF52-6CD6-40A5-AB3C-68EB2F1E4D0A}"/>
+    </a:ext>
+  </a:extLst>
+</a:theme>
 </file>
--- a/MEC8211-Devoir3.pptx
+++ b/MEC8211-Devoir3.pptx
@@ -5316,8 +5316,8 @@
           </a:p>
         </p:txBody>
       </p:sp>
-      <mc:AlternateContent xmlns:mc="http://schemas.openxmlformats.org/markup-compatibility/2006" xmlns:a14="http://schemas.microsoft.com/office/drawing/2010/main">
-        <mc:Choice Requires="a14">
+      <mc:AlternateContent xmlns:mc="http://schemas.openxmlformats.org/markup-compatibility/2006">
+        <mc:Choice xmlns:a14="http://schemas.microsoft.com/office/drawing/2010/main" Requires="a14">
           <p:sp>
             <p:nvSpPr>
               <p:cNvPr id="12" name="ZoneTexte 11">
@@ -5332,8 +5332,8 @@
             </p:nvSpPr>
             <p:spPr>
               <a:xfrm>
-                <a:off x="742384" y="1580884"/>
-                <a:ext cx="4001632" cy="4278094"/>
+                <a:off x="688063" y="1180652"/>
+                <a:ext cx="4001632" cy="5262979"/>
               </a:xfrm>
               <a:prstGeom prst="rect">
                 <a:avLst/>
@@ -5374,7 +5374,17 @@
                 </a:pPr>
                 <a:r>
                   <a:rPr lang="fr-CA" sz="1600" dirty="0"/>
-                  <a:t>La valeur la plus fine n’est pas dans la région asymptotique et donc n’est pas considérée dans le calcul de l’ordre observé.</a:t>
+                  <a:t>La valeur la plus fine n’est pas dans la région asymptotique et donc n’est pas considérée dans le calcul de l’ordre observé. Cela peut s’expliquer notamment par le fait que les données sont bruitées par la génération aléatoire des fibres et de l’incertitude sur la porosité.</a:t>
+                </a:r>
+              </a:p>
+              <a:p>
+                <a:pPr marL="285750" indent="-285750">
+                  <a:buFont typeface="Arial" panose="020B0604020202020204" pitchFamily="34" charset="0"/>
+                  <a:buChar char="•"/>
+                </a:pPr>
+                <a:r>
+                  <a:rPr lang="fr-CA" sz="1600" dirty="0"/>
+                  <a:t>Les barres d’erreur présentés dans ce graphique peuvent être interprétées comme étant les incertitudes des données d’entrée, qui seront calculées prochainement.</a:t>
                 </a:r>
               </a:p>
               <a:p>
@@ -5573,20 +5583,10 @@
                 </a14:m>
                 <a:endParaRPr lang="fr-CA" sz="1600" b="1" dirty="0"/>
               </a:p>
-              <a:p>
-                <a:pPr marL="285750" indent="-285750">
-                  <a:buFont typeface="Arial" panose="020B0604020202020204" pitchFamily="34" charset="0"/>
-                  <a:buChar char="•"/>
-                </a:pPr>
-                <a:r>
-                  <a:rPr lang="fr-CA" sz="1600" dirty="0"/>
-                  <a:t>Les barres d’erreur présentés dans ce graphique peuvent être interprétées comme étant les incertitudes des données d’entrée, qui seront calculées prochainement.</a:t>
-                </a:r>
-              </a:p>
             </p:txBody>
           </p:sp>
         </mc:Choice>
-        <mc:Fallback xmlns="">
+        <mc:Fallback>
           <p:sp>
             <p:nvSpPr>
               <p:cNvPr id="12" name="ZoneTexte 11">
@@ -5603,8 +5603,8 @@
             </p:nvSpPr>
             <p:spPr>
               <a:xfrm>
-                <a:off x="742384" y="1580884"/>
-                <a:ext cx="4001632" cy="4278094"/>
+                <a:off x="688063" y="1180652"/>
+                <a:ext cx="4001632" cy="5262979"/>
               </a:xfrm>
               <a:prstGeom prst="rect">
                 <a:avLst/>
@@ -5612,7 +5612,7 @@
               <a:blipFill>
                 <a:blip r:embed="rId4"/>
                 <a:stretch>
-                  <a:fillRect l="-610" t="-427" r="-305" b="-855"/>
+                  <a:fillRect l="-610" t="-348" r="-305"/>
                 </a:stretch>
               </a:blipFill>
             </p:spPr>
@@ -6596,8 +6596,8 @@
           </p:sp>
         </mc:Fallback>
       </mc:AlternateContent>
-      <mc:AlternateContent xmlns:mc="http://schemas.openxmlformats.org/markup-compatibility/2006">
-        <mc:Choice xmlns:a14="http://schemas.microsoft.com/office/drawing/2010/main" Requires="a14">
+      <mc:AlternateContent xmlns:mc="http://schemas.openxmlformats.org/markup-compatibility/2006" xmlns:a14="http://schemas.microsoft.com/office/drawing/2010/main">
+        <mc:Choice Requires="a14">
           <p:sp>
             <p:nvSpPr>
               <p:cNvPr id="3" name="Espace réservé du contenu 2">
@@ -7040,7 +7040,7 @@
             </p:txBody>
           </p:sp>
         </mc:Choice>
-        <mc:Fallback>
+        <mc:Fallback xmlns="">
           <p:sp>
             <p:nvSpPr>
               <p:cNvPr id="3" name="Espace réservé du contenu 2">
@@ -7235,8 +7235,8 @@
           </p:sp>
         </mc:Fallback>
       </mc:AlternateContent>
-      <mc:AlternateContent xmlns:mc="http://schemas.openxmlformats.org/markup-compatibility/2006">
-        <mc:Choice xmlns:a14="http://schemas.microsoft.com/office/drawing/2010/main" Requires="a14">
+      <mc:AlternateContent xmlns:mc="http://schemas.openxmlformats.org/markup-compatibility/2006" xmlns:a14="http://schemas.microsoft.com/office/drawing/2010/main">
+        <mc:Choice Requires="a14">
           <p:sp>
             <p:nvSpPr>
               <p:cNvPr id="3" name="Espace réservé du contenu 2">
@@ -7327,7 +7327,7 @@
             </p:txBody>
           </p:sp>
         </mc:Choice>
-        <mc:Fallback>
+        <mc:Fallback xmlns="">
           <p:sp>
             <p:nvSpPr>
               <p:cNvPr id="3" name="Espace réservé du contenu 2">
@@ -7522,8 +7522,8 @@
           </p:sp>
         </mc:Fallback>
       </mc:AlternateContent>
-      <mc:AlternateContent xmlns:mc="http://schemas.openxmlformats.org/markup-compatibility/2006">
-        <mc:Choice xmlns:a14="http://schemas.microsoft.com/office/drawing/2010/main" Requires="a14">
+      <mc:AlternateContent xmlns:mc="http://schemas.openxmlformats.org/markup-compatibility/2006" xmlns:a14="http://schemas.microsoft.com/office/drawing/2010/main">
+        <mc:Choice Requires="a14">
           <p:sp>
             <p:nvSpPr>
               <p:cNvPr id="3" name="Espace réservé du contenu 2">
@@ -7936,7 +7936,7 @@
             </p:txBody>
           </p:sp>
         </mc:Choice>
-        <mc:Fallback>
+        <mc:Fallback xmlns="">
           <p:sp>
             <p:nvSpPr>
               <p:cNvPr id="3" name="Espace réservé du contenu 2">

--- a/MEC8211-Devoir3.pptx
+++ b/MEC8211-Devoir3.pptx
@@ -206,7 +206,7 @@
           <a:p>
             <a:fld id="{6BD447F1-453D-4945-8981-7B47F590C70C}" type="datetimeFigureOut">
               <a:rPr lang="fr-CA" smtClean="0"/>
-              <a:t>2026-03-25</a:t>
+              <a:t>2026-03-26</a:t>
             </a:fld>
             <a:endParaRPr lang="fr-CA"/>
           </a:p>
@@ -365,7 +365,7 @@
           <a:p>
             <a:fld id="{75A0F3B1-98BF-4430-AB0B-53D22E8A78C9}" type="slidenum">
               <a:rPr lang="fr-CA" smtClean="0"/>
-              <a:t>‹N°›</a:t>
+              <a:t>‹#›</a:t>
             </a:fld>
             <a:endParaRPr lang="fr-CA"/>
           </a:p>
@@ -813,7 +813,7 @@
           <a:p>
             <a:fld id="{31FFBCA7-9440-4261-9163-708EE63D7830}" type="datetimeFigureOut">
               <a:rPr lang="fr-FR" smtClean="0"/>
-              <a:t>25/03/2026</a:t>
+              <a:t>26/03/2026</a:t>
             </a:fld>
             <a:endParaRPr lang="fr-FR"/>
           </a:p>
@@ -867,7 +867,7 @@
           <a:p>
             <a:fld id="{604604B4-3276-4BB4-823A-E61BE8D504DF}" type="slidenum">
               <a:rPr lang="fr-FR" smtClean="0"/>
-              <a:t>‹N°›</a:t>
+              <a:t>‹#›</a:t>
             </a:fld>
             <a:endParaRPr lang="fr-FR"/>
           </a:p>
@@ -1011,7 +1011,7 @@
           <a:p>
             <a:fld id="{31FFBCA7-9440-4261-9163-708EE63D7830}" type="datetimeFigureOut">
               <a:rPr lang="fr-FR" smtClean="0"/>
-              <a:t>25/03/2026</a:t>
+              <a:t>26/03/2026</a:t>
             </a:fld>
             <a:endParaRPr lang="fr-FR"/>
           </a:p>
@@ -1065,7 +1065,7 @@
           <a:p>
             <a:fld id="{604604B4-3276-4BB4-823A-E61BE8D504DF}" type="slidenum">
               <a:rPr lang="fr-FR" smtClean="0"/>
-              <a:t>‹N°›</a:t>
+              <a:t>‹#›</a:t>
             </a:fld>
             <a:endParaRPr lang="fr-FR"/>
           </a:p>
@@ -1219,7 +1219,7 @@
           <a:p>
             <a:fld id="{31FFBCA7-9440-4261-9163-708EE63D7830}" type="datetimeFigureOut">
               <a:rPr lang="fr-FR" smtClean="0"/>
-              <a:t>25/03/2026</a:t>
+              <a:t>26/03/2026</a:t>
             </a:fld>
             <a:endParaRPr lang="fr-FR"/>
           </a:p>
@@ -1273,7 +1273,7 @@
           <a:p>
             <a:fld id="{604604B4-3276-4BB4-823A-E61BE8D504DF}" type="slidenum">
               <a:rPr lang="fr-FR" smtClean="0"/>
-              <a:t>‹N°›</a:t>
+              <a:t>‹#›</a:t>
             </a:fld>
             <a:endParaRPr lang="fr-FR"/>
           </a:p>
@@ -1417,7 +1417,7 @@
           <a:p>
             <a:fld id="{31FFBCA7-9440-4261-9163-708EE63D7830}" type="datetimeFigureOut">
               <a:rPr lang="fr-FR" smtClean="0"/>
-              <a:t>25/03/2026</a:t>
+              <a:t>26/03/2026</a:t>
             </a:fld>
             <a:endParaRPr lang="fr-FR"/>
           </a:p>
@@ -1471,7 +1471,7 @@
           <a:p>
             <a:fld id="{604604B4-3276-4BB4-823A-E61BE8D504DF}" type="slidenum">
               <a:rPr lang="fr-FR" smtClean="0"/>
-              <a:t>‹N°›</a:t>
+              <a:t>‹#›</a:t>
             </a:fld>
             <a:endParaRPr lang="fr-FR"/>
           </a:p>
@@ -1692,7 +1692,7 @@
           <a:p>
             <a:fld id="{31FFBCA7-9440-4261-9163-708EE63D7830}" type="datetimeFigureOut">
               <a:rPr lang="fr-FR" smtClean="0"/>
-              <a:t>25/03/2026</a:t>
+              <a:t>26/03/2026</a:t>
             </a:fld>
             <a:endParaRPr lang="fr-FR"/>
           </a:p>
@@ -1746,7 +1746,7 @@
           <a:p>
             <a:fld id="{604604B4-3276-4BB4-823A-E61BE8D504DF}" type="slidenum">
               <a:rPr lang="fr-FR" smtClean="0"/>
-              <a:t>‹N°›</a:t>
+              <a:t>‹#›</a:t>
             </a:fld>
             <a:endParaRPr lang="fr-FR"/>
           </a:p>
@@ -1957,7 +1957,7 @@
           <a:p>
             <a:fld id="{31FFBCA7-9440-4261-9163-708EE63D7830}" type="datetimeFigureOut">
               <a:rPr lang="fr-FR" smtClean="0"/>
-              <a:t>25/03/2026</a:t>
+              <a:t>26/03/2026</a:t>
             </a:fld>
             <a:endParaRPr lang="fr-FR"/>
           </a:p>
@@ -2011,7 +2011,7 @@
           <a:p>
             <a:fld id="{604604B4-3276-4BB4-823A-E61BE8D504DF}" type="slidenum">
               <a:rPr lang="fr-FR" smtClean="0"/>
-              <a:t>‹N°›</a:t>
+              <a:t>‹#›</a:t>
             </a:fld>
             <a:endParaRPr lang="fr-FR"/>
           </a:p>
@@ -2369,7 +2369,7 @@
           <a:p>
             <a:fld id="{31FFBCA7-9440-4261-9163-708EE63D7830}" type="datetimeFigureOut">
               <a:rPr lang="fr-FR" smtClean="0"/>
-              <a:t>25/03/2026</a:t>
+              <a:t>26/03/2026</a:t>
             </a:fld>
             <a:endParaRPr lang="fr-FR"/>
           </a:p>
@@ -2423,7 +2423,7 @@
           <a:p>
             <a:fld id="{604604B4-3276-4BB4-823A-E61BE8D504DF}" type="slidenum">
               <a:rPr lang="fr-FR" smtClean="0"/>
-              <a:t>‹N°›</a:t>
+              <a:t>‹#›</a:t>
             </a:fld>
             <a:endParaRPr lang="fr-FR"/>
           </a:p>
@@ -2510,7 +2510,7 @@
           <a:p>
             <a:fld id="{31FFBCA7-9440-4261-9163-708EE63D7830}" type="datetimeFigureOut">
               <a:rPr lang="fr-FR" smtClean="0"/>
-              <a:t>25/03/2026</a:t>
+              <a:t>26/03/2026</a:t>
             </a:fld>
             <a:endParaRPr lang="fr-FR"/>
           </a:p>
@@ -2564,7 +2564,7 @@
           <a:p>
             <a:fld id="{604604B4-3276-4BB4-823A-E61BE8D504DF}" type="slidenum">
               <a:rPr lang="fr-FR" smtClean="0"/>
-              <a:t>‹N°›</a:t>
+              <a:t>‹#›</a:t>
             </a:fld>
             <a:endParaRPr lang="fr-FR"/>
           </a:p>
@@ -2623,7 +2623,7 @@
           <a:p>
             <a:fld id="{31FFBCA7-9440-4261-9163-708EE63D7830}" type="datetimeFigureOut">
               <a:rPr lang="fr-FR" smtClean="0"/>
-              <a:t>25/03/2026</a:t>
+              <a:t>26/03/2026</a:t>
             </a:fld>
             <a:endParaRPr lang="fr-FR"/>
           </a:p>
@@ -2677,7 +2677,7 @@
           <a:p>
             <a:fld id="{604604B4-3276-4BB4-823A-E61BE8D504DF}" type="slidenum">
               <a:rPr lang="fr-FR" smtClean="0"/>
-              <a:t>‹N°›</a:t>
+              <a:t>‹#›</a:t>
             </a:fld>
             <a:endParaRPr lang="fr-FR"/>
           </a:p>
@@ -2934,7 +2934,7 @@
           <a:p>
             <a:fld id="{31FFBCA7-9440-4261-9163-708EE63D7830}" type="datetimeFigureOut">
               <a:rPr lang="fr-FR" smtClean="0"/>
-              <a:t>25/03/2026</a:t>
+              <a:t>26/03/2026</a:t>
             </a:fld>
             <a:endParaRPr lang="fr-FR"/>
           </a:p>
@@ -2988,7 +2988,7 @@
           <a:p>
             <a:fld id="{604604B4-3276-4BB4-823A-E61BE8D504DF}" type="slidenum">
               <a:rPr lang="fr-FR" smtClean="0"/>
-              <a:t>‹N°›</a:t>
+              <a:t>‹#›</a:t>
             </a:fld>
             <a:endParaRPr lang="fr-FR"/>
           </a:p>
@@ -3222,7 +3222,7 @@
           <a:p>
             <a:fld id="{31FFBCA7-9440-4261-9163-708EE63D7830}" type="datetimeFigureOut">
               <a:rPr lang="fr-FR" smtClean="0"/>
-              <a:t>25/03/2026</a:t>
+              <a:t>26/03/2026</a:t>
             </a:fld>
             <a:endParaRPr lang="fr-FR"/>
           </a:p>
@@ -3276,7 +3276,7 @@
           <a:p>
             <a:fld id="{604604B4-3276-4BB4-823A-E61BE8D504DF}" type="slidenum">
               <a:rPr lang="fr-FR" smtClean="0"/>
-              <a:t>‹N°›</a:t>
+              <a:t>‹#›</a:t>
             </a:fld>
             <a:endParaRPr lang="fr-FR"/>
           </a:p>
@@ -3463,7 +3463,7 @@
           <a:p>
             <a:fld id="{31FFBCA7-9440-4261-9163-708EE63D7830}" type="datetimeFigureOut">
               <a:rPr lang="fr-FR" smtClean="0"/>
-              <a:t>25/03/2026</a:t>
+              <a:t>26/03/2026</a:t>
             </a:fld>
             <a:endParaRPr lang="fr-FR"/>
           </a:p>
@@ -3553,7 +3553,7 @@
           <a:p>
             <a:fld id="{604604B4-3276-4BB4-823A-E61BE8D504DF}" type="slidenum">
               <a:rPr lang="fr-FR" smtClean="0"/>
-              <a:t>‹N°›</a:t>
+              <a:t>‹#›</a:t>
             </a:fld>
             <a:endParaRPr lang="fr-FR"/>
           </a:p>
@@ -4072,8 +4072,8 @@
           </a:p>
         </p:txBody>
       </p:sp>
-      <mc:AlternateContent xmlns:mc="http://schemas.openxmlformats.org/markup-compatibility/2006" xmlns:a14="http://schemas.microsoft.com/office/drawing/2010/main">
-        <mc:Choice Requires="a14">
+      <mc:AlternateContent xmlns:mc="http://schemas.openxmlformats.org/markup-compatibility/2006">
+        <mc:Choice xmlns:a14="http://schemas.microsoft.com/office/drawing/2010/main" Requires="a14">
           <p:sp>
             <p:nvSpPr>
               <p:cNvPr id="3" name="Espace réservé du contenu 2">
@@ -4099,23 +4099,102 @@
                   <a:rPr lang="fr-FR" b="0" dirty="0">
                     <a:latin typeface="Cambria Math" panose="02040503050406030204" pitchFamily="18" charset="0"/>
                   </a:rPr>
-                  <a:t>E par rapport à </a:t>
-                </a:r>
-                <a:r>
-                  <a:rPr lang="fr-FR" b="0" dirty="0" err="1">
-                    <a:latin typeface="Cambria Math" panose="02040503050406030204" pitchFamily="18" charset="0"/>
-                  </a:rPr>
-                  <a:t>u_val</a:t>
-                </a:r>
-                <a:r>
-                  <a:rPr lang="fr-FR" b="0" dirty="0">
-                    <a:latin typeface="Cambria Math" panose="02040503050406030204" pitchFamily="18" charset="0"/>
-                  </a:rPr>
-                  <a:t> ?</a:t>
-                </a:r>
+                  <a:t>Nous connaissons le signe de </a:t>
+                </a:r>
+                <a14:m>
+                  <m:oMath xmlns:m="http://schemas.openxmlformats.org/officeDocument/2006/math">
+                    <m:sSub>
+                      <m:sSubPr>
+                        <m:ctrlPr>
+                          <a:rPr lang="fr-FR" i="1">
+                            <a:latin typeface="Cambria Math" panose="02040503050406030204" pitchFamily="18" charset="0"/>
+                          </a:rPr>
+                        </m:ctrlPr>
+                      </m:sSubPr>
+                      <m:e>
+                        <m:r>
+                          <a:rPr lang="fr-FR" i="1">
+                            <a:latin typeface="Cambria Math" panose="02040503050406030204" pitchFamily="18" charset="0"/>
+                          </a:rPr>
+                          <m:t>𝛿</m:t>
+                        </m:r>
+                      </m:e>
+                      <m:sub>
+                        <m:r>
+                          <a:rPr lang="fr-FR" i="1">
+                            <a:latin typeface="Cambria Math" panose="02040503050406030204" pitchFamily="18" charset="0"/>
+                          </a:rPr>
+                          <m:t>𝑚𝑜𝑑𝑒𝑙</m:t>
+                        </m:r>
+                      </m:sub>
+                    </m:sSub>
+                  </m:oMath>
+                </a14:m>
+                <a:endParaRPr lang="fr-FR" b="0" dirty="0">
+                  <a:latin typeface="Cambria Math" panose="02040503050406030204" pitchFamily="18" charset="0"/>
+                </a:endParaRPr>
               </a:p>
               <a:p>
-                <a:endParaRPr lang="fr-FR" b="0" i="1" dirty="0">
+                <a14:m>
+                  <m:oMath xmlns:m="http://schemas.openxmlformats.org/officeDocument/2006/math">
+                    <m:r>
+                      <a:rPr lang="fr-FR" b="0" i="1" smtClean="0">
+                        <a:latin typeface="Cambria Math" panose="02040503050406030204" pitchFamily="18" charset="0"/>
+                      </a:rPr>
+                      <m:t>|</m:t>
+                    </m:r>
+                    <m:r>
+                      <m:rPr>
+                        <m:sty m:val="p"/>
+                      </m:rPr>
+                      <a:rPr lang="fr-FR" b="0" i="1" smtClean="0">
+                        <a:latin typeface="Cambria Math" panose="02040503050406030204" pitchFamily="18" charset="0"/>
+                      </a:rPr>
+                      <m:t>E</m:t>
+                    </m:r>
+                    <m:r>
+                      <a:rPr lang="fr-FR" b="0" i="1" smtClean="0">
+                        <a:latin typeface="Cambria Math" panose="02040503050406030204" pitchFamily="18" charset="0"/>
+                      </a:rPr>
+                      <m:t>| &gt; </m:t>
+                    </m:r>
+                    <m:sSub>
+                      <m:sSubPr>
+                        <m:ctrlPr>
+                          <a:rPr lang="fr-FR" i="1">
+                            <a:latin typeface="Cambria Math" panose="02040503050406030204" pitchFamily="18" charset="0"/>
+                          </a:rPr>
+                        </m:ctrlPr>
+                      </m:sSubPr>
+                      <m:e>
+                        <m:r>
+                          <m:rPr>
+                            <m:sty m:val="p"/>
+                          </m:rPr>
+                          <a:rPr lang="fr-FR" b="0" i="1" smtClean="0">
+                            <a:latin typeface="Cambria Math" panose="02040503050406030204" pitchFamily="18" charset="0"/>
+                          </a:rPr>
+                          <m:t>k</m:t>
+                        </m:r>
+                        <m:r>
+                          <a:rPr lang="fr-FR" i="1">
+                            <a:latin typeface="Cambria Math" panose="02040503050406030204" pitchFamily="18" charset="0"/>
+                          </a:rPr>
+                          <m:t>𝑢</m:t>
+                        </m:r>
+                      </m:e>
+                      <m:sub>
+                        <m:r>
+                          <a:rPr lang="fr-FR" i="1">
+                            <a:latin typeface="Cambria Math" panose="02040503050406030204" pitchFamily="18" charset="0"/>
+                          </a:rPr>
+                          <m:t>𝑣𝑎𝑙</m:t>
+                        </m:r>
+                      </m:sub>
+                    </m:sSub>
+                  </m:oMath>
+                </a14:m>
+                <a:endParaRPr lang="fr-FR" b="0" dirty="0">
                   <a:latin typeface="Cambria Math" panose="02040503050406030204" pitchFamily="18" charset="0"/>
                 </a:endParaRPr>
               </a:p>
@@ -4164,7 +4243,7 @@
             </p:txBody>
           </p:sp>
         </mc:Choice>
-        <mc:Fallback xmlns="">
+        <mc:Fallback>
           <p:sp>
             <p:nvSpPr>
               <p:cNvPr id="3" name="Espace réservé du contenu 2">
@@ -4194,7 +4273,7 @@
               <a:lstStyle/>
               <a:p>
                 <a:r>
-                  <a:rPr lang="fr-FR">
+                  <a:rPr lang="en-US">
                     <a:noFill/>
                   </a:rPr>
                   <a:t> </a:t>
@@ -5316,8 +5395,8 @@
           </a:p>
         </p:txBody>
       </p:sp>
-      <mc:AlternateContent xmlns:mc="http://schemas.openxmlformats.org/markup-compatibility/2006">
-        <mc:Choice xmlns:a14="http://schemas.microsoft.com/office/drawing/2010/main" Requires="a14">
+      <mc:AlternateContent xmlns:mc="http://schemas.openxmlformats.org/markup-compatibility/2006" xmlns:a14="http://schemas.microsoft.com/office/drawing/2010/main">
+        <mc:Choice Requires="a14">
           <p:sp>
             <p:nvSpPr>
               <p:cNvPr id="12" name="ZoneTexte 11">
@@ -5586,7 +5665,7 @@
             </p:txBody>
           </p:sp>
         </mc:Choice>
-        <mc:Fallback>
+        <mc:Fallback xmlns="">
           <p:sp>
             <p:nvSpPr>
               <p:cNvPr id="12" name="ZoneTexte 11">
@@ -6596,8 +6675,8 @@
           </p:sp>
         </mc:Fallback>
       </mc:AlternateContent>
-      <mc:AlternateContent xmlns:mc="http://schemas.openxmlformats.org/markup-compatibility/2006" xmlns:a14="http://schemas.microsoft.com/office/drawing/2010/main">
-        <mc:Choice Requires="a14">
+      <mc:AlternateContent xmlns:mc="http://schemas.openxmlformats.org/markup-compatibility/2006">
+        <mc:Choice xmlns:a14="http://schemas.microsoft.com/office/drawing/2010/main" Requires="a14">
           <p:sp>
             <p:nvSpPr>
               <p:cNvPr id="3" name="Espace réservé du contenu 2">
@@ -7040,7 +7119,7 @@
             </p:txBody>
           </p:sp>
         </mc:Choice>
-        <mc:Fallback xmlns="">
+        <mc:Fallback>
           <p:sp>
             <p:nvSpPr>
               <p:cNvPr id="3" name="Espace réservé du contenu 2">
@@ -7074,7 +7153,7 @@
               <a:lstStyle/>
               <a:p>
                 <a:r>
-                  <a:rPr lang="fr-CA">
+                  <a:rPr lang="en-US">
                     <a:noFill/>
                   </a:rPr>
                   <a:t> </a:t>
@@ -7235,8 +7314,8 @@
           </p:sp>
         </mc:Fallback>
       </mc:AlternateContent>
-      <mc:AlternateContent xmlns:mc="http://schemas.openxmlformats.org/markup-compatibility/2006" xmlns:a14="http://schemas.microsoft.com/office/drawing/2010/main">
-        <mc:Choice Requires="a14">
+      <mc:AlternateContent xmlns:mc="http://schemas.openxmlformats.org/markup-compatibility/2006">
+        <mc:Choice xmlns:a14="http://schemas.microsoft.com/office/drawing/2010/main" Requires="a14">
           <p:sp>
             <p:nvSpPr>
               <p:cNvPr id="3" name="Espace réservé du contenu 2">
@@ -7267,13 +7346,7 @@
               <a:p>
                 <a:r>
                   <a:rPr lang="fr-FR" sz="2000" dirty="0"/>
-                  <a:t>Les graphiques suivants présentent la fonction de probabilité ainsi que la fonction de probabilité cumulative de la SRQ.</a:t>
-                </a:r>
-              </a:p>
-              <a:p>
-                <a:r>
-                  <a:rPr lang="fr-FR" sz="2000" dirty="0"/>
-                  <a:t>On observe un résultat assez satisfaisant.</a:t>
+                  <a:t>Les graphiques ci-contre présentent la fonction de probabilité ainsi que la fonction de probabilité cumulative de la SRQ.</a:t>
                 </a:r>
               </a:p>
               <a:p>
@@ -7319,15 +7392,106 @@
                     </m:r>
                   </m:oMath>
                 </a14:m>
+                <a:r>
+                  <a:rPr lang="fr-FR" sz="2000" b="1" dirty="0"/>
+                  <a:t>8.67 </a:t>
+                </a:r>
+                <a14:m>
+                  <m:oMath xmlns:m="http://schemas.openxmlformats.org/officeDocument/2006/math">
+                    <m:r>
+                      <m:rPr>
+                        <m:sty m:val="p"/>
+                      </m:rPr>
+                      <a:rPr lang="fr-FR" sz="2000" b="1" i="1" smtClean="0">
+                        <a:latin typeface="Cambria Math" panose="02040503050406030204" pitchFamily="18" charset="0"/>
+                      </a:rPr>
+                      <m:t>μm</m:t>
+                    </m:r>
+                    <m:r>
+                      <a:rPr lang="fr-FR" sz="2000" b="1" i="1" smtClean="0">
+                        <a:latin typeface="Cambria Math" panose="02040503050406030204" pitchFamily="18" charset="0"/>
+                      </a:rPr>
+                      <m:t>²</m:t>
+                    </m:r>
+                  </m:oMath>
+                </a14:m>
                 <a:endParaRPr lang="fr-FR" sz="2000" b="1" dirty="0"/>
               </a:p>
               <a:p>
-                <a:endParaRPr lang="fr-FR" b="1" dirty="0"/>
+                <a:r>
+                  <a:rPr lang="fr-FR" sz="2000" dirty="0"/>
+                  <a:t>Monte-Carlo réalisé avec 100 échantillons et un pas </a:t>
+                </a:r>
+                <a14:m>
+                  <m:oMath xmlns:m="http://schemas.openxmlformats.org/officeDocument/2006/math">
+                    <m:r>
+                      <m:rPr>
+                        <m:sty m:val="p"/>
+                      </m:rPr>
+                      <a:rPr lang="fr-FR" sz="2000" b="0" i="1" smtClean="0">
+                        <a:latin typeface="Cambria Math" panose="02040503050406030204" pitchFamily="18" charset="0"/>
+                      </a:rPr>
+                      <m:t>Δx</m:t>
+                    </m:r>
+                    <m:r>
+                      <a:rPr lang="fr-FR" sz="2000" b="0" i="1" smtClean="0">
+                        <a:latin typeface="Cambria Math" panose="02040503050406030204" pitchFamily="18" charset="0"/>
+                      </a:rPr>
+                      <m:t> = 1</m:t>
+                    </m:r>
+                    <m:r>
+                      <m:rPr>
+                        <m:sty m:val="p"/>
+                      </m:rPr>
+                      <a:rPr lang="fr-FR" sz="2000" b="0" i="1" smtClean="0">
+                        <a:latin typeface="Cambria Math" panose="02040503050406030204" pitchFamily="18" charset="0"/>
+                      </a:rPr>
+                      <m:t>E</m:t>
+                    </m:r>
+                    <m:r>
+                      <a:rPr lang="fr-FR" sz="2000" b="0" i="1" smtClean="0">
+                        <a:latin typeface="Cambria Math" panose="02040503050406030204" pitchFamily="18" charset="0"/>
+                      </a:rPr>
+                      <m:t>-6   </m:t>
+                    </m:r>
+                    <m:r>
+                      <m:rPr>
+                        <m:sty m:val="p"/>
+                      </m:rPr>
+                      <a:rPr lang="fr-FR" sz="2000" b="0" i="1" smtClean="0">
+                        <a:latin typeface="Cambria Math" panose="02040503050406030204" pitchFamily="18" charset="0"/>
+                      </a:rPr>
+                      <m:t>et</m:t>
+                    </m:r>
+                    <m:r>
+                      <a:rPr lang="fr-FR" sz="2000" b="0" i="1" smtClean="0">
+                        <a:latin typeface="Cambria Math" panose="02040503050406030204" pitchFamily="18" charset="0"/>
+                      </a:rPr>
+                      <m:t> </m:t>
+                    </m:r>
+                    <m:r>
+                      <m:rPr>
+                        <m:sty m:val="p"/>
+                      </m:rPr>
+                      <a:rPr lang="fr-FR" sz="2000" b="0" i="1" smtClean="0">
+                        <a:latin typeface="Cambria Math" panose="02040503050406030204" pitchFamily="18" charset="0"/>
+                      </a:rPr>
+                      <m:t>Nx</m:t>
+                    </m:r>
+                    <m:r>
+                      <a:rPr lang="fr-FR" sz="2000" b="0" i="1" smtClean="0">
+                        <a:latin typeface="Cambria Math" panose="02040503050406030204" pitchFamily="18" charset="0"/>
+                      </a:rPr>
+                      <m:t> = 200.</m:t>
+                    </m:r>
+                  </m:oMath>
+                </a14:m>
+                <a:endParaRPr lang="fr-FR" sz="2000" dirty="0"/>
               </a:p>
             </p:txBody>
           </p:sp>
         </mc:Choice>
-        <mc:Fallback xmlns="">
+        <mc:Fallback>
           <p:sp>
             <p:nvSpPr>
               <p:cNvPr id="3" name="Espace réservé du contenu 2">
@@ -7361,7 +7525,7 @@
               <a:lstStyle/>
               <a:p>
                 <a:r>
-                  <a:rPr lang="fr-CA">
+                  <a:rPr lang="en-US">
                     <a:noFill/>
                   </a:rPr>
                   <a:t> </a:t>
@@ -7371,6 +7535,80 @@
           </p:sp>
         </mc:Fallback>
       </mc:AlternateContent>
+      <p:pic>
+        <p:nvPicPr>
+          <p:cNvPr id="5" name="Picture 4">
+            <a:extLst>
+              <a:ext uri="{FF2B5EF4-FFF2-40B4-BE49-F238E27FC236}">
+                <a16:creationId xmlns:a16="http://schemas.microsoft.com/office/drawing/2014/main" id="{0646F739-E246-7718-42BD-FD146948AFDE}"/>
+              </a:ext>
+            </a:extLst>
+          </p:cNvPr>
+          <p:cNvPicPr>
+            <a:picLocks noChangeAspect="1"/>
+          </p:cNvPicPr>
+          <p:nvPr/>
+        </p:nvPicPr>
+        <p:blipFill>
+          <a:blip r:embed="rId5">
+            <a:extLst>
+              <a:ext uri="{28A0092B-C50C-407E-A947-70E740481C1C}">
+                <a14:useLocalDpi xmlns:a14="http://schemas.microsoft.com/office/drawing/2010/main" val="0"/>
+              </a:ext>
+            </a:extLst>
+          </a:blip>
+          <a:srcRect l="-1241" t="4882" r="5838"/>
+          <a:stretch>
+            <a:fillRect/>
+          </a:stretch>
+        </p:blipFill>
+        <p:spPr>
+          <a:xfrm>
+            <a:off x="7021493" y="3633902"/>
+            <a:ext cx="4080310" cy="3088980"/>
+          </a:xfrm>
+          <a:prstGeom prst="rect">
+            <a:avLst/>
+          </a:prstGeom>
+        </p:spPr>
+      </p:pic>
+      <p:pic>
+        <p:nvPicPr>
+          <p:cNvPr id="7" name="Picture 6">
+            <a:extLst>
+              <a:ext uri="{FF2B5EF4-FFF2-40B4-BE49-F238E27FC236}">
+                <a16:creationId xmlns:a16="http://schemas.microsoft.com/office/drawing/2014/main" id="{B3C4CE8E-F464-27C0-B3AA-C16C3B6BECC3}"/>
+              </a:ext>
+            </a:extLst>
+          </p:cNvPr>
+          <p:cNvPicPr>
+            <a:picLocks noChangeAspect="1"/>
+          </p:cNvPicPr>
+          <p:nvPr/>
+        </p:nvPicPr>
+        <p:blipFill>
+          <a:blip r:embed="rId6">
+            <a:extLst>
+              <a:ext uri="{28A0092B-C50C-407E-A947-70E740481C1C}">
+                <a14:useLocalDpi xmlns:a14="http://schemas.microsoft.com/office/drawing/2010/main" val="0"/>
+              </a:ext>
+            </a:extLst>
+          </a:blip>
+          <a:srcRect t="5439" r="7025"/>
+          <a:stretch>
+            <a:fillRect/>
+          </a:stretch>
+        </p:blipFill>
+        <p:spPr>
+          <a:xfrm>
+            <a:off x="7273494" y="864757"/>
+            <a:ext cx="3793677" cy="2893801"/>
+          </a:xfrm>
+          <a:prstGeom prst="rect">
+            <a:avLst/>
+          </a:prstGeom>
+        </p:spPr>
+      </p:pic>
     </p:spTree>
     <p:extLst>
       <p:ext uri="{BB962C8B-B14F-4D97-AF65-F5344CB8AC3E}">
@@ -8051,8 +8289,8 @@
           </a:p>
         </p:txBody>
       </p:sp>
-      <mc:AlternateContent xmlns:mc="http://schemas.openxmlformats.org/markup-compatibility/2006" xmlns:a14="http://schemas.microsoft.com/office/drawing/2010/main">
-        <mc:Choice Requires="a14">
+      <mc:AlternateContent xmlns:mc="http://schemas.openxmlformats.org/markup-compatibility/2006">
+        <mc:Choice xmlns:a14="http://schemas.microsoft.com/office/drawing/2010/main" Requires="a14">
           <p:sp>
             <p:nvSpPr>
               <p:cNvPr id="3" name="Espace réservé du contenu 2">
@@ -8165,7 +8403,31 @@
                       <a:rPr lang="fr-FR" b="0" i="1" smtClean="0">
                         <a:latin typeface="Cambria Math" panose="02040503050406030204" pitchFamily="18" charset="0"/>
                       </a:rPr>
-                      <m:t>=28.5−80.6=−52.1 </m:t>
+                      <m:t>=2</m:t>
+                    </m:r>
+                    <m:r>
+                      <a:rPr lang="fr-FR" b="0" i="1" smtClean="0">
+                        <a:latin typeface="Cambria Math" panose="02040503050406030204" pitchFamily="18" charset="0"/>
+                      </a:rPr>
+                      <m:t>7.8</m:t>
+                    </m:r>
+                    <m:r>
+                      <a:rPr lang="fr-FR" b="0" i="1" smtClean="0">
+                        <a:latin typeface="Cambria Math" panose="02040503050406030204" pitchFamily="18" charset="0"/>
+                      </a:rPr>
+                      <m:t>−80.6=−52.</m:t>
+                    </m:r>
+                    <m:r>
+                      <a:rPr lang="fr-FR" b="0" i="1" smtClean="0">
+                        <a:latin typeface="Cambria Math" panose="02040503050406030204" pitchFamily="18" charset="0"/>
+                      </a:rPr>
+                      <m:t>8</m:t>
+                    </m:r>
+                    <m:r>
+                      <a:rPr lang="fr-FR" b="0" i="1" smtClean="0">
+                        <a:latin typeface="Cambria Math" panose="02040503050406030204" pitchFamily="18" charset="0"/>
+                      </a:rPr>
+                      <m:t> </m:t>
                     </m:r>
                     <m:r>
                       <a:rPr lang="fr-FR" b="0" i="1" smtClean="0">
@@ -8211,13 +8473,204 @@
               <a:p>
                 <a:r>
                   <a:rPr lang="fr-FR" dirty="0"/>
-                  <a:t>S à simuler avec le code fourni </a:t>
-                </a:r>
+                  <a:t>S simulé avec les paramètres suivants :</a:t>
+                </a:r>
+              </a:p>
+              <a:p>
+                <a:pPr lvl="1"/>
+                <a:r>
+                  <a:rPr lang="fr-FR" dirty="0"/>
+                  <a:t>Porosité : 0.9 </a:t>
+                </a:r>
+              </a:p>
+              <a:p>
+                <a:pPr lvl="1"/>
+                <a:r>
+                  <a:rPr lang="fr-FR" dirty="0" err="1"/>
+                  <a:t>Seed</a:t>
+                </a:r>
+                <a:r>
+                  <a:rPr lang="fr-FR" dirty="0"/>
+                  <a:t> : 101</a:t>
+                </a:r>
+              </a:p>
+              <a:p>
+                <a:pPr lvl="1"/>
+                <a:r>
+                  <a:rPr lang="fr-FR" dirty="0" err="1"/>
+                  <a:t>Nx</a:t>
+                </a:r>
+                <a:r>
+                  <a:rPr lang="fr-FR" dirty="0"/>
+                  <a:t> = 200 et </a:t>
+                </a:r>
+                <a14:m>
+                  <m:oMath xmlns:m="http://schemas.openxmlformats.org/officeDocument/2006/math">
+                    <m:r>
+                      <m:rPr>
+                        <m:sty m:val="p"/>
+                      </m:rPr>
+                      <a:rPr lang="fr-FR" i="1">
+                        <a:latin typeface="Cambria Math" panose="02040503050406030204" pitchFamily="18" charset="0"/>
+                      </a:rPr>
+                      <m:t>Δx</m:t>
+                    </m:r>
+                    <m:r>
+                      <a:rPr lang="fr-FR" i="1">
+                        <a:latin typeface="Cambria Math" panose="02040503050406030204" pitchFamily="18" charset="0"/>
+                      </a:rPr>
+                      <m:t> = 1</m:t>
+                    </m:r>
+                    <m:r>
+                      <m:rPr>
+                        <m:sty m:val="p"/>
+                      </m:rPr>
+                      <a:rPr lang="fr-FR" i="1">
+                        <a:latin typeface="Cambria Math" panose="02040503050406030204" pitchFamily="18" charset="0"/>
+                      </a:rPr>
+                      <m:t>E</m:t>
+                    </m:r>
+                    <m:r>
+                      <a:rPr lang="fr-FR" i="1">
+                        <a:latin typeface="Cambria Math" panose="02040503050406030204" pitchFamily="18" charset="0"/>
+                      </a:rPr>
+                      <m:t>−6</m:t>
+                    </m:r>
+                  </m:oMath>
+                </a14:m>
+                <a:endParaRPr lang="fr-FR" dirty="0"/>
+              </a:p>
+              <a:p>
+                <a:pPr lvl="1"/>
+                <a14:m>
+                  <m:oMath xmlns:m="http://schemas.openxmlformats.org/officeDocument/2006/math">
+                    <m:r>
+                      <m:rPr>
+                        <m:sty m:val="p"/>
+                      </m:rPr>
+                      <a:rPr lang="fr-FR" i="1">
+                        <a:latin typeface="Cambria Math" panose="02040503050406030204" pitchFamily="18" charset="0"/>
+                      </a:rPr>
+                      <m:t>ΔP</m:t>
+                    </m:r>
+                    <m:r>
+                      <a:rPr lang="fr-FR" i="1">
+                        <a:latin typeface="Cambria Math" panose="02040503050406030204" pitchFamily="18" charset="0"/>
+                      </a:rPr>
+                      <m:t> = 0.1 </m:t>
+                    </m:r>
+                  </m:oMath>
+                </a14:m>
+                <a:endParaRPr lang="fr-FR" dirty="0"/>
+              </a:p>
+              <a:p>
+                <a:pPr lvl="1"/>
+                <a14:m>
+                  <m:oMath xmlns:m="http://schemas.openxmlformats.org/officeDocument/2006/math">
+                    <m:r>
+                      <m:rPr>
+                        <m:sty m:val="p"/>
+                      </m:rPr>
+                      <a:rPr lang="fr-FR" i="1">
+                        <a:latin typeface="Cambria Math" panose="02040503050406030204" pitchFamily="18" charset="0"/>
+                      </a:rPr>
+                      <m:t>σ</m:t>
+                    </m:r>
+                    <m:r>
+                      <a:rPr lang="fr-FR" i="1">
+                        <a:latin typeface="Cambria Math" panose="02040503050406030204" pitchFamily="18" charset="0"/>
+                      </a:rPr>
+                      <m:t>_</m:t>
+                    </m:r>
+                    <m:r>
+                      <m:rPr>
+                        <m:sty m:val="p"/>
+                      </m:rPr>
+                      <a:rPr lang="fr-FR" i="1">
+                        <a:latin typeface="Cambria Math" panose="02040503050406030204" pitchFamily="18" charset="0"/>
+                      </a:rPr>
+                      <m:t>d</m:t>
+                    </m:r>
+                    <m:r>
+                      <a:rPr lang="fr-FR" i="1">
+                        <a:latin typeface="Cambria Math" panose="02040503050406030204" pitchFamily="18" charset="0"/>
+                      </a:rPr>
+                      <m:t>  = 2.85 </m:t>
+                    </m:r>
+                    <m:r>
+                      <m:rPr>
+                        <m:sty m:val="p"/>
+                      </m:rPr>
+                      <a:rPr lang="fr-FR" i="1">
+                        <a:latin typeface="Cambria Math" panose="02040503050406030204" pitchFamily="18" charset="0"/>
+                      </a:rPr>
+                      <m:t>μm</m:t>
+                    </m:r>
+                    <m:r>
+                      <a:rPr lang="fr-FR" i="1">
+                        <a:latin typeface="Cambria Math" panose="02040503050406030204" pitchFamily="18" charset="0"/>
+                      </a:rPr>
+                      <m:t> </m:t>
+                    </m:r>
+                    <m:r>
+                      <m:rPr>
+                        <m:sty m:val="p"/>
+                      </m:rPr>
+                      <a:rPr lang="fr-FR" i="1">
+                        <a:latin typeface="Cambria Math" panose="02040503050406030204" pitchFamily="18" charset="0"/>
+                      </a:rPr>
+                      <m:t>et</m:t>
+                    </m:r>
+                    <m:r>
+                      <a:rPr lang="fr-FR" i="1">
+                        <a:latin typeface="Cambria Math" panose="02040503050406030204" pitchFamily="18" charset="0"/>
+                      </a:rPr>
+                      <m:t> </m:t>
+                    </m:r>
+                    <m:bar>
+                      <m:barPr>
+                        <m:pos m:val="top"/>
+                        <m:ctrlPr>
+                          <a:rPr lang="fr-FR" i="1">
+                            <a:latin typeface="Cambria Math" panose="02040503050406030204" pitchFamily="18" charset="0"/>
+                          </a:rPr>
+                        </m:ctrlPr>
+                      </m:barPr>
+                      <m:e>
+                        <m:r>
+                          <m:rPr>
+                            <m:sty m:val="p"/>
+                          </m:rPr>
+                          <a:rPr lang="fr-FR" i="1">
+                            <a:latin typeface="Cambria Math" panose="02040503050406030204" pitchFamily="18" charset="0"/>
+                          </a:rPr>
+                          <m:t>d</m:t>
+                        </m:r>
+                      </m:e>
+                    </m:bar>
+                    <m:r>
+                      <a:rPr lang="fr-FR" i="1">
+                        <a:latin typeface="Cambria Math" panose="02040503050406030204" pitchFamily="18" charset="0"/>
+                      </a:rPr>
+                      <m:t>=12.5 </m:t>
+                    </m:r>
+                    <m:r>
+                      <m:rPr>
+                        <m:sty m:val="p"/>
+                      </m:rPr>
+                      <a:rPr lang="fr-FR" i="1">
+                        <a:latin typeface="Cambria Math" panose="02040503050406030204" pitchFamily="18" charset="0"/>
+                      </a:rPr>
+                      <m:t>μm</m:t>
+                    </m:r>
+                  </m:oMath>
+                </a14:m>
+                <a:endParaRPr lang="fr-FR" dirty="0"/>
               </a:p>
             </p:txBody>
           </p:sp>
         </mc:Choice>
-        <mc:Fallback xmlns="">
+        <mc:Fallback>
           <p:sp>
             <p:nvSpPr>
               <p:cNvPr id="3" name="Espace réservé du contenu 2">
@@ -8247,7 +8700,7 @@
               <a:lstStyle/>
               <a:p>
                 <a:r>
-                  <a:rPr lang="fr-FR">
+                  <a:rPr lang="en-US">
                     <a:noFill/>
                   </a:rPr>
                   <a:t> </a:t>
@@ -8408,8 +8861,8 @@
           </p:sp>
         </mc:Fallback>
       </mc:AlternateContent>
-      <mc:AlternateContent xmlns:mc="http://schemas.openxmlformats.org/markup-compatibility/2006" xmlns:a14="http://schemas.microsoft.com/office/drawing/2010/main">
-        <mc:Choice Requires="a14">
+      <mc:AlternateContent xmlns:mc="http://schemas.openxmlformats.org/markup-compatibility/2006">
+        <mc:Choice xmlns:a14="http://schemas.microsoft.com/office/drawing/2010/main" Requires="a14">
           <p:sp>
             <p:nvSpPr>
               <p:cNvPr id="3" name="Espace réservé du contenu 2">
@@ -8728,8 +9181,91 @@
                         </m:sSubSup>
                       </m:e>
                     </m:rad>
+                    <m:r>
+                      <a:rPr lang="fr-FR" b="0" i="1" smtClean="0">
+                        <a:latin typeface="Cambria Math" panose="02040503050406030204" pitchFamily="18" charset="0"/>
+                      </a:rPr>
+                      <m:t>=19.8 </m:t>
+                    </m:r>
+                    <m:r>
+                      <m:rPr>
+                        <m:sty m:val="p"/>
+                      </m:rPr>
+                      <a:rPr lang="fr-FR" b="0" i="1" smtClean="0">
+                        <a:latin typeface="Cambria Math" panose="02040503050406030204" pitchFamily="18" charset="0"/>
+                      </a:rPr>
+                      <m:t>μm</m:t>
+                    </m:r>
+                    <m:r>
+                      <a:rPr lang="fr-FR" b="0" i="1" smtClean="0">
+                        <a:latin typeface="Cambria Math" panose="02040503050406030204" pitchFamily="18" charset="0"/>
+                      </a:rPr>
+                      <m:t>²</m:t>
+                    </m:r>
                   </m:oMath>
                 </a14:m>
+                <a:r>
+                  <a:rPr lang="fr-FR" b="0" dirty="0"/>
+                  <a:t> </a:t>
+                </a:r>
+              </a:p>
+              <a:p>
+                <a14:m>
+                  <m:oMath xmlns:m="http://schemas.openxmlformats.org/officeDocument/2006/math">
+                    <m:r>
+                      <a:rPr lang="fr-FR" b="0" i="1" smtClean="0">
+                        <a:latin typeface="Cambria Math" panose="02040503050406030204" pitchFamily="18" charset="0"/>
+                      </a:rPr>
+                      <m:t>-92.4</m:t>
+                    </m:r>
+                    <m:r>
+                      <a:rPr lang="fr-FR" i="1">
+                        <a:latin typeface="Cambria Math" panose="02040503050406030204" pitchFamily="18" charset="0"/>
+                      </a:rPr>
+                      <m:t>≤</m:t>
+                    </m:r>
+                    <m:sSub>
+                      <m:sSubPr>
+                        <m:ctrlPr>
+                          <a:rPr lang="fr-FR" i="1">
+                            <a:latin typeface="Cambria Math" panose="02040503050406030204" pitchFamily="18" charset="0"/>
+                          </a:rPr>
+                        </m:ctrlPr>
+                      </m:sSubPr>
+                      <m:e>
+                        <m:r>
+                          <a:rPr lang="fr-FR" i="1">
+                            <a:latin typeface="Cambria Math" panose="02040503050406030204" pitchFamily="18" charset="0"/>
+                          </a:rPr>
+                          <m:t>𝛿</m:t>
+                        </m:r>
+                      </m:e>
+                      <m:sub>
+                        <m:r>
+                          <a:rPr lang="fr-FR" i="1">
+                            <a:latin typeface="Cambria Math" panose="02040503050406030204" pitchFamily="18" charset="0"/>
+                          </a:rPr>
+                          <m:t>𝑚𝑜𝑑𝑒𝑙</m:t>
+                        </m:r>
+                      </m:sub>
+                    </m:sSub>
+                    <m:r>
+                      <a:rPr lang="fr-FR" i="1">
+                        <a:latin typeface="Cambria Math" panose="02040503050406030204" pitchFamily="18" charset="0"/>
+                      </a:rPr>
+                      <m:t>≤</m:t>
+                    </m:r>
+                    <m:r>
+                      <a:rPr lang="fr-FR" b="0" i="1" smtClean="0">
+                        <a:latin typeface="Cambria Math" panose="02040503050406030204" pitchFamily="18" charset="0"/>
+                      </a:rPr>
+                      <m:t>-13.2</m:t>
+                    </m:r>
+                  </m:oMath>
+                </a14:m>
+                <a:endParaRPr lang="fr-FR" dirty="0"/>
+              </a:p>
+              <a:p>
                 <a:endParaRPr lang="fr-FR" b="0" dirty="0"/>
               </a:p>
               <a:p>
@@ -8741,7 +9277,7 @@
             </p:txBody>
           </p:sp>
         </mc:Choice>
-        <mc:Fallback xmlns="">
+        <mc:Fallback>
           <p:sp>
             <p:nvSpPr>
               <p:cNvPr id="3" name="Espace réservé du contenu 2">
@@ -8771,7 +9307,7 @@
               <a:lstStyle/>
               <a:p>
                 <a:r>
-                  <a:rPr lang="fr-FR">
+                  <a:rPr lang="en-US">
                     <a:noFill/>
                   </a:rPr>
                   <a:t> </a:t>

--- a/MEC8211-Devoir3.pptx
+++ b/MEC8211-Devoir3.pptx
@@ -206,7 +206,7 @@
           <a:p>
             <a:fld id="{6BD447F1-453D-4945-8981-7B47F590C70C}" type="datetimeFigureOut">
               <a:rPr lang="fr-CA" smtClean="0"/>
-              <a:t>2026-03-26</a:t>
+              <a:t>2026-03-27</a:t>
             </a:fld>
             <a:endParaRPr lang="fr-CA"/>
           </a:p>
@@ -813,7 +813,7 @@
           <a:p>
             <a:fld id="{31FFBCA7-9440-4261-9163-708EE63D7830}" type="datetimeFigureOut">
               <a:rPr lang="fr-FR" smtClean="0"/>
-              <a:t>26/03/2026</a:t>
+              <a:t>27/03/2026</a:t>
             </a:fld>
             <a:endParaRPr lang="fr-FR"/>
           </a:p>
@@ -1011,7 +1011,7 @@
           <a:p>
             <a:fld id="{31FFBCA7-9440-4261-9163-708EE63D7830}" type="datetimeFigureOut">
               <a:rPr lang="fr-FR" smtClean="0"/>
-              <a:t>26/03/2026</a:t>
+              <a:t>27/03/2026</a:t>
             </a:fld>
             <a:endParaRPr lang="fr-FR"/>
           </a:p>
@@ -1219,7 +1219,7 @@
           <a:p>
             <a:fld id="{31FFBCA7-9440-4261-9163-708EE63D7830}" type="datetimeFigureOut">
               <a:rPr lang="fr-FR" smtClean="0"/>
-              <a:t>26/03/2026</a:t>
+              <a:t>27/03/2026</a:t>
             </a:fld>
             <a:endParaRPr lang="fr-FR"/>
           </a:p>
@@ -1417,7 +1417,7 @@
           <a:p>
             <a:fld id="{31FFBCA7-9440-4261-9163-708EE63D7830}" type="datetimeFigureOut">
               <a:rPr lang="fr-FR" smtClean="0"/>
-              <a:t>26/03/2026</a:t>
+              <a:t>27/03/2026</a:t>
             </a:fld>
             <a:endParaRPr lang="fr-FR"/>
           </a:p>
@@ -1692,7 +1692,7 @@
           <a:p>
             <a:fld id="{31FFBCA7-9440-4261-9163-708EE63D7830}" type="datetimeFigureOut">
               <a:rPr lang="fr-FR" smtClean="0"/>
-              <a:t>26/03/2026</a:t>
+              <a:t>27/03/2026</a:t>
             </a:fld>
             <a:endParaRPr lang="fr-FR"/>
           </a:p>
@@ -1957,7 +1957,7 @@
           <a:p>
             <a:fld id="{31FFBCA7-9440-4261-9163-708EE63D7830}" type="datetimeFigureOut">
               <a:rPr lang="fr-FR" smtClean="0"/>
-              <a:t>26/03/2026</a:t>
+              <a:t>27/03/2026</a:t>
             </a:fld>
             <a:endParaRPr lang="fr-FR"/>
           </a:p>
@@ -2369,7 +2369,7 @@
           <a:p>
             <a:fld id="{31FFBCA7-9440-4261-9163-708EE63D7830}" type="datetimeFigureOut">
               <a:rPr lang="fr-FR" smtClean="0"/>
-              <a:t>26/03/2026</a:t>
+              <a:t>27/03/2026</a:t>
             </a:fld>
             <a:endParaRPr lang="fr-FR"/>
           </a:p>
@@ -2510,7 +2510,7 @@
           <a:p>
             <a:fld id="{31FFBCA7-9440-4261-9163-708EE63D7830}" type="datetimeFigureOut">
               <a:rPr lang="fr-FR" smtClean="0"/>
-              <a:t>26/03/2026</a:t>
+              <a:t>27/03/2026</a:t>
             </a:fld>
             <a:endParaRPr lang="fr-FR"/>
           </a:p>
@@ -2623,7 +2623,7 @@
           <a:p>
             <a:fld id="{31FFBCA7-9440-4261-9163-708EE63D7830}" type="datetimeFigureOut">
               <a:rPr lang="fr-FR" smtClean="0"/>
-              <a:t>26/03/2026</a:t>
+              <a:t>27/03/2026</a:t>
             </a:fld>
             <a:endParaRPr lang="fr-FR"/>
           </a:p>
@@ -2934,7 +2934,7 @@
           <a:p>
             <a:fld id="{31FFBCA7-9440-4261-9163-708EE63D7830}" type="datetimeFigureOut">
               <a:rPr lang="fr-FR" smtClean="0"/>
-              <a:t>26/03/2026</a:t>
+              <a:t>27/03/2026</a:t>
             </a:fld>
             <a:endParaRPr lang="fr-FR"/>
           </a:p>
@@ -3222,7 +3222,7 @@
           <a:p>
             <a:fld id="{31FFBCA7-9440-4261-9163-708EE63D7830}" type="datetimeFigureOut">
               <a:rPr lang="fr-FR" smtClean="0"/>
-              <a:t>26/03/2026</a:t>
+              <a:t>27/03/2026</a:t>
             </a:fld>
             <a:endParaRPr lang="fr-FR"/>
           </a:p>
@@ -3463,7 +3463,7 @@
           <a:p>
             <a:fld id="{31FFBCA7-9440-4261-9163-708EE63D7830}" type="datetimeFigureOut">
               <a:rPr lang="fr-FR" smtClean="0"/>
-              <a:t>26/03/2026</a:t>
+              <a:t>27/03/2026</a:t>
             </a:fld>
             <a:endParaRPr lang="fr-FR"/>
           </a:p>
@@ -4090,7 +4090,12 @@
                 <p:ph idx="1"/>
               </p:nvPr>
             </p:nvSpPr>
-            <p:spPr/>
+            <p:spPr>
+              <a:xfrm>
+                <a:off x="499038" y="1690688"/>
+                <a:ext cx="5949875" cy="4351338"/>
+              </a:xfrm>
+            </p:spPr>
             <p:txBody>
               <a:bodyPr/>
               <a:lstStyle/>
@@ -4261,10 +4266,14 @@
               </p:nvPr>
             </p:nvSpPr>
             <p:spPr>
+              <a:xfrm>
+                <a:off x="499038" y="1690688"/>
+                <a:ext cx="5949875" cy="4351338"/>
+              </a:xfrm>
               <a:blipFill>
                 <a:blip r:embed="rId2"/>
                 <a:stretch>
-                  <a:fillRect l="-1043" t="-2381"/>
+                  <a:fillRect l="-1844" t="-2381" r="-1947"/>
                 </a:stretch>
               </a:blipFill>
             </p:spPr>
@@ -4283,6 +4292,42 @@
           </p:sp>
         </mc:Fallback>
       </mc:AlternateContent>
+      <p:pic>
+        <p:nvPicPr>
+          <p:cNvPr id="5" name="Picture 4">
+            <a:extLst>
+              <a:ext uri="{FF2B5EF4-FFF2-40B4-BE49-F238E27FC236}">
+                <a16:creationId xmlns:a16="http://schemas.microsoft.com/office/drawing/2014/main" id="{3BEB51FE-9D17-6E1A-CAEF-71B330E74E23}"/>
+              </a:ext>
+            </a:extLst>
+          </p:cNvPr>
+          <p:cNvPicPr>
+            <a:picLocks noChangeAspect="1"/>
+          </p:cNvPicPr>
+          <p:nvPr/>
+        </p:nvPicPr>
+        <p:blipFill>
+          <a:blip r:embed="rId3">
+            <a:extLst>
+              <a:ext uri="{28A0092B-C50C-407E-A947-70E740481C1C}">
+                <a14:useLocalDpi xmlns:a14="http://schemas.microsoft.com/office/drawing/2010/main" val="0"/>
+              </a:ext>
+            </a:extLst>
+          </a:blip>
+          <a:stretch>
+            <a:fillRect/>
+          </a:stretch>
+        </p:blipFill>
+        <p:spPr>
+          <a:xfrm>
+            <a:off x="6339828" y="1331254"/>
+            <a:ext cx="5852172" cy="4389129"/>
+          </a:xfrm>
+          <a:prstGeom prst="rect">
+            <a:avLst/>
+          </a:prstGeom>
+        </p:spPr>
+      </p:pic>
     </p:spTree>
     <p:extLst>
       <p:ext uri="{BB962C8B-B14F-4D97-AF65-F5344CB8AC3E}">
@@ -6675,8 +6720,8 @@
           </p:sp>
         </mc:Fallback>
       </mc:AlternateContent>
-      <mc:AlternateContent xmlns:mc="http://schemas.openxmlformats.org/markup-compatibility/2006">
-        <mc:Choice xmlns:a14="http://schemas.microsoft.com/office/drawing/2010/main" Requires="a14">
+      <mc:AlternateContent xmlns:mc="http://schemas.openxmlformats.org/markup-compatibility/2006" xmlns:a14="http://schemas.microsoft.com/office/drawing/2010/main">
+        <mc:Choice Requires="a14">
           <p:sp>
             <p:nvSpPr>
               <p:cNvPr id="3" name="Espace réservé du contenu 2">
@@ -7119,7 +7164,7 @@
             </p:txBody>
           </p:sp>
         </mc:Choice>
-        <mc:Fallback>
+        <mc:Fallback xmlns="">
           <p:sp>
             <p:nvSpPr>
               <p:cNvPr id="3" name="Espace réservé du contenu 2">
@@ -7335,7 +7380,7 @@
             <p:spPr>
               <a:xfrm>
                 <a:off x="838199" y="1580884"/>
-                <a:ext cx="4080309" cy="3597508"/>
+                <a:ext cx="5080820" cy="3597508"/>
               </a:xfrm>
             </p:spPr>
             <p:txBody>
@@ -7422,69 +7467,229 @@
                   <a:rPr lang="fr-FR" sz="2000" dirty="0"/>
                   <a:t>Monte-Carlo réalisé avec 100 échantillons et un pas </a:t>
                 </a:r>
+                <a:endParaRPr lang="fr-FR" sz="2000" i="1" dirty="0">
+                  <a:latin typeface="Cambria Math" panose="02040503050406030204" pitchFamily="18" charset="0"/>
+                </a:endParaRPr>
+              </a:p>
+              <a:p>
+                <a:pPr marL="0" indent="0">
+                  <a:buNone/>
+                </a:pPr>
                 <a14:m>
-                  <m:oMath xmlns:m="http://schemas.openxmlformats.org/officeDocument/2006/math">
-                    <m:r>
-                      <m:rPr>
-                        <m:sty m:val="p"/>
-                      </m:rPr>
-                      <a:rPr lang="fr-FR" sz="2000" b="0" i="1" smtClean="0">
-                        <a:latin typeface="Cambria Math" panose="02040503050406030204" pitchFamily="18" charset="0"/>
-                      </a:rPr>
-                      <m:t>Δx</m:t>
-                    </m:r>
-                    <m:r>
-                      <a:rPr lang="fr-FR" sz="2000" b="0" i="1" smtClean="0">
-                        <a:latin typeface="Cambria Math" panose="02040503050406030204" pitchFamily="18" charset="0"/>
-                      </a:rPr>
-                      <m:t> = 1</m:t>
-                    </m:r>
-                    <m:r>
-                      <m:rPr>
-                        <m:sty m:val="p"/>
-                      </m:rPr>
-                      <a:rPr lang="fr-FR" sz="2000" b="0" i="1" smtClean="0">
-                        <a:latin typeface="Cambria Math" panose="02040503050406030204" pitchFamily="18" charset="0"/>
-                      </a:rPr>
-                      <m:t>E</m:t>
-                    </m:r>
-                    <m:r>
-                      <a:rPr lang="fr-FR" sz="2000" b="0" i="1" smtClean="0">
-                        <a:latin typeface="Cambria Math" panose="02040503050406030204" pitchFamily="18" charset="0"/>
-                      </a:rPr>
-                      <m:t>-6   </m:t>
-                    </m:r>
-                    <m:r>
-                      <m:rPr>
-                        <m:sty m:val="p"/>
-                      </m:rPr>
-                      <a:rPr lang="fr-FR" sz="2000" b="0" i="1" smtClean="0">
-                        <a:latin typeface="Cambria Math" panose="02040503050406030204" pitchFamily="18" charset="0"/>
-                      </a:rPr>
-                      <m:t>et</m:t>
-                    </m:r>
-                    <m:r>
-                      <a:rPr lang="fr-FR" sz="2000" b="0" i="1" smtClean="0">
-                        <a:latin typeface="Cambria Math" panose="02040503050406030204" pitchFamily="18" charset="0"/>
-                      </a:rPr>
-                      <m:t> </m:t>
-                    </m:r>
-                    <m:r>
-                      <m:rPr>
-                        <m:sty m:val="p"/>
-                      </m:rPr>
-                      <a:rPr lang="fr-FR" sz="2000" b="0" i="1" smtClean="0">
-                        <a:latin typeface="Cambria Math" panose="02040503050406030204" pitchFamily="18" charset="0"/>
-                      </a:rPr>
-                      <m:t>Nx</m:t>
-                    </m:r>
-                    <m:r>
-                      <a:rPr lang="fr-FR" sz="2000" b="0" i="1" smtClean="0">
-                        <a:latin typeface="Cambria Math" panose="02040503050406030204" pitchFamily="18" charset="0"/>
-                      </a:rPr>
-                      <m:t> = 200.</m:t>
-                    </m:r>
-                  </m:oMath>
+                  <m:oMathPara xmlns:m="http://schemas.openxmlformats.org/officeDocument/2006/math">
+                    <m:oMathParaPr>
+                      <m:jc m:val="centerGroup"/>
+                    </m:oMathParaPr>
+                    <m:oMath xmlns:m="http://schemas.openxmlformats.org/officeDocument/2006/math">
+                      <m:r>
+                        <m:rPr>
+                          <m:sty m:val="p"/>
+                        </m:rPr>
+                        <a:rPr lang="fr-FR" sz="2000" b="0" i="0" smtClean="0">
+                          <a:latin typeface="Cambria Math" panose="02040503050406030204" pitchFamily="18" charset="0"/>
+                        </a:rPr>
+                        <m:t>Δ</m:t>
+                      </m:r>
+                      <m:r>
+                        <a:rPr lang="fr-FR" sz="2000" b="0" i="1" smtClean="0">
+                          <a:latin typeface="Cambria Math" panose="02040503050406030204" pitchFamily="18" charset="0"/>
+                        </a:rPr>
+                        <m:t>𝑥</m:t>
+                      </m:r>
+                      <m:r>
+                        <a:rPr lang="fr-FR" sz="2000" b="0" i="1" smtClean="0">
+                          <a:latin typeface="Cambria Math" panose="02040503050406030204" pitchFamily="18" charset="0"/>
+                        </a:rPr>
+                        <m:t>=</m:t>
+                      </m:r>
+                      <m:r>
+                        <a:rPr lang="fr-FR" sz="2000" b="0" i="1" smtClean="0">
+                          <a:latin typeface="Cambria Math" panose="02040503050406030204" pitchFamily="18" charset="0"/>
+                        </a:rPr>
+                        <m:t> 1</m:t>
+                      </m:r>
+                      <m:r>
+                        <a:rPr lang="fr-FR" sz="2000" b="0" i="1" smtClean="0">
+                          <a:latin typeface="Cambria Math" panose="02040503050406030204" pitchFamily="18" charset="0"/>
+                        </a:rPr>
+                        <m:t>𝐸</m:t>
+                      </m:r>
+                      <m:r>
+                        <a:rPr lang="fr-FR" sz="2000" b="0" i="1" smtClean="0">
+                          <a:latin typeface="Cambria Math" panose="02040503050406030204" pitchFamily="18" charset="0"/>
+                        </a:rPr>
+                        <m:t>−6 , </m:t>
+                      </m:r>
+                      <m:r>
+                        <a:rPr lang="fr-FR" sz="2000" b="0" i="1" smtClean="0">
+                          <a:latin typeface="Cambria Math" panose="02040503050406030204" pitchFamily="18" charset="0"/>
+                        </a:rPr>
+                        <m:t>𝑁𝑥</m:t>
+                      </m:r>
+                      <m:r>
+                        <a:rPr lang="fr-FR" sz="2000" b="0" i="1" smtClean="0">
+                          <a:latin typeface="Cambria Math" panose="02040503050406030204" pitchFamily="18" charset="0"/>
+                        </a:rPr>
+                        <m:t> = 200,</m:t>
+                      </m:r>
+                      <m:r>
+                        <m:rPr>
+                          <m:sty m:val="p"/>
+                        </m:rPr>
+                        <a:rPr lang="fr-FR" sz="2000">
+                          <a:latin typeface="Cambria Math" panose="02040503050406030204" pitchFamily="18" charset="0"/>
+                        </a:rPr>
+                        <m:t>Δ</m:t>
+                      </m:r>
+                      <m:r>
+                        <m:rPr>
+                          <m:sty m:val="p"/>
+                        </m:rPr>
+                        <a:rPr lang="fr-FR" sz="2000" i="1">
+                          <a:latin typeface="Cambria Math" panose="02040503050406030204" pitchFamily="18" charset="0"/>
+                        </a:rPr>
+                        <m:t>P</m:t>
+                      </m:r>
+                      <m:r>
+                        <a:rPr lang="fr-FR" sz="2000" i="1">
+                          <a:latin typeface="Cambria Math" panose="02040503050406030204" pitchFamily="18" charset="0"/>
+                        </a:rPr>
+                        <m:t>= </m:t>
+                      </m:r>
+                      <m:r>
+                        <a:rPr lang="fr-FR" sz="2000" i="1">
+                          <a:latin typeface="Cambria Math" panose="02040503050406030204" pitchFamily="18" charset="0"/>
+                        </a:rPr>
+                        <m:t>0.1</m:t>
+                      </m:r>
+                      <m:r>
+                        <a:rPr lang="fr-FR" sz="2000" b="0" i="1" smtClean="0">
+                          <a:latin typeface="Cambria Math" panose="02040503050406030204" pitchFamily="18" charset="0"/>
+                        </a:rPr>
+                        <m:t> </m:t>
+                      </m:r>
+                      <m:r>
+                        <m:rPr>
+                          <m:sty m:val="p"/>
+                        </m:rPr>
+                        <a:rPr lang="fr-FR" sz="2000" b="0" i="1" smtClean="0">
+                          <a:latin typeface="Cambria Math" panose="02040503050406030204" pitchFamily="18" charset="0"/>
+                        </a:rPr>
+                        <m:t>Pa</m:t>
+                      </m:r>
+                    </m:oMath>
+                  </m:oMathPara>
+                </a14:m>
+                <a:endParaRPr lang="fr-FR" sz="2000" b="0" dirty="0"/>
+              </a:p>
+              <a:p>
+                <a:pPr marL="0" indent="0">
+                  <a:buNone/>
+                </a:pPr>
+                <a14:m>
+                  <m:oMathPara xmlns:m="http://schemas.openxmlformats.org/officeDocument/2006/math">
+                    <m:oMathParaPr>
+                      <m:jc m:val="centerGroup"/>
+                    </m:oMathParaPr>
+                    <m:oMath xmlns:m="http://schemas.openxmlformats.org/officeDocument/2006/math">
+                      <m:r>
+                        <m:rPr>
+                          <m:sty m:val="p"/>
+                        </m:rPr>
+                        <a:rPr lang="fr-FR" sz="2000" b="0" i="1" smtClean="0">
+                          <a:latin typeface="Cambria Math" panose="02040503050406030204" pitchFamily="18" charset="0"/>
+                        </a:rPr>
+                        <m:t>seed</m:t>
+                      </m:r>
+                      <m:r>
+                        <a:rPr lang="fr-FR" sz="2000" b="0" i="1" smtClean="0">
+                          <a:latin typeface="Cambria Math" panose="02040503050406030204" pitchFamily="18" charset="0"/>
+                        </a:rPr>
+                        <m:t> = 0, </m:t>
+                      </m:r>
+                      <m:r>
+                        <m:rPr>
+                          <m:sty m:val="p"/>
+                        </m:rPr>
+                        <a:rPr lang="fr-FR" sz="2000" b="0" i="1" smtClean="0">
+                          <a:latin typeface="Cambria Math" panose="02040503050406030204" pitchFamily="18" charset="0"/>
+                        </a:rPr>
+                        <m:t>σ</m:t>
+                      </m:r>
+                      <m:r>
+                        <a:rPr lang="fr-FR" sz="2000" b="0" i="1" smtClean="0">
+                          <a:latin typeface="Cambria Math" panose="02040503050406030204" pitchFamily="18" charset="0"/>
+                        </a:rPr>
+                        <m:t>_</m:t>
+                      </m:r>
+                      <m:r>
+                        <m:rPr>
+                          <m:sty m:val="p"/>
+                        </m:rPr>
+                        <a:rPr lang="fr-FR" sz="2000" b="0" i="1" smtClean="0">
+                          <a:latin typeface="Cambria Math" panose="02040503050406030204" pitchFamily="18" charset="0"/>
+                        </a:rPr>
+                        <m:t>d</m:t>
+                      </m:r>
+                      <m:r>
+                        <a:rPr lang="fr-FR" sz="2000" b="0" i="1" smtClean="0">
+                          <a:latin typeface="Cambria Math" panose="02040503050406030204" pitchFamily="18" charset="0"/>
+                        </a:rPr>
+                        <m:t> = 2.85 </m:t>
+                      </m:r>
+                      <m:r>
+                        <m:rPr>
+                          <m:sty m:val="p"/>
+                        </m:rPr>
+                        <a:rPr lang="fr-FR" sz="2000" i="1">
+                          <a:latin typeface="Cambria Math" panose="02040503050406030204" pitchFamily="18" charset="0"/>
+                        </a:rPr>
+                        <m:t>μm</m:t>
+                      </m:r>
+                      <m:r>
+                        <a:rPr lang="fr-FR" sz="2000" b="0" i="1" smtClean="0">
+                          <a:latin typeface="Cambria Math" panose="02040503050406030204" pitchFamily="18" charset="0"/>
+                        </a:rPr>
+                        <m:t>,</m:t>
+                      </m:r>
+                      <m:bar>
+                        <m:barPr>
+                          <m:pos m:val="top"/>
+                          <m:ctrlPr>
+                            <a:rPr lang="fr-FR" sz="2000" i="1">
+                              <a:latin typeface="Cambria Math" panose="02040503050406030204" pitchFamily="18" charset="0"/>
+                            </a:rPr>
+                          </m:ctrlPr>
+                        </m:barPr>
+                        <m:e>
+                          <m:r>
+                            <m:rPr>
+                              <m:sty m:val="p"/>
+                            </m:rPr>
+                            <a:rPr lang="fr-FR" sz="2000" i="1">
+                              <a:latin typeface="Cambria Math" panose="02040503050406030204" pitchFamily="18" charset="0"/>
+                            </a:rPr>
+                            <m:t>d</m:t>
+                          </m:r>
+                        </m:e>
+                      </m:bar>
+                      <m:r>
+                        <a:rPr lang="fr-FR" sz="2000" b="0" i="1" smtClean="0">
+                          <a:latin typeface="Cambria Math" panose="02040503050406030204" pitchFamily="18" charset="0"/>
+                        </a:rPr>
+                        <m:t> = 12.5 </m:t>
+                      </m:r>
+                      <m:r>
+                        <m:rPr>
+                          <m:sty m:val="p"/>
+                        </m:rPr>
+                        <a:rPr lang="fr-FR" sz="2000" i="1">
+                          <a:latin typeface="Cambria Math" panose="02040503050406030204" pitchFamily="18" charset="0"/>
+                        </a:rPr>
+                        <m:t>μm</m:t>
+                      </m:r>
+                    </m:oMath>
+                  </m:oMathPara>
                 </a14:m>
                 <a:endParaRPr lang="fr-FR" sz="2000" dirty="0"/>
               </a:p>
@@ -7511,12 +7716,12 @@
             <p:spPr>
               <a:xfrm>
                 <a:off x="838199" y="1580884"/>
-                <a:ext cx="4080309" cy="3597508"/>
+                <a:ext cx="5080820" cy="3597508"/>
               </a:xfrm>
               <a:blipFill>
                 <a:blip r:embed="rId4"/>
                 <a:stretch>
-                  <a:fillRect l="-1194" t="-1525"/>
+                  <a:fillRect l="-959" t="-1525" r="-1079"/>
                 </a:stretch>
               </a:blipFill>
             </p:spPr>
@@ -7760,8 +7965,8 @@
           </p:sp>
         </mc:Fallback>
       </mc:AlternateContent>
-      <mc:AlternateContent xmlns:mc="http://schemas.openxmlformats.org/markup-compatibility/2006" xmlns:a14="http://schemas.microsoft.com/office/drawing/2010/main">
-        <mc:Choice Requires="a14">
+      <mc:AlternateContent xmlns:mc="http://schemas.openxmlformats.org/markup-compatibility/2006">
+        <mc:Choice xmlns:a14="http://schemas.microsoft.com/office/drawing/2010/main" Requires="a14">
           <p:sp>
             <p:nvSpPr>
               <p:cNvPr id="3" name="Espace réservé du contenu 2">
@@ -8037,49 +8242,6 @@
                               <a:rPr lang="fr-FR" b="1" i="1" smtClean="0">
                                 <a:latin typeface="Cambria Math" panose="02040503050406030204" pitchFamily="18" charset="0"/>
                               </a:rPr>
-                              <m:t>𝟏𝟎</m:t>
-                            </m:r>
-                            <m:r>
-                              <a:rPr lang="fr-FR" b="1" i="1" smtClean="0">
-                                <a:latin typeface="Cambria Math" panose="02040503050406030204" pitchFamily="18" charset="0"/>
-                              </a:rPr>
-                              <m:t>.</m:t>
-                            </m:r>
-                            <m:r>
-                              <a:rPr lang="fr-FR" b="1" i="1" smtClean="0">
-                                <a:latin typeface="Cambria Math" panose="02040503050406030204" pitchFamily="18" charset="0"/>
-                              </a:rPr>
-                              <m:t>𝟎</m:t>
-                            </m:r>
-                          </m:e>
-                          <m:sup>
-                            <m:r>
-                              <a:rPr lang="fr-FR" b="1" i="1" smtClean="0">
-                                <a:latin typeface="Cambria Math" panose="02040503050406030204" pitchFamily="18" charset="0"/>
-                              </a:rPr>
-                              <m:t>𝟐</m:t>
-                            </m:r>
-                          </m:sup>
-                        </m:sSup>
-                        <m:r>
-                          <a:rPr lang="fr-FR" b="1" i="1" smtClean="0">
-                            <a:latin typeface="Cambria Math" panose="02040503050406030204" pitchFamily="18" charset="0"/>
-                          </a:rPr>
-                          <m:t>+</m:t>
-                        </m:r>
-                        <m:sSup>
-                          <m:sSupPr>
-                            <m:ctrlPr>
-                              <a:rPr lang="fr-FR" b="1" i="1" smtClean="0">
-                                <a:latin typeface="Cambria Math" panose="02040503050406030204" pitchFamily="18" charset="0"/>
-                              </a:rPr>
-                            </m:ctrlPr>
-                          </m:sSupPr>
-                          <m:e>
-                            <m:r>
-                              <a:rPr lang="fr-FR" b="1" i="1" smtClean="0">
-                                <a:latin typeface="Cambria Math" panose="02040503050406030204" pitchFamily="18" charset="0"/>
-                              </a:rPr>
                               <m:t>𝟏𝟒</m:t>
                             </m:r>
                             <m:r>
@@ -8104,6 +8266,49 @@
                             </m:r>
                           </m:sup>
                         </m:sSup>
+                        <m:r>
+                          <a:rPr lang="fr-FR" b="1" i="1" smtClean="0">
+                            <a:latin typeface="Cambria Math" panose="02040503050406030204" pitchFamily="18" charset="0"/>
+                          </a:rPr>
+                          <m:t> +</m:t>
+                        </m:r>
+                        <m:sSup>
+                          <m:sSupPr>
+                            <m:ctrlPr>
+                              <a:rPr lang="fr-FR" b="1" i="1">
+                                <a:latin typeface="Cambria Math" panose="02040503050406030204" pitchFamily="18" charset="0"/>
+                              </a:rPr>
+                            </m:ctrlPr>
+                          </m:sSupPr>
+                          <m:e>
+                            <m:r>
+                              <a:rPr lang="fr-FR" b="1" i="1">
+                                <a:latin typeface="Cambria Math" panose="02040503050406030204" pitchFamily="18" charset="0"/>
+                              </a:rPr>
+                              <m:t>𝟏𝟎</m:t>
+                            </m:r>
+                            <m:r>
+                              <a:rPr lang="fr-FR" b="1" i="1">
+                                <a:latin typeface="Cambria Math" panose="02040503050406030204" pitchFamily="18" charset="0"/>
+                              </a:rPr>
+                              <m:t>.</m:t>
+                            </m:r>
+                            <m:r>
+                              <a:rPr lang="fr-FR" b="1" i="1">
+                                <a:latin typeface="Cambria Math" panose="02040503050406030204" pitchFamily="18" charset="0"/>
+                              </a:rPr>
+                              <m:t>𝟎</m:t>
+                            </m:r>
+                          </m:e>
+                          <m:sup>
+                            <m:r>
+                              <a:rPr lang="fr-FR" b="1" i="1">
+                                <a:latin typeface="Cambria Math" panose="02040503050406030204" pitchFamily="18" charset="0"/>
+                              </a:rPr>
+                              <m:t>𝟐</m:t>
+                            </m:r>
+                          </m:sup>
+                        </m:sSup>
                       </m:e>
                     </m:rad>
                     <m:r>
@@ -8174,7 +8379,7 @@
             </p:txBody>
           </p:sp>
         </mc:Choice>
-        <mc:Fallback xmlns="">
+        <mc:Fallback>
           <p:sp>
             <p:nvSpPr>
               <p:cNvPr id="3" name="Espace réservé du contenu 2">
@@ -8204,7 +8409,7 @@
               <a:lstStyle/>
               <a:p>
                 <a:r>
-                  <a:rPr lang="fr-CA">
+                  <a:rPr lang="en-US">
                     <a:noFill/>
                   </a:rPr>
                   <a:t> </a:t>
@@ -8403,31 +8608,7 @@
                       <a:rPr lang="fr-FR" b="0" i="1" smtClean="0">
                         <a:latin typeface="Cambria Math" panose="02040503050406030204" pitchFamily="18" charset="0"/>
                       </a:rPr>
-                      <m:t>=2</m:t>
-                    </m:r>
-                    <m:r>
-                      <a:rPr lang="fr-FR" b="0" i="1" smtClean="0">
-                        <a:latin typeface="Cambria Math" panose="02040503050406030204" pitchFamily="18" charset="0"/>
-                      </a:rPr>
-                      <m:t>7.8</m:t>
-                    </m:r>
-                    <m:r>
-                      <a:rPr lang="fr-FR" b="0" i="1" smtClean="0">
-                        <a:latin typeface="Cambria Math" panose="02040503050406030204" pitchFamily="18" charset="0"/>
-                      </a:rPr>
-                      <m:t>−80.6=−52.</m:t>
-                    </m:r>
-                    <m:r>
-                      <a:rPr lang="fr-FR" b="0" i="1" smtClean="0">
-                        <a:latin typeface="Cambria Math" panose="02040503050406030204" pitchFamily="18" charset="0"/>
-                      </a:rPr>
-                      <m:t>8</m:t>
-                    </m:r>
-                    <m:r>
-                      <a:rPr lang="fr-FR" b="0" i="1" smtClean="0">
-                        <a:latin typeface="Cambria Math" panose="02040503050406030204" pitchFamily="18" charset="0"/>
-                      </a:rPr>
-                      <m:t> </m:t>
+                      <m:t>=27.8−80.6=−52.8 </m:t>
                     </m:r>
                     <m:r>
                       <a:rPr lang="fr-FR" b="0" i="1" smtClean="0">
@@ -8480,7 +8661,7 @@
                 <a:pPr lvl="1"/>
                 <a:r>
                   <a:rPr lang="fr-FR" dirty="0"/>
-                  <a:t>Porosité : 0.9 </a:t>
+                  <a:t>Porosité = 0.9 </a:t>
                 </a:r>
               </a:p>
               <a:p>
@@ -8491,7 +8672,7 @@
                 </a:r>
                 <a:r>
                   <a:rPr lang="fr-FR" dirty="0"/>
-                  <a:t> : 101</a:t>
+                  <a:t> = 101</a:t>
                 </a:r>
               </a:p>
               <a:p>
@@ -8558,6 +8739,21 @@
                         <a:latin typeface="Cambria Math" panose="02040503050406030204" pitchFamily="18" charset="0"/>
                       </a:rPr>
                       <m:t> = 0.1 </m:t>
+                    </m:r>
+                    <m:r>
+                      <m:rPr>
+                        <m:sty m:val="p"/>
+                      </m:rPr>
+                      <a:rPr lang="fr-FR" b="0" i="1" smtClean="0">
+                        <a:latin typeface="Cambria Math" panose="02040503050406030204" pitchFamily="18" charset="0"/>
+                      </a:rPr>
+                      <m:t>Pa</m:t>
+                    </m:r>
+                    <m:r>
+                      <a:rPr lang="fr-FR" i="1">
+                        <a:latin typeface="Cambria Math" panose="02040503050406030204" pitchFamily="18" charset="0"/>
+                      </a:rPr>
+                      <m:t> </m:t>
                     </m:r>
                   </m:oMath>
                 </a14:m>
@@ -9216,13 +9412,28 @@
                       <a:rPr lang="fr-FR" b="0" i="1" smtClean="0">
                         <a:latin typeface="Cambria Math" panose="02040503050406030204" pitchFamily="18" charset="0"/>
                       </a:rPr>
-                      <m:t>-92.4</m:t>
-                    </m:r>
-                    <m:r>
+                      <m:t>−92.4</m:t>
+                    </m:r>
+                    <m:r>
+                      <a:rPr lang="fr-FR" b="0" i="1" smtClean="0">
+                        <a:latin typeface="Cambria Math" panose="02040503050406030204" pitchFamily="18" charset="0"/>
+                      </a:rPr>
+                      <m:t> </m:t>
+                    </m:r>
+                    <m:r>
+                      <m:rPr>
+                        <m:sty m:val="p"/>
+                      </m:rPr>
                       <a:rPr lang="fr-FR" i="1">
                         <a:latin typeface="Cambria Math" panose="02040503050406030204" pitchFamily="18" charset="0"/>
                       </a:rPr>
-                      <m:t>≤</m:t>
+                      <m:t>μm</m:t>
+                    </m:r>
+                    <m:r>
+                      <a:rPr lang="fr-FR" i="1">
+                        <a:latin typeface="Cambria Math" panose="02040503050406030204" pitchFamily="18" charset="0"/>
+                      </a:rPr>
+                      <m:t>²≤</m:t>
                     </m:r>
                     <m:sSub>
                       <m:sSubPr>
@@ -9259,7 +9470,22 @@
                       <a:rPr lang="fr-FR" b="0" i="1" smtClean="0">
                         <a:latin typeface="Cambria Math" panose="02040503050406030204" pitchFamily="18" charset="0"/>
                       </a:rPr>
-                      <m:t>-13.2</m:t>
+                      <m:t>−13.2</m:t>
+                    </m:r>
+                    <m:r>
+                      <m:rPr>
+                        <m:sty m:val="p"/>
+                      </m:rPr>
+                      <a:rPr lang="fr-FR" i="1">
+                        <a:latin typeface="Cambria Math" panose="02040503050406030204" pitchFamily="18" charset="0"/>
+                      </a:rPr>
+                      <m:t>μm</m:t>
+                    </m:r>
+                    <m:r>
+                      <a:rPr lang="fr-FR" i="1">
+                        <a:latin typeface="Cambria Math" panose="02040503050406030204" pitchFamily="18" charset="0"/>
+                      </a:rPr>
+                      <m:t>²</m:t>
                     </m:r>
                   </m:oMath>
                 </a14:m>

--- a/MEC8211-Devoir3.pptx
+++ b/MEC8211-Devoir3.pptx
@@ -206,7 +206,7 @@
           <a:p>
             <a:fld id="{6BD447F1-453D-4945-8981-7B47F590C70C}" type="datetimeFigureOut">
               <a:rPr lang="fr-CA" smtClean="0"/>
-              <a:t>2026-03-26</a:t>
+              <a:t>2026-03-27</a:t>
             </a:fld>
             <a:endParaRPr lang="fr-CA"/>
           </a:p>
@@ -365,7 +365,7 @@
           <a:p>
             <a:fld id="{75A0F3B1-98BF-4430-AB0B-53D22E8A78C9}" type="slidenum">
               <a:rPr lang="fr-CA" smtClean="0"/>
-              <a:t>‹#›</a:t>
+              <a:t>‹N°›</a:t>
             </a:fld>
             <a:endParaRPr lang="fr-CA"/>
           </a:p>
@@ -666,6 +666,258 @@
 </p:notes>
 </file>
 
+<file path=ppt/notesSlides/notesSlide3.xml><?xml version="1.0" encoding="utf-8"?>
+<p:notes xmlns:a="http://schemas.openxmlformats.org/drawingml/2006/main" xmlns:r="http://schemas.openxmlformats.org/officeDocument/2006/relationships" xmlns:p="http://schemas.openxmlformats.org/presentationml/2006/main">
+  <p:cSld>
+    <p:spTree>
+      <p:nvGrpSpPr>
+        <p:cNvPr id="1" name=""/>
+        <p:cNvGrpSpPr/>
+        <p:nvPr/>
+      </p:nvGrpSpPr>
+      <p:grpSpPr>
+        <a:xfrm>
+          <a:off x="0" y="0"/>
+          <a:ext cx="0" cy="0"/>
+          <a:chOff x="0" y="0"/>
+          <a:chExt cx="0" cy="0"/>
+        </a:xfrm>
+      </p:grpSpPr>
+      <p:sp>
+        <p:nvSpPr>
+          <p:cNvPr id="2" name="Espace réservé de l'image des diapositives 1"/>
+          <p:cNvSpPr>
+            <a:spLocks noGrp="1" noRot="1" noChangeAspect="1"/>
+          </p:cNvSpPr>
+          <p:nvPr>
+            <p:ph type="sldImg"/>
+          </p:nvPr>
+        </p:nvSpPr>
+        <p:spPr/>
+      </p:sp>
+      <p:sp>
+        <p:nvSpPr>
+          <p:cNvPr id="3" name="Espace réservé des notes 2"/>
+          <p:cNvSpPr>
+            <a:spLocks noGrp="1"/>
+          </p:cNvSpPr>
+          <p:nvPr>
+            <p:ph type="body" idx="1"/>
+          </p:nvPr>
+        </p:nvSpPr>
+        <p:spPr/>
+        <p:txBody>
+          <a:bodyPr/>
+          <a:lstStyle/>
+          <a:p>
+            <a:endParaRPr lang="fr-FR" dirty="0"/>
+          </a:p>
+        </p:txBody>
+      </p:sp>
+      <p:sp>
+        <p:nvSpPr>
+          <p:cNvPr id="4" name="Espace réservé du numéro de diapositive 3"/>
+          <p:cNvSpPr>
+            <a:spLocks noGrp="1"/>
+          </p:cNvSpPr>
+          <p:nvPr>
+            <p:ph type="sldNum" sz="quarter" idx="5"/>
+          </p:nvPr>
+        </p:nvSpPr>
+        <p:spPr/>
+        <p:txBody>
+          <a:bodyPr/>
+          <a:lstStyle/>
+          <a:p>
+            <a:fld id="{75A0F3B1-98BF-4430-AB0B-53D22E8A78C9}" type="slidenum">
+              <a:rPr lang="fr-CA" smtClean="0"/>
+              <a:t>7</a:t>
+            </a:fld>
+            <a:endParaRPr lang="fr-CA"/>
+          </a:p>
+        </p:txBody>
+      </p:sp>
+    </p:spTree>
+    <p:extLst>
+      <p:ext uri="{BB962C8B-B14F-4D97-AF65-F5344CB8AC3E}">
+        <p14:creationId xmlns:p14="http://schemas.microsoft.com/office/powerpoint/2010/main" val="1601497228"/>
+      </p:ext>
+    </p:extLst>
+  </p:cSld>
+  <p:clrMapOvr>
+    <a:masterClrMapping/>
+  </p:clrMapOvr>
+</p:notes>
+</file>
+
+<file path=ppt/notesSlides/notesSlide4.xml><?xml version="1.0" encoding="utf-8"?>
+<p:notes xmlns:a="http://schemas.openxmlformats.org/drawingml/2006/main" xmlns:r="http://schemas.openxmlformats.org/officeDocument/2006/relationships" xmlns:p="http://schemas.openxmlformats.org/presentationml/2006/main">
+  <p:cSld>
+    <p:spTree>
+      <p:nvGrpSpPr>
+        <p:cNvPr id="1" name=""/>
+        <p:cNvGrpSpPr/>
+        <p:nvPr/>
+      </p:nvGrpSpPr>
+      <p:grpSpPr>
+        <a:xfrm>
+          <a:off x="0" y="0"/>
+          <a:ext cx="0" cy="0"/>
+          <a:chOff x="0" y="0"/>
+          <a:chExt cx="0" cy="0"/>
+        </a:xfrm>
+      </p:grpSpPr>
+      <p:sp>
+        <p:nvSpPr>
+          <p:cNvPr id="2" name="Espace réservé de l'image des diapositives 1"/>
+          <p:cNvSpPr>
+            <a:spLocks noGrp="1" noRot="1" noChangeAspect="1"/>
+          </p:cNvSpPr>
+          <p:nvPr>
+            <p:ph type="sldImg"/>
+          </p:nvPr>
+        </p:nvSpPr>
+        <p:spPr/>
+      </p:sp>
+      <p:sp>
+        <p:nvSpPr>
+          <p:cNvPr id="3" name="Espace réservé des notes 2"/>
+          <p:cNvSpPr>
+            <a:spLocks noGrp="1"/>
+          </p:cNvSpPr>
+          <p:nvPr>
+            <p:ph type="body" idx="1"/>
+          </p:nvPr>
+        </p:nvSpPr>
+        <p:spPr/>
+        <p:txBody>
+          <a:bodyPr/>
+          <a:lstStyle/>
+          <a:p>
+            <a:endParaRPr lang="fr-FR" dirty="0"/>
+          </a:p>
+        </p:txBody>
+      </p:sp>
+      <p:sp>
+        <p:nvSpPr>
+          <p:cNvPr id="4" name="Espace réservé du numéro de diapositive 3"/>
+          <p:cNvSpPr>
+            <a:spLocks noGrp="1"/>
+          </p:cNvSpPr>
+          <p:nvPr>
+            <p:ph type="sldNum" sz="quarter" idx="5"/>
+          </p:nvPr>
+        </p:nvSpPr>
+        <p:spPr/>
+        <p:txBody>
+          <a:bodyPr/>
+          <a:lstStyle/>
+          <a:p>
+            <a:fld id="{75A0F3B1-98BF-4430-AB0B-53D22E8A78C9}" type="slidenum">
+              <a:rPr lang="fr-CA" smtClean="0"/>
+              <a:t>9</a:t>
+            </a:fld>
+            <a:endParaRPr lang="fr-CA"/>
+          </a:p>
+        </p:txBody>
+      </p:sp>
+    </p:spTree>
+    <p:extLst>
+      <p:ext uri="{BB962C8B-B14F-4D97-AF65-F5344CB8AC3E}">
+        <p14:creationId xmlns:p14="http://schemas.microsoft.com/office/powerpoint/2010/main" val="137409518"/>
+      </p:ext>
+    </p:extLst>
+  </p:cSld>
+  <p:clrMapOvr>
+    <a:masterClrMapping/>
+  </p:clrMapOvr>
+</p:notes>
+</file>
+
+<file path=ppt/notesSlides/notesSlide5.xml><?xml version="1.0" encoding="utf-8"?>
+<p:notes xmlns:a="http://schemas.openxmlformats.org/drawingml/2006/main" xmlns:r="http://schemas.openxmlformats.org/officeDocument/2006/relationships" xmlns:p="http://schemas.openxmlformats.org/presentationml/2006/main">
+  <p:cSld>
+    <p:spTree>
+      <p:nvGrpSpPr>
+        <p:cNvPr id="1" name=""/>
+        <p:cNvGrpSpPr/>
+        <p:nvPr/>
+      </p:nvGrpSpPr>
+      <p:grpSpPr>
+        <a:xfrm>
+          <a:off x="0" y="0"/>
+          <a:ext cx="0" cy="0"/>
+          <a:chOff x="0" y="0"/>
+          <a:chExt cx="0" cy="0"/>
+        </a:xfrm>
+      </p:grpSpPr>
+      <p:sp>
+        <p:nvSpPr>
+          <p:cNvPr id="2" name="Espace réservé de l'image des diapositives 1"/>
+          <p:cNvSpPr>
+            <a:spLocks noGrp="1" noRot="1" noChangeAspect="1"/>
+          </p:cNvSpPr>
+          <p:nvPr>
+            <p:ph type="sldImg"/>
+          </p:nvPr>
+        </p:nvSpPr>
+        <p:spPr/>
+      </p:sp>
+      <p:sp>
+        <p:nvSpPr>
+          <p:cNvPr id="3" name="Espace réservé des notes 2"/>
+          <p:cNvSpPr>
+            <a:spLocks noGrp="1"/>
+          </p:cNvSpPr>
+          <p:nvPr>
+            <p:ph type="body" idx="1"/>
+          </p:nvPr>
+        </p:nvSpPr>
+        <p:spPr/>
+        <p:txBody>
+          <a:bodyPr/>
+          <a:lstStyle/>
+          <a:p>
+            <a:endParaRPr lang="fr-FR" dirty="0"/>
+          </a:p>
+        </p:txBody>
+      </p:sp>
+      <p:sp>
+        <p:nvSpPr>
+          <p:cNvPr id="4" name="Espace réservé du numéro de diapositive 3"/>
+          <p:cNvSpPr>
+            <a:spLocks noGrp="1"/>
+          </p:cNvSpPr>
+          <p:nvPr>
+            <p:ph type="sldNum" sz="quarter" idx="5"/>
+          </p:nvPr>
+        </p:nvSpPr>
+        <p:spPr/>
+        <p:txBody>
+          <a:bodyPr/>
+          <a:lstStyle/>
+          <a:p>
+            <a:fld id="{75A0F3B1-98BF-4430-AB0B-53D22E8A78C9}" type="slidenum">
+              <a:rPr lang="fr-CA" smtClean="0"/>
+              <a:t>10</a:t>
+            </a:fld>
+            <a:endParaRPr lang="fr-CA"/>
+          </a:p>
+        </p:txBody>
+      </p:sp>
+    </p:spTree>
+    <p:extLst>
+      <p:ext uri="{BB962C8B-B14F-4D97-AF65-F5344CB8AC3E}">
+        <p14:creationId xmlns:p14="http://schemas.microsoft.com/office/powerpoint/2010/main" val="2593110498"/>
+      </p:ext>
+    </p:extLst>
+  </p:cSld>
+  <p:clrMapOvr>
+    <a:masterClrMapping/>
+  </p:clrMapOvr>
+</p:notes>
+</file>
+
 <file path=ppt/slideLayouts/slideLayout1.xml><?xml version="1.0" encoding="utf-8"?>
 <p:sldLayout xmlns:a="http://schemas.openxmlformats.org/drawingml/2006/main" xmlns:r="http://schemas.openxmlformats.org/officeDocument/2006/relationships" xmlns:p="http://schemas.openxmlformats.org/presentationml/2006/main" type="title" preserve="1">
   <p:cSld name="Diapositive de titre">
@@ -813,7 +1065,7 @@
           <a:p>
             <a:fld id="{31FFBCA7-9440-4261-9163-708EE63D7830}" type="datetimeFigureOut">
               <a:rPr lang="fr-FR" smtClean="0"/>
-              <a:t>26/03/2026</a:t>
+              <a:t>27/03/2026</a:t>
             </a:fld>
             <a:endParaRPr lang="fr-FR"/>
           </a:p>
@@ -867,7 +1119,7 @@
           <a:p>
             <a:fld id="{604604B4-3276-4BB4-823A-E61BE8D504DF}" type="slidenum">
               <a:rPr lang="fr-FR" smtClean="0"/>
-              <a:t>‹#›</a:t>
+              <a:t>‹N°›</a:t>
             </a:fld>
             <a:endParaRPr lang="fr-FR"/>
           </a:p>
@@ -1011,7 +1263,7 @@
           <a:p>
             <a:fld id="{31FFBCA7-9440-4261-9163-708EE63D7830}" type="datetimeFigureOut">
               <a:rPr lang="fr-FR" smtClean="0"/>
-              <a:t>26/03/2026</a:t>
+              <a:t>27/03/2026</a:t>
             </a:fld>
             <a:endParaRPr lang="fr-FR"/>
           </a:p>
@@ -1065,7 +1317,7 @@
           <a:p>
             <a:fld id="{604604B4-3276-4BB4-823A-E61BE8D504DF}" type="slidenum">
               <a:rPr lang="fr-FR" smtClean="0"/>
-              <a:t>‹#›</a:t>
+              <a:t>‹N°›</a:t>
             </a:fld>
             <a:endParaRPr lang="fr-FR"/>
           </a:p>
@@ -1219,7 +1471,7 @@
           <a:p>
             <a:fld id="{31FFBCA7-9440-4261-9163-708EE63D7830}" type="datetimeFigureOut">
               <a:rPr lang="fr-FR" smtClean="0"/>
-              <a:t>26/03/2026</a:t>
+              <a:t>27/03/2026</a:t>
             </a:fld>
             <a:endParaRPr lang="fr-FR"/>
           </a:p>
@@ -1273,7 +1525,7 @@
           <a:p>
             <a:fld id="{604604B4-3276-4BB4-823A-E61BE8D504DF}" type="slidenum">
               <a:rPr lang="fr-FR" smtClean="0"/>
-              <a:t>‹#›</a:t>
+              <a:t>‹N°›</a:t>
             </a:fld>
             <a:endParaRPr lang="fr-FR"/>
           </a:p>
@@ -1417,7 +1669,7 @@
           <a:p>
             <a:fld id="{31FFBCA7-9440-4261-9163-708EE63D7830}" type="datetimeFigureOut">
               <a:rPr lang="fr-FR" smtClean="0"/>
-              <a:t>26/03/2026</a:t>
+              <a:t>27/03/2026</a:t>
             </a:fld>
             <a:endParaRPr lang="fr-FR"/>
           </a:p>
@@ -1471,7 +1723,7 @@
           <a:p>
             <a:fld id="{604604B4-3276-4BB4-823A-E61BE8D504DF}" type="slidenum">
               <a:rPr lang="fr-FR" smtClean="0"/>
-              <a:t>‹#›</a:t>
+              <a:t>‹N°›</a:t>
             </a:fld>
             <a:endParaRPr lang="fr-FR"/>
           </a:p>
@@ -1692,7 +1944,7 @@
           <a:p>
             <a:fld id="{31FFBCA7-9440-4261-9163-708EE63D7830}" type="datetimeFigureOut">
               <a:rPr lang="fr-FR" smtClean="0"/>
-              <a:t>26/03/2026</a:t>
+              <a:t>27/03/2026</a:t>
             </a:fld>
             <a:endParaRPr lang="fr-FR"/>
           </a:p>
@@ -1746,7 +1998,7 @@
           <a:p>
             <a:fld id="{604604B4-3276-4BB4-823A-E61BE8D504DF}" type="slidenum">
               <a:rPr lang="fr-FR" smtClean="0"/>
-              <a:t>‹#›</a:t>
+              <a:t>‹N°›</a:t>
             </a:fld>
             <a:endParaRPr lang="fr-FR"/>
           </a:p>
@@ -1957,7 +2209,7 @@
           <a:p>
             <a:fld id="{31FFBCA7-9440-4261-9163-708EE63D7830}" type="datetimeFigureOut">
               <a:rPr lang="fr-FR" smtClean="0"/>
-              <a:t>26/03/2026</a:t>
+              <a:t>27/03/2026</a:t>
             </a:fld>
             <a:endParaRPr lang="fr-FR"/>
           </a:p>
@@ -2011,7 +2263,7 @@
           <a:p>
             <a:fld id="{604604B4-3276-4BB4-823A-E61BE8D504DF}" type="slidenum">
               <a:rPr lang="fr-FR" smtClean="0"/>
-              <a:t>‹#›</a:t>
+              <a:t>‹N°›</a:t>
             </a:fld>
             <a:endParaRPr lang="fr-FR"/>
           </a:p>
@@ -2369,7 +2621,7 @@
           <a:p>
             <a:fld id="{31FFBCA7-9440-4261-9163-708EE63D7830}" type="datetimeFigureOut">
               <a:rPr lang="fr-FR" smtClean="0"/>
-              <a:t>26/03/2026</a:t>
+              <a:t>27/03/2026</a:t>
             </a:fld>
             <a:endParaRPr lang="fr-FR"/>
           </a:p>
@@ -2423,7 +2675,7 @@
           <a:p>
             <a:fld id="{604604B4-3276-4BB4-823A-E61BE8D504DF}" type="slidenum">
               <a:rPr lang="fr-FR" smtClean="0"/>
-              <a:t>‹#›</a:t>
+              <a:t>‹N°›</a:t>
             </a:fld>
             <a:endParaRPr lang="fr-FR"/>
           </a:p>
@@ -2510,7 +2762,7 @@
           <a:p>
             <a:fld id="{31FFBCA7-9440-4261-9163-708EE63D7830}" type="datetimeFigureOut">
               <a:rPr lang="fr-FR" smtClean="0"/>
-              <a:t>26/03/2026</a:t>
+              <a:t>27/03/2026</a:t>
             </a:fld>
             <a:endParaRPr lang="fr-FR"/>
           </a:p>
@@ -2564,7 +2816,7 @@
           <a:p>
             <a:fld id="{604604B4-3276-4BB4-823A-E61BE8D504DF}" type="slidenum">
               <a:rPr lang="fr-FR" smtClean="0"/>
-              <a:t>‹#›</a:t>
+              <a:t>‹N°›</a:t>
             </a:fld>
             <a:endParaRPr lang="fr-FR"/>
           </a:p>
@@ -2623,7 +2875,7 @@
           <a:p>
             <a:fld id="{31FFBCA7-9440-4261-9163-708EE63D7830}" type="datetimeFigureOut">
               <a:rPr lang="fr-FR" smtClean="0"/>
-              <a:t>26/03/2026</a:t>
+              <a:t>27/03/2026</a:t>
             </a:fld>
             <a:endParaRPr lang="fr-FR"/>
           </a:p>
@@ -2677,7 +2929,7 @@
           <a:p>
             <a:fld id="{604604B4-3276-4BB4-823A-E61BE8D504DF}" type="slidenum">
               <a:rPr lang="fr-FR" smtClean="0"/>
-              <a:t>‹#›</a:t>
+              <a:t>‹N°›</a:t>
             </a:fld>
             <a:endParaRPr lang="fr-FR"/>
           </a:p>
@@ -2934,7 +3186,7 @@
           <a:p>
             <a:fld id="{31FFBCA7-9440-4261-9163-708EE63D7830}" type="datetimeFigureOut">
               <a:rPr lang="fr-FR" smtClean="0"/>
-              <a:t>26/03/2026</a:t>
+              <a:t>27/03/2026</a:t>
             </a:fld>
             <a:endParaRPr lang="fr-FR"/>
           </a:p>
@@ -2988,7 +3240,7 @@
           <a:p>
             <a:fld id="{604604B4-3276-4BB4-823A-E61BE8D504DF}" type="slidenum">
               <a:rPr lang="fr-FR" smtClean="0"/>
-              <a:t>‹#›</a:t>
+              <a:t>‹N°›</a:t>
             </a:fld>
             <a:endParaRPr lang="fr-FR"/>
           </a:p>
@@ -3222,7 +3474,7 @@
           <a:p>
             <a:fld id="{31FFBCA7-9440-4261-9163-708EE63D7830}" type="datetimeFigureOut">
               <a:rPr lang="fr-FR" smtClean="0"/>
-              <a:t>26/03/2026</a:t>
+              <a:t>27/03/2026</a:t>
             </a:fld>
             <a:endParaRPr lang="fr-FR"/>
           </a:p>
@@ -3276,7 +3528,7 @@
           <a:p>
             <a:fld id="{604604B4-3276-4BB4-823A-E61BE8D504DF}" type="slidenum">
               <a:rPr lang="fr-FR" smtClean="0"/>
-              <a:t>‹#›</a:t>
+              <a:t>‹N°›</a:t>
             </a:fld>
             <a:endParaRPr lang="fr-FR"/>
           </a:p>
@@ -3463,7 +3715,7 @@
           <a:p>
             <a:fld id="{31FFBCA7-9440-4261-9163-708EE63D7830}" type="datetimeFigureOut">
               <a:rPr lang="fr-FR" smtClean="0"/>
-              <a:t>26/03/2026</a:t>
+              <a:t>27/03/2026</a:t>
             </a:fld>
             <a:endParaRPr lang="fr-FR"/>
           </a:p>
@@ -3553,7 +3805,7 @@
           <a:p>
             <a:fld id="{604604B4-3276-4BB4-823A-E61BE8D504DF}" type="slidenum">
               <a:rPr lang="fr-FR" smtClean="0"/>
-              <a:t>‹#›</a:t>
+              <a:t>‹N°›</a:t>
             </a:fld>
             <a:endParaRPr lang="fr-FR"/>
           </a:p>
@@ -4060,14 +4312,19 @@
             <p:ph type="title"/>
           </p:nvPr>
         </p:nvSpPr>
-        <p:spPr/>
+        <p:spPr>
+          <a:xfrm>
+            <a:off x="838200" y="16130"/>
+            <a:ext cx="10515600" cy="1325563"/>
+          </a:xfrm>
+        </p:spPr>
         <p:txBody>
           <a:bodyPr/>
           <a:lstStyle/>
           <a:p>
             <a:r>
               <a:rPr lang="fr-FR" dirty="0"/>
-              <a:t>Interprétation de l’intervalle de confiance </a:t>
+              <a:t>Conclusions </a:t>
             </a:r>
           </a:p>
         </p:txBody>
@@ -4090,30 +4347,55 @@
                 <p:ph idx="1"/>
               </p:nvPr>
             </p:nvSpPr>
-            <p:spPr/>
+            <p:spPr>
+              <a:xfrm>
+                <a:off x="292063" y="1341693"/>
+                <a:ext cx="5322353" cy="4491947"/>
+              </a:xfrm>
+            </p:spPr>
             <p:txBody>
-              <a:bodyPr/>
+              <a:bodyPr>
+                <a:normAutofit fontScale="92500" lnSpcReduction="10000"/>
+              </a:bodyPr>
               <a:lstStyle/>
               <a:p>
-                <a:r>
-                  <a:rPr lang="fr-FR" b="0" dirty="0">
+                <a:pPr algn="just">
+                  <a:spcAft>
+                    <a:spcPts val="1200"/>
+                  </a:spcAft>
+                </a:pPr>
+                <a:r>
+                  <a:rPr lang="fr-FR" sz="2500" b="0" dirty="0">
                     <a:latin typeface="Cambria Math" panose="02040503050406030204" pitchFamily="18" charset="0"/>
                   </a:rPr>
-                  <a:t>Nous connaissons le signe de </a:t>
+                  <a:t>On se trouve dans le cas 3a (C=7)</a:t>
+                </a:r>
+              </a:p>
+              <a:p>
+                <a:pPr algn="just">
+                  <a:spcAft>
+                    <a:spcPts val="1200"/>
+                  </a:spcAft>
+                </a:pPr>
+                <a:r>
+                  <a:rPr lang="fr-FR" sz="2500" b="0" dirty="0">
+                    <a:latin typeface="Cambria Math" panose="02040503050406030204" pitchFamily="18" charset="0"/>
+                  </a:rPr>
+                  <a:t>Seul un encadrement de </a:t>
                 </a:r>
                 <a14:m>
                   <m:oMath xmlns:m="http://schemas.openxmlformats.org/officeDocument/2006/math">
                     <m:sSub>
                       <m:sSubPr>
                         <m:ctrlPr>
-                          <a:rPr lang="fr-FR" i="1">
+                          <a:rPr lang="fr-FR" sz="2500" i="1">
                             <a:latin typeface="Cambria Math" panose="02040503050406030204" pitchFamily="18" charset="0"/>
                           </a:rPr>
                         </m:ctrlPr>
                       </m:sSubPr>
                       <m:e>
                         <m:r>
-                          <a:rPr lang="fr-FR" i="1">
+                          <a:rPr lang="fr-FR" sz="2500" i="1">
                             <a:latin typeface="Cambria Math" panose="02040503050406030204" pitchFamily="18" charset="0"/>
                           </a:rPr>
                           <m:t>𝛿</m:t>
@@ -4121,7 +4403,7 @@
                       </m:e>
                       <m:sub>
                         <m:r>
-                          <a:rPr lang="fr-FR" i="1">
+                          <a:rPr lang="fr-FR" sz="2500" i="1">
                             <a:latin typeface="Cambria Math" panose="02040503050406030204" pitchFamily="18" charset="0"/>
                           </a:rPr>
                           <m:t>𝑚𝑜𝑑𝑒𝑙</m:t>
@@ -4130,115 +4412,273 @@
                     </m:sSub>
                   </m:oMath>
                 </a14:m>
-                <a:endParaRPr lang="fr-FR" b="0" dirty="0">
+                <a:r>
+                  <a:rPr lang="fr-FR" sz="2500" b="0" dirty="0">
+                    <a:latin typeface="Cambria Math" panose="02040503050406030204" pitchFamily="18" charset="0"/>
+                  </a:rPr>
+                  <a:t> est possible (contrairement au cas 1) </a:t>
+                </a:r>
+              </a:p>
+              <a:p>
+                <a:pPr algn="just">
+                  <a:spcAft>
+                    <a:spcPts val="1200"/>
+                  </a:spcAft>
+                </a:pPr>
+                <a14:m>
+                  <m:oMath xmlns:m="http://schemas.openxmlformats.org/officeDocument/2006/math">
+                    <m:d>
+                      <m:dPr>
+                        <m:begChr m:val="|"/>
+                        <m:endChr m:val="|"/>
+                        <m:ctrlPr>
+                          <a:rPr lang="fr-FR" sz="2500" i="1">
+                            <a:latin typeface="Cambria Math" panose="02040503050406030204" pitchFamily="18" charset="0"/>
+                          </a:rPr>
+                        </m:ctrlPr>
+                      </m:dPr>
+                      <m:e>
+                        <m:sSub>
+                          <m:sSubPr>
+                            <m:ctrlPr>
+                              <a:rPr lang="fr-FR" sz="2500" i="1">
+                                <a:latin typeface="Cambria Math" panose="02040503050406030204" pitchFamily="18" charset="0"/>
+                              </a:rPr>
+                            </m:ctrlPr>
+                          </m:sSubPr>
+                          <m:e>
+                            <m:r>
+                              <a:rPr lang="fr-FR" sz="2500" i="1">
+                                <a:latin typeface="Cambria Math" panose="02040503050406030204" pitchFamily="18" charset="0"/>
+                              </a:rPr>
+                              <m:t>𝛿</m:t>
+                            </m:r>
+                          </m:e>
+                          <m:sub>
+                            <m:r>
+                              <a:rPr lang="fr-FR" sz="2500" i="1">
+                                <a:latin typeface="Cambria Math" panose="02040503050406030204" pitchFamily="18" charset="0"/>
+                              </a:rPr>
+                              <m:t>𝑚𝑜𝑑𝑒𝑙</m:t>
+                            </m:r>
+                          </m:sub>
+                        </m:sSub>
+                      </m:e>
+                    </m:d>
+                    <m:r>
+                      <a:rPr lang="fr-FR" sz="2500" i="1">
+                        <a:latin typeface="Cambria Math" panose="02040503050406030204" pitchFamily="18" charset="0"/>
+                      </a:rPr>
+                      <m:t>&lt;</m:t>
+                    </m:r>
+                    <m:d>
+                      <m:dPr>
+                        <m:begChr m:val="|"/>
+                        <m:endChr m:val="|"/>
+                        <m:ctrlPr>
+                          <a:rPr lang="fr-FR" sz="2500" i="1">
+                            <a:latin typeface="Cambria Math" panose="02040503050406030204" pitchFamily="18" charset="0"/>
+                          </a:rPr>
+                        </m:ctrlPr>
+                      </m:dPr>
+                      <m:e>
+                        <m:r>
+                          <m:rPr>
+                            <m:sty m:val="p"/>
+                          </m:rPr>
+                          <a:rPr lang="fr-FR" sz="2500" i="1">
+                            <a:latin typeface="Cambria Math" panose="02040503050406030204" pitchFamily="18" charset="0"/>
+                          </a:rPr>
+                          <m:t>E</m:t>
+                        </m:r>
+                      </m:e>
+                    </m:d>
+                    <m:r>
+                      <a:rPr lang="fr-FR" sz="2500" i="1">
+                        <a:latin typeface="Cambria Math" panose="02040503050406030204" pitchFamily="18" charset="0"/>
+                      </a:rPr>
+                      <m:t>+ </m:t>
+                    </m:r>
+                    <m:sSub>
+                      <m:sSubPr>
+                        <m:ctrlPr>
+                          <a:rPr lang="fr-FR" sz="2500" i="1">
+                            <a:latin typeface="Cambria Math" panose="02040503050406030204" pitchFamily="18" charset="0"/>
+                          </a:rPr>
+                        </m:ctrlPr>
+                      </m:sSubPr>
+                      <m:e>
+                        <m:r>
+                          <m:rPr>
+                            <m:sty m:val="p"/>
+                          </m:rPr>
+                          <a:rPr lang="fr-FR" sz="2500" i="1">
+                            <a:latin typeface="Cambria Math" panose="02040503050406030204" pitchFamily="18" charset="0"/>
+                          </a:rPr>
+                          <m:t>k</m:t>
+                        </m:r>
+                        <m:r>
+                          <a:rPr lang="fr-FR" sz="2500" i="1">
+                            <a:latin typeface="Cambria Math" panose="02040503050406030204" pitchFamily="18" charset="0"/>
+                          </a:rPr>
+                          <m:t>𝑢</m:t>
+                        </m:r>
+                      </m:e>
+                      <m:sub>
+                        <m:r>
+                          <a:rPr lang="fr-FR" sz="2500" i="1">
+                            <a:latin typeface="Cambria Math" panose="02040503050406030204" pitchFamily="18" charset="0"/>
+                          </a:rPr>
+                          <m:t>𝑣𝑎𝑙</m:t>
+                        </m:r>
+                      </m:sub>
+                    </m:sSub>
+                    <m:r>
+                      <a:rPr lang="fr-FR" sz="2500" b="0" i="1" smtClean="0">
+                        <a:latin typeface="Cambria Math" panose="02040503050406030204" pitchFamily="18" charset="0"/>
+                      </a:rPr>
+                      <m:t>=92.4 </m:t>
+                    </m:r>
+                    <m:r>
+                      <m:rPr>
+                        <m:sty m:val="p"/>
+                      </m:rPr>
+                      <a:rPr lang="fr-FR" sz="2400" i="1">
+                        <a:latin typeface="Cambria Math" panose="02040503050406030204" pitchFamily="18" charset="0"/>
+                      </a:rPr>
+                      <m:t>μm</m:t>
+                    </m:r>
+                    <m:r>
+                      <a:rPr lang="fr-FR" sz="2400" i="1">
+                        <a:latin typeface="Cambria Math" panose="02040503050406030204" pitchFamily="18" charset="0"/>
+                      </a:rPr>
+                      <m:t>²</m:t>
+                    </m:r>
+                  </m:oMath>
+                </a14:m>
+                <a:r>
+                  <a:rPr lang="fr-FR" sz="2400" dirty="0"/>
+                  <a:t> </a:t>
+                </a:r>
+                <a:endParaRPr lang="fr-FR" sz="2500" b="0" dirty="0">
                   <a:latin typeface="Cambria Math" panose="02040503050406030204" pitchFamily="18" charset="0"/>
                 </a:endParaRPr>
               </a:p>
               <a:p>
-                <a14:m>
-                  <m:oMath xmlns:m="http://schemas.openxmlformats.org/officeDocument/2006/math">
-                    <m:r>
-                      <a:rPr lang="fr-FR" b="0" i="1" smtClean="0">
-                        <a:latin typeface="Cambria Math" panose="02040503050406030204" pitchFamily="18" charset="0"/>
-                      </a:rPr>
-                      <m:t>|</m:t>
-                    </m:r>
-                    <m:r>
-                      <m:rPr>
-                        <m:sty m:val="p"/>
-                      </m:rPr>
-                      <a:rPr lang="fr-FR" b="0" i="1" smtClean="0">
-                        <a:latin typeface="Cambria Math" panose="02040503050406030204" pitchFamily="18" charset="0"/>
-                      </a:rPr>
-                      <m:t>E</m:t>
-                    </m:r>
-                    <m:r>
-                      <a:rPr lang="fr-FR" b="0" i="1" smtClean="0">
-                        <a:latin typeface="Cambria Math" panose="02040503050406030204" pitchFamily="18" charset="0"/>
-                      </a:rPr>
-                      <m:t>| &gt; </m:t>
-                    </m:r>
-                    <m:sSub>
-                      <m:sSubPr>
-                        <m:ctrlPr>
-                          <a:rPr lang="fr-FR" i="1">
-                            <a:latin typeface="Cambria Math" panose="02040503050406030204" pitchFamily="18" charset="0"/>
-                          </a:rPr>
-                        </m:ctrlPr>
-                      </m:sSubPr>
-                      <m:e>
-                        <m:r>
-                          <m:rPr>
-                            <m:sty m:val="p"/>
-                          </m:rPr>
-                          <a:rPr lang="fr-FR" b="0" i="1" smtClean="0">
-                            <a:latin typeface="Cambria Math" panose="02040503050406030204" pitchFamily="18" charset="0"/>
-                          </a:rPr>
-                          <m:t>k</m:t>
-                        </m:r>
-                        <m:r>
-                          <a:rPr lang="fr-FR" i="1">
-                            <a:latin typeface="Cambria Math" panose="02040503050406030204" pitchFamily="18" charset="0"/>
-                          </a:rPr>
-                          <m:t>𝑢</m:t>
-                        </m:r>
-                      </m:e>
-                      <m:sub>
-                        <m:r>
-                          <a:rPr lang="fr-FR" i="1">
-                            <a:latin typeface="Cambria Math" panose="02040503050406030204" pitchFamily="18" charset="0"/>
-                          </a:rPr>
-                          <m:t>𝑣𝑎𝑙</m:t>
-                        </m:r>
-                      </m:sub>
-                    </m:sSub>
-                  </m:oMath>
-                </a14:m>
-                <a:endParaRPr lang="fr-FR" b="0" dirty="0">
-                  <a:latin typeface="Cambria Math" panose="02040503050406030204" pitchFamily="18" charset="0"/>
-                </a:endParaRPr>
-              </a:p>
-              <a:p>
+                <a:pPr algn="just">
+                  <a:spcAft>
+                    <a:spcPts val="1200"/>
+                  </a:spcAft>
+                </a:pPr>
+                <a:r>
+                  <a:rPr lang="fr-FR" sz="2500" b="0" dirty="0">
+                    <a:latin typeface="Cambria Math" panose="02040503050406030204" pitchFamily="18" charset="0"/>
+                  </a:rPr>
+                  <a:t>Le signe de </a:t>
+                </a:r>
                 <a14:m>
                   <m:oMath xmlns:m="http://schemas.openxmlformats.org/officeDocument/2006/math">
                     <m:sSub>
                       <m:sSubPr>
                         <m:ctrlPr>
-                          <a:rPr lang="fr-FR" b="0" i="1" smtClean="0">
+                          <a:rPr lang="fr-FR" sz="2500" i="1">
                             <a:latin typeface="Cambria Math" panose="02040503050406030204" pitchFamily="18" charset="0"/>
                           </a:rPr>
                         </m:ctrlPr>
                       </m:sSubPr>
                       <m:e>
                         <m:r>
-                          <a:rPr lang="fr-FR" b="0" i="1" smtClean="0">
-                            <a:latin typeface="Cambria Math" panose="02040503050406030204" pitchFamily="18" charset="0"/>
-                          </a:rPr>
-                          <m:t>𝑢</m:t>
+                          <a:rPr lang="fr-FR" sz="2500" i="1">
+                            <a:latin typeface="Cambria Math" panose="02040503050406030204" pitchFamily="18" charset="0"/>
+                          </a:rPr>
+                          <m:t>𝛿</m:t>
                         </m:r>
                       </m:e>
                       <m:sub>
                         <m:r>
-                          <a:rPr lang="fr-FR" b="0" i="1" smtClean="0">
-                            <a:latin typeface="Cambria Math" panose="02040503050406030204" pitchFamily="18" charset="0"/>
-                          </a:rPr>
-                          <m:t>𝐷</m:t>
+                          <a:rPr lang="fr-FR" sz="2500" i="1">
+                            <a:latin typeface="Cambria Math" panose="02040503050406030204" pitchFamily="18" charset="0"/>
+                          </a:rPr>
+                          <m:t>𝑚𝑜𝑑𝑒𝑙</m:t>
                         </m:r>
                       </m:sub>
                     </m:sSub>
                   </m:oMath>
                 </a14:m>
                 <a:r>
-                  <a:rPr lang="fr-FR" dirty="0"/>
+                  <a:rPr lang="fr-FR" sz="2500" b="0" dirty="0">
+                    <a:latin typeface="Cambria Math" panose="02040503050406030204" pitchFamily="18" charset="0"/>
+                  </a:rPr>
+                  <a:t> est connu (-)</a:t>
+                </a:r>
+              </a:p>
+              <a:p>
+                <a:pPr algn="just">
+                  <a:spcAft>
+                    <a:spcPts val="200"/>
+                  </a:spcAft>
+                </a:pPr>
+                <a:r>
+                  <a:rPr lang="fr-FR" sz="2500" b="0" dirty="0"/>
+                  <a:t>L’erreur expérimentale (</a:t>
+                </a:r>
+                <a14:m>
+                  <m:oMath xmlns:m="http://schemas.openxmlformats.org/officeDocument/2006/math">
+                    <m:sSub>
+                      <m:sSubPr>
+                        <m:ctrlPr>
+                          <a:rPr lang="fr-FR" sz="2500" b="0" i="1" smtClean="0">
+                            <a:latin typeface="Cambria Math" panose="02040503050406030204" pitchFamily="18" charset="0"/>
+                          </a:rPr>
+                        </m:ctrlPr>
+                      </m:sSubPr>
+                      <m:e>
+                        <m:r>
+                          <a:rPr lang="fr-FR" sz="2500" b="0" i="1" smtClean="0">
+                            <a:latin typeface="Cambria Math" panose="02040503050406030204" pitchFamily="18" charset="0"/>
+                          </a:rPr>
+                          <m:t>𝑢</m:t>
+                        </m:r>
+                      </m:e>
+                      <m:sub>
+                        <m:r>
+                          <a:rPr lang="fr-FR" sz="2500" b="0" i="1" smtClean="0">
+                            <a:latin typeface="Cambria Math" panose="02040503050406030204" pitchFamily="18" charset="0"/>
+                          </a:rPr>
+                          <m:t>𝐷</m:t>
+                        </m:r>
+                      </m:sub>
+                    </m:sSub>
+                    <m:r>
+                      <a:rPr lang="fr-FR" sz="2500" b="0" i="1" smtClean="0">
+                        <a:latin typeface="Cambria Math" panose="02040503050406030204" pitchFamily="18" charset="0"/>
+                      </a:rPr>
+                      <m:t>)</m:t>
+                    </m:r>
+                  </m:oMath>
+                </a14:m>
+                <a:r>
+                  <a:rPr lang="fr-FR" sz="2500" dirty="0"/>
                   <a:t> semble être l’erreur prédominante dans la validation </a:t>
                 </a:r>
-                <a:r>
-                  <a:rPr lang="fr-FR" dirty="0">
+              </a:p>
+              <a:p>
+                <a:pPr marL="0" indent="0" algn="just">
+                  <a:spcBef>
+                    <a:spcPts val="600"/>
+                  </a:spcBef>
+                  <a:spcAft>
+                    <a:spcPts val="1200"/>
+                  </a:spcAft>
+                  <a:buNone/>
+                </a:pPr>
+                <a:r>
+                  <a:rPr lang="fr-FR" sz="2500" dirty="0">
                     <a:sym typeface="Wingdings" panose="05000000000000000000" pitchFamily="2" charset="2"/>
                   </a:rPr>
-                  <a:t> être plus précis sur les expériences  </a:t>
-                </a:r>
-                <a:endParaRPr lang="fr-FR" dirty="0"/>
+                  <a:t>La qualité des expériences doit être améliorée en priorité pour obtenir une meilleure validation   </a:t>
+                </a:r>
+                <a:endParaRPr lang="fr-FR" sz="2500" dirty="0"/>
               </a:p>
             </p:txBody>
           </p:sp>
@@ -4261,10 +4701,14 @@
               </p:nvPr>
             </p:nvSpPr>
             <p:spPr>
+              <a:xfrm>
+                <a:off x="292063" y="1341693"/>
+                <a:ext cx="5322353" cy="4491947"/>
+              </a:xfrm>
               <a:blipFill>
-                <a:blip r:embed="rId2"/>
+                <a:blip r:embed="rId3"/>
                 <a:stretch>
-                  <a:fillRect l="-1043" t="-2381"/>
+                  <a:fillRect l="-1718" t="-2578" r="-1604" b="-950"/>
                 </a:stretch>
               </a:blipFill>
             </p:spPr>
@@ -4273,7 +4717,7 @@
               <a:lstStyle/>
               <a:p>
                 <a:r>
-                  <a:rPr lang="en-US">
+                  <a:rPr lang="fr-FR">
                     <a:noFill/>
                   </a:rPr>
                   <a:t> </a:t>
@@ -4283,6 +4727,66 @@
           </p:sp>
         </mc:Fallback>
       </mc:AlternateContent>
+      <p:pic>
+        <p:nvPicPr>
+          <p:cNvPr id="5" name="Image 4">
+            <a:extLst>
+              <a:ext uri="{FF2B5EF4-FFF2-40B4-BE49-F238E27FC236}">
+                <a16:creationId xmlns:a16="http://schemas.microsoft.com/office/drawing/2014/main" id="{D8F01A94-F4A7-18EC-AAB0-3B711BC07064}"/>
+              </a:ext>
+            </a:extLst>
+          </p:cNvPr>
+          <p:cNvPicPr>
+            <a:picLocks noChangeAspect="1"/>
+          </p:cNvPicPr>
+          <p:nvPr/>
+        </p:nvPicPr>
+        <p:blipFill>
+          <a:blip r:embed="rId4"/>
+          <a:stretch>
+            <a:fillRect/>
+          </a:stretch>
+        </p:blipFill>
+        <p:spPr>
+          <a:xfrm>
+            <a:off x="6096000" y="861165"/>
+            <a:ext cx="5456465" cy="1928920"/>
+          </a:xfrm>
+          <a:prstGeom prst="rect">
+            <a:avLst/>
+          </a:prstGeom>
+        </p:spPr>
+      </p:pic>
+      <p:pic>
+        <p:nvPicPr>
+          <p:cNvPr id="7" name="Image 6">
+            <a:extLst>
+              <a:ext uri="{FF2B5EF4-FFF2-40B4-BE49-F238E27FC236}">
+                <a16:creationId xmlns:a16="http://schemas.microsoft.com/office/drawing/2014/main" id="{0BB0A49F-187C-8798-4016-9E545EB0A2FE}"/>
+              </a:ext>
+            </a:extLst>
+          </p:cNvPr>
+          <p:cNvPicPr>
+            <a:picLocks noChangeAspect="1"/>
+          </p:cNvPicPr>
+          <p:nvPr/>
+        </p:nvPicPr>
+        <p:blipFill>
+          <a:blip r:embed="rId5"/>
+          <a:stretch>
+            <a:fillRect/>
+          </a:stretch>
+        </p:blipFill>
+        <p:spPr>
+          <a:xfrm>
+            <a:off x="6096000" y="3429000"/>
+            <a:ext cx="4709568" cy="3071126"/>
+          </a:xfrm>
+          <a:prstGeom prst="rect">
+            <a:avLst/>
+          </a:prstGeom>
+        </p:spPr>
+      </p:pic>
     </p:spTree>
     <p:extLst>
       <p:ext uri="{BB962C8B-B14F-4D97-AF65-F5344CB8AC3E}">
@@ -5412,7 +5916,7 @@
             <p:spPr>
               <a:xfrm>
                 <a:off x="688063" y="1180652"/>
-                <a:ext cx="4001632" cy="5262979"/>
+                <a:ext cx="4001632" cy="5514779"/>
               </a:xfrm>
               <a:prstGeom prst="rect">
                 <a:avLst/>
@@ -5529,34 +6033,73 @@
                       <a:rPr lang="fr-CA" sz="1600" i="1">
                         <a:latin typeface="Cambria Math" panose="02040503050406030204" pitchFamily="18" charset="0"/>
                       </a:rPr>
-                      <m:t>=1.086767</m:t>
-                    </m:r>
+                      <m:t>=1.086767.</m:t>
+                    </m:r>
+                    <m:sSup>
+                      <m:sSupPr>
+                        <m:ctrlPr>
+                          <a:rPr lang="fr-FR" sz="1600" b="0" i="1" smtClean="0">
+                            <a:latin typeface="Cambria Math" panose="02040503050406030204" pitchFamily="18" charset="0"/>
+                          </a:rPr>
+                        </m:ctrlPr>
+                      </m:sSupPr>
+                      <m:e>
+                        <m:r>
+                          <a:rPr lang="fr-FR" sz="1600" b="0" i="1" smtClean="0">
+                            <a:latin typeface="Cambria Math" panose="02040503050406030204" pitchFamily="18" charset="0"/>
+                          </a:rPr>
+                          <m:t>10</m:t>
+                        </m:r>
+                      </m:e>
+                      <m:sup>
+                        <m:r>
+                          <a:rPr lang="fr-FR" sz="1600" b="0" i="1" smtClean="0">
+                            <a:latin typeface="Cambria Math" panose="02040503050406030204" pitchFamily="18" charset="0"/>
+                          </a:rPr>
+                          <m:t>−2</m:t>
+                        </m:r>
+                      </m:sup>
+                    </m:sSup>
                     <m:r>
                       <a:rPr lang="fr-CA" sz="1600" i="1">
                         <a:latin typeface="Cambria Math" panose="02040503050406030204" pitchFamily="18" charset="0"/>
                       </a:rPr>
-                      <m:t>𝑒</m:t>
-                    </m:r>
-                    <m:r>
-                      <a:rPr lang="fr-CA" sz="1600" i="1">
-                        <a:latin typeface="Cambria Math" panose="02040503050406030204" pitchFamily="18" charset="0"/>
-                      </a:rPr>
-                      <m:t>−02 µ</m:t>
-                    </m:r>
-                    <m:r>
-                      <a:rPr lang="fr-CA" sz="1600" i="1">
-                        <a:latin typeface="Cambria Math" panose="02040503050406030204" pitchFamily="18" charset="0"/>
-                      </a:rPr>
-                      <m:t>𝑚</m:t>
-                    </m:r>
-                    <m:r>
-                      <a:rPr lang="fr-CA" sz="1600" i="1">
-                        <a:latin typeface="Cambria Math" panose="02040503050406030204" pitchFamily="18" charset="0"/>
-                      </a:rPr>
-                      <m:t>²</m:t>
-                    </m:r>
+                      <m:t>µ</m:t>
+                    </m:r>
+                    <m:sSup>
+                      <m:sSupPr>
+                        <m:ctrlPr>
+                          <a:rPr lang="fr-CA" sz="1600" b="0" i="1">
+                            <a:latin typeface="Cambria Math" panose="02040503050406030204" pitchFamily="18" charset="0"/>
+                          </a:rPr>
+                        </m:ctrlPr>
+                      </m:sSupPr>
+                      <m:e>
+                        <m:r>
+                          <a:rPr lang="fr-CA" sz="1600" i="1">
+                            <a:latin typeface="Cambria Math" panose="02040503050406030204" pitchFamily="18" charset="0"/>
+                          </a:rPr>
+                          <m:t>𝑚</m:t>
+                        </m:r>
+                      </m:e>
+                      <m:sup>
+                        <m:r>
+                          <a:rPr lang="fr-CA" sz="1600" i="1">
+                            <a:latin typeface="Cambria Math" panose="02040503050406030204" pitchFamily="18" charset="0"/>
+                          </a:rPr>
+                          <m:t>2</m:t>
+                        </m:r>
+                      </m:sup>
+                    </m:sSup>
                   </m:oMath>
                 </a14:m>
+                <a:endParaRPr lang="fr-FR" sz="1600" dirty="0"/>
+              </a:p>
+              <a:p>
+                <a:pPr marL="285750" indent="-285750">
+                  <a:buFont typeface="Arial" panose="020B0604020202020204" pitchFamily="34" charset="0"/>
+                  <a:buChar char="•"/>
+                </a:pPr>
                 <a:endParaRPr lang="fr-CA" sz="1600" dirty="0"/>
               </a:p>
               <a:p>
@@ -5622,45 +6165,80 @@
                       </a:rPr>
                       <m:t>𝟒𝟑𝟑𝟖𝟑𝟑</m:t>
                     </m:r>
-                    <m:r>
-                      <a:rPr lang="fr-CA" sz="1600" b="1" i="1">
-                        <a:latin typeface="Cambria Math" panose="02040503050406030204" pitchFamily="18" charset="0"/>
-                      </a:rPr>
-                      <m:t>𝒆</m:t>
-                    </m:r>
-                    <m:r>
-                      <a:rPr lang="fr-CA" sz="1600" b="1" i="1">
-                        <a:latin typeface="Cambria Math" panose="02040503050406030204" pitchFamily="18" charset="0"/>
-                      </a:rPr>
-                      <m:t>−</m:t>
-                    </m:r>
-                    <m:r>
-                      <a:rPr lang="fr-CA" sz="1600" b="1" i="1">
-                        <a:latin typeface="Cambria Math" panose="02040503050406030204" pitchFamily="18" charset="0"/>
-                      </a:rPr>
-                      <m:t>𝟎𝟑</m:t>
-                    </m:r>
-                    <m:r>
-                      <a:rPr lang="fr-CA" sz="1600" b="1" i="1">
-                        <a:latin typeface="Cambria Math" panose="02040503050406030204" pitchFamily="18" charset="0"/>
-                      </a:rPr>
-                      <m:t> µ</m:t>
-                    </m:r>
-                    <m:r>
-                      <a:rPr lang="fr-CA" sz="1600" b="1" i="1">
-                        <a:latin typeface="Cambria Math" panose="02040503050406030204" pitchFamily="18" charset="0"/>
-                      </a:rPr>
-                      <m:t>𝒎</m:t>
-                    </m:r>
-                    <m:r>
-                      <a:rPr lang="fr-CA" sz="1600" b="1" i="1">
-                        <a:latin typeface="Cambria Math" panose="02040503050406030204" pitchFamily="18" charset="0"/>
-                      </a:rPr>
-                      <m:t>²</m:t>
-                    </m:r>
+                    <m:sSup>
+                      <m:sSupPr>
+                        <m:ctrlPr>
+                          <a:rPr lang="fr-FR" sz="1600" b="1" i="1">
+                            <a:latin typeface="Cambria Math" panose="02040503050406030204" pitchFamily="18" charset="0"/>
+                          </a:rPr>
+                        </m:ctrlPr>
+                      </m:sSupPr>
+                      <m:e>
+                        <m:r>
+                          <a:rPr lang="fr-FR" sz="1600" b="1" i="1" smtClean="0">
+                            <a:latin typeface="Cambria Math" panose="02040503050406030204" pitchFamily="18" charset="0"/>
+                          </a:rPr>
+                          <m:t>.</m:t>
+                        </m:r>
+                        <m:r>
+                          <a:rPr lang="fr-FR" sz="1600" b="1" i="1">
+                            <a:latin typeface="Cambria Math" panose="02040503050406030204" pitchFamily="18" charset="0"/>
+                          </a:rPr>
+                          <m:t>𝟏𝟎</m:t>
+                        </m:r>
+                      </m:e>
+                      <m:sup>
+                        <m:r>
+                          <a:rPr lang="fr-FR" sz="1600" b="1" i="1">
+                            <a:latin typeface="Cambria Math" panose="02040503050406030204" pitchFamily="18" charset="0"/>
+                          </a:rPr>
+                          <m:t>−</m:t>
+                        </m:r>
+                        <m:r>
+                          <a:rPr lang="fr-FR" sz="1600" b="1" i="1" smtClean="0">
+                            <a:latin typeface="Cambria Math" panose="02040503050406030204" pitchFamily="18" charset="0"/>
+                          </a:rPr>
+                          <m:t>𝟑</m:t>
+                        </m:r>
+                      </m:sup>
+                    </m:sSup>
+                    <m:r>
+                      <m:rPr>
+                        <m:sty m:val="p"/>
+                      </m:rPr>
+                      <a:rPr lang="fr-FR" sz="1600" b="1" i="1" smtClean="0">
+                        <a:latin typeface="Cambria Math" panose="02040503050406030204" pitchFamily="18" charset="0"/>
+                      </a:rPr>
+                      <m:t>μ</m:t>
+                    </m:r>
+                    <m:sSup>
+                      <m:sSupPr>
+                        <m:ctrlPr>
+                          <a:rPr lang="fr-CA" sz="1600" b="1" i="1">
+                            <a:latin typeface="Cambria Math" panose="02040503050406030204" pitchFamily="18" charset="0"/>
+                          </a:rPr>
+                        </m:ctrlPr>
+                      </m:sSupPr>
+                      <m:e>
+                        <m:r>
+                          <a:rPr lang="fr-CA" sz="1600" b="1" i="1">
+                            <a:latin typeface="Cambria Math" panose="02040503050406030204" pitchFamily="18" charset="0"/>
+                          </a:rPr>
+                          <m:t>𝒎</m:t>
+                        </m:r>
+                      </m:e>
+                      <m:sup>
+                        <m:r>
+                          <a:rPr lang="fr-CA" sz="1600" b="1" i="1">
+                            <a:latin typeface="Cambria Math" panose="02040503050406030204" pitchFamily="18" charset="0"/>
+                          </a:rPr>
+                          <m:t>2</m:t>
+                        </m:r>
+                      </m:sup>
+                    </m:sSup>
                   </m:oMath>
                 </a14:m>
-                <a:endParaRPr lang="fr-CA" sz="1600" b="1" dirty="0"/>
+                <a:endParaRPr lang="fr-FR" sz="1600" b="1" dirty="0"/>
               </a:p>
             </p:txBody>
           </p:sp>
@@ -5683,7 +6261,7 @@
             <p:spPr>
               <a:xfrm>
                 <a:off x="688063" y="1180652"/>
-                <a:ext cx="4001632" cy="5262979"/>
+                <a:ext cx="4001632" cy="5514779"/>
               </a:xfrm>
               <a:prstGeom prst="rect">
                 <a:avLst/>
@@ -5691,7 +6269,7 @@
               <a:blipFill>
                 <a:blip r:embed="rId4"/>
                 <a:stretch>
-                  <a:fillRect l="-610" t="-348" r="-305"/>
+                  <a:fillRect l="-610" t="-332" r="-305"/>
                 </a:stretch>
               </a:blipFill>
             </p:spPr>
@@ -5700,7 +6278,7 @@
               <a:lstStyle/>
               <a:p>
                 <a:r>
-                  <a:rPr lang="fr-CA">
+                  <a:rPr lang="fr-FR">
                     <a:noFill/>
                   </a:rPr>
                   <a:t> </a:t>
@@ -6232,7 +6810,9 @@
           </a:xfrm>
         </p:spPr>
         <p:txBody>
-          <a:bodyPr/>
+          <a:bodyPr>
+            <a:normAutofit fontScale="92500"/>
+          </a:bodyPr>
           <a:lstStyle/>
           <a:p>
             <a:r>
@@ -6245,7 +6825,7 @@
             </a:r>
             <a:r>
               <a:rPr lang="fr-FR" dirty="0"/>
-              <a:t> ne provoque pas un changement de géométrie mais seulement un raffinement du domaine pour une </a:t>
+              <a:t> ne provoque pas un changement de géométrie (fibres à la même place) mais seulement un raffinement du domaine pour une </a:t>
             </a:r>
             <a:r>
               <a:rPr lang="fr-FR" dirty="0" err="1"/>
@@ -6675,8 +7255,8 @@
           </p:sp>
         </mc:Fallback>
       </mc:AlternateContent>
-      <mc:AlternateContent xmlns:mc="http://schemas.openxmlformats.org/markup-compatibility/2006">
-        <mc:Choice xmlns:a14="http://schemas.microsoft.com/office/drawing/2010/main" Requires="a14">
+      <mc:AlternateContent xmlns:mc="http://schemas.openxmlformats.org/markup-compatibility/2006" xmlns:a14="http://schemas.microsoft.com/office/drawing/2010/main">
+        <mc:Choice Requires="a14">
           <p:sp>
             <p:nvSpPr>
               <p:cNvPr id="3" name="Espace réservé du contenu 2">
@@ -6695,13 +7275,13 @@
             </p:nvSpPr>
             <p:spPr>
               <a:xfrm>
-                <a:off x="838200" y="1580884"/>
-                <a:ext cx="10515600" cy="4351338"/>
+                <a:off x="558799" y="1134533"/>
+                <a:ext cx="11192933" cy="5468146"/>
               </a:xfrm>
             </p:spPr>
             <p:txBody>
               <a:bodyPr>
-                <a:normAutofit fontScale="62500" lnSpcReduction="20000"/>
+                <a:normAutofit fontScale="77500" lnSpcReduction="20000"/>
               </a:bodyPr>
               <a:lstStyle/>
               <a:p>
@@ -7119,7 +7699,7 @@
             </p:txBody>
           </p:sp>
         </mc:Choice>
-        <mc:Fallback>
+        <mc:Fallback xmlns="">
           <p:sp>
             <p:nvSpPr>
               <p:cNvPr id="3" name="Espace réservé du contenu 2">
@@ -7138,13 +7718,13 @@
             </p:nvSpPr>
             <p:spPr>
               <a:xfrm>
-                <a:off x="838200" y="1580884"/>
-                <a:ext cx="10515600" cy="4351338"/>
+                <a:off x="558799" y="1134533"/>
+                <a:ext cx="11192933" cy="5468146"/>
               </a:xfrm>
               <a:blipFill>
                 <a:blip r:embed="rId4"/>
                 <a:stretch>
-                  <a:fillRect l="-406" t="-1961" r="-870"/>
+                  <a:fillRect l="-654" t="-2118" r="-436"/>
                 </a:stretch>
               </a:blipFill>
             </p:spPr>
@@ -7153,7 +7733,7 @@
               <a:lstStyle/>
               <a:p>
                 <a:r>
-                  <a:rPr lang="en-US">
+                  <a:rPr lang="fr-FR">
                     <a:noFill/>
                   </a:rPr>
                   <a:t> </a:t>
@@ -7219,7 +7799,7 @@
             </p:nvSpPr>
             <p:spPr>
               <a:xfrm>
-                <a:off x="838200" y="255321"/>
+                <a:off x="838200" y="218745"/>
                 <a:ext cx="10515600" cy="1325563"/>
               </a:xfrm>
             </p:spPr>
@@ -7276,7 +7856,7 @@
               <p:cNvPr id="2" name="Titre 1">
                 <a:extLst>
                   <a:ext uri="{FF2B5EF4-FFF2-40B4-BE49-F238E27FC236}">
-                    <a16:creationId xmlns:a16="http://schemas.microsoft.com/office/drawing/2014/main" id="{E42DB292-C1C7-B7A1-2983-182756BDF140}"/>
+                    <a16:creationId xmlns:a16="http://schemas.microsoft.com/office/drawing/2014/main" id="{DF82B067-B537-3E0F-96D6-2FFA9E4B2202}"/>
                   </a:ext>
                 </a:extLst>
               </p:cNvPr>
@@ -7289,7 +7869,7 @@
             </p:nvSpPr>
             <p:spPr>
               <a:xfrm>
-                <a:off x="838200" y="255321"/>
+                <a:off x="838200" y="218745"/>
                 <a:ext cx="10515600" cy="1325563"/>
               </a:xfrm>
               <a:blipFill>
@@ -7335,7 +7915,7 @@
             <p:spPr>
               <a:xfrm>
                 <a:off x="838199" y="1580884"/>
-                <a:ext cx="4080309" cy="3597508"/>
+                <a:ext cx="5257801" cy="3597508"/>
               </a:xfrm>
             </p:spPr>
             <p:txBody>
@@ -7399,13 +7979,16 @@
                 <a14:m>
                   <m:oMath xmlns:m="http://schemas.openxmlformats.org/officeDocument/2006/math">
                     <m:r>
-                      <m:rPr>
-                        <m:sty m:val="p"/>
-                      </m:rPr>
                       <a:rPr lang="fr-FR" sz="2000" b="1" i="1" smtClean="0">
                         <a:latin typeface="Cambria Math" panose="02040503050406030204" pitchFamily="18" charset="0"/>
                       </a:rPr>
-                      <m:t>μm</m:t>
+                      <m:t>𝝁</m:t>
+                    </m:r>
+                    <m:r>
+                      <a:rPr lang="fr-FR" sz="2000" b="1" i="1" smtClean="0">
+                        <a:latin typeface="Cambria Math" panose="02040503050406030204" pitchFamily="18" charset="0"/>
+                      </a:rPr>
+                      <m:t>𝒎</m:t>
                     </m:r>
                     <m:r>
                       <a:rPr lang="fr-FR" sz="2000" b="1" i="1" smtClean="0">
@@ -7452,7 +8035,7 @@
                       <a:rPr lang="fr-FR" sz="2000" b="0" i="1" smtClean="0">
                         <a:latin typeface="Cambria Math" panose="02040503050406030204" pitchFamily="18" charset="0"/>
                       </a:rPr>
-                      <m:t>-6   </m:t>
+                      <m:t>−6   </m:t>
                     </m:r>
                     <m:r>
                       <m:rPr>
@@ -7511,12 +8094,12 @@
             <p:spPr>
               <a:xfrm>
                 <a:off x="838199" y="1580884"/>
-                <a:ext cx="4080309" cy="3597508"/>
+                <a:ext cx="5257801" cy="3597508"/>
               </a:xfrm>
               <a:blipFill>
                 <a:blip r:embed="rId4"/>
                 <a:stretch>
-                  <a:fillRect l="-1194" t="-1525"/>
+                  <a:fillRect l="-927" t="-1525" r="-116"/>
                 </a:stretch>
               </a:blipFill>
             </p:spPr>
@@ -7525,7 +8108,7 @@
               <a:lstStyle/>
               <a:p>
                 <a:r>
-                  <a:rPr lang="en-US">
+                  <a:rPr lang="fr-FR">
                     <a:noFill/>
                   </a:rPr>
                   <a:t> </a:t>
@@ -7564,7 +8147,7 @@
         </p:blipFill>
         <p:spPr>
           <a:xfrm>
-            <a:off x="7021493" y="3633902"/>
+            <a:off x="6986861" y="3758558"/>
             <a:ext cx="4080310" cy="3088980"/>
           </a:xfrm>
           <a:prstGeom prst="rect">
@@ -7601,7 +8184,7 @@
         </p:blipFill>
         <p:spPr>
           <a:xfrm>
-            <a:off x="7273494" y="864757"/>
+            <a:off x="7273494" y="928765"/>
             <a:ext cx="3793677" cy="2893801"/>
           </a:xfrm>
           <a:prstGeom prst="rect">
@@ -7739,7 +8322,7 @@
                 <a:ext cx="10515600" cy="1325563"/>
               </a:xfrm>
               <a:blipFill>
-                <a:blip r:embed="rId2"/>
+                <a:blip r:embed="rId3"/>
                 <a:stretch>
                   <a:fillRect l="-2377" t="-13364"/>
                 </a:stretch>
@@ -7760,8 +8343,8 @@
           </p:sp>
         </mc:Fallback>
       </mc:AlternateContent>
-      <mc:AlternateContent xmlns:mc="http://schemas.openxmlformats.org/markup-compatibility/2006" xmlns:a14="http://schemas.microsoft.com/office/drawing/2010/main">
-        <mc:Choice Requires="a14">
+      <mc:AlternateContent xmlns:mc="http://schemas.openxmlformats.org/markup-compatibility/2006">
+        <mc:Choice xmlns:a14="http://schemas.microsoft.com/office/drawing/2010/main" Requires="a14">
           <p:sp>
             <p:nvSpPr>
               <p:cNvPr id="3" name="Espace réservé du contenu 2">
@@ -7778,20 +8361,25 @@
                 <p:ph idx="1"/>
               </p:nvPr>
             </p:nvSpPr>
-            <p:spPr/>
+            <p:spPr>
+              <a:xfrm>
+                <a:off x="838200" y="1426464"/>
+                <a:ext cx="10515600" cy="3111669"/>
+              </a:xfrm>
+            </p:spPr>
             <p:txBody>
               <a:bodyPr/>
               <a:lstStyle/>
               <a:p>
                 <a:r>
                   <a:rPr lang="fr-FR" dirty="0"/>
-                  <a:t>Systématique et aléatoire </a:t>
+                  <a:t>Incertitude divisée entre composantes aléatoire et épistémique</a:t>
                 </a:r>
               </a:p>
               <a:p>
                 <a:r>
                   <a:rPr lang="fr-FR" dirty="0"/>
-                  <a:t>Erreur expérimentale provient de la mesure de la perméabilité :  	</a:t>
+                  <a:t>L’erreur expérimentale provient de la mesure de la perméabilité :	</a:t>
                 </a:r>
               </a:p>
               <a:p>
@@ -7887,6 +8475,11 @@
                   </m:oMath>
                 </a14:m>
                 <a:endParaRPr lang="fr-FR" dirty="0"/>
+              </a:p>
+              <a:p>
+                <a:endParaRPr lang="fr-FR" b="1" i="1" dirty="0">
+                  <a:latin typeface="Cambria Math" panose="02040503050406030204" pitchFamily="18" charset="0"/>
+                </a:endParaRPr>
               </a:p>
               <a:p>
                 <a14:m>
@@ -8174,7 +8767,7 @@
             </p:txBody>
           </p:sp>
         </mc:Choice>
-        <mc:Fallback xmlns="">
+        <mc:Fallback>
           <p:sp>
             <p:nvSpPr>
               <p:cNvPr id="3" name="Espace réservé du contenu 2">
@@ -8192,10 +8785,14 @@
               </p:nvPr>
             </p:nvSpPr>
             <p:spPr>
+              <a:xfrm>
+                <a:off x="838200" y="1426464"/>
+                <a:ext cx="10515600" cy="3111669"/>
+              </a:xfrm>
               <a:blipFill>
-                <a:blip r:embed="rId3"/>
+                <a:blip r:embed="rId4"/>
                 <a:stretch>
-                  <a:fillRect l="-1043" t="-2381"/>
+                  <a:fillRect l="-1043" t="-3333"/>
                 </a:stretch>
               </a:blipFill>
             </p:spPr>
@@ -8204,7 +8801,7 @@
               <a:lstStyle/>
               <a:p>
                 <a:r>
-                  <a:rPr lang="fr-CA">
+                  <a:rPr lang="fr-FR">
                     <a:noFill/>
                   </a:rPr>
                   <a:t> </a:t>
@@ -8268,7 +8865,7 @@
         </p:nvSpPr>
         <p:spPr>
           <a:xfrm>
-            <a:off x="838200" y="255321"/>
+            <a:off x="838200" y="365049"/>
             <a:ext cx="10515600" cy="1325563"/>
           </a:xfrm>
         </p:spPr>
@@ -8307,173 +8904,98 @@
                 <p:ph idx="1"/>
               </p:nvPr>
             </p:nvSpPr>
-            <p:spPr/>
+            <p:spPr>
+              <a:xfrm>
+                <a:off x="838200" y="1580884"/>
+                <a:ext cx="10381488" cy="4351338"/>
+              </a:xfrm>
+            </p:spPr>
             <p:txBody>
-              <a:bodyPr/>
+              <a:bodyPr>
+                <a:normAutofit fontScale="92500" lnSpcReduction="10000"/>
+              </a:bodyPr>
               <a:lstStyle/>
               <a:p>
+                <a:r>
+                  <a:rPr lang="fr-FR" dirty="0"/>
+                  <a:t>L’erreur de simulation </a:t>
+                </a:r>
                 <a14:m>
                   <m:oMath xmlns:m="http://schemas.openxmlformats.org/officeDocument/2006/math">
                     <m:r>
-                      <a:rPr lang="fr-FR" b="0" i="1" smtClean="0">
+                      <a:rPr lang="fr-FR" i="1">
                         <a:latin typeface="Cambria Math" panose="02040503050406030204" pitchFamily="18" charset="0"/>
                       </a:rPr>
                       <m:t>𝐸</m:t>
                     </m:r>
                     <m:r>
-                      <a:rPr lang="fr-FR" b="0" i="1" smtClean="0">
-                        <a:latin typeface="Cambria Math" panose="02040503050406030204" pitchFamily="18" charset="0"/>
-                      </a:rPr>
-                      <m:t>=</m:t>
-                    </m:r>
-                    <m:r>
-                      <a:rPr lang="fr-FR" b="0" i="1" smtClean="0">
+                      <a:rPr lang="fr-FR" i="1">
+                        <a:latin typeface="Cambria Math" panose="02040503050406030204" pitchFamily="18" charset="0"/>
+                      </a:rPr>
+                      <m:t> </m:t>
+                    </m:r>
+                  </m:oMath>
+                </a14:m>
+                <a:r>
+                  <a:rPr lang="fr-FR" dirty="0"/>
+                  <a:t>quantifie l’écart entre la simulation </a:t>
+                </a:r>
+                <a14:m>
+                  <m:oMath xmlns:m="http://schemas.openxmlformats.org/officeDocument/2006/math">
+                    <m:r>
+                      <a:rPr lang="fr-FR" i="1">
                         <a:latin typeface="Cambria Math" panose="02040503050406030204" pitchFamily="18" charset="0"/>
                       </a:rPr>
                       <m:t>𝑆</m:t>
                     </m:r>
-                    <m:r>
-                      <a:rPr lang="fr-FR" b="0" i="1" smtClean="0">
-                        <a:latin typeface="Cambria Math" panose="02040503050406030204" pitchFamily="18" charset="0"/>
-                      </a:rPr>
-                      <m:t>−</m:t>
-                    </m:r>
-                    <m:r>
-                      <a:rPr lang="fr-FR" b="0" i="1" smtClean="0">
+                  </m:oMath>
+                </a14:m>
+                <a:r>
+                  <a:rPr lang="fr-FR" dirty="0"/>
+                  <a:t> et l’expérience </a:t>
+                </a:r>
+                <a14:m>
+                  <m:oMath xmlns:m="http://schemas.openxmlformats.org/officeDocument/2006/math">
+                    <m:r>
+                      <a:rPr lang="fr-FR" i="1">
                         <a:latin typeface="Cambria Math" panose="02040503050406030204" pitchFamily="18" charset="0"/>
                       </a:rPr>
                       <m:t>𝐷</m:t>
                     </m:r>
-                    <m:r>
-                      <a:rPr lang="fr-FR" b="0" i="1" smtClean="0">
-                        <a:latin typeface="Cambria Math" panose="02040503050406030204" pitchFamily="18" charset="0"/>
-                      </a:rPr>
-                      <m:t>=</m:t>
-                    </m:r>
-                    <m:sSub>
-                      <m:sSubPr>
-                        <m:ctrlPr>
-                          <a:rPr lang="fr-FR" b="0" i="1" smtClean="0">
-                            <a:latin typeface="Cambria Math" panose="02040503050406030204" pitchFamily="18" charset="0"/>
-                          </a:rPr>
-                        </m:ctrlPr>
-                      </m:sSubPr>
-                      <m:e>
-                        <m:r>
-                          <a:rPr lang="fr-FR" b="0" i="1" smtClean="0">
-                            <a:latin typeface="Cambria Math" panose="02040503050406030204" pitchFamily="18" charset="0"/>
-                          </a:rPr>
-                          <m:t>𝑘</m:t>
-                        </m:r>
-                      </m:e>
-                      <m:sub>
-                        <m:r>
-                          <a:rPr lang="fr-FR" b="0" i="1" smtClean="0">
-                            <a:latin typeface="Cambria Math" panose="02040503050406030204" pitchFamily="18" charset="0"/>
-                          </a:rPr>
-                          <m:t>𝑠𝑖𝑚</m:t>
-                        </m:r>
-                      </m:sub>
-                    </m:sSub>
-                    <m:r>
-                      <a:rPr lang="fr-FR" b="0" i="1" smtClean="0">
-                        <a:latin typeface="Cambria Math" panose="02040503050406030204" pitchFamily="18" charset="0"/>
-                      </a:rPr>
-                      <m:t>−</m:t>
-                    </m:r>
-                    <m:bar>
-                      <m:barPr>
-                        <m:pos m:val="top"/>
-                        <m:ctrlPr>
-                          <a:rPr lang="fr-FR" b="0" i="1" smtClean="0">
-                            <a:latin typeface="Cambria Math" panose="02040503050406030204" pitchFamily="18" charset="0"/>
-                          </a:rPr>
-                        </m:ctrlPr>
-                      </m:barPr>
-                      <m:e>
-                        <m:r>
-                          <a:rPr lang="fr-FR" b="0" i="1" smtClean="0">
-                            <a:latin typeface="Cambria Math" panose="02040503050406030204" pitchFamily="18" charset="0"/>
-                          </a:rPr>
-                          <m:t>𝑘</m:t>
-                        </m:r>
-                      </m:e>
-                    </m:bar>
-                    <m:r>
-                      <a:rPr lang="fr-FR" b="0" i="1" smtClean="0">
-                        <a:latin typeface="Cambria Math" panose="02040503050406030204" pitchFamily="18" charset="0"/>
-                      </a:rPr>
-                      <m:t>=2</m:t>
-                    </m:r>
-                    <m:r>
-                      <a:rPr lang="fr-FR" b="0" i="1" smtClean="0">
-                        <a:latin typeface="Cambria Math" panose="02040503050406030204" pitchFamily="18" charset="0"/>
-                      </a:rPr>
-                      <m:t>7.8</m:t>
-                    </m:r>
-                    <m:r>
-                      <a:rPr lang="fr-FR" b="0" i="1" smtClean="0">
-                        <a:latin typeface="Cambria Math" panose="02040503050406030204" pitchFamily="18" charset="0"/>
-                      </a:rPr>
-                      <m:t>−80.6=−52.</m:t>
-                    </m:r>
-                    <m:r>
-                      <a:rPr lang="fr-FR" b="0" i="1" smtClean="0">
-                        <a:latin typeface="Cambria Math" panose="02040503050406030204" pitchFamily="18" charset="0"/>
-                      </a:rPr>
-                      <m:t>8</m:t>
-                    </m:r>
-                    <m:r>
-                      <a:rPr lang="fr-FR" b="0" i="1" smtClean="0">
-                        <a:latin typeface="Cambria Math" panose="02040503050406030204" pitchFamily="18" charset="0"/>
-                      </a:rPr>
-                      <m:t> </m:t>
-                    </m:r>
-                    <m:r>
-                      <a:rPr lang="fr-FR" b="0" i="1" smtClean="0">
-                        <a:latin typeface="Cambria Math" panose="02040503050406030204" pitchFamily="18" charset="0"/>
-                      </a:rPr>
-                      <m:t>𝜇</m:t>
-                    </m:r>
-                    <m:sSup>
-                      <m:sSupPr>
-                        <m:ctrlPr>
-                          <a:rPr lang="fr-FR" b="0" i="1" smtClean="0">
-                            <a:latin typeface="Cambria Math" panose="02040503050406030204" pitchFamily="18" charset="0"/>
-                          </a:rPr>
-                        </m:ctrlPr>
-                      </m:sSupPr>
-                      <m:e>
-                        <m:r>
-                          <a:rPr lang="fr-FR" b="0" i="1" smtClean="0">
-                            <a:latin typeface="Cambria Math" panose="02040503050406030204" pitchFamily="18" charset="0"/>
-                          </a:rPr>
-                          <m:t>𝑚</m:t>
-                        </m:r>
-                      </m:e>
-                      <m:sup>
-                        <m:r>
-                          <a:rPr lang="fr-FR" b="0" i="1" smtClean="0">
-                            <a:latin typeface="Cambria Math" panose="02040503050406030204" pitchFamily="18" charset="0"/>
-                          </a:rPr>
-                          <m:t>2</m:t>
-                        </m:r>
-                      </m:sup>
-                    </m:sSup>
                   </m:oMath>
                 </a14:m>
                 <a:endParaRPr lang="fr-FR" dirty="0"/>
               </a:p>
               <a:p>
+                <a14:m>
+                  <m:oMath xmlns:m="http://schemas.openxmlformats.org/officeDocument/2006/math">
+                    <m:r>
+                      <a:rPr lang="fr-FR" i="1">
+                        <a:latin typeface="Cambria Math" panose="02040503050406030204" pitchFamily="18" charset="0"/>
+                      </a:rPr>
+                      <m:t>𝐷</m:t>
+                    </m:r>
+                  </m:oMath>
+                </a14:m>
                 <a:r>
                   <a:rPr lang="fr-FR" dirty="0"/>
-                  <a:t>D calculé à partir des moyennes du tableau 1 (moyenne = médiane) </a:t>
+                  <a:t> calculé à partir des moyennes du tableau 1(moyenne = médiane)</a:t>
                 </a:r>
               </a:p>
               <a:p>
+                <a14:m>
+                  <m:oMath xmlns:m="http://schemas.openxmlformats.org/officeDocument/2006/math">
+                    <m:r>
+                      <a:rPr lang="fr-FR" i="1">
+                        <a:latin typeface="Cambria Math" panose="02040503050406030204" pitchFamily="18" charset="0"/>
+                      </a:rPr>
+                      <m:t>𝑆</m:t>
+                    </m:r>
+                  </m:oMath>
+                </a14:m>
                 <a:r>
                   <a:rPr lang="fr-FR" dirty="0"/>
-                  <a:t>S simulé avec les paramètres suivants :</a:t>
+                  <a:t> simulé avec les paramètres suivants :</a:t>
                 </a:r>
               </a:p>
               <a:p>
@@ -8567,35 +9089,42 @@
                 <a:pPr lvl="1"/>
                 <a14:m>
                   <m:oMath xmlns:m="http://schemas.openxmlformats.org/officeDocument/2006/math">
-                    <m:r>
-                      <m:rPr>
-                        <m:sty m:val="p"/>
-                      </m:rPr>
+                    <m:sSub>
+                      <m:sSubPr>
+                        <m:ctrlPr>
+                          <a:rPr lang="fr-FR" i="1">
+                            <a:latin typeface="Cambria Math" panose="02040503050406030204" pitchFamily="18" charset="0"/>
+                          </a:rPr>
+                        </m:ctrlPr>
+                      </m:sSubPr>
+                      <m:e>
+                        <m:r>
+                          <m:rPr>
+                            <m:sty m:val="p"/>
+                          </m:rPr>
+                          <a:rPr lang="fr-FR" i="1">
+                            <a:latin typeface="Cambria Math" panose="02040503050406030204" pitchFamily="18" charset="0"/>
+                          </a:rPr>
+                          <m:t>σ</m:t>
+                        </m:r>
+                      </m:e>
+                      <m:sub>
+                        <m:r>
+                          <m:rPr>
+                            <m:sty m:val="p"/>
+                          </m:rPr>
+                          <a:rPr lang="fr-FR" i="1">
+                            <a:latin typeface="Cambria Math" panose="02040503050406030204" pitchFamily="18" charset="0"/>
+                          </a:rPr>
+                          <m:t>d</m:t>
+                        </m:r>
+                      </m:sub>
+                    </m:sSub>
+                    <m:r>
                       <a:rPr lang="fr-FR" i="1">
                         <a:latin typeface="Cambria Math" panose="02040503050406030204" pitchFamily="18" charset="0"/>
                       </a:rPr>
-                      <m:t>σ</m:t>
-                    </m:r>
-                    <m:r>
-                      <a:rPr lang="fr-FR" i="1">
-                        <a:latin typeface="Cambria Math" panose="02040503050406030204" pitchFamily="18" charset="0"/>
-                      </a:rPr>
-                      <m:t>_</m:t>
-                    </m:r>
-                    <m:r>
-                      <m:rPr>
-                        <m:sty m:val="p"/>
-                      </m:rPr>
-                      <a:rPr lang="fr-FR" i="1">
-                        <a:latin typeface="Cambria Math" panose="02040503050406030204" pitchFamily="18" charset="0"/>
-                      </a:rPr>
-                      <m:t>d</m:t>
-                    </m:r>
-                    <m:r>
-                      <a:rPr lang="fr-FR" i="1">
-                        <a:latin typeface="Cambria Math" panose="02040503050406030204" pitchFamily="18" charset="0"/>
-                      </a:rPr>
-                      <m:t>  = 2.85 </m:t>
+                      <m:t>= 2.85 </m:t>
                     </m:r>
                     <m:r>
                       <m:rPr>
@@ -8665,6 +9194,293 @@
                     </m:r>
                   </m:oMath>
                 </a14:m>
+                <a:endParaRPr lang="fr-FR" dirty="0"/>
+              </a:p>
+              <a:p>
+                <a:pPr lvl="1"/>
+                <a:endParaRPr lang="fr-FR" dirty="0"/>
+              </a:p>
+              <a:p>
+                <a:pPr lvl="0">
+                  <a:defRPr/>
+                </a:pPr>
+                <a14:m>
+                  <m:oMath xmlns:m="http://schemas.openxmlformats.org/officeDocument/2006/math">
+                    <m:r>
+                      <a:rPr lang="fr-FR" sz="2900" b="1" i="1">
+                        <a:latin typeface="Cambria Math" panose="02040503050406030204" pitchFamily="18" charset="0"/>
+                      </a:rPr>
+                      <m:t>𝑬</m:t>
+                    </m:r>
+                    <m:r>
+                      <a:rPr lang="fr-FR" sz="2900" b="1" i="1">
+                        <a:latin typeface="Cambria Math" panose="02040503050406030204" pitchFamily="18" charset="0"/>
+                      </a:rPr>
+                      <m:t>=</m:t>
+                    </m:r>
+                    <m:r>
+                      <a:rPr lang="fr-FR" sz="2900" b="1" i="1">
+                        <a:latin typeface="Cambria Math" panose="02040503050406030204" pitchFamily="18" charset="0"/>
+                      </a:rPr>
+                      <m:t>𝑺</m:t>
+                    </m:r>
+                    <m:r>
+                      <a:rPr lang="fr-FR" sz="2900" b="1" i="1">
+                        <a:latin typeface="Cambria Math" panose="02040503050406030204" pitchFamily="18" charset="0"/>
+                      </a:rPr>
+                      <m:t>−</m:t>
+                    </m:r>
+                    <m:r>
+                      <a:rPr lang="fr-FR" sz="2900" b="1" i="1">
+                        <a:latin typeface="Cambria Math" panose="02040503050406030204" pitchFamily="18" charset="0"/>
+                      </a:rPr>
+                      <m:t>𝑫</m:t>
+                    </m:r>
+                    <m:r>
+                      <a:rPr lang="fr-FR" sz="2900" b="1" i="1">
+                        <a:latin typeface="Cambria Math" panose="02040503050406030204" pitchFamily="18" charset="0"/>
+                      </a:rPr>
+                      <m:t>=</m:t>
+                    </m:r>
+                    <m:sSub>
+                      <m:sSubPr>
+                        <m:ctrlPr>
+                          <a:rPr lang="fr-FR" sz="2900" b="1" i="1">
+                            <a:latin typeface="Cambria Math" panose="02040503050406030204" pitchFamily="18" charset="0"/>
+                          </a:rPr>
+                        </m:ctrlPr>
+                      </m:sSubPr>
+                      <m:e>
+                        <m:r>
+                          <a:rPr lang="fr-FR" sz="2900" b="1" i="1">
+                            <a:latin typeface="Cambria Math" panose="02040503050406030204" pitchFamily="18" charset="0"/>
+                          </a:rPr>
+                          <m:t>𝒌</m:t>
+                        </m:r>
+                      </m:e>
+                      <m:sub>
+                        <m:r>
+                          <a:rPr lang="fr-FR" sz="2900" b="1" i="1">
+                            <a:latin typeface="Cambria Math" panose="02040503050406030204" pitchFamily="18" charset="0"/>
+                          </a:rPr>
+                          <m:t>𝒔𝒊𝒎</m:t>
+                        </m:r>
+                      </m:sub>
+                    </m:sSub>
+                    <m:r>
+                      <a:rPr lang="fr-FR" sz="2900" b="1" i="1">
+                        <a:latin typeface="Cambria Math" panose="02040503050406030204" pitchFamily="18" charset="0"/>
+                      </a:rPr>
+                      <m:t>−</m:t>
+                    </m:r>
+                    <m:bar>
+                      <m:barPr>
+                        <m:pos m:val="top"/>
+                        <m:ctrlPr>
+                          <a:rPr lang="fr-FR" sz="2900" b="1" i="1">
+                            <a:latin typeface="Cambria Math" panose="02040503050406030204" pitchFamily="18" charset="0"/>
+                          </a:rPr>
+                        </m:ctrlPr>
+                      </m:barPr>
+                      <m:e>
+                        <m:r>
+                          <a:rPr lang="fr-FR" sz="2900" b="1" i="1">
+                            <a:latin typeface="Cambria Math" panose="02040503050406030204" pitchFamily="18" charset="0"/>
+                          </a:rPr>
+                          <m:t>𝒌</m:t>
+                        </m:r>
+                      </m:e>
+                    </m:bar>
+                    <m:r>
+                      <a:rPr lang="fr-FR" sz="2900" b="1" i="1">
+                        <a:latin typeface="Cambria Math" panose="02040503050406030204" pitchFamily="18" charset="0"/>
+                      </a:rPr>
+                      <m:t>=</m:t>
+                    </m:r>
+                    <m:r>
+                      <a:rPr lang="fr-FR" sz="2900" b="1" i="1">
+                        <a:latin typeface="Cambria Math" panose="02040503050406030204" pitchFamily="18" charset="0"/>
+                      </a:rPr>
+                      <m:t>𝟐𝟕</m:t>
+                    </m:r>
+                    <m:r>
+                      <a:rPr lang="fr-FR" sz="2900" b="1" i="1">
+                        <a:latin typeface="Cambria Math" panose="02040503050406030204" pitchFamily="18" charset="0"/>
+                      </a:rPr>
+                      <m:t>.</m:t>
+                    </m:r>
+                    <m:r>
+                      <a:rPr lang="fr-FR" sz="2900" b="1" i="1">
+                        <a:latin typeface="Cambria Math" panose="02040503050406030204" pitchFamily="18" charset="0"/>
+                      </a:rPr>
+                      <m:t>𝟖</m:t>
+                    </m:r>
+                    <m:r>
+                      <a:rPr lang="fr-FR" sz="2900" b="1" i="1">
+                        <a:latin typeface="Cambria Math" panose="02040503050406030204" pitchFamily="18" charset="0"/>
+                      </a:rPr>
+                      <m:t>𝝁</m:t>
+                    </m:r>
+                    <m:sSup>
+                      <m:sSupPr>
+                        <m:ctrlPr>
+                          <a:rPr lang="fr-FR" sz="2900" b="1" i="1">
+                            <a:latin typeface="Cambria Math" panose="02040503050406030204" pitchFamily="18" charset="0"/>
+                          </a:rPr>
+                        </m:ctrlPr>
+                      </m:sSupPr>
+                      <m:e>
+                        <m:r>
+                          <a:rPr lang="fr-FR" sz="2900" b="1" i="1">
+                            <a:latin typeface="Cambria Math" panose="02040503050406030204" pitchFamily="18" charset="0"/>
+                          </a:rPr>
+                          <m:t>𝒎</m:t>
+                        </m:r>
+                      </m:e>
+                      <m:sup>
+                        <m:r>
+                          <a:rPr lang="fr-FR" sz="2900" b="1" i="1">
+                            <a:latin typeface="Cambria Math" panose="02040503050406030204" pitchFamily="18" charset="0"/>
+                          </a:rPr>
+                          <m:t>𝟐</m:t>
+                        </m:r>
+                      </m:sup>
+                    </m:sSup>
+                    <m:r>
+                      <a:rPr lang="fr-FR" sz="2900" b="1" i="1">
+                        <a:latin typeface="Cambria Math" panose="02040503050406030204" pitchFamily="18" charset="0"/>
+                      </a:rPr>
+                      <m:t>−</m:t>
+                    </m:r>
+                    <m:r>
+                      <a:rPr lang="fr-FR" sz="2900" b="1" i="1">
+                        <a:latin typeface="Cambria Math" panose="02040503050406030204" pitchFamily="18" charset="0"/>
+                      </a:rPr>
+                      <m:t>𝟖𝟎</m:t>
+                    </m:r>
+                    <m:r>
+                      <a:rPr lang="fr-FR" sz="2900" b="1" i="1">
+                        <a:latin typeface="Cambria Math" panose="02040503050406030204" pitchFamily="18" charset="0"/>
+                      </a:rPr>
+                      <m:t>.</m:t>
+                    </m:r>
+                    <m:r>
+                      <a:rPr lang="fr-FR" sz="2900" b="1" i="1">
+                        <a:latin typeface="Cambria Math" panose="02040503050406030204" pitchFamily="18" charset="0"/>
+                      </a:rPr>
+                      <m:t>𝟔</m:t>
+                    </m:r>
+                    <m:r>
+                      <a:rPr lang="fr-FR" sz="2900" b="1" i="1">
+                        <a:latin typeface="Cambria Math" panose="02040503050406030204" pitchFamily="18" charset="0"/>
+                      </a:rPr>
+                      <m:t>𝝁</m:t>
+                    </m:r>
+                    <m:sSup>
+                      <m:sSupPr>
+                        <m:ctrlPr>
+                          <a:rPr lang="fr-FR" sz="2900" b="1" i="1">
+                            <a:latin typeface="Cambria Math" panose="02040503050406030204" pitchFamily="18" charset="0"/>
+                          </a:rPr>
+                        </m:ctrlPr>
+                      </m:sSupPr>
+                      <m:e>
+                        <m:r>
+                          <a:rPr lang="fr-FR" sz="2900" b="1" i="1">
+                            <a:latin typeface="Cambria Math" panose="02040503050406030204" pitchFamily="18" charset="0"/>
+                          </a:rPr>
+                          <m:t>𝒎</m:t>
+                        </m:r>
+                      </m:e>
+                      <m:sup>
+                        <m:r>
+                          <a:rPr lang="fr-FR" sz="2900" b="1" i="1">
+                            <a:latin typeface="Cambria Math" panose="02040503050406030204" pitchFamily="18" charset="0"/>
+                          </a:rPr>
+                          <m:t>𝟐</m:t>
+                        </m:r>
+                      </m:sup>
+                    </m:sSup>
+                    <m:r>
+                      <a:rPr lang="fr-FR" sz="2900" b="1" i="1">
+                        <a:latin typeface="Cambria Math" panose="02040503050406030204" pitchFamily="18" charset="0"/>
+                      </a:rPr>
+                      <m:t>=−</m:t>
+                    </m:r>
+                    <m:r>
+                      <a:rPr lang="fr-FR" sz="2900" b="1" i="1">
+                        <a:latin typeface="Cambria Math" panose="02040503050406030204" pitchFamily="18" charset="0"/>
+                      </a:rPr>
+                      <m:t>𝟓𝟐</m:t>
+                    </m:r>
+                    <m:r>
+                      <a:rPr lang="fr-FR" sz="2900" b="1" i="1">
+                        <a:latin typeface="Cambria Math" panose="02040503050406030204" pitchFamily="18" charset="0"/>
+                      </a:rPr>
+                      <m:t>.</m:t>
+                    </m:r>
+                    <m:r>
+                      <a:rPr lang="fr-FR" sz="2900" b="1" i="1">
+                        <a:latin typeface="Cambria Math" panose="02040503050406030204" pitchFamily="18" charset="0"/>
+                      </a:rPr>
+                      <m:t>𝟖</m:t>
+                    </m:r>
+                    <m:r>
+                      <a:rPr lang="fr-FR" sz="2900" b="1" i="1">
+                        <a:latin typeface="Cambria Math" panose="02040503050406030204" pitchFamily="18" charset="0"/>
+                      </a:rPr>
+                      <m:t> </m:t>
+                    </m:r>
+                    <m:r>
+                      <a:rPr lang="fr-FR" sz="2900" b="1" i="1">
+                        <a:latin typeface="Cambria Math" panose="02040503050406030204" pitchFamily="18" charset="0"/>
+                      </a:rPr>
+                      <m:t>𝝁</m:t>
+                    </m:r>
+                    <m:sSup>
+                      <m:sSupPr>
+                        <m:ctrlPr>
+                          <a:rPr lang="fr-FR" sz="2900" b="1" i="1">
+                            <a:latin typeface="Cambria Math" panose="02040503050406030204" pitchFamily="18" charset="0"/>
+                          </a:rPr>
+                        </m:ctrlPr>
+                      </m:sSupPr>
+                      <m:e>
+                        <m:r>
+                          <a:rPr lang="fr-FR" sz="2900" b="1" i="1">
+                            <a:latin typeface="Cambria Math" panose="02040503050406030204" pitchFamily="18" charset="0"/>
+                          </a:rPr>
+                          <m:t>𝒎</m:t>
+                        </m:r>
+                      </m:e>
+                      <m:sup>
+                        <m:r>
+                          <a:rPr lang="fr-FR" sz="2900" b="1" i="1">
+                            <a:latin typeface="Cambria Math" panose="02040503050406030204" pitchFamily="18" charset="0"/>
+                          </a:rPr>
+                          <m:t>𝟐</m:t>
+                        </m:r>
+                      </m:sup>
+                    </m:sSup>
+                  </m:oMath>
+                </a14:m>
+                <a:endParaRPr kumimoji="0" lang="fr-FR" sz="2900" b="1" i="0" u="none" strike="noStrike" kern="1200" cap="none" spc="0" normalizeH="0" baseline="0" noProof="0" dirty="0">
+                  <a:ln>
+                    <a:noFill/>
+                  </a:ln>
+                  <a:solidFill>
+                    <a:prstClr val="black"/>
+                  </a:solidFill>
+                  <a:effectLst/>
+                  <a:uLnTx/>
+                  <a:uFillTx/>
+                  <a:latin typeface="Aptos" panose="02110004020202020204"/>
+                </a:endParaRPr>
+              </a:p>
+              <a:p>
+                <a:pPr marL="457200" lvl="1" indent="0">
+                  <a:buNone/>
+                </a:pPr>
                 <a:endParaRPr lang="fr-FR" dirty="0"/>
               </a:p>
             </p:txBody>
@@ -8688,10 +9504,14 @@
               </p:nvPr>
             </p:nvSpPr>
             <p:spPr>
+              <a:xfrm>
+                <a:off x="838200" y="1580884"/>
+                <a:ext cx="10381488" cy="4351338"/>
+              </a:xfrm>
               <a:blipFill>
                 <a:blip r:embed="rId2"/>
                 <a:stretch>
-                  <a:fillRect l="-1043"/>
+                  <a:fillRect l="-940" t="-2801"/>
                 </a:stretch>
               </a:blipFill>
             </p:spPr>
@@ -8700,7 +9520,7 @@
               <a:lstStyle/>
               <a:p>
                 <a:r>
-                  <a:rPr lang="en-US">
+                  <a:rPr lang="fr-FR">
                     <a:noFill/>
                   </a:rPr>
                   <a:t> </a:t>
@@ -8840,7 +9660,7 @@
                 <a:ext cx="10515600" cy="1325563"/>
               </a:xfrm>
               <a:blipFill>
-                <a:blip r:embed="rId2"/>
+                <a:blip r:embed="rId3"/>
                 <a:stretch>
                   <a:fillRect l="-2377" t="-13364"/>
                 </a:stretch>
@@ -8879,11 +9699,71 @@
                 <p:ph idx="1"/>
               </p:nvPr>
             </p:nvSpPr>
-            <p:spPr/>
+            <p:spPr>
+              <a:xfrm>
+                <a:off x="838200" y="1436158"/>
+                <a:ext cx="10515600" cy="4351338"/>
+              </a:xfrm>
+            </p:spPr>
             <p:txBody>
-              <a:bodyPr/>
+              <a:bodyPr>
+                <a:normAutofit fontScale="92500" lnSpcReduction="20000"/>
+              </a:bodyPr>
               <a:lstStyle/>
               <a:p>
+                <a:pPr marL="0" indent="0">
+                  <a:buNone/>
+                </a:pPr>
+                <a:r>
+                  <a:rPr lang="fr-FR" b="0" dirty="0"/>
+                  <a:t>D’après </a:t>
+                </a:r>
+                <a:r>
+                  <a:rPr lang="fr-FR" dirty="0"/>
+                  <a:t>le standard V&amp;V20, </a:t>
+                </a:r>
+                <a14:m>
+                  <m:oMath xmlns:m="http://schemas.openxmlformats.org/officeDocument/2006/math">
+                    <m:sSub>
+                      <m:sSubPr>
+                        <m:ctrlPr>
+                          <a:rPr lang="fr-FR" i="1">
+                            <a:latin typeface="Cambria Math" panose="02040503050406030204" pitchFamily="18" charset="0"/>
+                          </a:rPr>
+                        </m:ctrlPr>
+                      </m:sSubPr>
+                      <m:e>
+                        <m:r>
+                          <a:rPr lang="fr-FR" i="1">
+                            <a:latin typeface="Cambria Math" panose="02040503050406030204" pitchFamily="18" charset="0"/>
+                          </a:rPr>
+                          <m:t>𝛿</m:t>
+                        </m:r>
+                      </m:e>
+                      <m:sub>
+                        <m:r>
+                          <a:rPr lang="fr-FR" i="1">
+                            <a:latin typeface="Cambria Math" panose="02040503050406030204" pitchFamily="18" charset="0"/>
+                          </a:rPr>
+                          <m:t>𝑚𝑜𝑑𝑒𝑙</m:t>
+                        </m:r>
+                      </m:sub>
+                    </m:sSub>
+                  </m:oMath>
+                </a14:m>
+                <a:r>
+                  <a:rPr lang="fr-FR" dirty="0"/>
+                  <a:t> peut être encadré de la manière </a:t>
+                </a:r>
+              </a:p>
+              <a:p>
+                <a:pPr marL="0" indent="0">
+                  <a:buNone/>
+                </a:pPr>
+                <a:r>
+                  <a:rPr lang="fr-FR" dirty="0"/>
+                  <a:t>suivante : </a:t>
+                </a:r>
                 <a14:m>
                   <m:oMath xmlns:m="http://schemas.openxmlformats.org/officeDocument/2006/math">
                     <m:r>
@@ -9014,9 +9894,44 @@
                 <a:endParaRPr lang="fr-FR" b="0" dirty="0"/>
               </a:p>
               <a:p>
+                <a:pPr marL="0" indent="0">
+                  <a:buNone/>
+                </a:pPr>
+                <a:endParaRPr lang="fr-FR" dirty="0"/>
+              </a:p>
+              <a:p>
+                <a:pPr marL="0" indent="0">
+                  <a:buNone/>
+                </a:pPr>
+                <a:r>
+                  <a:rPr lang="fr-FR" dirty="0"/>
+                  <a:t>Avec </a:t>
+                </a:r>
                 <a:r>
                   <a:rPr lang="fr-FR" b="0" dirty="0"/>
-                  <a:t>K = 2 pour in</a:t>
+                  <a:t> </a:t>
+                </a:r>
+              </a:p>
+              <a:p>
+                <a14:m>
+                  <m:oMath xmlns:m="http://schemas.openxmlformats.org/officeDocument/2006/math">
+                    <m:r>
+                      <a:rPr lang="fr-FR" b="0" i="1" smtClean="0">
+                        <a:latin typeface="Cambria Math" panose="02040503050406030204" pitchFamily="18" charset="0"/>
+                      </a:rPr>
+                      <m:t>𝑘</m:t>
+                    </m:r>
+                    <m:r>
+                      <a:rPr lang="fr-FR" b="0" i="1" smtClean="0">
+                        <a:latin typeface="Cambria Math" panose="02040503050406030204" pitchFamily="18" charset="0"/>
+                      </a:rPr>
+                      <m:t>=2</m:t>
+                    </m:r>
+                  </m:oMath>
+                </a14:m>
+                <a:r>
+                  <a:rPr lang="fr-FR" b="0" dirty="0"/>
+                  <a:t>, pour un in</a:t>
                 </a:r>
                 <a:r>
                   <a:rPr lang="fr-FR" dirty="0"/>
@@ -9185,29 +10100,33 @@
                       <a:rPr lang="fr-FR" b="0" i="1" smtClean="0">
                         <a:latin typeface="Cambria Math" panose="02040503050406030204" pitchFamily="18" charset="0"/>
                       </a:rPr>
-                      <m:t>=19.8 </m:t>
+                      <m:t>=19.8</m:t>
                     </m:r>
                     <m:r>
                       <m:rPr>
                         <m:sty m:val="p"/>
                       </m:rPr>
-                      <a:rPr lang="fr-FR" b="0" i="1" smtClean="0">
+                      <a:rPr lang="fr-FR" i="1">
                         <a:latin typeface="Cambria Math" panose="02040503050406030204" pitchFamily="18" charset="0"/>
                       </a:rPr>
                       <m:t>μm</m:t>
                     </m:r>
                     <m:r>
-                      <a:rPr lang="fr-FR" b="0" i="1" smtClean="0">
+                      <a:rPr lang="fr-FR" i="1">
                         <a:latin typeface="Cambria Math" panose="02040503050406030204" pitchFamily="18" charset="0"/>
                       </a:rPr>
                       <m:t>²</m:t>
+                    </m:r>
+                    <m:r>
+                      <m:rPr>
+                        <m:nor/>
+                      </m:rPr>
+                      <a:rPr lang="fr-FR" dirty="0"/>
+                      <m:t> </m:t>
                     </m:r>
                   </m:oMath>
                 </a14:m>
-                <a:r>
-                  <a:rPr lang="fr-FR" b="0" dirty="0"/>
-                  <a:t> </a:t>
-                </a:r>
+                <a:endParaRPr lang="fr-FR" b="0" dirty="0"/>
               </a:p>
               <a:p>
                 <a14:m>
@@ -9216,54 +10135,203 @@
                       <a:rPr lang="fr-FR" b="0" i="1" smtClean="0">
                         <a:latin typeface="Cambria Math" panose="02040503050406030204" pitchFamily="18" charset="0"/>
                       </a:rPr>
-                      <m:t>-92.4</m:t>
-                    </m:r>
+                      <m:t>𝐸</m:t>
+                    </m:r>
+                    <m:r>
+                      <a:rPr lang="fr-FR" b="0" i="1" smtClean="0">
+                        <a:latin typeface="Cambria Math" panose="02040503050406030204" pitchFamily="18" charset="0"/>
+                      </a:rPr>
+                      <m:t>=</m:t>
+                    </m:r>
+                  </m:oMath>
+                </a14:m>
+                <a:r>
+                  <a:rPr lang="fr-FR" b="0" dirty="0"/>
+                  <a:t> </a:t>
+                </a:r>
+                <a14:m>
+                  <m:oMath xmlns:m="http://schemas.openxmlformats.org/officeDocument/2006/math">
                     <m:r>
                       <a:rPr lang="fr-FR" i="1">
                         <a:latin typeface="Cambria Math" panose="02040503050406030204" pitchFamily="18" charset="0"/>
                       </a:rPr>
-                      <m:t>≤</m:t>
+                      <m:t>−52.8 </m:t>
+                    </m:r>
+                    <m:r>
+                      <a:rPr lang="fr-FR" i="1">
+                        <a:latin typeface="Cambria Math" panose="02040503050406030204" pitchFamily="18" charset="0"/>
+                      </a:rPr>
+                      <m:t>𝜇</m:t>
+                    </m:r>
+                    <m:sSup>
+                      <m:sSupPr>
+                        <m:ctrlPr>
+                          <a:rPr lang="fr-FR" i="1">
+                            <a:latin typeface="Cambria Math" panose="02040503050406030204" pitchFamily="18" charset="0"/>
+                          </a:rPr>
+                        </m:ctrlPr>
+                      </m:sSupPr>
+                      <m:e>
+                        <m:r>
+                          <a:rPr lang="fr-FR" i="1">
+                            <a:latin typeface="Cambria Math" panose="02040503050406030204" pitchFamily="18" charset="0"/>
+                          </a:rPr>
+                          <m:t>𝑚</m:t>
+                        </m:r>
+                      </m:e>
+                      <m:sup>
+                        <m:r>
+                          <a:rPr lang="fr-FR" i="1">
+                            <a:latin typeface="Cambria Math" panose="02040503050406030204" pitchFamily="18" charset="0"/>
+                          </a:rPr>
+                          <m:t>2</m:t>
+                        </m:r>
+                      </m:sup>
+                    </m:sSup>
+                  </m:oMath>
+                </a14:m>
+                <a:endParaRPr lang="fr-FR" b="0" dirty="0"/>
+              </a:p>
+              <a:p>
+                <a:pPr marL="0" indent="0">
+                  <a:buNone/>
+                </a:pPr>
+                <a:endParaRPr lang="fr-FR" b="0" i="1" dirty="0">
+                  <a:latin typeface="Cambria Math" panose="02040503050406030204" pitchFamily="18" charset="0"/>
+                </a:endParaRPr>
+              </a:p>
+              <a:p>
+                <a:pPr marL="0" indent="0" algn="ctr">
+                  <a:buNone/>
+                </a:pPr>
+                <a14:m>
+                  <m:oMath xmlns:m="http://schemas.openxmlformats.org/officeDocument/2006/math">
+                    <m:r>
+                      <a:rPr lang="fr-FR" b="1" i="1" smtClean="0">
+                        <a:latin typeface="Cambria Math" panose="02040503050406030204" pitchFamily="18" charset="0"/>
+                      </a:rPr>
+                      <m:t>−</m:t>
+                    </m:r>
+                    <m:r>
+                      <a:rPr lang="fr-FR" b="1" i="1" smtClean="0">
+                        <a:latin typeface="Cambria Math" panose="02040503050406030204" pitchFamily="18" charset="0"/>
+                      </a:rPr>
+                      <m:t>𝟗𝟐</m:t>
+                    </m:r>
+                    <m:r>
+                      <a:rPr lang="fr-FR" b="1" i="1" smtClean="0">
+                        <a:latin typeface="Cambria Math" panose="02040503050406030204" pitchFamily="18" charset="0"/>
+                      </a:rPr>
+                      <m:t>.</m:t>
+                    </m:r>
+                    <m:r>
+                      <a:rPr lang="fr-FR" b="1" i="1" smtClean="0">
+                        <a:latin typeface="Cambria Math" panose="02040503050406030204" pitchFamily="18" charset="0"/>
+                      </a:rPr>
+                      <m:t>𝟒</m:t>
+                    </m:r>
+                    <m:r>
+                      <a:rPr lang="fr-FR" b="1" i="1">
+                        <a:latin typeface="Cambria Math" panose="02040503050406030204" pitchFamily="18" charset="0"/>
+                      </a:rPr>
+                      <m:t>𝝁</m:t>
+                    </m:r>
+                    <m:r>
+                      <a:rPr lang="fr-FR" b="1" i="1">
+                        <a:latin typeface="Cambria Math" panose="02040503050406030204" pitchFamily="18" charset="0"/>
+                      </a:rPr>
+                      <m:t>𝒎</m:t>
+                    </m:r>
+                    <m:r>
+                      <a:rPr lang="fr-FR" b="1" i="1">
+                        <a:latin typeface="Cambria Math" panose="02040503050406030204" pitchFamily="18" charset="0"/>
+                      </a:rPr>
+                      <m:t>²≤</m:t>
                     </m:r>
                     <m:sSub>
                       <m:sSubPr>
                         <m:ctrlPr>
-                          <a:rPr lang="fr-FR" i="1">
+                          <a:rPr lang="fr-FR" b="1" i="1">
                             <a:latin typeface="Cambria Math" panose="02040503050406030204" pitchFamily="18" charset="0"/>
                           </a:rPr>
                         </m:ctrlPr>
                       </m:sSubPr>
                       <m:e>
                         <m:r>
-                          <a:rPr lang="fr-FR" i="1">
-                            <a:latin typeface="Cambria Math" panose="02040503050406030204" pitchFamily="18" charset="0"/>
-                          </a:rPr>
-                          <m:t>𝛿</m:t>
+                          <a:rPr lang="fr-FR" b="1" i="1">
+                            <a:latin typeface="Cambria Math" panose="02040503050406030204" pitchFamily="18" charset="0"/>
+                          </a:rPr>
+                          <m:t>𝜹</m:t>
                         </m:r>
                       </m:e>
                       <m:sub>
                         <m:r>
-                          <a:rPr lang="fr-FR" i="1">
-                            <a:latin typeface="Cambria Math" panose="02040503050406030204" pitchFamily="18" charset="0"/>
-                          </a:rPr>
-                          <m:t>𝑚𝑜𝑑𝑒𝑙</m:t>
+                          <a:rPr lang="fr-FR" b="1" i="1">
+                            <a:latin typeface="Cambria Math" panose="02040503050406030204" pitchFamily="18" charset="0"/>
+                          </a:rPr>
+                          <m:t>𝒎𝒐𝒅𝒆𝒍</m:t>
                         </m:r>
                       </m:sub>
                     </m:sSub>
                     <m:r>
-                      <a:rPr lang="fr-FR" i="1">
+                      <a:rPr lang="fr-FR" b="1" i="1">
                         <a:latin typeface="Cambria Math" panose="02040503050406030204" pitchFamily="18" charset="0"/>
                       </a:rPr>
                       <m:t>≤</m:t>
                     </m:r>
                     <m:r>
-                      <a:rPr lang="fr-FR" b="0" i="1" smtClean="0">
-                        <a:latin typeface="Cambria Math" panose="02040503050406030204" pitchFamily="18" charset="0"/>
-                      </a:rPr>
-                      <m:t>-13.2</m:t>
+                      <a:rPr lang="fr-FR" b="1" i="1" smtClean="0">
+                        <a:latin typeface="Cambria Math" panose="02040503050406030204" pitchFamily="18" charset="0"/>
+                      </a:rPr>
+                      <m:t>−</m:t>
+                    </m:r>
+                    <m:r>
+                      <a:rPr lang="fr-FR" b="1" i="1" smtClean="0">
+                        <a:latin typeface="Cambria Math" panose="02040503050406030204" pitchFamily="18" charset="0"/>
+                      </a:rPr>
+                      <m:t>𝟏𝟑</m:t>
+                    </m:r>
+                    <m:r>
+                      <a:rPr lang="fr-FR" b="1" i="1" smtClean="0">
+                        <a:latin typeface="Cambria Math" panose="02040503050406030204" pitchFamily="18" charset="0"/>
+                      </a:rPr>
+                      <m:t>.</m:t>
+                    </m:r>
+                    <m:r>
+                      <a:rPr lang="fr-FR" b="1" i="1" smtClean="0">
+                        <a:latin typeface="Cambria Math" panose="02040503050406030204" pitchFamily="18" charset="0"/>
+                      </a:rPr>
+                      <m:t>𝟐</m:t>
                     </m:r>
                   </m:oMath>
                 </a14:m>
-                <a:endParaRPr lang="fr-FR" dirty="0"/>
+                <a:r>
+                  <a:rPr lang="fr-FR" b="1" dirty="0"/>
+                  <a:t> </a:t>
+                </a:r>
+                <a14:m>
+                  <m:oMath xmlns:m="http://schemas.openxmlformats.org/officeDocument/2006/math">
+                    <m:r>
+                      <a:rPr lang="fr-FR" b="1" i="1">
+                        <a:latin typeface="Cambria Math" panose="02040503050406030204" pitchFamily="18" charset="0"/>
+                      </a:rPr>
+                      <m:t>𝝁</m:t>
+                    </m:r>
+                    <m:r>
+                      <a:rPr lang="fr-FR" b="1" i="1">
+                        <a:latin typeface="Cambria Math" panose="02040503050406030204" pitchFamily="18" charset="0"/>
+                      </a:rPr>
+                      <m:t>𝒎</m:t>
+                    </m:r>
+                    <m:r>
+                      <a:rPr lang="fr-FR" b="1" i="1">
+                        <a:latin typeface="Cambria Math" panose="02040503050406030204" pitchFamily="18" charset="0"/>
+                      </a:rPr>
+                      <m:t>²</m:t>
+                    </m:r>
+                  </m:oMath>
+                </a14:m>
+                <a:endParaRPr lang="fr-FR" b="1" dirty="0"/>
               </a:p>
               <a:p>
                 <a:endParaRPr lang="fr-FR" b="0" dirty="0"/>
@@ -9295,10 +10363,14 @@
               </p:nvPr>
             </p:nvSpPr>
             <p:spPr>
+              <a:xfrm>
+                <a:off x="838200" y="1436158"/>
+                <a:ext cx="10515600" cy="4351338"/>
+              </a:xfrm>
               <a:blipFill>
-                <a:blip r:embed="rId3"/>
+                <a:blip r:embed="rId4"/>
                 <a:stretch>
-                  <a:fillRect l="-1043"/>
+                  <a:fillRect l="-1043" t="-3647"/>
                 </a:stretch>
               </a:blipFill>
             </p:spPr>
@@ -9307,7 +10379,7 @@
               <a:lstStyle/>
               <a:p>
                 <a:r>
-                  <a:rPr lang="en-US">
+                  <a:rPr lang="fr-FR">
                     <a:noFill/>
                   </a:rPr>
                   <a:t> </a:t>
@@ -9317,6 +10389,58 @@
           </p:sp>
         </mc:Fallback>
       </mc:AlternateContent>
+      <p:sp>
+        <p:nvSpPr>
+          <p:cNvPr id="4" name="Rectangle 3">
+            <a:extLst>
+              <a:ext uri="{FF2B5EF4-FFF2-40B4-BE49-F238E27FC236}">
+                <a16:creationId xmlns:a16="http://schemas.microsoft.com/office/drawing/2014/main" id="{806A440F-4525-4755-9716-F3DDCC775AB6}"/>
+              </a:ext>
+            </a:extLst>
+          </p:cNvPr>
+          <p:cNvSpPr/>
+          <p:nvPr/>
+        </p:nvSpPr>
+        <p:spPr>
+          <a:xfrm>
+            <a:off x="3402957" y="5047489"/>
+            <a:ext cx="5312780" cy="488220"/>
+          </a:xfrm>
+          <a:prstGeom prst="rect">
+            <a:avLst/>
+          </a:prstGeom>
+          <a:noFill/>
+          <a:ln w="28575">
+            <a:solidFill>
+              <a:schemeClr val="tx1"/>
+            </a:solidFill>
+          </a:ln>
+        </p:spPr>
+        <p:style>
+          <a:lnRef idx="2">
+            <a:schemeClr val="accent1">
+              <a:shade val="15000"/>
+            </a:schemeClr>
+          </a:lnRef>
+          <a:fillRef idx="1">
+            <a:schemeClr val="accent1"/>
+          </a:fillRef>
+          <a:effectRef idx="0">
+            <a:schemeClr val="accent1"/>
+          </a:effectRef>
+          <a:fontRef idx="minor">
+            <a:schemeClr val="lt1"/>
+          </a:fontRef>
+        </p:style>
+        <p:txBody>
+          <a:bodyPr rtlCol="0" anchor="ctr"/>
+          <a:lstStyle/>
+          <a:p>
+            <a:pPr algn="ctr"/>
+            <a:endParaRPr lang="fr-FR"/>
+          </a:p>
+        </p:txBody>
+      </p:sp>
     </p:spTree>
     <p:extLst>
       <p:ext uri="{BB962C8B-B14F-4D97-AF65-F5344CB8AC3E}">

--- a/MEC8211-Devoir3.pptx
+++ b/MEC8211-Devoir3.pptx
@@ -4097,11 +4097,13 @@
               </a:xfrm>
             </p:spPr>
             <p:txBody>
-              <a:bodyPr/>
+              <a:bodyPr>
+                <a:normAutofit/>
+              </a:bodyPr>
               <a:lstStyle/>
               <a:p>
                 <a:r>
-                  <a:rPr lang="fr-FR" b="0" dirty="0">
+                  <a:rPr lang="fr-FR" sz="2000" b="0" dirty="0">
                     <a:latin typeface="Cambria Math" panose="02040503050406030204" pitchFamily="18" charset="0"/>
                   </a:rPr>
                   <a:t>Nous connaissons le signe de </a:t>
@@ -4111,14 +4113,14 @@
                     <m:sSub>
                       <m:sSubPr>
                         <m:ctrlPr>
-                          <a:rPr lang="fr-FR" i="1">
+                          <a:rPr lang="fr-FR" sz="2000" i="1">
                             <a:latin typeface="Cambria Math" panose="02040503050406030204" pitchFamily="18" charset="0"/>
                           </a:rPr>
                         </m:ctrlPr>
                       </m:sSubPr>
                       <m:e>
                         <m:r>
-                          <a:rPr lang="fr-FR" i="1">
+                          <a:rPr lang="fr-FR" sz="2000" i="1">
                             <a:latin typeface="Cambria Math" panose="02040503050406030204" pitchFamily="18" charset="0"/>
                           </a:rPr>
                           <m:t>𝛿</m:t>
@@ -4126,7 +4128,7 @@
                       </m:e>
                       <m:sub>
                         <m:r>
-                          <a:rPr lang="fr-FR" i="1">
+                          <a:rPr lang="fr-FR" sz="2000" i="1">
                             <a:latin typeface="Cambria Math" panose="02040503050406030204" pitchFamily="18" charset="0"/>
                           </a:rPr>
                           <m:t>𝑚𝑜𝑑𝑒𝑙</m:t>
@@ -4135,15 +4137,18 @@
                     </m:sSub>
                   </m:oMath>
                 </a14:m>
-                <a:endParaRPr lang="fr-FR" b="0" dirty="0">
-                  <a:latin typeface="Cambria Math" panose="02040503050406030204" pitchFamily="18" charset="0"/>
-                </a:endParaRPr>
+                <a:r>
+                  <a:rPr lang="fr-FR" sz="2000" b="0" dirty="0">
+                    <a:latin typeface="Cambria Math" panose="02040503050406030204" pitchFamily="18" charset="0"/>
+                  </a:rPr>
+                  <a:t> (négatif)</a:t>
+                </a:r>
               </a:p>
               <a:p>
                 <a14:m>
                   <m:oMath xmlns:m="http://schemas.openxmlformats.org/officeDocument/2006/math">
                     <m:r>
-                      <a:rPr lang="fr-FR" b="0" i="1" smtClean="0">
+                      <a:rPr lang="fr-FR" sz="2000" b="0" i="1" smtClean="0">
                         <a:latin typeface="Cambria Math" panose="02040503050406030204" pitchFamily="18" charset="0"/>
                       </a:rPr>
                       <m:t>|</m:t>
@@ -4152,13 +4157,13 @@
                       <m:rPr>
                         <m:sty m:val="p"/>
                       </m:rPr>
-                      <a:rPr lang="fr-FR" b="0" i="1" smtClean="0">
+                      <a:rPr lang="fr-FR" sz="2000" b="0" i="1" smtClean="0">
                         <a:latin typeface="Cambria Math" panose="02040503050406030204" pitchFamily="18" charset="0"/>
                       </a:rPr>
                       <m:t>E</m:t>
                     </m:r>
                     <m:r>
-                      <a:rPr lang="fr-FR" b="0" i="1" smtClean="0">
+                      <a:rPr lang="fr-FR" sz="2000" b="0" i="1" smtClean="0">
                         <a:latin typeface="Cambria Math" panose="02040503050406030204" pitchFamily="18" charset="0"/>
                       </a:rPr>
                       <m:t>| &gt; </m:t>
@@ -4166,7 +4171,7 @@
                     <m:sSub>
                       <m:sSubPr>
                         <m:ctrlPr>
-                          <a:rPr lang="fr-FR" i="1">
+                          <a:rPr lang="fr-FR" sz="2000" i="1">
                             <a:latin typeface="Cambria Math" panose="02040503050406030204" pitchFamily="18" charset="0"/>
                           </a:rPr>
                         </m:ctrlPr>
@@ -4176,13 +4181,13 @@
                           <m:rPr>
                             <m:sty m:val="p"/>
                           </m:rPr>
-                          <a:rPr lang="fr-FR" b="0" i="1" smtClean="0">
+                          <a:rPr lang="fr-FR" sz="2000" b="0" i="1" smtClean="0">
                             <a:latin typeface="Cambria Math" panose="02040503050406030204" pitchFamily="18" charset="0"/>
                           </a:rPr>
                           <m:t>k</m:t>
                         </m:r>
                         <m:r>
-                          <a:rPr lang="fr-FR" i="1">
+                          <a:rPr lang="fr-FR" sz="2000" i="1">
                             <a:latin typeface="Cambria Math" panose="02040503050406030204" pitchFamily="18" charset="0"/>
                           </a:rPr>
                           <m:t>𝑢</m:t>
@@ -4190,7 +4195,7 @@
                       </m:e>
                       <m:sub>
                         <m:r>
-                          <a:rPr lang="fr-FR" i="1">
+                          <a:rPr lang="fr-FR" sz="2000" i="1">
                             <a:latin typeface="Cambria Math" panose="02040503050406030204" pitchFamily="18" charset="0"/>
                           </a:rPr>
                           <m:t>𝑣𝑎𝑙</m:t>
@@ -4199,24 +4204,41 @@
                     </m:sSub>
                   </m:oMath>
                 </a14:m>
-                <a:endParaRPr lang="fr-FR" b="0" dirty="0">
-                  <a:latin typeface="Cambria Math" panose="02040503050406030204" pitchFamily="18" charset="0"/>
+                <a:endParaRPr lang="fr-FR" sz="2000" dirty="0">
+                  <a:sym typeface="Wingdings" panose="05000000000000000000" pitchFamily="2" charset="2"/>
                 </a:endParaRPr>
               </a:p>
               <a:p>
+                <a:r>
+                  <a:rPr lang="fr-FR" sz="2000" dirty="0">
+                    <a:sym typeface="Wingdings" panose="05000000000000000000" pitchFamily="2" charset="2"/>
+                  </a:rPr>
+                  <a:t>Par la figure ci-contre, on remarque que pour seulement 2 valeurs E=0 est dans l’intervalle de confiance montrant que le modèle est possiblement invalide.</a:t>
+                </a:r>
+              </a:p>
+              <a:p>
+                <a:r>
+                  <a:rPr lang="fr-FR" sz="2000" dirty="0">
+                    <a:sym typeface="Wingdings" panose="05000000000000000000" pitchFamily="2" charset="2"/>
+                  </a:rPr>
+                  <a:t>Pour améliorer la validation il faudrait :</a:t>
+                </a:r>
+              </a:p>
+              <a:p>
+                <a:pPr lvl="1"/>
                 <a14:m>
                   <m:oMath xmlns:m="http://schemas.openxmlformats.org/officeDocument/2006/math">
                     <m:sSub>
                       <m:sSubPr>
                         <m:ctrlPr>
-                          <a:rPr lang="fr-FR" b="0" i="1" smtClean="0">
+                          <a:rPr lang="fr-FR" sz="1600" i="1">
                             <a:latin typeface="Cambria Math" panose="02040503050406030204" pitchFamily="18" charset="0"/>
                           </a:rPr>
                         </m:ctrlPr>
                       </m:sSubPr>
                       <m:e>
                         <m:r>
-                          <a:rPr lang="fr-FR" b="0" i="1" smtClean="0">
+                          <a:rPr lang="fr-FR" sz="1600" i="1">
                             <a:latin typeface="Cambria Math" panose="02040503050406030204" pitchFamily="18" charset="0"/>
                           </a:rPr>
                           <m:t>𝑢</m:t>
@@ -4224,7 +4246,7 @@
                       </m:e>
                       <m:sub>
                         <m:r>
-                          <a:rPr lang="fr-FR" b="0" i="1" smtClean="0">
+                          <a:rPr lang="fr-FR" sz="1600" i="1">
                             <a:latin typeface="Cambria Math" panose="02040503050406030204" pitchFamily="18" charset="0"/>
                           </a:rPr>
                           <m:t>𝐷</m:t>
@@ -4234,16 +4256,55 @@
                   </m:oMath>
                 </a14:m>
                 <a:r>
-                  <a:rPr lang="fr-FR" dirty="0"/>
-                  <a:t> semble être l’erreur prédominante dans la validation </a:t>
-                </a:r>
-                <a:r>
-                  <a:rPr lang="fr-FR" dirty="0">
+                  <a:rPr lang="fr-FR" sz="1600" dirty="0"/>
+                  <a:t> est l’erreur prédominante dans la validation </a:t>
+                </a:r>
+                <a:r>
+                  <a:rPr lang="fr-FR" sz="1600" dirty="0">
                     <a:sym typeface="Wingdings" panose="05000000000000000000" pitchFamily="2" charset="2"/>
                   </a:rPr>
-                  <a:t> être plus précis sur les expériences  </a:t>
-                </a:r>
-                <a:endParaRPr lang="fr-FR" dirty="0"/>
+                  <a:t> être plus précis sur les expériences </a:t>
+                </a:r>
+              </a:p>
+              <a:p>
+                <a:pPr lvl="1"/>
+                <a14:m>
+                  <m:oMath xmlns:m="http://schemas.openxmlformats.org/officeDocument/2006/math">
+                    <m:r>
+                      <m:rPr>
+                        <m:sty m:val="p"/>
+                      </m:rPr>
+                      <a:rPr lang="fr-FR" sz="1600" b="0" i="1" smtClean="0">
+                        <a:latin typeface="Cambria Math" panose="02040503050406030204" pitchFamily="18" charset="0"/>
+                        <a:sym typeface="Wingdings" panose="05000000000000000000" pitchFamily="2" charset="2"/>
+                      </a:rPr>
+                      <m:t>u</m:t>
+                    </m:r>
+                    <m:r>
+                      <m:rPr>
+                        <m:sty m:val="p"/>
+                      </m:rPr>
+                      <a:rPr lang="fr-FR" sz="1600" b="0" i="1" baseline="-25000" smtClean="0">
+                        <a:latin typeface="Cambria Math" panose="02040503050406030204" pitchFamily="18" charset="0"/>
+                        <a:sym typeface="Wingdings" panose="05000000000000000000" pitchFamily="2" charset="2"/>
+                      </a:rPr>
+                      <m:t>input</m:t>
+                    </m:r>
+                    <m:r>
+                      <a:rPr lang="fr-FR" sz="1600" b="0" i="1" smtClean="0">
+                        <a:latin typeface="Cambria Math" panose="02040503050406030204" pitchFamily="18" charset="0"/>
+                        <a:sym typeface="Wingdings" panose="05000000000000000000" pitchFamily="2" charset="2"/>
+                      </a:rPr>
+                      <m:t>  </m:t>
+                    </m:r>
+                  </m:oMath>
+                </a14:m>
+                <a:r>
+                  <a:rPr lang="fr-FR" sz="1600" dirty="0">
+                    <a:sym typeface="Wingdings" panose="05000000000000000000" pitchFamily="2" charset="2"/>
+                  </a:rPr>
+                  <a:t> devrait être réduite  comment faire ?</a:t>
+                </a:r>
               </a:p>
             </p:txBody>
           </p:sp>
@@ -4273,7 +4334,7 @@
               <a:blipFill>
                 <a:blip r:embed="rId2"/>
                 <a:stretch>
-                  <a:fillRect l="-1844" t="-2381" r="-1947"/>
+                  <a:fillRect l="-922" t="-1401"/>
                 </a:stretch>
               </a:blipFill>
             </p:spPr>
@@ -4320,14 +4381,130 @@
         </p:blipFill>
         <p:spPr>
           <a:xfrm>
-            <a:off x="6339828" y="1331254"/>
-            <a:ext cx="5852172" cy="4389129"/>
+            <a:off x="7734591" y="3866357"/>
+            <a:ext cx="3645309" cy="2733982"/>
           </a:xfrm>
           <a:prstGeom prst="rect">
             <a:avLst/>
           </a:prstGeom>
         </p:spPr>
       </p:pic>
+      <p:pic>
+        <p:nvPicPr>
+          <p:cNvPr id="6" name="Picture 5">
+            <a:extLst>
+              <a:ext uri="{FF2B5EF4-FFF2-40B4-BE49-F238E27FC236}">
+                <a16:creationId xmlns:a16="http://schemas.microsoft.com/office/drawing/2014/main" id="{46D59226-3439-4DB4-F4CD-E7F67F9B1E5E}"/>
+              </a:ext>
+            </a:extLst>
+          </p:cNvPr>
+          <p:cNvPicPr>
+            <a:picLocks noChangeAspect="1"/>
+          </p:cNvPicPr>
+          <p:nvPr/>
+        </p:nvPicPr>
+        <p:blipFill>
+          <a:blip r:embed="rId4">
+            <a:extLst>
+              <a:ext uri="{28A0092B-C50C-407E-A947-70E740481C1C}">
+                <a14:useLocalDpi xmlns:a14="http://schemas.microsoft.com/office/drawing/2010/main" val="0"/>
+              </a:ext>
+            </a:extLst>
+          </a:blip>
+          <a:stretch>
+            <a:fillRect/>
+          </a:stretch>
+        </p:blipFill>
+        <p:spPr>
+          <a:xfrm>
+            <a:off x="7734591" y="1291800"/>
+            <a:ext cx="3619209" cy="2714406"/>
+          </a:xfrm>
+          <a:prstGeom prst="rect">
+            <a:avLst/>
+          </a:prstGeom>
+        </p:spPr>
+      </p:pic>
+      <p:sp>
+        <p:nvSpPr>
+          <p:cNvPr id="7" name="TextBox 6">
+            <a:extLst>
+              <a:ext uri="{FF2B5EF4-FFF2-40B4-BE49-F238E27FC236}">
+                <a16:creationId xmlns:a16="http://schemas.microsoft.com/office/drawing/2014/main" id="{BE23B282-BF3F-890B-4B8E-C42D9B10E1E0}"/>
+              </a:ext>
+            </a:extLst>
+          </p:cNvPr>
+          <p:cNvSpPr txBox="1"/>
+          <p:nvPr/>
+        </p:nvSpPr>
+        <p:spPr>
+          <a:xfrm>
+            <a:off x="10243465" y="3956942"/>
+            <a:ext cx="748923" cy="276999"/>
+          </a:xfrm>
+          <a:prstGeom prst="rect">
+            <a:avLst/>
+          </a:prstGeom>
+          <a:noFill/>
+        </p:spPr>
+        <p:txBody>
+          <a:bodyPr wrap="none" rtlCol="0">
+            <a:spAutoFit/>
+          </a:bodyPr>
+          <a:lstStyle/>
+          <a:p>
+            <a:r>
+              <a:rPr lang="fr-FR" sz="1200" dirty="0" err="1"/>
+              <a:t>Seed</a:t>
+            </a:r>
+            <a:r>
+              <a:rPr lang="fr-FR" sz="1200" dirty="0"/>
+              <a:t> = 0</a:t>
+            </a:r>
+            <a:endParaRPr lang="en-US" sz="1200" dirty="0"/>
+          </a:p>
+        </p:txBody>
+      </p:sp>
+      <p:sp>
+        <p:nvSpPr>
+          <p:cNvPr id="8" name="TextBox 7">
+            <a:extLst>
+              <a:ext uri="{FF2B5EF4-FFF2-40B4-BE49-F238E27FC236}">
+                <a16:creationId xmlns:a16="http://schemas.microsoft.com/office/drawing/2014/main" id="{003B073F-7988-4BCD-9F9C-3DD102E8CECA}"/>
+              </a:ext>
+            </a:extLst>
+          </p:cNvPr>
+          <p:cNvSpPr txBox="1"/>
+          <p:nvPr/>
+        </p:nvSpPr>
+        <p:spPr>
+          <a:xfrm>
+            <a:off x="10243466" y="1382385"/>
+            <a:ext cx="748923" cy="276999"/>
+          </a:xfrm>
+          <a:prstGeom prst="rect">
+            <a:avLst/>
+          </a:prstGeom>
+          <a:noFill/>
+        </p:spPr>
+        <p:txBody>
+          <a:bodyPr wrap="none" rtlCol="0">
+            <a:spAutoFit/>
+          </a:bodyPr>
+          <a:lstStyle/>
+          <a:p>
+            <a:r>
+              <a:rPr lang="fr-FR" sz="1200" dirty="0" err="1"/>
+              <a:t>Seed</a:t>
+            </a:r>
+            <a:r>
+              <a:rPr lang="fr-FR" sz="1200" dirty="0"/>
+              <a:t> = 1</a:t>
+            </a:r>
+            <a:endParaRPr lang="en-US" sz="1200" dirty="0"/>
+          </a:p>
+        </p:txBody>
+      </p:sp>
     </p:spTree>
     <p:extLst>
       <p:ext uri="{BB962C8B-B14F-4D97-AF65-F5344CB8AC3E}">
@@ -7500,13 +7677,7 @@
                         <a:rPr lang="fr-FR" sz="2000" b="0" i="1" smtClean="0">
                           <a:latin typeface="Cambria Math" panose="02040503050406030204" pitchFamily="18" charset="0"/>
                         </a:rPr>
-                        <m:t>=</m:t>
-                      </m:r>
-                      <m:r>
-                        <a:rPr lang="fr-FR" sz="2000" b="0" i="1" smtClean="0">
-                          <a:latin typeface="Cambria Math" panose="02040503050406030204" pitchFamily="18" charset="0"/>
-                        </a:rPr>
-                        <m:t> 1</m:t>
+                        <m:t>= 1</m:t>
                       </m:r>
                       <m:r>
                         <a:rPr lang="fr-FR" sz="2000" b="0" i="1" smtClean="0">
@@ -7554,19 +7725,7 @@
                         <a:rPr lang="fr-FR" sz="2000" i="1">
                           <a:latin typeface="Cambria Math" panose="02040503050406030204" pitchFamily="18" charset="0"/>
                         </a:rPr>
-                        <m:t>= </m:t>
-                      </m:r>
-                      <m:r>
-                        <a:rPr lang="fr-FR" sz="2000" i="1">
-                          <a:latin typeface="Cambria Math" panose="02040503050406030204" pitchFamily="18" charset="0"/>
-                        </a:rPr>
-                        <m:t>0.1</m:t>
-                      </m:r>
-                      <m:r>
-                        <a:rPr lang="fr-FR" sz="2000" b="0" i="1" smtClean="0">
-                          <a:latin typeface="Cambria Math" panose="02040503050406030204" pitchFamily="18" charset="0"/>
-                        </a:rPr>
-                        <m:t> </m:t>
+                        <m:t>= 0.1 </m:t>
                       </m:r>
                       <m:r>
                         <m:rPr>
@@ -7614,22 +7773,7 @@
                         <a:rPr lang="fr-FR" sz="2000" b="0" i="1" smtClean="0">
                           <a:latin typeface="Cambria Math" panose="02040503050406030204" pitchFamily="18" charset="0"/>
                         </a:rPr>
-                        <m:t>σ</m:t>
-                      </m:r>
-                      <m:r>
-                        <a:rPr lang="fr-FR" sz="2000" b="0" i="1" smtClean="0">
-                          <a:latin typeface="Cambria Math" panose="02040503050406030204" pitchFamily="18" charset="0"/>
-                        </a:rPr>
-                        <m:t>_</m:t>
-                      </m:r>
-                      <m:r>
-                        <m:rPr>
-                          <m:sty m:val="p"/>
-                        </m:rPr>
-                        <a:rPr lang="fr-FR" sz="2000" b="0" i="1" smtClean="0">
-                          <a:latin typeface="Cambria Math" panose="02040503050406030204" pitchFamily="18" charset="0"/>
-                        </a:rPr>
-                        <m:t>d</m:t>
+                        <m:t>σd</m:t>
                       </m:r>
                       <m:r>
                         <a:rPr lang="fr-FR" sz="2000" b="0" i="1" smtClean="0">
@@ -7990,12 +8134,6 @@
               <a:p>
                 <a:r>
                   <a:rPr lang="fr-FR" dirty="0"/>
-                  <a:t>Systématique et aléatoire </a:t>
-                </a:r>
-              </a:p>
-              <a:p>
-                <a:r>
-                  <a:rPr lang="fr-FR" dirty="0"/>
                   <a:t>Erreur expérimentale provient de la mesure de la perméabilité :  	</a:t>
                 </a:r>
               </a:p>
@@ -8003,7 +8141,7 @@
                 <a:pPr lvl="1"/>
                 <a:r>
                   <a:rPr lang="fr-FR" dirty="0"/>
-                  <a:t>Erreur de l’outil de mesure (épistémique) </a:t>
+                  <a:t>Ecart type de l’erreur de l’outil de mesure (épistémique) </a:t>
                 </a:r>
                 <a:r>
                   <a:rPr lang="fr-FR" dirty="0">
@@ -8051,7 +8189,7 @@
                 <a:pPr lvl="1"/>
                 <a:r>
                   <a:rPr lang="fr-FR" dirty="0"/>
-                  <a:t>Incertitude de la perméabilité (aléatoire) </a:t>
+                  <a:t>Ecart type des mesures de la perméabilité (aléatoire) </a:t>
                 </a:r>
                 <a:r>
                   <a:rPr lang="fr-FR" dirty="0">
@@ -8514,7 +8652,9 @@
             </p:nvSpPr>
             <p:spPr/>
             <p:txBody>
-              <a:bodyPr/>
+              <a:bodyPr>
+                <a:normAutofit/>
+              </a:bodyPr>
               <a:lstStyle/>
               <a:p>
                 <a14:m>
@@ -8647,42 +8787,42 @@
               </a:p>
               <a:p>
                 <a:r>
-                  <a:rPr lang="fr-FR" dirty="0"/>
-                  <a:t>D calculé à partir des moyennes du tableau 1 (moyenne = médiane) </a:t>
+                  <a:rPr lang="fr-FR" sz="2000" dirty="0"/>
+                  <a:t>D calculé à partir des moyennes du tableau 1                                                                                          (moyenne = médiane car distribution gaussienne) </a:t>
                 </a:r>
               </a:p>
               <a:p>
                 <a:r>
-                  <a:rPr lang="fr-FR" dirty="0"/>
+                  <a:rPr lang="fr-FR" sz="2000" dirty="0"/>
                   <a:t>S simulé avec les paramètres suivants :</a:t>
                 </a:r>
               </a:p>
               <a:p>
                 <a:pPr lvl="1"/>
                 <a:r>
-                  <a:rPr lang="fr-FR" dirty="0"/>
+                  <a:rPr lang="fr-FR" sz="2000" dirty="0"/>
                   <a:t>Porosité = 0.9 </a:t>
                 </a:r>
               </a:p>
               <a:p>
                 <a:pPr lvl="1"/>
                 <a:r>
-                  <a:rPr lang="fr-FR" dirty="0" err="1"/>
+                  <a:rPr lang="fr-FR" sz="2000" dirty="0" err="1"/>
                   <a:t>Seed</a:t>
                 </a:r>
                 <a:r>
-                  <a:rPr lang="fr-FR" dirty="0"/>
+                  <a:rPr lang="fr-FR" sz="2000" dirty="0"/>
                   <a:t> = 101</a:t>
                 </a:r>
               </a:p>
               <a:p>
                 <a:pPr lvl="1"/>
                 <a:r>
-                  <a:rPr lang="fr-FR" dirty="0" err="1"/>
+                  <a:rPr lang="fr-FR" sz="2000" dirty="0" err="1"/>
                   <a:t>Nx</a:t>
                 </a:r>
                 <a:r>
-                  <a:rPr lang="fr-FR" dirty="0"/>
+                  <a:rPr lang="fr-FR" sz="2000" dirty="0"/>
                   <a:t> = 200 et </a:t>
                 </a:r>
                 <a14:m>
@@ -8691,13 +8831,13 @@
                       <m:rPr>
                         <m:sty m:val="p"/>
                       </m:rPr>
-                      <a:rPr lang="fr-FR" i="1">
+                      <a:rPr lang="fr-FR" sz="2000" i="1">
                         <a:latin typeface="Cambria Math" panose="02040503050406030204" pitchFamily="18" charset="0"/>
                       </a:rPr>
                       <m:t>Δx</m:t>
                     </m:r>
                     <m:r>
-                      <a:rPr lang="fr-FR" i="1">
+                      <a:rPr lang="fr-FR" sz="2000" i="1">
                         <a:latin typeface="Cambria Math" panose="02040503050406030204" pitchFamily="18" charset="0"/>
                       </a:rPr>
                       <m:t> = 1</m:t>
@@ -8706,20 +8846,20 @@
                       <m:rPr>
                         <m:sty m:val="p"/>
                       </m:rPr>
-                      <a:rPr lang="fr-FR" i="1">
+                      <a:rPr lang="fr-FR" sz="2000" i="1">
                         <a:latin typeface="Cambria Math" panose="02040503050406030204" pitchFamily="18" charset="0"/>
                       </a:rPr>
                       <m:t>E</m:t>
                     </m:r>
                     <m:r>
-                      <a:rPr lang="fr-FR" i="1">
+                      <a:rPr lang="fr-FR" sz="2000" i="1">
                         <a:latin typeface="Cambria Math" panose="02040503050406030204" pitchFamily="18" charset="0"/>
                       </a:rPr>
                       <m:t>−6</m:t>
                     </m:r>
                   </m:oMath>
                 </a14:m>
-                <a:endParaRPr lang="fr-FR" dirty="0"/>
+                <a:endParaRPr lang="fr-FR" sz="2000" dirty="0"/>
               </a:p>
               <a:p>
                 <a:pPr lvl="1"/>
@@ -8729,13 +8869,13 @@
                       <m:rPr>
                         <m:sty m:val="p"/>
                       </m:rPr>
-                      <a:rPr lang="fr-FR" i="1">
+                      <a:rPr lang="fr-FR" sz="2000" i="1">
                         <a:latin typeface="Cambria Math" panose="02040503050406030204" pitchFamily="18" charset="0"/>
                       </a:rPr>
                       <m:t>ΔP</m:t>
                     </m:r>
                     <m:r>
-                      <a:rPr lang="fr-FR" i="1">
+                      <a:rPr lang="fr-FR" sz="2000" i="1">
                         <a:latin typeface="Cambria Math" panose="02040503050406030204" pitchFamily="18" charset="0"/>
                       </a:rPr>
                       <m:t> = 0.1 </m:t>
@@ -8744,20 +8884,20 @@
                       <m:rPr>
                         <m:sty m:val="p"/>
                       </m:rPr>
-                      <a:rPr lang="fr-FR" b="0" i="1" smtClean="0">
+                      <a:rPr lang="fr-FR" sz="2000" b="0" i="1" smtClean="0">
                         <a:latin typeface="Cambria Math" panose="02040503050406030204" pitchFamily="18" charset="0"/>
                       </a:rPr>
                       <m:t>Pa</m:t>
                     </m:r>
                     <m:r>
-                      <a:rPr lang="fr-FR" i="1">
+                      <a:rPr lang="fr-FR" sz="2000" i="1">
                         <a:latin typeface="Cambria Math" panose="02040503050406030204" pitchFamily="18" charset="0"/>
                       </a:rPr>
                       <m:t> </m:t>
                     </m:r>
                   </m:oMath>
                 </a14:m>
-                <a:endParaRPr lang="fr-FR" dirty="0"/>
+                <a:endParaRPr lang="fr-FR" sz="2000" dirty="0"/>
               </a:p>
               <a:p>
                 <a:pPr lvl="1"/>
@@ -8767,28 +8907,22 @@
                       <m:rPr>
                         <m:sty m:val="p"/>
                       </m:rPr>
-                      <a:rPr lang="fr-FR" i="1">
+                      <a:rPr lang="fr-FR" sz="2000" i="1">
                         <a:latin typeface="Cambria Math" panose="02040503050406030204" pitchFamily="18" charset="0"/>
                       </a:rPr>
                       <m:t>σ</m:t>
-                    </m:r>
-                    <m:r>
-                      <a:rPr lang="fr-FR" i="1">
-                        <a:latin typeface="Cambria Math" panose="02040503050406030204" pitchFamily="18" charset="0"/>
-                      </a:rPr>
-                      <m:t>_</m:t>
                     </m:r>
                     <m:r>
                       <m:rPr>
                         <m:sty m:val="p"/>
                       </m:rPr>
-                      <a:rPr lang="fr-FR" i="1">
+                      <a:rPr lang="fr-FR" sz="2000" i="1" baseline="-25000">
                         <a:latin typeface="Cambria Math" panose="02040503050406030204" pitchFamily="18" charset="0"/>
                       </a:rPr>
                       <m:t>d</m:t>
                     </m:r>
                     <m:r>
-                      <a:rPr lang="fr-FR" i="1">
+                      <a:rPr lang="fr-FR" sz="2000" i="1">
                         <a:latin typeface="Cambria Math" panose="02040503050406030204" pitchFamily="18" charset="0"/>
                       </a:rPr>
                       <m:t>  = 2.85 </m:t>
@@ -8797,13 +8931,13 @@
                       <m:rPr>
                         <m:sty m:val="p"/>
                       </m:rPr>
-                      <a:rPr lang="fr-FR" i="1">
+                      <a:rPr lang="fr-FR" sz="2000" i="1">
                         <a:latin typeface="Cambria Math" panose="02040503050406030204" pitchFamily="18" charset="0"/>
                       </a:rPr>
                       <m:t>μm</m:t>
                     </m:r>
                     <m:r>
-                      <a:rPr lang="fr-FR" i="1">
+                      <a:rPr lang="fr-FR" sz="2000" i="1">
                         <a:latin typeface="Cambria Math" panose="02040503050406030204" pitchFamily="18" charset="0"/>
                       </a:rPr>
                       <m:t> </m:t>
@@ -8812,13 +8946,13 @@
                       <m:rPr>
                         <m:sty m:val="p"/>
                       </m:rPr>
-                      <a:rPr lang="fr-FR" i="1">
+                      <a:rPr lang="fr-FR" sz="2000" i="1">
                         <a:latin typeface="Cambria Math" panose="02040503050406030204" pitchFamily="18" charset="0"/>
                       </a:rPr>
                       <m:t>et</m:t>
                     </m:r>
                     <m:r>
-                      <a:rPr lang="fr-FR" i="1">
+                      <a:rPr lang="fr-FR" sz="2000" i="1">
                         <a:latin typeface="Cambria Math" panose="02040503050406030204" pitchFamily="18" charset="0"/>
                       </a:rPr>
                       <m:t> </m:t>
@@ -8827,7 +8961,7 @@
                       <m:barPr>
                         <m:pos m:val="top"/>
                         <m:ctrlPr>
-                          <a:rPr lang="fr-FR" i="1">
+                          <a:rPr lang="fr-FR" sz="2000" i="1">
                             <a:latin typeface="Cambria Math" panose="02040503050406030204" pitchFamily="18" charset="0"/>
                           </a:rPr>
                         </m:ctrlPr>
@@ -8837,7 +8971,7 @@
                           <m:rPr>
                             <m:sty m:val="p"/>
                           </m:rPr>
-                          <a:rPr lang="fr-FR" i="1">
+                          <a:rPr lang="fr-FR" sz="2000" i="1">
                             <a:latin typeface="Cambria Math" panose="02040503050406030204" pitchFamily="18" charset="0"/>
                           </a:rPr>
                           <m:t>d</m:t>
@@ -8845,7 +8979,7 @@
                       </m:e>
                     </m:bar>
                     <m:r>
-                      <a:rPr lang="fr-FR" i="1">
+                      <a:rPr lang="fr-FR" sz="2000" i="1">
                         <a:latin typeface="Cambria Math" panose="02040503050406030204" pitchFamily="18" charset="0"/>
                       </a:rPr>
                       <m:t>=12.5 </m:t>
@@ -8854,14 +8988,33 @@
                       <m:rPr>
                         <m:sty m:val="p"/>
                       </m:rPr>
-                      <a:rPr lang="fr-FR" i="1">
+                      <a:rPr lang="fr-FR" sz="2000" i="1">
                         <a:latin typeface="Cambria Math" panose="02040503050406030204" pitchFamily="18" charset="0"/>
                       </a:rPr>
                       <m:t>μm</m:t>
                     </m:r>
                   </m:oMath>
                 </a14:m>
-                <a:endParaRPr lang="fr-FR" dirty="0"/>
+                <a:endParaRPr lang="fr-FR" sz="2000" dirty="0"/>
+              </a:p>
+              <a:p>
+                <a:r>
+                  <a:rPr lang="fr-FR" sz="2000" dirty="0"/>
+                  <a:t>Nous ne connaissons pas le nombre d’expérience réalisé il n’est donc pas possible de déterminer un intervalle de confiance pour l’erreur E.</a:t>
+                </a:r>
+              </a:p>
+              <a:p>
+                <a:pPr marL="457200" lvl="1" indent="0">
+                  <a:buNone/>
+                </a:pPr>
+                <a:r>
+                  <a:rPr lang="fr-FR" sz="2000" dirty="0"/>
+                  <a:t>		</a:t>
+                </a:r>
+              </a:p>
+              <a:p>
+                <a:pPr lvl="1"/>
+                <a:endParaRPr lang="fr-FR" sz="2000" dirty="0"/>
               </a:p>
             </p:txBody>
           </p:sp>
@@ -8887,7 +9040,7 @@
               <a:blipFill>
                 <a:blip r:embed="rId2"/>
                 <a:stretch>
-                  <a:fillRect l="-1043"/>
+                  <a:fillRect l="-522"/>
                 </a:stretch>
               </a:blipFill>
             </p:spPr>
@@ -9057,8 +9210,8 @@
           </p:sp>
         </mc:Fallback>
       </mc:AlternateContent>
-      <mc:AlternateContent xmlns:mc="http://schemas.openxmlformats.org/markup-compatibility/2006">
-        <mc:Choice xmlns:a14="http://schemas.microsoft.com/office/drawing/2010/main" Requires="a14">
+      <mc:AlternateContent xmlns:mc="http://schemas.openxmlformats.org/markup-compatibility/2006" xmlns:a14="http://schemas.microsoft.com/office/drawing/2010/main">
+        <mc:Choice Requires="a14">
           <p:sp>
             <p:nvSpPr>
               <p:cNvPr id="3" name="Espace réservé du contenu 2">
@@ -9412,13 +9565,7 @@
                       <a:rPr lang="fr-FR" b="0" i="1" smtClean="0">
                         <a:latin typeface="Cambria Math" panose="02040503050406030204" pitchFamily="18" charset="0"/>
                       </a:rPr>
-                      <m:t>−92.4</m:t>
-                    </m:r>
-                    <m:r>
-                      <a:rPr lang="fr-FR" b="0" i="1" smtClean="0">
-                        <a:latin typeface="Cambria Math" panose="02040503050406030204" pitchFamily="18" charset="0"/>
-                      </a:rPr>
-                      <m:t> </m:t>
+                      <m:t>−92.4 </m:t>
                     </m:r>
                     <m:r>
                       <m:rPr>
@@ -9503,7 +9650,7 @@
             </p:txBody>
           </p:sp>
         </mc:Choice>
-        <mc:Fallback>
+        <mc:Fallback xmlns="">
           <p:sp>
             <p:nvSpPr>
               <p:cNvPr id="3" name="Espace réservé du contenu 2">

--- a/MEC8211-Devoir3.pptx
+++ b/MEC8211-Devoir3.pptx
@@ -365,7 +365,7 @@
           <a:p>
             <a:fld id="{75A0F3B1-98BF-4430-AB0B-53D22E8A78C9}" type="slidenum">
               <a:rPr lang="fr-CA" smtClean="0"/>
-              <a:t>‹N°›</a:t>
+              <a:t>‹#›</a:t>
             </a:fld>
             <a:endParaRPr lang="fr-CA"/>
           </a:p>
@@ -1119,7 +1119,7 @@
           <a:p>
             <a:fld id="{604604B4-3276-4BB4-823A-E61BE8D504DF}" type="slidenum">
               <a:rPr lang="fr-FR" smtClean="0"/>
-              <a:t>‹N°›</a:t>
+              <a:t>‹#›</a:t>
             </a:fld>
             <a:endParaRPr lang="fr-FR"/>
           </a:p>
@@ -1317,7 +1317,7 @@
           <a:p>
             <a:fld id="{604604B4-3276-4BB4-823A-E61BE8D504DF}" type="slidenum">
               <a:rPr lang="fr-FR" smtClean="0"/>
-              <a:t>‹N°›</a:t>
+              <a:t>‹#›</a:t>
             </a:fld>
             <a:endParaRPr lang="fr-FR"/>
           </a:p>
@@ -1525,7 +1525,7 @@
           <a:p>
             <a:fld id="{604604B4-3276-4BB4-823A-E61BE8D504DF}" type="slidenum">
               <a:rPr lang="fr-FR" smtClean="0"/>
-              <a:t>‹N°›</a:t>
+              <a:t>‹#›</a:t>
             </a:fld>
             <a:endParaRPr lang="fr-FR"/>
           </a:p>
@@ -1723,7 +1723,7 @@
           <a:p>
             <a:fld id="{604604B4-3276-4BB4-823A-E61BE8D504DF}" type="slidenum">
               <a:rPr lang="fr-FR" smtClean="0"/>
-              <a:t>‹N°›</a:t>
+              <a:t>‹#›</a:t>
             </a:fld>
             <a:endParaRPr lang="fr-FR"/>
           </a:p>
@@ -1998,7 +1998,7 @@
           <a:p>
             <a:fld id="{604604B4-3276-4BB4-823A-E61BE8D504DF}" type="slidenum">
               <a:rPr lang="fr-FR" smtClean="0"/>
-              <a:t>‹N°›</a:t>
+              <a:t>‹#›</a:t>
             </a:fld>
             <a:endParaRPr lang="fr-FR"/>
           </a:p>
@@ -2263,7 +2263,7 @@
           <a:p>
             <a:fld id="{604604B4-3276-4BB4-823A-E61BE8D504DF}" type="slidenum">
               <a:rPr lang="fr-FR" smtClean="0"/>
-              <a:t>‹N°›</a:t>
+              <a:t>‹#›</a:t>
             </a:fld>
             <a:endParaRPr lang="fr-FR"/>
           </a:p>
@@ -2675,7 +2675,7 @@
           <a:p>
             <a:fld id="{604604B4-3276-4BB4-823A-E61BE8D504DF}" type="slidenum">
               <a:rPr lang="fr-FR" smtClean="0"/>
-              <a:t>‹N°›</a:t>
+              <a:t>‹#›</a:t>
             </a:fld>
             <a:endParaRPr lang="fr-FR"/>
           </a:p>
@@ -2816,7 +2816,7 @@
           <a:p>
             <a:fld id="{604604B4-3276-4BB4-823A-E61BE8D504DF}" type="slidenum">
               <a:rPr lang="fr-FR" smtClean="0"/>
-              <a:t>‹N°›</a:t>
+              <a:t>‹#›</a:t>
             </a:fld>
             <a:endParaRPr lang="fr-FR"/>
           </a:p>
@@ -2929,7 +2929,7 @@
           <a:p>
             <a:fld id="{604604B4-3276-4BB4-823A-E61BE8D504DF}" type="slidenum">
               <a:rPr lang="fr-FR" smtClean="0"/>
-              <a:t>‹N°›</a:t>
+              <a:t>‹#›</a:t>
             </a:fld>
             <a:endParaRPr lang="fr-FR"/>
           </a:p>
@@ -3240,7 +3240,7 @@
           <a:p>
             <a:fld id="{604604B4-3276-4BB4-823A-E61BE8D504DF}" type="slidenum">
               <a:rPr lang="fr-FR" smtClean="0"/>
-              <a:t>‹N°›</a:t>
+              <a:t>‹#›</a:t>
             </a:fld>
             <a:endParaRPr lang="fr-FR"/>
           </a:p>
@@ -3528,7 +3528,7 @@
           <a:p>
             <a:fld id="{604604B4-3276-4BB4-823A-E61BE8D504DF}" type="slidenum">
               <a:rPr lang="fr-FR" smtClean="0"/>
-              <a:t>‹N°›</a:t>
+              <a:t>‹#›</a:t>
             </a:fld>
             <a:endParaRPr lang="fr-FR"/>
           </a:p>
@@ -3805,7 +3805,7 @@
           <a:p>
             <a:fld id="{604604B4-3276-4BB4-823A-E61BE8D504DF}" type="slidenum">
               <a:rPr lang="fr-FR" smtClean="0"/>
-              <a:t>‹N°›</a:t>
+              <a:t>‹#›</a:t>
             </a:fld>
             <a:endParaRPr lang="fr-FR"/>
           </a:p>
@@ -4329,8 +4329,8 @@
           </a:p>
         </p:txBody>
       </p:sp>
-      <mc:AlternateContent xmlns:mc="http://schemas.openxmlformats.org/markup-compatibility/2006">
-        <mc:Choice xmlns:a14="http://schemas.microsoft.com/office/drawing/2010/main" Requires="a14">
+      <mc:AlternateContent xmlns:mc="http://schemas.openxmlformats.org/markup-compatibility/2006" xmlns:a14="http://schemas.microsoft.com/office/drawing/2010/main">
+        <mc:Choice Requires="a14">
           <p:sp>
             <p:nvSpPr>
               <p:cNvPr id="3" name="Espace réservé du contenu 2">
@@ -4683,7 +4683,7 @@
             </p:txBody>
           </p:sp>
         </mc:Choice>
-        <mc:Fallback>
+        <mc:Fallback xmlns="">
           <p:sp>
             <p:nvSpPr>
               <p:cNvPr id="3" name="Espace réservé du contenu 2">
@@ -4759,10 +4759,10 @@
       </p:pic>
       <p:pic>
         <p:nvPicPr>
-          <p:cNvPr id="7" name="Image 6">
+          <p:cNvPr id="4" name="Picture 3">
             <a:extLst>
               <a:ext uri="{FF2B5EF4-FFF2-40B4-BE49-F238E27FC236}">
-                <a16:creationId xmlns:a16="http://schemas.microsoft.com/office/drawing/2014/main" id="{0BB0A49F-187C-8798-4016-9E545EB0A2FE}"/>
+                <a16:creationId xmlns:a16="http://schemas.microsoft.com/office/drawing/2014/main" id="{EF64D01B-C435-7196-3EB0-884EC6BC205F}"/>
               </a:ext>
             </a:extLst>
           </p:cNvPr>
@@ -4772,21 +4772,67 @@
           <p:nvPr/>
         </p:nvPicPr>
         <p:blipFill>
-          <a:blip r:embed="rId5"/>
+          <a:blip r:embed="rId5">
+            <a:extLst>
+              <a:ext uri="{28A0092B-C50C-407E-A947-70E740481C1C}">
+                <a14:useLocalDpi xmlns:a14="http://schemas.microsoft.com/office/drawing/2010/main" val="0"/>
+              </a:ext>
+            </a:extLst>
+          </a:blip>
           <a:stretch>
             <a:fillRect/>
           </a:stretch>
         </p:blipFill>
         <p:spPr>
           <a:xfrm>
-            <a:off x="6096000" y="3429000"/>
-            <a:ext cx="4709568" cy="3071126"/>
+            <a:off x="6792500" y="3157447"/>
+            <a:ext cx="4561300" cy="3420974"/>
           </a:xfrm>
           <a:prstGeom prst="rect">
             <a:avLst/>
           </a:prstGeom>
         </p:spPr>
       </p:pic>
+      <p:sp>
+        <p:nvSpPr>
+          <p:cNvPr id="8" name="TextBox 7">
+            <a:extLst>
+              <a:ext uri="{FF2B5EF4-FFF2-40B4-BE49-F238E27FC236}">
+                <a16:creationId xmlns:a16="http://schemas.microsoft.com/office/drawing/2014/main" id="{50AF6070-01CB-9A9F-D770-A8741BFF87C2}"/>
+              </a:ext>
+            </a:extLst>
+          </p:cNvPr>
+          <p:cNvSpPr txBox="1"/>
+          <p:nvPr/>
+        </p:nvSpPr>
+        <p:spPr>
+          <a:xfrm>
+            <a:off x="10275742" y="3312016"/>
+            <a:ext cx="796679" cy="276999"/>
+          </a:xfrm>
+          <a:prstGeom prst="rect">
+            <a:avLst/>
+          </a:prstGeom>
+          <a:noFill/>
+        </p:spPr>
+        <p:txBody>
+          <a:bodyPr wrap="square" rtlCol="0">
+            <a:spAutoFit/>
+          </a:bodyPr>
+          <a:lstStyle/>
+          <a:p>
+            <a:r>
+              <a:rPr lang="fr-FR" sz="1200" dirty="0" err="1"/>
+              <a:t>Seed</a:t>
+            </a:r>
+            <a:r>
+              <a:rPr lang="fr-FR" sz="1200" dirty="0"/>
+              <a:t> = 1</a:t>
+            </a:r>
+            <a:endParaRPr lang="en-US" sz="1200" dirty="0"/>
+          </a:p>
+        </p:txBody>
+      </p:sp>
     </p:spTree>
     <p:extLst>
       <p:ext uri="{BB962C8B-B14F-4D97-AF65-F5344CB8AC3E}">
@@ -7894,8 +7940,8 @@
           </p:sp>
         </mc:Fallback>
       </mc:AlternateContent>
-      <mc:AlternateContent xmlns:mc="http://schemas.openxmlformats.org/markup-compatibility/2006">
-        <mc:Choice xmlns:a14="http://schemas.microsoft.com/office/drawing/2010/main" Requires="a14">
+      <mc:AlternateContent xmlns:mc="http://schemas.openxmlformats.org/markup-compatibility/2006" xmlns:a14="http://schemas.microsoft.com/office/drawing/2010/main">
+        <mc:Choice Requires="a14">
           <p:sp>
             <p:nvSpPr>
               <p:cNvPr id="3" name="Espace réservé du contenu 2">
@@ -8074,7 +8120,7 @@
             </p:txBody>
           </p:sp>
         </mc:Choice>
-        <mc:Fallback>
+        <mc:Fallback xmlns="">
           <p:sp>
             <p:nvSpPr>
               <p:cNvPr id="3" name="Espace réservé du contenu 2">
@@ -8386,7 +8432,7 @@
                 <a:pPr lvl="1"/>
                 <a:r>
                   <a:rPr lang="fr-FR" dirty="0"/>
-                  <a:t>Erreur de l’outil de mesure (épistémique) </a:t>
+                  <a:t>Ecart type de l’erreur de l’outil de mesure (épistémique) </a:t>
                 </a:r>
                 <a:r>
                   <a:rPr lang="fr-FR" dirty="0">
@@ -8434,7 +8480,7 @@
                 <a:pPr lvl="1"/>
                 <a:r>
                   <a:rPr lang="fr-FR" dirty="0"/>
-                  <a:t>Incertitude de la perméabilité (aléatoire) </a:t>
+                  <a:t>Ecart type des mesures de la perméabilité (aléatoire) </a:t>
                 </a:r>
                 <a:r>
                   <a:rPr lang="fr-FR" dirty="0">
@@ -8626,6 +8672,49 @@
                             </m:ctrlPr>
                           </m:sSupPr>
                           <m:e>
+                            <m:sSup>
+                              <m:sSupPr>
+                                <m:ctrlPr>
+                                  <a:rPr lang="fr-FR" b="1" i="1">
+                                    <a:latin typeface="Cambria Math" panose="02040503050406030204" pitchFamily="18" charset="0"/>
+                                  </a:rPr>
+                                </m:ctrlPr>
+                              </m:sSupPr>
+                              <m:e>
+                                <m:r>
+                                  <a:rPr lang="fr-FR" b="1" i="1">
+                                    <a:latin typeface="Cambria Math" panose="02040503050406030204" pitchFamily="18" charset="0"/>
+                                  </a:rPr>
+                                  <m:t>𝟏𝟒</m:t>
+                                </m:r>
+                                <m:r>
+                                  <a:rPr lang="fr-FR" b="1" i="1">
+                                    <a:latin typeface="Cambria Math" panose="02040503050406030204" pitchFamily="18" charset="0"/>
+                                  </a:rPr>
+                                  <m:t>.</m:t>
+                                </m:r>
+                                <m:r>
+                                  <a:rPr lang="fr-FR" b="1" i="1">
+                                    <a:latin typeface="Cambria Math" panose="02040503050406030204" pitchFamily="18" charset="0"/>
+                                  </a:rPr>
+                                  <m:t>𝟕</m:t>
+                                </m:r>
+                              </m:e>
+                              <m:sup>
+                                <m:r>
+                                  <a:rPr lang="fr-FR" b="1" i="1">
+                                    <a:latin typeface="Cambria Math" panose="02040503050406030204" pitchFamily="18" charset="0"/>
+                                  </a:rPr>
+                                  <m:t>𝟐</m:t>
+                                </m:r>
+                              </m:sup>
+                            </m:sSup>
+                            <m:r>
+                              <a:rPr lang="fr-FR" b="1" i="1" smtClean="0">
+                                <a:latin typeface="Cambria Math" panose="02040503050406030204" pitchFamily="18" charset="0"/>
+                              </a:rPr>
+                              <m:t>+</m:t>
+                            </m:r>
                             <m:r>
                               <a:rPr lang="fr-FR" b="1" i="1" smtClean="0">
                                 <a:latin typeface="Cambria Math" panose="02040503050406030204" pitchFamily="18" charset="0"/>
@@ -8643,49 +8732,6 @@
                                 <a:latin typeface="Cambria Math" panose="02040503050406030204" pitchFamily="18" charset="0"/>
                               </a:rPr>
                               <m:t>𝟎</m:t>
-                            </m:r>
-                          </m:e>
-                          <m:sup>
-                            <m:r>
-                              <a:rPr lang="fr-FR" b="1" i="1" smtClean="0">
-                                <a:latin typeface="Cambria Math" panose="02040503050406030204" pitchFamily="18" charset="0"/>
-                              </a:rPr>
-                              <m:t>𝟐</m:t>
-                            </m:r>
-                          </m:sup>
-                        </m:sSup>
-                        <m:r>
-                          <a:rPr lang="fr-FR" b="1" i="1" smtClean="0">
-                            <a:latin typeface="Cambria Math" panose="02040503050406030204" pitchFamily="18" charset="0"/>
-                          </a:rPr>
-                          <m:t>+</m:t>
-                        </m:r>
-                        <m:sSup>
-                          <m:sSupPr>
-                            <m:ctrlPr>
-                              <a:rPr lang="fr-FR" b="1" i="1" smtClean="0">
-                                <a:latin typeface="Cambria Math" panose="02040503050406030204" pitchFamily="18" charset="0"/>
-                              </a:rPr>
-                            </m:ctrlPr>
-                          </m:sSupPr>
-                          <m:e>
-                            <m:r>
-                              <a:rPr lang="fr-FR" b="1" i="1" smtClean="0">
-                                <a:latin typeface="Cambria Math" panose="02040503050406030204" pitchFamily="18" charset="0"/>
-                              </a:rPr>
-                              <m:t>𝟏𝟒</m:t>
-                            </m:r>
-                            <m:r>
-                              <a:rPr lang="fr-FR" b="1" i="1" smtClean="0">
-                                <a:latin typeface="Cambria Math" panose="02040503050406030204" pitchFamily="18" charset="0"/>
-                              </a:rPr>
-                              <m:t>.</m:t>
-                            </m:r>
-                            <m:r>
-                              <a:rPr lang="fr-FR" b="1" i="1" smtClean="0">
-                                <a:latin typeface="Cambria Math" panose="02040503050406030204" pitchFamily="18" charset="0"/>
-                              </a:rPr>
-                              <m:t>𝟕</m:t>
                             </m:r>
                           </m:e>
                           <m:sup>
@@ -8801,7 +8847,7 @@
               <a:lstStyle/>
               <a:p>
                 <a:r>
-                  <a:rPr lang="fr-FR">
+                  <a:rPr lang="en-US">
                     <a:noFill/>
                   </a:rPr>
                   <a:t> </a:t>
@@ -8865,7 +8911,7 @@
         </p:nvSpPr>
         <p:spPr>
           <a:xfrm>
-            <a:off x="838200" y="365049"/>
+            <a:off x="838200" y="255321"/>
             <a:ext cx="10515600" cy="1325563"/>
           </a:xfrm>
         </p:spPr>
@@ -8879,10 +8925,6 @@
               <a:rPr lang="fr-FR" dirty="0"/>
               <a:t>D) Erreur de simulation E </a:t>
             </a:r>
-            <a:br>
-              <a:rPr lang="fr-FR" b="0" dirty="0"/>
-            </a:br>
-            <a:endParaRPr lang="fr-FR" dirty="0"/>
           </a:p>
         </p:txBody>
       </p:sp>
@@ -8912,7 +8954,7 @@
             </p:spPr>
             <p:txBody>
               <a:bodyPr>
-                <a:normAutofit fontScale="92500" lnSpcReduction="10000"/>
+                <a:normAutofit fontScale="77500" lnSpcReduction="20000"/>
               </a:bodyPr>
               <a:lstStyle/>
               <a:p>
@@ -9464,6 +9506,49 @@
                     </m:sSup>
                   </m:oMath>
                 </a14:m>
+                <a:endParaRPr kumimoji="0" lang="fr-FR" sz="2900" b="1" i="0" u="none" strike="noStrike" kern="1200" cap="none" spc="0" normalizeH="0" baseline="0" noProof="0" dirty="0">
+                  <a:ln>
+                    <a:noFill/>
+                  </a:ln>
+                  <a:solidFill>
+                    <a:prstClr val="black"/>
+                  </a:solidFill>
+                  <a:effectLst/>
+                  <a:uLnTx/>
+                  <a:uFillTx/>
+                  <a:latin typeface="Aptos" panose="02110004020202020204"/>
+                </a:endParaRPr>
+              </a:p>
+              <a:p>
+                <a:pPr lvl="0">
+                  <a:defRPr/>
+                </a:pPr>
+                <a:endParaRPr kumimoji="0" lang="fr-FR" sz="2900" b="1" i="0" u="none" strike="noStrike" kern="1200" cap="none" spc="0" normalizeH="0" baseline="0" noProof="0" dirty="0">
+                  <a:ln>
+                    <a:noFill/>
+                  </a:ln>
+                  <a:solidFill>
+                    <a:prstClr val="black"/>
+                  </a:solidFill>
+                  <a:effectLst/>
+                  <a:uLnTx/>
+                  <a:uFillTx/>
+                  <a:latin typeface="Aptos" panose="02110004020202020204"/>
+                </a:endParaRPr>
+              </a:p>
+              <a:p>
+                <a:pPr>
+                  <a:defRPr/>
+                </a:pPr>
+                <a:r>
+                  <a:rPr lang="fr-FR" dirty="0"/>
+                  <a:t>Nous ne connaissons pas le nombre d’expérience réalisé il n’est donc pas possible de déterminer un intervalle de confiance pour l’erreur E.</a:t>
+                </a:r>
+              </a:p>
+              <a:p>
+                <a:pPr lvl="0">
+                  <a:defRPr/>
+                </a:pPr>
                 <a:endParaRPr kumimoji="0" lang="fr-FR" sz="2900" b="1" i="0" u="none" strike="noStrike" kern="1200" cap="none" spc="0" normalizeH="0" baseline="0" noProof="0" dirty="0">
                   <a:ln>
                     <a:noFill/>
@@ -9511,7 +9596,7 @@
               <a:blipFill>
                 <a:blip r:embed="rId2"/>
                 <a:stretch>
-                  <a:fillRect l="-940" t="-2801"/>
+                  <a:fillRect l="-705" t="-2661" r="-940" b="-560"/>
                 </a:stretch>
               </a:blipFill>
             </p:spPr>
@@ -9520,7 +9605,7 @@
               <a:lstStyle/>
               <a:p>
                 <a:r>
-                  <a:rPr lang="fr-FR">
+                  <a:rPr lang="en-US">
                     <a:noFill/>
                   </a:rPr>
                   <a:t> </a:t>
@@ -9681,8 +9766,8 @@
           </p:sp>
         </mc:Fallback>
       </mc:AlternateContent>
-      <mc:AlternateContent xmlns:mc="http://schemas.openxmlformats.org/markup-compatibility/2006">
-        <mc:Choice xmlns:a14="http://schemas.microsoft.com/office/drawing/2010/main" Requires="a14">
+      <mc:AlternateContent xmlns:mc="http://schemas.openxmlformats.org/markup-compatibility/2006" xmlns:a14="http://schemas.microsoft.com/office/drawing/2010/main">
+        <mc:Choice Requires="a14">
           <p:sp>
             <p:nvSpPr>
               <p:cNvPr id="3" name="Espace réservé du contenu 2">
@@ -10345,7 +10430,7 @@
             </p:txBody>
           </p:sp>
         </mc:Choice>
-        <mc:Fallback>
+        <mc:Fallback xmlns="">
           <p:sp>
             <p:nvSpPr>
               <p:cNvPr id="3" name="Espace réservé du contenu 2">

--- a/MEC8211-Devoir3.pptx
+++ b/MEC8211-Devoir3.pptx
@@ -4329,8 +4329,8 @@
           </a:p>
         </p:txBody>
       </p:sp>
-      <mc:AlternateContent xmlns:mc="http://schemas.openxmlformats.org/markup-compatibility/2006" xmlns:a14="http://schemas.microsoft.com/office/drawing/2010/main">
-        <mc:Choice Requires="a14">
+      <mc:AlternateContent xmlns:mc="http://schemas.openxmlformats.org/markup-compatibility/2006">
+        <mc:Choice xmlns:a14="http://schemas.microsoft.com/office/drawing/2010/main" Requires="a14">
           <p:sp>
             <p:nvSpPr>
               <p:cNvPr id="3" name="Espace réservé du contenu 2">
@@ -4350,12 +4350,12 @@
             <p:spPr>
               <a:xfrm>
                 <a:off x="292063" y="1341693"/>
-                <a:ext cx="5322353" cy="4491947"/>
+                <a:ext cx="5456465" cy="4491947"/>
               </a:xfrm>
             </p:spPr>
             <p:txBody>
               <a:bodyPr>
-                <a:normAutofit fontScale="92500" lnSpcReduction="10000"/>
+                <a:normAutofit fontScale="77500" lnSpcReduction="20000"/>
               </a:bodyPr>
               <a:lstStyle/>
               <a:p>
@@ -4615,6 +4615,22 @@
               <a:p>
                 <a:pPr algn="just">
                   <a:spcAft>
+                    <a:spcPts val="1200"/>
+                  </a:spcAft>
+                </a:pPr>
+                <a:r>
+                  <a:rPr lang="fr-FR" sz="2500" dirty="0">
+                    <a:latin typeface="Cambria Math" panose="02040503050406030204" pitchFamily="18" charset="0"/>
+                  </a:rPr>
+                  <a:t>Pour la plupart des valeurs de porosité, l’erreur E=0 (dans la figure ci-contre) n’est pas dans l’intervalle de confiance. Il faut donc chercher à améliorer la validation.</a:t>
+                </a:r>
+                <a:endParaRPr lang="fr-FR" sz="2500" b="0" dirty="0">
+                  <a:latin typeface="Cambria Math" panose="02040503050406030204" pitchFamily="18" charset="0"/>
+                </a:endParaRPr>
+              </a:p>
+              <a:p>
+                <a:pPr algn="just">
+                  <a:spcAft>
                     <a:spcPts val="200"/>
                   </a:spcAft>
                 </a:pPr>
@@ -4683,7 +4699,7 @@
             </p:txBody>
           </p:sp>
         </mc:Choice>
-        <mc:Fallback xmlns="">
+        <mc:Fallback>
           <p:sp>
             <p:nvSpPr>
               <p:cNvPr id="3" name="Espace réservé du contenu 2">
@@ -4703,12 +4719,12 @@
             <p:spPr>
               <a:xfrm>
                 <a:off x="292063" y="1341693"/>
-                <a:ext cx="5322353" cy="4491947"/>
+                <a:ext cx="5456465" cy="4491947"/>
               </a:xfrm>
               <a:blipFill>
                 <a:blip r:embed="rId3"/>
                 <a:stretch>
-                  <a:fillRect l="-1718" t="-2578" r="-1604" b="-950"/>
+                  <a:fillRect l="-1117" t="-2578" r="-1006"/>
                 </a:stretch>
               </a:blipFill>
             </p:spPr>
@@ -4717,7 +4733,7 @@
               <a:lstStyle/>
               <a:p>
                 <a:r>
-                  <a:rPr lang="fr-FR">
+                  <a:rPr lang="en-US">
                     <a:noFill/>
                   </a:rPr>
                   <a:t> </a:t>
@@ -7940,8 +7956,8 @@
           </p:sp>
         </mc:Fallback>
       </mc:AlternateContent>
-      <mc:AlternateContent xmlns:mc="http://schemas.openxmlformats.org/markup-compatibility/2006" xmlns:a14="http://schemas.microsoft.com/office/drawing/2010/main">
-        <mc:Choice Requires="a14">
+      <mc:AlternateContent xmlns:mc="http://schemas.openxmlformats.org/markup-compatibility/2006">
+        <mc:Choice xmlns:a14="http://schemas.microsoft.com/office/drawing/2010/main" Requires="a14">
           <p:sp>
             <p:nvSpPr>
               <p:cNvPr id="3" name="Espace réservé du contenu 2">
@@ -7960,7 +7976,7 @@
             </p:nvSpPr>
             <p:spPr>
               <a:xfrm>
-                <a:off x="838199" y="1580884"/>
+                <a:off x="838200" y="1630246"/>
                 <a:ext cx="5257801" cy="3597508"/>
               </a:xfrm>
             </p:spPr>
@@ -8030,18 +8046,31 @@
                       </a:rPr>
                       <m:t>𝝁</m:t>
                     </m:r>
-                    <m:r>
-                      <a:rPr lang="fr-FR" sz="2000" b="1" i="1" smtClean="0">
-                        <a:latin typeface="Cambria Math" panose="02040503050406030204" pitchFamily="18" charset="0"/>
-                      </a:rPr>
-                      <m:t>𝒎</m:t>
-                    </m:r>
-                    <m:r>
-                      <a:rPr lang="fr-FR" sz="2000" b="1" i="1" smtClean="0">
-                        <a:latin typeface="Cambria Math" panose="02040503050406030204" pitchFamily="18" charset="0"/>
-                      </a:rPr>
-                      <m:t>²</m:t>
-                    </m:r>
+                    <m:sSup>
+                      <m:sSupPr>
+                        <m:ctrlPr>
+                          <a:rPr lang="fr-FR" sz="2000" b="1" i="1" smtClean="0">
+                            <a:latin typeface="Cambria Math" panose="02040503050406030204" pitchFamily="18" charset="0"/>
+                          </a:rPr>
+                        </m:ctrlPr>
+                      </m:sSupPr>
+                      <m:e>
+                        <m:r>
+                          <a:rPr lang="fr-FR" sz="2000" b="1" i="1" smtClean="0">
+                            <a:latin typeface="Cambria Math" panose="02040503050406030204" pitchFamily="18" charset="0"/>
+                          </a:rPr>
+                          <m:t>𝒎</m:t>
+                        </m:r>
+                      </m:e>
+                      <m:sup>
+                        <m:r>
+                          <a:rPr lang="fr-FR" sz="2000" b="1" i="1" smtClean="0">
+                            <a:latin typeface="Cambria Math" panose="02040503050406030204" pitchFamily="18" charset="0"/>
+                          </a:rPr>
+                          <m:t>2</m:t>
+                        </m:r>
+                      </m:sup>
+                    </m:sSup>
                   </m:oMath>
                 </a14:m>
                 <a:endParaRPr lang="fr-FR" sz="2000" b="1" dirty="0"/>
@@ -8049,7 +8078,7 @@
               <a:p>
                 <a:r>
                   <a:rPr lang="fr-FR" sz="2000" dirty="0"/>
-                  <a:t>Monte-Carlo réalisé avec 100 échantillons et un pas </a:t>
+                  <a:t>Monte-Carlo réalisé avec 100 échantillons et       </a:t>
                 </a:r>
                 <a14:m>
                   <m:oMath xmlns:m="http://schemas.openxmlformats.org/officeDocument/2006/math">
@@ -8057,70 +8086,184 @@
                       <m:rPr>
                         <m:sty m:val="p"/>
                       </m:rPr>
-                      <a:rPr lang="fr-FR" sz="2000" b="0" i="1" smtClean="0">
-                        <a:latin typeface="Cambria Math" panose="02040503050406030204" pitchFamily="18" charset="0"/>
-                      </a:rPr>
-                      <m:t>Δx</m:t>
-                    </m:r>
-                    <m:r>
-                      <a:rPr lang="fr-FR" sz="2000" b="0" i="1" smtClean="0">
-                        <a:latin typeface="Cambria Math" panose="02040503050406030204" pitchFamily="18" charset="0"/>
-                      </a:rPr>
-                      <m:t> = 1</m:t>
+                      <a:rPr lang="fr-FR" sz="2000">
+                        <a:latin typeface="Cambria Math" panose="02040503050406030204" pitchFamily="18" charset="0"/>
+                      </a:rPr>
+                      <m:t>Δ</m:t>
+                    </m:r>
+                    <m:r>
+                      <a:rPr lang="fr-FR" sz="2000" i="1">
+                        <a:latin typeface="Cambria Math" panose="02040503050406030204" pitchFamily="18" charset="0"/>
+                      </a:rPr>
+                      <m:t>𝑥</m:t>
+                    </m:r>
+                    <m:r>
+                      <a:rPr lang="fr-FR" sz="2000" i="1">
+                        <a:latin typeface="Cambria Math" panose="02040503050406030204" pitchFamily="18" charset="0"/>
+                      </a:rPr>
+                      <m:t>= 1</m:t>
+                    </m:r>
+                    <m:r>
+                      <a:rPr lang="fr-FR" sz="2000" i="1">
+                        <a:latin typeface="Cambria Math" panose="02040503050406030204" pitchFamily="18" charset="0"/>
+                      </a:rPr>
+                      <m:t>𝐸</m:t>
+                    </m:r>
+                    <m:r>
+                      <a:rPr lang="fr-FR" sz="2000" i="1">
+                        <a:latin typeface="Cambria Math" panose="02040503050406030204" pitchFamily="18" charset="0"/>
+                      </a:rPr>
+                      <m:t>−6 , </m:t>
+                    </m:r>
+                    <m:r>
+                      <a:rPr lang="fr-FR" sz="2000" i="1">
+                        <a:latin typeface="Cambria Math" panose="02040503050406030204" pitchFamily="18" charset="0"/>
+                      </a:rPr>
+                      <m:t>𝑁𝑥</m:t>
+                    </m:r>
+                    <m:r>
+                      <a:rPr lang="fr-FR" sz="2000" i="1">
+                        <a:latin typeface="Cambria Math" panose="02040503050406030204" pitchFamily="18" charset="0"/>
+                      </a:rPr>
+                      <m:t> = 200,</m:t>
                     </m:r>
                     <m:r>
                       <m:rPr>
                         <m:sty m:val="p"/>
                       </m:rPr>
-                      <a:rPr lang="fr-FR" sz="2000" b="0" i="1" smtClean="0">
-                        <a:latin typeface="Cambria Math" panose="02040503050406030204" pitchFamily="18" charset="0"/>
-                      </a:rPr>
-                      <m:t>E</m:t>
-                    </m:r>
-                    <m:r>
-                      <a:rPr lang="fr-FR" sz="2000" b="0" i="1" smtClean="0">
-                        <a:latin typeface="Cambria Math" panose="02040503050406030204" pitchFamily="18" charset="0"/>
-                      </a:rPr>
-                      <m:t>−6   </m:t>
+                      <a:rPr lang="fr-FR" sz="2000">
+                        <a:latin typeface="Cambria Math" panose="02040503050406030204" pitchFamily="18" charset="0"/>
+                      </a:rPr>
+                      <m:t>Δ</m:t>
                     </m:r>
                     <m:r>
                       <m:rPr>
                         <m:sty m:val="p"/>
                       </m:rPr>
-                      <a:rPr lang="fr-FR" sz="2000" b="0" i="1" smtClean="0">
-                        <a:latin typeface="Cambria Math" panose="02040503050406030204" pitchFamily="18" charset="0"/>
-                      </a:rPr>
-                      <m:t>et</m:t>
-                    </m:r>
-                    <m:r>
-                      <a:rPr lang="fr-FR" sz="2000" b="0" i="1" smtClean="0">
-                        <a:latin typeface="Cambria Math" panose="02040503050406030204" pitchFamily="18" charset="0"/>
-                      </a:rPr>
-                      <m:t> </m:t>
+                      <a:rPr lang="fr-FR" sz="2000" i="1">
+                        <a:latin typeface="Cambria Math" panose="02040503050406030204" pitchFamily="18" charset="0"/>
+                      </a:rPr>
+                      <m:t>P</m:t>
+                    </m:r>
+                    <m:r>
+                      <a:rPr lang="fr-FR" sz="2000" i="1">
+                        <a:latin typeface="Cambria Math" panose="02040503050406030204" pitchFamily="18" charset="0"/>
+                      </a:rPr>
+                      <m:t>= 0.1 </m:t>
                     </m:r>
                     <m:r>
                       <m:rPr>
                         <m:sty m:val="p"/>
                       </m:rPr>
-                      <a:rPr lang="fr-FR" sz="2000" b="0" i="1" smtClean="0">
-                        <a:latin typeface="Cambria Math" panose="02040503050406030204" pitchFamily="18" charset="0"/>
-                      </a:rPr>
-                      <m:t>Nx</m:t>
-                    </m:r>
-                    <m:r>
-                      <a:rPr lang="fr-FR" sz="2000" b="0" i="1" smtClean="0">
-                        <a:latin typeface="Cambria Math" panose="02040503050406030204" pitchFamily="18" charset="0"/>
-                      </a:rPr>
-                      <m:t> = 200.</m:t>
+                      <a:rPr lang="fr-FR" sz="2000" i="1">
+                        <a:latin typeface="Cambria Math" panose="02040503050406030204" pitchFamily="18" charset="0"/>
+                      </a:rPr>
+                      <m:t>Pa</m:t>
+                    </m:r>
+                    <m:r>
+                      <a:rPr lang="fr-FR" sz="2000" b="0" i="0" smtClean="0">
+                        <a:latin typeface="Cambria Math" panose="02040503050406030204" pitchFamily="18" charset="0"/>
+                      </a:rPr>
+                      <m:t>,  </m:t>
+                    </m:r>
+                    <m:r>
+                      <m:rPr>
+                        <m:sty m:val="p"/>
+                      </m:rPr>
+                      <a:rPr lang="fr-FR" sz="2000" i="1">
+                        <a:latin typeface="Cambria Math" panose="02040503050406030204" pitchFamily="18" charset="0"/>
+                      </a:rPr>
+                      <m:t>seed</m:t>
+                    </m:r>
+                    <m:r>
+                      <a:rPr lang="fr-FR" sz="2000" i="1">
+                        <a:latin typeface="Cambria Math" panose="02040503050406030204" pitchFamily="18" charset="0"/>
+                      </a:rPr>
+                      <m:t> = 0, </m:t>
+                    </m:r>
+                    <m:r>
+                      <m:rPr>
+                        <m:sty m:val="p"/>
+                      </m:rPr>
+                      <a:rPr lang="fr-FR" sz="2000" i="1">
+                        <a:latin typeface="Cambria Math" panose="02040503050406030204" pitchFamily="18" charset="0"/>
+                      </a:rPr>
+                      <m:t>σd</m:t>
+                    </m:r>
+                    <m:r>
+                      <a:rPr lang="fr-FR" sz="2000" i="1" baseline="-25000">
+                        <a:latin typeface="Cambria Math" panose="02040503050406030204" pitchFamily="18" charset="0"/>
+                      </a:rPr>
+                      <m:t> = </m:t>
+                    </m:r>
+                    <m:r>
+                      <a:rPr lang="fr-FR" sz="2000" i="1">
+                        <a:latin typeface="Cambria Math" panose="02040503050406030204" pitchFamily="18" charset="0"/>
+                      </a:rPr>
+                      <m:t>2.85 </m:t>
+                    </m:r>
+                    <m:r>
+                      <m:rPr>
+                        <m:sty m:val="p"/>
+                      </m:rPr>
+                      <a:rPr lang="fr-FR" sz="2000" i="1">
+                        <a:latin typeface="Cambria Math" panose="02040503050406030204" pitchFamily="18" charset="0"/>
+                      </a:rPr>
+                      <m:t>μm</m:t>
+                    </m:r>
+                    <m:r>
+                      <a:rPr lang="fr-FR" sz="2000" i="1">
+                        <a:latin typeface="Cambria Math" panose="02040503050406030204" pitchFamily="18" charset="0"/>
+                      </a:rPr>
+                      <m:t>,</m:t>
+                    </m:r>
+                    <m:bar>
+                      <m:barPr>
+                        <m:pos m:val="top"/>
+                        <m:ctrlPr>
+                          <a:rPr lang="fr-FR" sz="2000" i="1">
+                            <a:latin typeface="Cambria Math" panose="02040503050406030204" pitchFamily="18" charset="0"/>
+                          </a:rPr>
+                        </m:ctrlPr>
+                      </m:barPr>
+                      <m:e>
+                        <m:r>
+                          <m:rPr>
+                            <m:sty m:val="p"/>
+                          </m:rPr>
+                          <a:rPr lang="fr-FR" sz="2000" i="1">
+                            <a:latin typeface="Cambria Math" panose="02040503050406030204" pitchFamily="18" charset="0"/>
+                          </a:rPr>
+                          <m:t>d</m:t>
+                        </m:r>
+                      </m:e>
+                    </m:bar>
+                    <m:r>
+                      <a:rPr lang="fr-FR" sz="2000" i="1">
+                        <a:latin typeface="Cambria Math" panose="02040503050406030204" pitchFamily="18" charset="0"/>
+                      </a:rPr>
+                      <m:t> = 12.5 </m:t>
+                    </m:r>
+                    <m:r>
+                      <m:rPr>
+                        <m:sty m:val="p"/>
+                      </m:rPr>
+                      <a:rPr lang="fr-FR" sz="2000" i="1">
+                        <a:latin typeface="Cambria Math" panose="02040503050406030204" pitchFamily="18" charset="0"/>
+                      </a:rPr>
+                      <m:t>μm</m:t>
                     </m:r>
                   </m:oMath>
                 </a14:m>
+                <a:endParaRPr lang="fr-FR" sz="2000" dirty="0"/>
+              </a:p>
+              <a:p>
                 <a:endParaRPr lang="fr-FR" sz="2000" dirty="0"/>
               </a:p>
             </p:txBody>
           </p:sp>
         </mc:Choice>
-        <mc:Fallback xmlns="">
+        <mc:Fallback>
           <p:sp>
             <p:nvSpPr>
               <p:cNvPr id="3" name="Espace réservé du contenu 2">
@@ -8139,13 +8282,13 @@
             </p:nvSpPr>
             <p:spPr>
               <a:xfrm>
-                <a:off x="838199" y="1580884"/>
+                <a:off x="838200" y="1630246"/>
                 <a:ext cx="5257801" cy="3597508"/>
               </a:xfrm>
               <a:blipFill>
                 <a:blip r:embed="rId4"/>
                 <a:stretch>
-                  <a:fillRect l="-927" t="-1525" r="-116"/>
+                  <a:fillRect l="-1044" t="-1523" r="-116"/>
                 </a:stretch>
               </a:blipFill>
             </p:spPr>
@@ -8154,7 +8297,7 @@
               <a:lstStyle/>
               <a:p>
                 <a:r>
-                  <a:rPr lang="fr-FR">
+                  <a:rPr lang="en-US">
                     <a:noFill/>
                   </a:rPr>
                   <a:t> </a:t>
@@ -8389,8 +8532,8 @@
           </p:sp>
         </mc:Fallback>
       </mc:AlternateContent>
-      <mc:AlternateContent xmlns:mc="http://schemas.openxmlformats.org/markup-compatibility/2006">
-        <mc:Choice xmlns:a14="http://schemas.microsoft.com/office/drawing/2010/main" Requires="a14">
+      <mc:AlternateContent xmlns:mc="http://schemas.openxmlformats.org/markup-compatibility/2006" xmlns:a14="http://schemas.microsoft.com/office/drawing/2010/main">
+        <mc:Choice Requires="a14">
           <p:sp>
             <p:nvSpPr>
               <p:cNvPr id="3" name="Espace réservé du contenu 2">
@@ -8813,7 +8956,7 @@
             </p:txBody>
           </p:sp>
         </mc:Choice>
-        <mc:Fallback>
+        <mc:Fallback xmlns="">
           <p:sp>
             <p:nvSpPr>
               <p:cNvPr id="3" name="Espace réservé du contenu 2">
@@ -8928,8 +9071,8 @@
           </a:p>
         </p:txBody>
       </p:sp>
-      <mc:AlternateContent xmlns:mc="http://schemas.openxmlformats.org/markup-compatibility/2006">
-        <mc:Choice xmlns:a14="http://schemas.microsoft.com/office/drawing/2010/main" Requires="a14">
+      <mc:AlternateContent xmlns:mc="http://schemas.openxmlformats.org/markup-compatibility/2006" xmlns:a14="http://schemas.microsoft.com/office/drawing/2010/main">
+        <mc:Choice Requires="a14">
           <p:sp>
             <p:nvSpPr>
               <p:cNvPr id="3" name="Espace réservé du contenu 2">
@@ -9571,7 +9714,7 @@
             </p:txBody>
           </p:sp>
         </mc:Choice>
-        <mc:Fallback>
+        <mc:Fallback xmlns="">
           <p:sp>
             <p:nvSpPr>
               <p:cNvPr id="3" name="Espace réservé du contenu 2">

--- a/MEC8211-Devoir3.pptx
+++ b/MEC8211-Devoir3.pptx
@@ -206,7 +206,7 @@
           <a:p>
             <a:fld id="{6BD447F1-453D-4945-8981-7B47F590C70C}" type="datetimeFigureOut">
               <a:rPr lang="fr-CA" smtClean="0"/>
-              <a:t>2026-03-27</a:t>
+              <a:t>2026-03-29</a:t>
             </a:fld>
             <a:endParaRPr lang="fr-CA"/>
           </a:p>
@@ -1065,7 +1065,7 @@
           <a:p>
             <a:fld id="{31FFBCA7-9440-4261-9163-708EE63D7830}" type="datetimeFigureOut">
               <a:rPr lang="fr-FR" smtClean="0"/>
-              <a:t>27/03/2026</a:t>
+              <a:t>29/03/2026</a:t>
             </a:fld>
             <a:endParaRPr lang="fr-FR"/>
           </a:p>
@@ -1263,7 +1263,7 @@
           <a:p>
             <a:fld id="{31FFBCA7-9440-4261-9163-708EE63D7830}" type="datetimeFigureOut">
               <a:rPr lang="fr-FR" smtClean="0"/>
-              <a:t>27/03/2026</a:t>
+              <a:t>29/03/2026</a:t>
             </a:fld>
             <a:endParaRPr lang="fr-FR"/>
           </a:p>
@@ -1471,7 +1471,7 @@
           <a:p>
             <a:fld id="{31FFBCA7-9440-4261-9163-708EE63D7830}" type="datetimeFigureOut">
               <a:rPr lang="fr-FR" smtClean="0"/>
-              <a:t>27/03/2026</a:t>
+              <a:t>29/03/2026</a:t>
             </a:fld>
             <a:endParaRPr lang="fr-FR"/>
           </a:p>
@@ -1669,7 +1669,7 @@
           <a:p>
             <a:fld id="{31FFBCA7-9440-4261-9163-708EE63D7830}" type="datetimeFigureOut">
               <a:rPr lang="fr-FR" smtClean="0"/>
-              <a:t>27/03/2026</a:t>
+              <a:t>29/03/2026</a:t>
             </a:fld>
             <a:endParaRPr lang="fr-FR"/>
           </a:p>
@@ -1944,7 +1944,7 @@
           <a:p>
             <a:fld id="{31FFBCA7-9440-4261-9163-708EE63D7830}" type="datetimeFigureOut">
               <a:rPr lang="fr-FR" smtClean="0"/>
-              <a:t>27/03/2026</a:t>
+              <a:t>29/03/2026</a:t>
             </a:fld>
             <a:endParaRPr lang="fr-FR"/>
           </a:p>
@@ -2209,7 +2209,7 @@
           <a:p>
             <a:fld id="{31FFBCA7-9440-4261-9163-708EE63D7830}" type="datetimeFigureOut">
               <a:rPr lang="fr-FR" smtClean="0"/>
-              <a:t>27/03/2026</a:t>
+              <a:t>29/03/2026</a:t>
             </a:fld>
             <a:endParaRPr lang="fr-FR"/>
           </a:p>
@@ -2621,7 +2621,7 @@
           <a:p>
             <a:fld id="{31FFBCA7-9440-4261-9163-708EE63D7830}" type="datetimeFigureOut">
               <a:rPr lang="fr-FR" smtClean="0"/>
-              <a:t>27/03/2026</a:t>
+              <a:t>29/03/2026</a:t>
             </a:fld>
             <a:endParaRPr lang="fr-FR"/>
           </a:p>
@@ -2762,7 +2762,7 @@
           <a:p>
             <a:fld id="{31FFBCA7-9440-4261-9163-708EE63D7830}" type="datetimeFigureOut">
               <a:rPr lang="fr-FR" smtClean="0"/>
-              <a:t>27/03/2026</a:t>
+              <a:t>29/03/2026</a:t>
             </a:fld>
             <a:endParaRPr lang="fr-FR"/>
           </a:p>
@@ -2875,7 +2875,7 @@
           <a:p>
             <a:fld id="{31FFBCA7-9440-4261-9163-708EE63D7830}" type="datetimeFigureOut">
               <a:rPr lang="fr-FR" smtClean="0"/>
-              <a:t>27/03/2026</a:t>
+              <a:t>29/03/2026</a:t>
             </a:fld>
             <a:endParaRPr lang="fr-FR"/>
           </a:p>
@@ -3186,7 +3186,7 @@
           <a:p>
             <a:fld id="{31FFBCA7-9440-4261-9163-708EE63D7830}" type="datetimeFigureOut">
               <a:rPr lang="fr-FR" smtClean="0"/>
-              <a:t>27/03/2026</a:t>
+              <a:t>29/03/2026</a:t>
             </a:fld>
             <a:endParaRPr lang="fr-FR"/>
           </a:p>
@@ -3474,7 +3474,7 @@
           <a:p>
             <a:fld id="{31FFBCA7-9440-4261-9163-708EE63D7830}" type="datetimeFigureOut">
               <a:rPr lang="fr-FR" smtClean="0"/>
-              <a:t>27/03/2026</a:t>
+              <a:t>29/03/2026</a:t>
             </a:fld>
             <a:endParaRPr lang="fr-FR"/>
           </a:p>
@@ -3715,7 +3715,7 @@
           <a:p>
             <a:fld id="{31FFBCA7-9440-4261-9163-708EE63D7830}" type="datetimeFigureOut">
               <a:rPr lang="fr-FR" smtClean="0"/>
-              <a:t>27/03/2026</a:t>
+              <a:t>29/03/2026</a:t>
             </a:fld>
             <a:endParaRPr lang="fr-FR"/>
           </a:p>
@@ -4329,8 +4329,8 @@
           </a:p>
         </p:txBody>
       </p:sp>
-      <mc:AlternateContent xmlns:mc="http://schemas.openxmlformats.org/markup-compatibility/2006">
-        <mc:Choice xmlns:a14="http://schemas.microsoft.com/office/drawing/2010/main" Requires="a14">
+      <mc:AlternateContent xmlns:mc="http://schemas.openxmlformats.org/markup-compatibility/2006" xmlns:a14="http://schemas.microsoft.com/office/drawing/2010/main">
+        <mc:Choice Requires="a14">
           <p:sp>
             <p:nvSpPr>
               <p:cNvPr id="3" name="Espace réservé du contenu 2">
@@ -4699,7 +4699,7 @@
             </p:txBody>
           </p:sp>
         </mc:Choice>
-        <mc:Fallback>
+        <mc:Fallback xmlns="">
           <p:sp>
             <p:nvSpPr>
               <p:cNvPr id="3" name="Espace réservé du contenu 2">
